--- a/docs/RUDP_Host_Guide.pptx
+++ b/docs/RUDP_Host_Guide.pptx
@@ -22695,7 +22695,7 @@
                 <a:ea typeface="Calibri" pitchFamily="34" charset="-122"/>
                 <a:cs typeface="Calibri" pitchFamily="34" charset="-120"/>
               </a:rPr>
-              <a:t>Against tuned AIMD the neural agent is 61 percent faster on the lossy path, 70 percent on the 5G-like path and 83 percent on the satellite path. All three are highly significant. On the reordering path it is 33 percent faster but that is not significant.</a:t>
+              <a:t>Against tuned AIMD the neural agent is 71 percent faster on the lossy path, 65 percent on the 5G-like path and 83 percent on the satellite path, all significant. On the reordering path it is 60 percent faster but that is not significant.</a:t>
             </a:r>
             <a:endParaRPr lang="en-US" sz="1400" dirty="0"/>
           </a:p>
@@ -22716,7 +22716,7 @@
                 <a:ea typeface="Calibri" pitchFamily="34" charset="-122"/>
                 <a:cs typeface="Calibri" pitchFamily="34" charset="-120"/>
               </a:rPr>
-              <a:t>Kernel TCP is still faster than our agent on every path, between one and a half and three times. We are not claiming to beat TCP.</a:t>
+              <a:t>Kernel TCP is still faster than our agent on every path, by one and a half to one and seven tenths. We are not claiming to beat TCP.</a:t>
             </a:r>
             <a:endParaRPr lang="en-US" sz="1400" dirty="0"/>
           </a:p>
@@ -22737,7 +22737,28 @@
                 <a:ea typeface="Calibri" pitchFamily="34" charset="-122"/>
                 <a:cs typeface="Calibri" pitchFamily="34" charset="-120"/>
               </a:rPr>
-              <a:t>Our first three runs were wrong: the netem queue limit counted packets in flight, our baseline was untuned, and TCP sent bigger payloads. We found that, fixed it and re-ran everything.</a:t>
+              <a:t>We also put a kernel TCP flow and one RUDP flow on the same link. The neural agent takes 24 to 34 percent of it, so it does not starve TCP; tuned AIMD gets only 5 to 17 percent.</a:t>
+            </a:r>
+            <a:endParaRPr lang="en-US" sz="1400" dirty="0"/>
+          </a:p>
+          <a:p>
+            <a:pPr marL="342900" indent="-342900">
+              <a:spcAft>
+                <a:spcPts val="600"/>
+              </a:spcAft>
+              <a:buSzPct val="100000"/>
+              <a:buChar char="•"/>
+            </a:pPr>
+            <a:r>
+              <a:rPr lang="en-US" sz="1400" dirty="0">
+                <a:solidFill>
+                  <a:srgbClr val="1B2430"/>
+                </a:solidFill>
+                <a:latin typeface="Calibri" pitchFamily="34" charset="0"/>
+                <a:ea typeface="Calibri" pitchFamily="34" charset="-122"/>
+                <a:cs typeface="Calibri" pitchFamily="34" charset="-120"/>
+              </a:rPr>
+              <a:t>Our first runs were wrong four times: the netem queue limit counted packets in flight, the baseline was untuned, the payload sizes differed, and finally RUDP was sending 40-byte synthetic packets. We found each one, fixed it, re-ran everything and documented it.</a:t>
             </a:r>
             <a:endParaRPr lang="en-US" sz="1400" dirty="0"/>
           </a:p>
@@ -22815,7 +22836,7 @@
                 <a:ea typeface="Calibri" pitchFamily="34" charset="-122"/>
                 <a:cs typeface="Calibri" pitchFamily="34" charset="-120"/>
               </a:rPr>
-              <a:t>Q: Does it beat TCP? A: No. It beats our AIMD baselines on a real kernel path; mature kernel TCP is faster, by 1.5x to 3.2x. Q: Why were the first runs wrong? A: netem's limit also counts packets in the delay line, so a large window overflowed it on the satellite path.</a:t>
+              <a:t>Q: Does it beat TCP? A: No. It beats our AIMD baselines on a real kernel path; mature kernel TCP is faster, by 1.5x to 1.7x. Q: Does it starve TCP? A: No, it takes 24 to 34 percent of a shared link (3 runs per cell, one laptop). Q: Why were the first runs wrong? A: four separate mistakes, the last being 40-byte synthetic packets against 512-byte TCP payloads; all fixed and re-run.</a:t>
             </a:r>
             <a:endParaRPr lang="en-US" sz="1400" dirty="0"/>
           </a:p>
@@ -23629,7 +23650,7 @@
                 <a:ea typeface="Calibri" pitchFamily="34" charset="-122"/>
                 <a:cs typeface="Calibri" pitchFamily="34" charset="-120"/>
               </a:rPr>
-              <a:t>The kernel TCP coexistence measurement is written but not yet run.</a:t>
+              <a:t>Kernel TCP coexistence is measured: the neural agent takes 24 to 34 percent of a shared link, so it does not starve TCP, with only three runs per cell.</a:t>
             </a:r>
             <a:endParaRPr lang="en-US" sz="1400" dirty="0"/>
           </a:p>
@@ -23707,7 +23728,7 @@
                 <a:ea typeface="Calibri" pitchFamily="34" charset="-122"/>
                 <a:cs typeface="Calibri" pitchFamily="34" charset="-120"/>
               </a:rPr>
-              <a:t>Did you test against kernel TCP? The script is written but the measurement still has to be run on a Linux host with tc.</a:t>
+              <a:t>Did you test against kernel TCP? Yes, on kernel netem: the neural agent took 24 to 34 percent of a shared link, three runs per cell on one laptop.</a:t>
             </a:r>
             <a:endParaRPr lang="en-US" sz="1400" dirty="0"/>
           </a:p>
@@ -25787,7 +25808,7 @@
                 <a:ea typeface="Calibri" pitchFamily="34" charset="-122"/>
                 <a:cs typeface="Calibri" pitchFamily="34" charset="-120"/>
               </a:rPr>
-              <a:t>Yes. Delay, loss and jitter are emulated in our client, in a separate proxy on real UDP sockets, and in virtual time; these agree with each other. We also ran it once on the Linux kernel with tc netem on one laptop: the agent beat tuned AIMD there, but kernel TCP was 1.5 to 3.2 times faster than us. No multi-machine path was tested.</a:t>
+              <a:t>Yes. Delay, loss and jitter are emulated in our client, in a separate proxy on real UDP sockets, and in virtual time; these agree with each other. We also ran it once on the Linux kernel with tc netem on one laptop: the agent beat tuned AIMD there, but kernel TCP was 1.5 to 1.7 times faster than us. No multi-machine path was tested.</a:t>
             </a:r>
             <a:endParaRPr lang="en-US" sz="1350" dirty="0"/>
           </a:p>
@@ -26597,7 +26618,7 @@
                 <a:ea typeface="Calibri" pitchFamily="34" charset="-122"/>
                 <a:cs typeface="Calibri" pitchFamily="34" charset="-120"/>
               </a:rPr>
-              <a:t>No, not entirely: against tuned AIMD it takes 68 percent of a shared link, (CUBIC takes 61 percent). Nothing starves. We did not train for fairness. With unequal round-trip times two neural flows are fairer than two AIMD flows (Jain 0.84 against 0.64 at +150 ms). The test against kernel TCP is written but not yet run.</a:t>
+              <a:t>No, not entirely: against tuned AIMD it takes 68 percent of a shared link, (CUBIC takes 61 percent). Nothing starves. We did not train for fairness. With unequal round-trip times two neural flows are fairer than two AIMD flows (Jain 0.84 against 0.64 at +150 ms). Against a kernel TCP flow on the same link it takes only 24 to 34 percent, so it does not starve TCP (three runs per cell).</a:t>
             </a:r>
             <a:endParaRPr lang="en-US" sz="1350" dirty="0"/>
           </a:p>

--- a/docs/RUDP_Host_Guide.pptx
+++ b/docs/RUDP_Host_Guide.pptx
@@ -47,9 +47,11 @@
     <p:sldId id="295" r:id="rId41"/>
     <p:sldId id="296" r:id="rId42"/>
     <p:sldId id="297" r:id="rId43"/>
+    <p:sldId id="298" r:id="rId44"/>
+    <p:sldId id="299" r:id="rId45"/>
   </p:sldIdLst>
   <p:notesMasterIdLst>
-    <p:notesMasterId r:id="rId44"/>
+    <p:notesMasterId r:id="rId46"/>
   </p:notesMasterIdLst>
   <p:sldSz cx="12192000" cy="6858000"/>
   <p:notesSz cx="6858000" cy="12192000"/>
@@ -3735,6 +3737,182 @@
             <a:fld id="{F7021451-1387-4CA6-816F-3879F97B5CBC}" type="slidenum">
               <a:rPr lang="en-US"/>
               <a:t>42</a:t>
+            </a:fld>
+            <a:endParaRPr lang="en-US"/>
+          </a:p>
+        </p:txBody>
+      </p:sp>
+    </p:spTree>
+    <p:extLst>
+      <p:ext uri="{BB962C8B-B14F-4D97-AF65-F5344CB8AC3E}">
+        <p14:creationId xmlns:p14="http://schemas.microsoft.com/office/powerpoint/2010/main" val="1024086991"/>
+      </p:ext>
+    </p:extLst>
+  </p:cSld>
+  <p:clrMapOvr>
+    <a:masterClrMapping/>
+  </p:clrMapOvr>
+</p:notes>
+</file>
+
+<file path=ppt/notesSlides/notesSlide43.xml><?xml version="1.0" encoding="utf-8"?>
+<p:notes xmlns:a="http://schemas.openxmlformats.org/drawingml/2006/main" xmlns:r="http://schemas.openxmlformats.org/officeDocument/2006/relationships" xmlns:p="http://schemas.openxmlformats.org/presentationml/2006/main">
+  <p:cSld>
+    <p:spTree>
+      <p:nvGrpSpPr>
+        <p:cNvPr id="1" name=""/>
+        <p:cNvGrpSpPr/>
+        <p:nvPr/>
+      </p:nvGrpSpPr>
+      <p:grpSpPr>
+        <a:xfrm>
+          <a:off x="0" y="0"/>
+          <a:ext cx="0" cy="0"/>
+          <a:chOff x="0" y="0"/>
+          <a:chExt cx="0" cy="0"/>
+        </a:xfrm>
+      </p:grpSpPr>
+      <p:sp>
+        <p:nvSpPr>
+          <p:cNvPr id="2" name="Slide Image Placeholder 1"/>
+          <p:cNvSpPr>
+            <a:spLocks noGrp="1" noRot="1" noChangeAspect="1"/>
+          </p:cNvSpPr>
+          <p:nvPr>
+            <p:ph type="sldImg"/>
+          </p:nvPr>
+        </p:nvSpPr>
+        <p:spPr/>
+      </p:sp>
+      <p:sp>
+        <p:nvSpPr>
+          <p:cNvPr id="3" name="Notes Placeholder 2"/>
+          <p:cNvSpPr>
+            <a:spLocks noGrp="1"/>
+          </p:cNvSpPr>
+          <p:nvPr>
+            <p:ph type="body" idx="1"/>
+          </p:nvPr>
+        </p:nvSpPr>
+        <p:spPr/>
+        <p:txBody>
+          <a:bodyPr/>
+          <a:lstStyle/>
+          <a:p>
+            <a:r>
+              <a:rPr lang="en-US" dirty="0"/>
+              <a:t/>
+            </a:r>
+            <a:endParaRPr lang="en-US" dirty="0"/>
+          </a:p>
+        </p:txBody>
+      </p:sp>
+      <p:sp>
+        <p:nvSpPr>
+          <p:cNvPr id="4" name="Slide Number Placeholder 3"/>
+          <p:cNvSpPr>
+            <a:spLocks noGrp="1"/>
+          </p:cNvSpPr>
+          <p:nvPr>
+            <p:ph type="sldNum" sz="quarter" idx="10"/>
+          </p:nvPr>
+        </p:nvSpPr>
+        <p:spPr/>
+        <p:txBody>
+          <a:bodyPr/>
+          <a:lstStyle/>
+          <a:p>
+            <a:fld id="{F7021451-1387-4CA6-816F-3879F97B5CBC}" type="slidenum">
+              <a:rPr lang="en-US"/>
+              <a:t>43</a:t>
+            </a:fld>
+            <a:endParaRPr lang="en-US"/>
+          </a:p>
+        </p:txBody>
+      </p:sp>
+    </p:spTree>
+    <p:extLst>
+      <p:ext uri="{BB962C8B-B14F-4D97-AF65-F5344CB8AC3E}">
+        <p14:creationId xmlns:p14="http://schemas.microsoft.com/office/powerpoint/2010/main" val="1024086991"/>
+      </p:ext>
+    </p:extLst>
+  </p:cSld>
+  <p:clrMapOvr>
+    <a:masterClrMapping/>
+  </p:clrMapOvr>
+</p:notes>
+</file>
+
+<file path=ppt/notesSlides/notesSlide44.xml><?xml version="1.0" encoding="utf-8"?>
+<p:notes xmlns:a="http://schemas.openxmlformats.org/drawingml/2006/main" xmlns:r="http://schemas.openxmlformats.org/officeDocument/2006/relationships" xmlns:p="http://schemas.openxmlformats.org/presentationml/2006/main">
+  <p:cSld>
+    <p:spTree>
+      <p:nvGrpSpPr>
+        <p:cNvPr id="1" name=""/>
+        <p:cNvGrpSpPr/>
+        <p:nvPr/>
+      </p:nvGrpSpPr>
+      <p:grpSpPr>
+        <a:xfrm>
+          <a:off x="0" y="0"/>
+          <a:ext cx="0" cy="0"/>
+          <a:chOff x="0" y="0"/>
+          <a:chExt cx="0" cy="0"/>
+        </a:xfrm>
+      </p:grpSpPr>
+      <p:sp>
+        <p:nvSpPr>
+          <p:cNvPr id="2" name="Slide Image Placeholder 1"/>
+          <p:cNvSpPr>
+            <a:spLocks noGrp="1" noRot="1" noChangeAspect="1"/>
+          </p:cNvSpPr>
+          <p:nvPr>
+            <p:ph type="sldImg"/>
+          </p:nvPr>
+        </p:nvSpPr>
+        <p:spPr/>
+      </p:sp>
+      <p:sp>
+        <p:nvSpPr>
+          <p:cNvPr id="3" name="Notes Placeholder 2"/>
+          <p:cNvSpPr>
+            <a:spLocks noGrp="1"/>
+          </p:cNvSpPr>
+          <p:nvPr>
+            <p:ph type="body" idx="1"/>
+          </p:nvPr>
+        </p:nvSpPr>
+        <p:spPr/>
+        <p:txBody>
+          <a:bodyPr/>
+          <a:lstStyle/>
+          <a:p>
+            <a:r>
+              <a:rPr lang="en-US" dirty="0"/>
+              <a:t/>
+            </a:r>
+            <a:endParaRPr lang="en-US" dirty="0"/>
+          </a:p>
+        </p:txBody>
+      </p:sp>
+      <p:sp>
+        <p:nvSpPr>
+          <p:cNvPr id="4" name="Slide Number Placeholder 3"/>
+          <p:cNvSpPr>
+            <a:spLocks noGrp="1"/>
+          </p:cNvSpPr>
+          <p:nvPr>
+            <p:ph type="sldNum" sz="quarter" idx="10"/>
+          </p:nvPr>
+        </p:nvSpPr>
+        <p:spPr/>
+        <p:txBody>
+          <a:bodyPr/>
+          <a:lstStyle/>
+          <a:p>
+            <a:fld id="{F7021451-1387-4CA6-816F-3879F97B5CBC}" type="slidenum">
+              <a:rPr lang="en-US"/>
+              <a:t>44</a:t>
             </a:fld>
             <a:endParaRPr lang="en-US"/>
           </a:p>
@@ -9301,7 +9479,7 @@
                           <a:ea typeface="Calibri" pitchFamily="34" charset="-122"/>
                           <a:cs typeface="Calibri" pitchFamily="34" charset="-120"/>
                         </a:rPr>
-                        <a:t>20</a:t>
+                        <a:t>21</a:t>
                       </a:r>
                       <a:endParaRPr lang="en-US" sz="1200" dirty="0">
                         <a:latin typeface="Calibri" charset="0"/>
@@ -9366,7 +9544,7 @@
                           <a:ea typeface="Calibri" pitchFamily="34" charset="-122"/>
                           <a:cs typeface="Calibri" pitchFamily="34" charset="-120"/>
                         </a:rPr>
-                        <a:t>RUDP Chat demo</a:t>
+                        <a:t>More evidence: baselines, SACK, reordering</a:t>
                       </a:r>
                       <a:endParaRPr lang="en-US" sz="1200" dirty="0">
                         <a:latin typeface="Calibri" charset="0"/>
@@ -9693,7 +9871,7 @@
                           <a:ea typeface="Calibri" pitchFamily="34" charset="-122"/>
                           <a:cs typeface="Calibri" pitchFamily="34" charset="-120"/>
                         </a:rPr>
-                        <a:t>21</a:t>
+                        <a:t>22</a:t>
                       </a:r>
                       <a:endParaRPr lang="en-US" sz="1200" dirty="0">
                         <a:latin typeface="Calibri" charset="0"/>
@@ -9758,7 +9936,7 @@
                           <a:ea typeface="Calibri" pitchFamily="34" charset="-122"/>
                           <a:cs typeface="Calibri" pitchFamily="34" charset="-120"/>
                         </a:rPr>
-                        <a:t>More evidence: baselines, SACK, reordering</a:t>
+                        <a:t>Neural agent in the C transport</a:t>
                       </a:r>
                       <a:endParaRPr lang="en-US" sz="1200" dirty="0">
                         <a:latin typeface="Calibri" charset="0"/>
@@ -10085,7 +10263,7 @@
                           <a:ea typeface="Calibri" pitchFamily="34" charset="-122"/>
                           <a:cs typeface="Calibri" pitchFamily="34" charset="-120"/>
                         </a:rPr>
-                        <a:t>22</a:t>
+                        <a:t>23</a:t>
                       </a:r>
                       <a:endParaRPr lang="en-US" sz="1200" dirty="0">
                         <a:latin typeface="Calibri" charset="0"/>
@@ -10150,7 +10328,7 @@
                           <a:ea typeface="Calibri" pitchFamily="34" charset="-122"/>
                           <a:cs typeface="Calibri" pitchFamily="34" charset="-120"/>
                         </a:rPr>
-                        <a:t>Neural agent in the C transport</a:t>
+                        <a:t>Fairness, ablations, chat fixes</a:t>
                       </a:r>
                       <a:endParaRPr lang="en-US" sz="1200" dirty="0">
                         <a:latin typeface="Calibri" charset="0"/>
@@ -10215,7 +10393,7 @@
                           <a:ea typeface="Calibri" pitchFamily="34" charset="-122"/>
                           <a:cs typeface="Calibri" pitchFamily="34" charset="-120"/>
                         </a:rPr>
-                        <a:t>1:00</a:t>
+                        <a:t>0:50</a:t>
                       </a:r>
                       <a:endParaRPr lang="en-US" sz="1200" dirty="0">
                         <a:latin typeface="Calibri" charset="0"/>
@@ -10477,7 +10655,7 @@
                           <a:ea typeface="Calibri" pitchFamily="34" charset="-122"/>
                           <a:cs typeface="Calibri" pitchFamily="34" charset="-120"/>
                         </a:rPr>
-                        <a:t>23</a:t>
+                        <a:t>24</a:t>
                       </a:r>
                       <a:endParaRPr lang="en-US" sz="1200" dirty="0">
                         <a:latin typeface="Calibri" charset="0"/>
@@ -10542,7 +10720,7 @@
                           <a:ea typeface="Calibri" pitchFamily="34" charset="-122"/>
                           <a:cs typeface="Calibri" pitchFamily="34" charset="-120"/>
                         </a:rPr>
-                        <a:t>Fairness, ablations, chat fixes</a:t>
+                        <a:t>Safety net: hand over to AIMD</a:t>
                       </a:r>
                       <a:endParaRPr lang="en-US" sz="1200" dirty="0">
                         <a:latin typeface="Calibri" charset="0"/>
@@ -10869,7 +11047,7 @@
                           <a:ea typeface="Calibri" pitchFamily="34" charset="-122"/>
                           <a:cs typeface="Calibri" pitchFamily="34" charset="-120"/>
                         </a:rPr>
-                        <a:t>24</a:t>
+                        <a:t>25</a:t>
                       </a:r>
                       <a:endParaRPr lang="en-US" sz="1200" dirty="0">
                         <a:latin typeface="Calibri" charset="0"/>
@@ -10934,7 +11112,7 @@
                           <a:ea typeface="Calibri" pitchFamily="34" charset="-122"/>
                           <a:cs typeface="Calibri" pitchFamily="34" charset="-120"/>
                         </a:rPr>
-                        <a:t>Safety net: hand over to AIMD</a:t>
+                        <a:t>Selective Repeat is now the default</a:t>
                       </a:r>
                       <a:endParaRPr lang="en-US" sz="1200" dirty="0">
                         <a:latin typeface="Calibri" charset="0"/>
@@ -11261,7 +11439,7 @@
                           <a:ea typeface="Calibri" pitchFamily="34" charset="-122"/>
                           <a:cs typeface="Calibri" pitchFamily="34" charset="-120"/>
                         </a:rPr>
-                        <a:t>25</a:t>
+                        <a:t>26</a:t>
                       </a:r>
                       <a:endParaRPr lang="en-US" sz="1200" dirty="0">
                         <a:latin typeface="Calibri" charset="0"/>
@@ -11326,7 +11504,7 @@
                           <a:ea typeface="Calibri" pitchFamily="34" charset="-122"/>
                           <a:cs typeface="Calibri" pitchFamily="34" charset="-120"/>
                         </a:rPr>
-                        <a:t>Selective Repeat is now the default</a:t>
+                        <a:t>Final results: tuned baselines, real clock</a:t>
                       </a:r>
                       <a:endParaRPr lang="en-US" sz="1200" dirty="0">
                         <a:latin typeface="Calibri" charset="0"/>
@@ -11391,7 +11569,7 @@
                           <a:ea typeface="Calibri" pitchFamily="34" charset="-122"/>
                           <a:cs typeface="Calibri" pitchFamily="34" charset="-120"/>
                         </a:rPr>
-                        <a:t>0:50</a:t>
+                        <a:t>1:00</a:t>
                       </a:r>
                       <a:endParaRPr lang="en-US" sz="1200" dirty="0">
                         <a:latin typeface="Calibri" charset="0"/>
@@ -11653,7 +11831,7 @@
                           <a:ea typeface="Calibri" pitchFamily="34" charset="-122"/>
                           <a:cs typeface="Calibri" pitchFamily="34" charset="-120"/>
                         </a:rPr>
-                        <a:t>26</a:t>
+                        <a:t>27</a:t>
                       </a:r>
                       <a:endParaRPr lang="en-US" sz="1200" dirty="0">
                         <a:latin typeface="Calibri" charset="0"/>
@@ -11718,7 +11896,7 @@
                           <a:ea typeface="Calibri" pitchFamily="34" charset="-122"/>
                           <a:cs typeface="Calibri" pitchFamily="34" charset="-120"/>
                         </a:rPr>
-                        <a:t>Final results: tuned baselines, real clock</a:t>
+                        <a:t>Real sockets found what the emulator could not</a:t>
                       </a:r>
                       <a:endParaRPr lang="en-US" sz="1200" dirty="0">
                         <a:latin typeface="Calibri" charset="0"/>
@@ -11783,7 +11961,7 @@
                           <a:ea typeface="Calibri" pitchFamily="34" charset="-122"/>
                           <a:cs typeface="Calibri" pitchFamily="34" charset="-120"/>
                         </a:rPr>
-                        <a:t>1:00</a:t>
+                        <a:t>0:50</a:t>
                       </a:r>
                       <a:endParaRPr lang="en-US" sz="1200" dirty="0">
                         <a:latin typeface="Calibri" charset="0"/>
@@ -12045,7 +12223,7 @@
                           <a:ea typeface="Calibri" pitchFamily="34" charset="-122"/>
                           <a:cs typeface="Calibri" pitchFamily="34" charset="-120"/>
                         </a:rPr>
-                        <a:t>27</a:t>
+                        <a:t>28</a:t>
                       </a:r>
                       <a:endParaRPr lang="en-US" sz="1200" dirty="0">
                         <a:latin typeface="Calibri" charset="0"/>
@@ -12110,7 +12288,7 @@
                           <a:ea typeface="Calibri" pitchFamily="34" charset="-122"/>
                           <a:cs typeface="Calibri" pitchFamily="34" charset="-120"/>
                         </a:rPr>
-                        <a:t>Real sockets found what the emulator could not</a:t>
+                        <a:t>A fast, faithful C simulator, and what it showed</a:t>
                       </a:r>
                       <a:endParaRPr lang="en-US" sz="1200" dirty="0">
                         <a:latin typeface="Calibri" charset="0"/>
@@ -12175,7 +12353,7 @@
                           <a:ea typeface="Calibri" pitchFamily="34" charset="-122"/>
                           <a:cs typeface="Calibri" pitchFamily="34" charset="-120"/>
                         </a:rPr>
-                        <a:t>0:50</a:t>
+                        <a:t>1:00</a:t>
                       </a:r>
                       <a:endParaRPr lang="en-US" sz="1200" dirty="0">
                         <a:latin typeface="Calibri" charset="0"/>
@@ -12437,7 +12615,7 @@
                           <a:ea typeface="Calibri" pitchFamily="34" charset="-122"/>
                           <a:cs typeface="Calibri" pitchFamily="34" charset="-120"/>
                         </a:rPr>
-                        <a:t>28</a:t>
+                        <a:t>29</a:t>
                       </a:r>
                       <a:endParaRPr lang="en-US" sz="1200" dirty="0">
                         <a:latin typeface="Calibri" charset="0"/>
@@ -12502,7 +12680,7 @@
                           <a:ea typeface="Calibri" pitchFamily="34" charset="-122"/>
                           <a:cs typeface="Calibri" pitchFamily="34" charset="-120"/>
                         </a:rPr>
-                        <a:t>A fast, faithful C simulator, and what it showed</a:t>
+                        <a:t>Fairness and file transfer</a:t>
                       </a:r>
                       <a:endParaRPr lang="en-US" sz="1200" dirty="0">
                         <a:latin typeface="Calibri" charset="0"/>
@@ -12567,7 +12745,7 @@
                           <a:ea typeface="Calibri" pitchFamily="34" charset="-122"/>
                           <a:cs typeface="Calibri" pitchFamily="34" charset="-120"/>
                         </a:rPr>
-                        <a:t>1:00</a:t>
+                        <a:t>0:50</a:t>
                       </a:r>
                       <a:endParaRPr lang="en-US" sz="1200" dirty="0">
                         <a:latin typeface="Calibri" charset="0"/>
@@ -12829,7 +13007,7 @@
                           <a:ea typeface="Calibri" pitchFamily="34" charset="-122"/>
                           <a:cs typeface="Calibri" pitchFamily="34" charset="-120"/>
                         </a:rPr>
-                        <a:t>29</a:t>
+                        <a:t>30</a:t>
                       </a:r>
                       <a:endParaRPr lang="en-US" sz="1200" dirty="0">
                         <a:latin typeface="Calibri" charset="0"/>
@@ -12894,7 +13072,7 @@
                           <a:ea typeface="Calibri" pitchFamily="34" charset="-122"/>
                           <a:cs typeface="Calibri" pitchFamily="34" charset="-120"/>
                         </a:rPr>
-                        <a:t>Fairness and file transfer</a:t>
+                        <a:t>Seeing the difference: the window</a:t>
                       </a:r>
                       <a:endParaRPr lang="en-US" sz="1200" dirty="0">
                         <a:latin typeface="Calibri" charset="0"/>
@@ -12959,7 +13137,7 @@
                           <a:ea typeface="Calibri" pitchFamily="34" charset="-122"/>
                           <a:cs typeface="Calibri" pitchFamily="34" charset="-120"/>
                         </a:rPr>
-                        <a:t>0:50</a:t>
+                        <a:t>0:40</a:t>
                       </a:r>
                       <a:endParaRPr lang="en-US" sz="1200" dirty="0">
                         <a:latin typeface="Calibri" charset="0"/>
@@ -13221,7 +13399,7 @@
                           <a:ea typeface="Calibri" pitchFamily="34" charset="-122"/>
                           <a:cs typeface="Calibri" pitchFamily="34" charset="-120"/>
                         </a:rPr>
-                        <a:t>30</a:t>
+                        <a:t>31</a:t>
                       </a:r>
                       <a:endParaRPr lang="en-US" sz="1200" dirty="0">
                         <a:latin typeface="Calibri" charset="0"/>
@@ -13286,7 +13464,7 @@
                           <a:ea typeface="Calibri" pitchFamily="34" charset="-122"/>
                           <a:cs typeface="Calibri" pitchFamily="34" charset="-120"/>
                         </a:rPr>
-                        <a:t>Seeing the difference: the window</a:t>
+                        <a:t>Closing gaps: fairness and cross traffic</a:t>
                       </a:r>
                       <a:endParaRPr lang="en-US" sz="1200" dirty="0">
                         <a:latin typeface="Calibri" charset="0"/>
@@ -13351,7 +13529,7 @@
                           <a:ea typeface="Calibri" pitchFamily="34" charset="-122"/>
                           <a:cs typeface="Calibri" pitchFamily="34" charset="-120"/>
                         </a:rPr>
-                        <a:t>0:40</a:t>
+                        <a:t>0:50</a:t>
                       </a:r>
                       <a:endParaRPr lang="en-US" sz="1200" dirty="0">
                         <a:latin typeface="Calibri" charset="0"/>
@@ -13613,7 +13791,7 @@
                           <a:ea typeface="Calibri" pitchFamily="34" charset="-122"/>
                           <a:cs typeface="Calibri" pitchFamily="34" charset="-120"/>
                         </a:rPr>
-                        <a:t>31</a:t>
+                        <a:t>32</a:t>
                       </a:r>
                       <a:endParaRPr lang="en-US" sz="1200" dirty="0">
                         <a:latin typeface="Calibri" charset="0"/>
@@ -13678,7 +13856,7 @@
                           <a:ea typeface="Calibri" pitchFamily="34" charset="-122"/>
                           <a:cs typeface="Calibri" pitchFamily="34" charset="-120"/>
                         </a:rPr>
-                        <a:t>Closing gaps: fairness and cross traffic</a:t>
+                        <a:t>How it was tested</a:t>
                       </a:r>
                       <a:endParaRPr lang="en-US" sz="1200" dirty="0">
                         <a:latin typeface="Calibri" charset="0"/>
@@ -13743,7 +13921,7 @@
                           <a:ea typeface="Calibri" pitchFamily="34" charset="-122"/>
                           <a:cs typeface="Calibri" pitchFamily="34" charset="-120"/>
                         </a:rPr>
-                        <a:t>0:50</a:t>
+                        <a:t>0:40</a:t>
                       </a:r>
                       <a:endParaRPr lang="en-US" sz="1200" dirty="0">
                         <a:latin typeface="Calibri" charset="0"/>
@@ -14005,7 +14183,7 @@
                           <a:ea typeface="Calibri" pitchFamily="34" charset="-122"/>
                           <a:cs typeface="Calibri" pitchFamily="34" charset="-120"/>
                         </a:rPr>
-                        <a:t>32</a:t>
+                        <a:t>33</a:t>
                       </a:r>
                       <a:endParaRPr lang="en-US" sz="1200" dirty="0">
                         <a:latin typeface="Calibri" charset="0"/>
@@ -14397,7 +14575,7 @@
                           <a:ea typeface="Calibri" pitchFamily="34" charset="-122"/>
                           <a:cs typeface="Calibri" pitchFamily="34" charset="-120"/>
                         </a:rPr>
-                        <a:t>33</a:t>
+                        <a:t>34</a:t>
                       </a:r>
                       <a:endParaRPr lang="en-US" sz="1200" dirty="0">
                         <a:latin typeface="Calibri" charset="0"/>
@@ -14789,7 +14967,7 @@
                           <a:ea typeface="Calibri" pitchFamily="34" charset="-122"/>
                           <a:cs typeface="Calibri" pitchFamily="34" charset="-120"/>
                         </a:rPr>
-                        <a:t>34</a:t>
+                        <a:t>35</a:t>
                       </a:r>
                       <a:endParaRPr lang="en-US" sz="1200" dirty="0">
                         <a:latin typeface="Calibri" charset="0"/>
@@ -15181,7 +15359,7 @@
                           <a:ea typeface="Calibri" pitchFamily="34" charset="-122"/>
                           <a:cs typeface="Calibri" pitchFamily="34" charset="-120"/>
                         </a:rPr>
-                        <a:t>35</a:t>
+                        <a:t>36</a:t>
                       </a:r>
                       <a:endParaRPr lang="en-US" sz="1200" dirty="0">
                         <a:latin typeface="Calibri" charset="0"/>
@@ -15246,7 +15424,7 @@
                           <a:ea typeface="Calibri" pitchFamily="34" charset="-122"/>
                           <a:cs typeface="Calibri" pitchFamily="34" charset="-120"/>
                         </a:rPr>
-                        <a:t>Learnings and future work</a:t>
+                        <a:t>First run between two machines</a:t>
                       </a:r>
                       <a:endParaRPr lang="en-US" sz="1200" dirty="0">
                         <a:latin typeface="Calibri" charset="0"/>
@@ -15311,7 +15489,7 @@
                           <a:ea typeface="Calibri" pitchFamily="34" charset="-122"/>
                           <a:cs typeface="Calibri" pitchFamily="34" charset="-120"/>
                         </a:rPr>
-                        <a:t>0:50</a:t>
+                        <a:t>0:45</a:t>
                       </a:r>
                       <a:endParaRPr lang="en-US" sz="1200" dirty="0">
                         <a:latin typeface="Calibri" charset="0"/>
@@ -15573,7 +15751,7 @@
                           <a:ea typeface="Calibri" pitchFamily="34" charset="-122"/>
                           <a:cs typeface="Calibri" pitchFamily="34" charset="-120"/>
                         </a:rPr>
-                        <a:t>36</a:t>
+                        <a:t>37</a:t>
                       </a:r>
                       <a:endParaRPr lang="en-US" sz="1200" dirty="0">
                         <a:latin typeface="Calibri" charset="0"/>
@@ -15638,7 +15816,7 @@
                           <a:ea typeface="Calibri" pitchFamily="34" charset="-122"/>
                           <a:cs typeface="Calibri" pitchFamily="34" charset="-120"/>
                         </a:rPr>
-                        <a:t>Thank you</a:t>
+                        <a:t>Learnings and future work</a:t>
                       </a:r>
                       <a:endParaRPr lang="en-US" sz="1200" dirty="0">
                         <a:latin typeface="Calibri" charset="0"/>
@@ -15703,7 +15881,7 @@
                           <a:ea typeface="Calibri" pitchFamily="34" charset="-122"/>
                           <a:cs typeface="Calibri" pitchFamily="34" charset="-120"/>
                         </a:rPr>
-                        <a:t>0:15</a:t>
+                        <a:t>0:50</a:t>
                       </a:r>
                       <a:endParaRPr lang="en-US" sz="1200" dirty="0">
                         <a:latin typeface="Calibri" charset="0"/>
@@ -15965,7 +16143,7 @@
                           <a:ea typeface="Calibri" pitchFamily="34" charset="-122"/>
                           <a:cs typeface="Calibri" pitchFamily="34" charset="-120"/>
                         </a:rPr>
-                        <a:t>37</a:t>
+                        <a:t>38</a:t>
                       </a:r>
                       <a:endParaRPr lang="en-US" sz="1200" dirty="0">
                         <a:latin typeface="Calibri" charset="0"/>
@@ -16030,7 +16208,7 @@
                           <a:ea typeface="Calibri" pitchFamily="34" charset="-122"/>
                           <a:cs typeface="Calibri" pitchFamily="34" charset="-120"/>
                         </a:rPr>
-                        <a:t>Appendix: slow start</a:t>
+                        <a:t>Thank you</a:t>
                       </a:r>
                       <a:endParaRPr lang="en-US" sz="1200" dirty="0">
                         <a:latin typeface="Calibri" charset="0"/>
@@ -16095,7 +16273,7 @@
                           <a:ea typeface="Calibri" pitchFamily="34" charset="-122"/>
                           <a:cs typeface="Calibri" pitchFamily="34" charset="-120"/>
                         </a:rPr>
-                        <a:t>-</a:t>
+                        <a:t>0:15</a:t>
                       </a:r>
                       <a:endParaRPr lang="en-US" sz="1200" dirty="0">
                         <a:latin typeface="Calibri" charset="0"/>
@@ -16348,6 +16526,398 @@
                       <a:pPr indent="0" marL="0">
                         <a:buNone/>
                       </a:pPr>
+                      <a:r>
+                        <a:rPr lang="en-US" sz="1200" dirty="0">
+                          <a:solidFill>
+                            <a:srgbClr val="1B2430"/>
+                          </a:solidFill>
+                          <a:latin typeface="Calibri" pitchFamily="34" charset="0"/>
+                          <a:ea typeface="Calibri" pitchFamily="34" charset="-122"/>
+                          <a:cs typeface="Calibri" pitchFamily="34" charset="-120"/>
+                        </a:rPr>
+                        <a:t>39</a:t>
+                      </a:r>
+                      <a:endParaRPr lang="en-US" sz="1200" dirty="0">
+                        <a:latin typeface="Calibri" charset="0"/>
+                        <a:ea typeface="Calibri" charset="0"/>
+                        <a:cs typeface="Calibri" charset="0"/>
+                      </a:endParaRPr>
+                    </a:p>
+                  </a:txBody>
+                  <a:tcPr marL="91440" marR="91440" marT="45720" marB="45720">
+                    <a:lnL w="6350" cap="flat" cmpd="sng" algn="ctr">
+                      <a:solidFill>
+                        <a:srgbClr val="D5DEE9"/>
+                      </a:solidFill>
+                      <a:prstDash val="solid"/>
+                      <a:round/>
+                      <a:headEnd type="none" w="med" len="med"/>
+                      <a:tailEnd type="none" w="med" len="med"/>
+                    </a:lnL>
+                    <a:lnR w="6350" cap="flat" cmpd="sng" algn="ctr">
+                      <a:solidFill>
+                        <a:srgbClr val="D5DEE9"/>
+                      </a:solidFill>
+                      <a:prstDash val="solid"/>
+                      <a:round/>
+                      <a:headEnd type="none" w="med" len="med"/>
+                      <a:tailEnd type="none" w="med" len="med"/>
+                    </a:lnR>
+                    <a:lnT w="6350" cap="flat" cmpd="sng" algn="ctr">
+                      <a:solidFill>
+                        <a:srgbClr val="D5DEE9"/>
+                      </a:solidFill>
+                      <a:prstDash val="solid"/>
+                      <a:round/>
+                      <a:headEnd type="none" w="med" len="med"/>
+                      <a:tailEnd type="none" w="med" len="med"/>
+                    </a:lnT>
+                    <a:lnB w="6350" cap="flat" cmpd="sng" algn="ctr">
+                      <a:solidFill>
+                        <a:srgbClr val="D5DEE9"/>
+                      </a:solidFill>
+                      <a:prstDash val="solid"/>
+                      <a:round/>
+                      <a:headEnd type="none" w="med" len="med"/>
+                      <a:tailEnd type="none" w="med" len="med"/>
+                    </a:lnB>
+                  </a:tcPr>
+                </a:tc>
+                <a:tc>
+                  <a:txBody>
+                    <a:bodyPr/>
+                    <a:lstStyle/>
+                    <a:p>
+                      <a:pPr indent="0" marL="0">
+                        <a:buNone/>
+                      </a:pPr>
+                      <a:r>
+                        <a:rPr lang="en-US" sz="1200" dirty="0">
+                          <a:solidFill>
+                            <a:srgbClr val="1B2430"/>
+                          </a:solidFill>
+                          <a:latin typeface="Calibri" pitchFamily="34" charset="0"/>
+                          <a:ea typeface="Calibri" pitchFamily="34" charset="-122"/>
+                          <a:cs typeface="Calibri" pitchFamily="34" charset="-120"/>
+                        </a:rPr>
+                        <a:t>Appendix: slow start</a:t>
+                      </a:r>
+                      <a:endParaRPr lang="en-US" sz="1200" dirty="0">
+                        <a:latin typeface="Calibri" charset="0"/>
+                        <a:ea typeface="Calibri" charset="0"/>
+                        <a:cs typeface="Calibri" charset="0"/>
+                      </a:endParaRPr>
+                    </a:p>
+                  </a:txBody>
+                  <a:tcPr marL="91440" marR="91440" marT="45720" marB="45720">
+                    <a:lnL w="6350" cap="flat" cmpd="sng" algn="ctr">
+                      <a:solidFill>
+                        <a:srgbClr val="D5DEE9"/>
+                      </a:solidFill>
+                      <a:prstDash val="solid"/>
+                      <a:round/>
+                      <a:headEnd type="none" w="med" len="med"/>
+                      <a:tailEnd type="none" w="med" len="med"/>
+                    </a:lnL>
+                    <a:lnR w="6350" cap="flat" cmpd="sng" algn="ctr">
+                      <a:solidFill>
+                        <a:srgbClr val="D5DEE9"/>
+                      </a:solidFill>
+                      <a:prstDash val="solid"/>
+                      <a:round/>
+                      <a:headEnd type="none" w="med" len="med"/>
+                      <a:tailEnd type="none" w="med" len="med"/>
+                    </a:lnR>
+                    <a:lnT w="6350" cap="flat" cmpd="sng" algn="ctr">
+                      <a:solidFill>
+                        <a:srgbClr val="D5DEE9"/>
+                      </a:solidFill>
+                      <a:prstDash val="solid"/>
+                      <a:round/>
+                      <a:headEnd type="none" w="med" len="med"/>
+                      <a:tailEnd type="none" w="med" len="med"/>
+                    </a:lnT>
+                    <a:lnB w="6350" cap="flat" cmpd="sng" algn="ctr">
+                      <a:solidFill>
+                        <a:srgbClr val="D5DEE9"/>
+                      </a:solidFill>
+                      <a:prstDash val="solid"/>
+                      <a:round/>
+                      <a:headEnd type="none" w="med" len="med"/>
+                      <a:tailEnd type="none" w="med" len="med"/>
+                    </a:lnB>
+                  </a:tcPr>
+                </a:tc>
+                <a:tc>
+                  <a:txBody>
+                    <a:bodyPr/>
+                    <a:lstStyle/>
+                    <a:p>
+                      <a:pPr indent="0" marL="0">
+                        <a:buNone/>
+                      </a:pPr>
+                      <a:r>
+                        <a:rPr lang="en-US" sz="1200" dirty="0">
+                          <a:solidFill>
+                            <a:srgbClr val="1B2430"/>
+                          </a:solidFill>
+                          <a:latin typeface="Calibri" pitchFamily="34" charset="0"/>
+                          <a:ea typeface="Calibri" pitchFamily="34" charset="-122"/>
+                          <a:cs typeface="Calibri" pitchFamily="34" charset="-120"/>
+                        </a:rPr>
+                        <a:t>-</a:t>
+                      </a:r>
+                      <a:endParaRPr lang="en-US" sz="1200" dirty="0">
+                        <a:latin typeface="Calibri" charset="0"/>
+                        <a:ea typeface="Calibri" charset="0"/>
+                        <a:cs typeface="Calibri" charset="0"/>
+                      </a:endParaRPr>
+                    </a:p>
+                  </a:txBody>
+                  <a:tcPr marL="91440" marR="91440" marT="45720" marB="45720">
+                    <a:lnL w="6350" cap="flat" cmpd="sng" algn="ctr">
+                      <a:solidFill>
+                        <a:srgbClr val="D5DEE9"/>
+                      </a:solidFill>
+                      <a:prstDash val="solid"/>
+                      <a:round/>
+                      <a:headEnd type="none" w="med" len="med"/>
+                      <a:tailEnd type="none" w="med" len="med"/>
+                    </a:lnL>
+                    <a:lnR w="6350" cap="flat" cmpd="sng" algn="ctr">
+                      <a:solidFill>
+                        <a:srgbClr val="D5DEE9"/>
+                      </a:solidFill>
+                      <a:prstDash val="solid"/>
+                      <a:round/>
+                      <a:headEnd type="none" w="med" len="med"/>
+                      <a:tailEnd type="none" w="med" len="med"/>
+                    </a:lnR>
+                    <a:lnT w="6350" cap="flat" cmpd="sng" algn="ctr">
+                      <a:solidFill>
+                        <a:srgbClr val="D5DEE9"/>
+                      </a:solidFill>
+                      <a:prstDash val="solid"/>
+                      <a:round/>
+                      <a:headEnd type="none" w="med" len="med"/>
+                      <a:tailEnd type="none" w="med" len="med"/>
+                    </a:lnT>
+                    <a:lnB w="6350" cap="flat" cmpd="sng" algn="ctr">
+                      <a:solidFill>
+                        <a:srgbClr val="D5DEE9"/>
+                      </a:solidFill>
+                      <a:prstDash val="solid"/>
+                      <a:round/>
+                      <a:headEnd type="none" w="med" len="med"/>
+                      <a:tailEnd type="none" w="med" len="med"/>
+                    </a:lnB>
+                  </a:tcPr>
+                </a:tc>
+              </a:tr>
+              <a:tr h="347472">
+                <a:tc>
+                  <a:txBody>
+                    <a:bodyPr/>
+                    <a:lstStyle/>
+                    <a:p>
+                      <a:pPr indent="0" marL="0">
+                        <a:buNone/>
+                      </a:pPr>
+                      <a:r>
+                        <a:rPr lang="en-US" sz="1200" dirty="0">
+                          <a:solidFill>
+                            <a:srgbClr val="1B2430"/>
+                          </a:solidFill>
+                          <a:latin typeface="Calibri" pitchFamily="34" charset="0"/>
+                          <a:ea typeface="Calibri" pitchFamily="34" charset="-122"/>
+                          <a:cs typeface="Calibri" pitchFamily="34" charset="-120"/>
+                        </a:rPr>
+                        <a:t>20</a:t>
+                      </a:r>
+                      <a:endParaRPr lang="en-US" sz="1200" dirty="0">
+                        <a:latin typeface="Calibri" charset="0"/>
+                        <a:ea typeface="Calibri" charset="0"/>
+                        <a:cs typeface="Calibri" charset="0"/>
+                      </a:endParaRPr>
+                    </a:p>
+                  </a:txBody>
+                  <a:tcPr marL="91440" marR="91440" marT="45720" marB="45720">
+                    <a:lnL w="6350" cap="flat" cmpd="sng" algn="ctr">
+                      <a:solidFill>
+                        <a:srgbClr val="D5DEE9"/>
+                      </a:solidFill>
+                      <a:prstDash val="solid"/>
+                      <a:round/>
+                      <a:headEnd type="none" w="med" len="med"/>
+                      <a:tailEnd type="none" w="med" len="med"/>
+                    </a:lnL>
+                    <a:lnR w="6350" cap="flat" cmpd="sng" algn="ctr">
+                      <a:solidFill>
+                        <a:srgbClr val="D5DEE9"/>
+                      </a:solidFill>
+                      <a:prstDash val="solid"/>
+                      <a:round/>
+                      <a:headEnd type="none" w="med" len="med"/>
+                      <a:tailEnd type="none" w="med" len="med"/>
+                    </a:lnR>
+                    <a:lnT w="6350" cap="flat" cmpd="sng" algn="ctr">
+                      <a:solidFill>
+                        <a:srgbClr val="D5DEE9"/>
+                      </a:solidFill>
+                      <a:prstDash val="solid"/>
+                      <a:round/>
+                      <a:headEnd type="none" w="med" len="med"/>
+                      <a:tailEnd type="none" w="med" len="med"/>
+                    </a:lnT>
+                    <a:lnB w="6350" cap="flat" cmpd="sng" algn="ctr">
+                      <a:solidFill>
+                        <a:srgbClr val="D5DEE9"/>
+                      </a:solidFill>
+                      <a:prstDash val="solid"/>
+                      <a:round/>
+                      <a:headEnd type="none" w="med" len="med"/>
+                      <a:tailEnd type="none" w="med" len="med"/>
+                    </a:lnB>
+                  </a:tcPr>
+                </a:tc>
+                <a:tc>
+                  <a:txBody>
+                    <a:bodyPr/>
+                    <a:lstStyle/>
+                    <a:p>
+                      <a:pPr indent="0" marL="0">
+                        <a:buNone/>
+                      </a:pPr>
+                      <a:r>
+                        <a:rPr lang="en-US" sz="1200" dirty="0">
+                          <a:solidFill>
+                            <a:srgbClr val="1B2430"/>
+                          </a:solidFill>
+                          <a:latin typeface="Calibri" pitchFamily="34" charset="0"/>
+                          <a:ea typeface="Calibri" pitchFamily="34" charset="-122"/>
+                          <a:cs typeface="Calibri" pitchFamily="34" charset="-120"/>
+                        </a:rPr>
+                        <a:t>RUDP Chat demo</a:t>
+                      </a:r>
+                      <a:endParaRPr lang="en-US" sz="1200" dirty="0">
+                        <a:latin typeface="Calibri" charset="0"/>
+                        <a:ea typeface="Calibri" charset="0"/>
+                        <a:cs typeface="Calibri" charset="0"/>
+                      </a:endParaRPr>
+                    </a:p>
+                  </a:txBody>
+                  <a:tcPr marL="91440" marR="91440" marT="45720" marB="45720">
+                    <a:lnL w="6350" cap="flat" cmpd="sng" algn="ctr">
+                      <a:solidFill>
+                        <a:srgbClr val="D5DEE9"/>
+                      </a:solidFill>
+                      <a:prstDash val="solid"/>
+                      <a:round/>
+                      <a:headEnd type="none" w="med" len="med"/>
+                      <a:tailEnd type="none" w="med" len="med"/>
+                    </a:lnL>
+                    <a:lnR w="6350" cap="flat" cmpd="sng" algn="ctr">
+                      <a:solidFill>
+                        <a:srgbClr val="D5DEE9"/>
+                      </a:solidFill>
+                      <a:prstDash val="solid"/>
+                      <a:round/>
+                      <a:headEnd type="none" w="med" len="med"/>
+                      <a:tailEnd type="none" w="med" len="med"/>
+                    </a:lnR>
+                    <a:lnT w="6350" cap="flat" cmpd="sng" algn="ctr">
+                      <a:solidFill>
+                        <a:srgbClr val="D5DEE9"/>
+                      </a:solidFill>
+                      <a:prstDash val="solid"/>
+                      <a:round/>
+                      <a:headEnd type="none" w="med" len="med"/>
+                      <a:tailEnd type="none" w="med" len="med"/>
+                    </a:lnT>
+                    <a:lnB w="6350" cap="flat" cmpd="sng" algn="ctr">
+                      <a:solidFill>
+                        <a:srgbClr val="D5DEE9"/>
+                      </a:solidFill>
+                      <a:prstDash val="solid"/>
+                      <a:round/>
+                      <a:headEnd type="none" w="med" len="med"/>
+                      <a:tailEnd type="none" w="med" len="med"/>
+                    </a:lnB>
+                  </a:tcPr>
+                </a:tc>
+                <a:tc>
+                  <a:txBody>
+                    <a:bodyPr/>
+                    <a:lstStyle/>
+                    <a:p>
+                      <a:pPr indent="0" marL="0">
+                        <a:buNone/>
+                      </a:pPr>
+                      <a:r>
+                        <a:rPr lang="en-US" sz="1200" dirty="0">
+                          <a:solidFill>
+                            <a:srgbClr val="1B2430"/>
+                          </a:solidFill>
+                          <a:latin typeface="Calibri" pitchFamily="34" charset="0"/>
+                          <a:ea typeface="Calibri" pitchFamily="34" charset="-122"/>
+                          <a:cs typeface="Calibri" pitchFamily="34" charset="-120"/>
+                        </a:rPr>
+                        <a:t>1:00</a:t>
+                      </a:r>
+                      <a:endParaRPr lang="en-US" sz="1200" dirty="0">
+                        <a:latin typeface="Calibri" charset="0"/>
+                        <a:ea typeface="Calibri" charset="0"/>
+                        <a:cs typeface="Calibri" charset="0"/>
+                      </a:endParaRPr>
+                    </a:p>
+                  </a:txBody>
+                  <a:tcPr marL="91440" marR="91440" marT="45720" marB="45720">
+                    <a:lnL w="6350" cap="flat" cmpd="sng" algn="ctr">
+                      <a:solidFill>
+                        <a:srgbClr val="D5DEE9"/>
+                      </a:solidFill>
+                      <a:prstDash val="solid"/>
+                      <a:round/>
+                      <a:headEnd type="none" w="med" len="med"/>
+                      <a:tailEnd type="none" w="med" len="med"/>
+                    </a:lnL>
+                    <a:lnR w="6350" cap="flat" cmpd="sng" algn="ctr">
+                      <a:solidFill>
+                        <a:srgbClr val="D5DEE9"/>
+                      </a:solidFill>
+                      <a:prstDash val="solid"/>
+                      <a:round/>
+                      <a:headEnd type="none" w="med" len="med"/>
+                      <a:tailEnd type="none" w="med" len="med"/>
+                    </a:lnR>
+                    <a:lnT w="6350" cap="flat" cmpd="sng" algn="ctr">
+                      <a:solidFill>
+                        <a:srgbClr val="D5DEE9"/>
+                      </a:solidFill>
+                      <a:prstDash val="solid"/>
+                      <a:round/>
+                      <a:headEnd type="none" w="med" len="med"/>
+                      <a:tailEnd type="none" w="med" len="med"/>
+                    </a:lnT>
+                    <a:lnB w="6350" cap="flat" cmpd="sng" algn="ctr">
+                      <a:solidFill>
+                        <a:srgbClr val="D5DEE9"/>
+                      </a:solidFill>
+                      <a:prstDash val="solid"/>
+                      <a:round/>
+                      <a:headEnd type="none" w="med" len="med"/>
+                      <a:tailEnd type="none" w="med" len="med"/>
+                    </a:lnB>
+                  </a:tcPr>
+                </a:tc>
+                <a:tc>
+                  <a:txBody>
+                    <a:bodyPr/>
+                    <a:lstStyle/>
+                    <a:p>
+                      <a:pPr indent="0" marL="0">
+                        <a:buNone/>
+                      </a:pPr>
                       <a:endParaRPr lang="en-US" sz="1200" dirty="0">
                         <a:latin typeface="Calibri" charset="0"/>
                         <a:ea typeface="Calibri" charset="0"/>
@@ -22482,7 +23052,7 @@
                 <a:ea typeface="Calibri" pitchFamily="34" charset="-122"/>
                 <a:cs typeface="Calibri" pitchFamily="34" charset="-120"/>
               </a:rPr>
-              <a:t>32. Reality check: real kernel (tc/netem)</a:t>
+              <a:t>32. How it was tested</a:t>
             </a:r>
             <a:endParaRPr lang="en-US" sz="2600" dirty="0"/>
           </a:p>
@@ -22521,7 +23091,7 @@
                 <a:ea typeface="Calibri" pitchFamily="34" charset="-122"/>
                 <a:cs typeface="Calibri" pitchFamily="34" charset="-120"/>
               </a:rPr>
-              <a:t>Time on this slide: 1:00</a:t>
+              <a:t>Time on this slide: 0:40</a:t>
             </a:r>
             <a:endParaRPr lang="en-US" sz="1300" dirty="0"/>
           </a:p>
@@ -22674,7 +23244,7 @@
                 <a:ea typeface="Calibri" pitchFamily="34" charset="-122"/>
                 <a:cs typeface="Calibri" pitchFamily="34" charset="-120"/>
               </a:rPr>
-              <a:t>Until now our real-socket tests ran through our own proxy. We repeated them on the Linux kernel itself, using tc netem, with kernel TCP in the same table.</a:t>
+              <a:t>Correctness first: unit, end-to-end, handshake, file-integrity, chat and simulator tests, and the packet parser is fuzzed under AddressSanitizer.</a:t>
             </a:r>
             <a:endParaRPr lang="en-US" sz="1400" dirty="0"/>
           </a:p>
@@ -22695,7 +23265,7 @@
                 <a:ea typeface="Calibri" pitchFamily="34" charset="-122"/>
                 <a:cs typeface="Calibri" pitchFamily="34" charset="-120"/>
               </a:rPr>
-              <a:t>Against tuned AIMD the neural agent is 71 percent faster on the lossy path, 65 percent on the 5G-like path and 83 percent on the satellite path, all significant. On the reordering path it is 60 percent faster but that is not significant.</a:t>
+              <a:t>For speed we use virtual time, which is the same C sender on a simulated clock. We checked it against the real clock, and it agreed in all 15 of 15 cells. We use paired seeds with 95 percent intervals and keep tuning seeds apart from test seeds.</a:t>
             </a:r>
             <a:endParaRPr lang="en-US" sz="1400" dirty="0"/>
           </a:p>
@@ -22716,49 +23286,7 @@
                 <a:ea typeface="Calibri" pitchFamily="34" charset="-122"/>
                 <a:cs typeface="Calibri" pitchFamily="34" charset="-120"/>
               </a:rPr>
-              <a:t>Kernel TCP is still faster than our agent on every path, by one and a half to one and seven tenths. We are not claiming to beat TCP.</a:t>
-            </a:r>
-            <a:endParaRPr lang="en-US" sz="1400" dirty="0"/>
-          </a:p>
-          <a:p>
-            <a:pPr marL="342900" indent="-342900">
-              <a:spcAft>
-                <a:spcPts val="600"/>
-              </a:spcAft>
-              <a:buSzPct val="100000"/>
-              <a:buChar char="•"/>
-            </a:pPr>
-            <a:r>
-              <a:rPr lang="en-US" sz="1400" dirty="0">
-                <a:solidFill>
-                  <a:srgbClr val="1B2430"/>
-                </a:solidFill>
-                <a:latin typeface="Calibri" pitchFamily="34" charset="0"/>
-                <a:ea typeface="Calibri" pitchFamily="34" charset="-122"/>
-                <a:cs typeface="Calibri" pitchFamily="34" charset="-120"/>
-              </a:rPr>
-              <a:t>We also put a kernel TCP flow and one RUDP flow on the same link. The neural agent takes 24 to 34 percent of it, so it does not starve TCP; tuned AIMD gets only 5 to 17 percent.</a:t>
-            </a:r>
-            <a:endParaRPr lang="en-US" sz="1400" dirty="0"/>
-          </a:p>
-          <a:p>
-            <a:pPr marL="342900" indent="-342900">
-              <a:spcAft>
-                <a:spcPts val="600"/>
-              </a:spcAft>
-              <a:buSzPct val="100000"/>
-              <a:buChar char="•"/>
-            </a:pPr>
-            <a:r>
-              <a:rPr lang="en-US" sz="1400" dirty="0">
-                <a:solidFill>
-                  <a:srgbClr val="1B2430"/>
-                </a:solidFill>
-                <a:latin typeface="Calibri" pitchFamily="34" charset="0"/>
-                <a:ea typeface="Calibri" pitchFamily="34" charset="-122"/>
-                <a:cs typeface="Calibri" pitchFamily="34" charset="-120"/>
-              </a:rPr>
-              <a:t>Our first runs were wrong four times: the netem queue limit counted packets in flight, the baseline was untuned, the payload sizes differed, and finally RUDP was sending 40-byte synthetic packets. We found each one, fixed it, re-ran everything and documented it.</a:t>
+              <a:t>Realism comes in four steps: emulation in the client, a separate proxy on real sockets, the Linux kernel with netem, and two laptops over the internet. Every result has its command in the report.</a:t>
             </a:r>
             <a:endParaRPr lang="en-US" sz="1400" dirty="0"/>
           </a:p>
@@ -22836,7 +23364,7 @@
                 <a:ea typeface="Calibri" pitchFamily="34" charset="-122"/>
                 <a:cs typeface="Calibri" pitchFamily="34" charset="-120"/>
               </a:rPr>
-              <a:t>Q: Does it beat TCP? A: No. It beats our AIMD baselines on a real kernel path; mature kernel TCP is faster, by 1.5x to 1.7x. Q: Does it starve TCP? A: No, it takes 24 to 34 percent of a shared link (3 runs per cell, one laptop). Q: Why were the first runs wrong? A: four separate mistakes, the last being 40-byte synthetic packets against 512-byte TCP payloads; all fixed and re-run.</a:t>
+              <a:t>Did you make mistakes? Yes, and we logged them: untuned baselines, unequal payloads, and synthetic 40-byte packets in the kernel test, each found, fixed and re-run.</a:t>
             </a:r>
             <a:endParaRPr lang="en-US" sz="1400" dirty="0"/>
           </a:p>
@@ -22907,7 +23435,7 @@
                 <a:ea typeface="Calibri" pitchFamily="34" charset="-122"/>
                 <a:cs typeface="Calibri" pitchFamily="34" charset="-120"/>
               </a:rPr>
-              <a:t>33. Research gaps: changing paths and a BBR baseline</a:t>
+              <a:t>33. Reality check: real kernel (tc/netem)</a:t>
             </a:r>
             <a:endParaRPr lang="en-US" sz="2600" dirty="0"/>
           </a:p>
@@ -23099,7 +23627,7 @@
                 <a:ea typeface="Calibri" pitchFamily="34" charset="-122"/>
                 <a:cs typeface="Calibri" pitchFamily="34" charset="-120"/>
               </a:rPr>
-              <a:t>Two more research gaps we tested.</a:t>
+              <a:t>Until now our real-socket tests ran through our own proxy. We repeated them on the Linux kernel itself, using tc netem, with kernel TCP in the same table.</a:t>
             </a:r>
             <a:endParaRPr lang="en-US" sz="1400" dirty="0"/>
           </a:p>
@@ -23120,7 +23648,7 @@
                 <a:ea typeface="Calibri" pitchFamily="34" charset="-122"/>
                 <a:cs typeface="Calibri" pitchFamily="34" charset="-120"/>
               </a:rPr>
-              <a:t>First, paths that change during a transfer: we added a --dyn option so bandwidth and delay change mid-run.</a:t>
+              <a:t>Against tuned AIMD the neural agent is 71 percent faster on the lossy path, 65 percent on the 5G-like path and 83 percent on the satellite path, all significant. On the reordering path it is 60 percent faster but that is not significant.</a:t>
             </a:r>
             <a:endParaRPr lang="en-US" sz="1400" dirty="0"/>
           </a:p>
@@ -23141,7 +23669,7 @@
                 <a:ea typeface="Calibri" pitchFamily="34" charset="-122"/>
                 <a:cs typeface="Calibri" pitchFamily="34" charset="-120"/>
               </a:rPr>
-              <a:t>The neural agent was fastest in all four cases, 6 to 53 percent faster than tuned AIMD, but it retransmits 1 to 6 percent of packets.</a:t>
+              <a:t>Kernel TCP is still faster than our agent on every path, by one and a half to one and seven tenths. We are not claiming to beat TCP.</a:t>
             </a:r>
             <a:endParaRPr lang="en-US" sz="1400" dirty="0"/>
           </a:p>
@@ -23162,7 +23690,7 @@
                 <a:ea typeface="Calibri" pitchFamily="34" charset="-122"/>
                 <a:cs typeface="Calibri" pitchFamily="34" charset="-120"/>
               </a:rPr>
-              <a:t>Second, a stronger baseline: a simplified BBR.</a:t>
+              <a:t>We also put a kernel TCP flow and one RUDP flow on the same link. The neural agent takes 24 to 34 percent of it, so it does not starve TCP; tuned AIMD gets only 5 to 17 percent.</a:t>
             </a:r>
             <a:endParaRPr lang="en-US" sz="1400" dirty="0"/>
           </a:p>
@@ -23183,28 +23711,7 @@
                 <a:ea typeface="Calibri" pitchFamily="34" charset="-122"/>
                 <a:cs typeface="Calibri" pitchFamily="34" charset="-120"/>
               </a:rPr>
-              <a:t>It beats tuned AIMD on four of five paths and is actually faster than our agent on the 2 percent lossy path, 8.2 seconds against 9.8.</a:t>
-            </a:r>
-            <a:endParaRPr lang="en-US" sz="1400" dirty="0"/>
-          </a:p>
-          <a:p>
-            <a:pPr marL="342900" indent="-342900">
-              <a:spcAft>
-                <a:spcPts val="600"/>
-              </a:spcAft>
-              <a:buSzPct val="100000"/>
-              <a:buChar char="•"/>
-            </a:pPr>
-            <a:r>
-              <a:rPr lang="en-US" sz="1400" dirty="0">
-                <a:solidFill>
-                  <a:srgbClr val="1B2430"/>
-                </a:solidFill>
-                <a:latin typeface="Calibri" pitchFamily="34" charset="0"/>
-                <a:ea typeface="Calibri" pitchFamily="34" charset="-122"/>
-                <a:cs typeface="Calibri" pitchFamily="34" charset="-120"/>
-              </a:rPr>
-              <a:t>Be honest that our BBR is a simplification and that two bugs in it were found and fixed by these tests.</a:t>
+              <a:t>Our first runs were wrong four times: the netem queue limit counted packets in flight, the baseline was untuned, the payload sizes differed, and finally RUDP was sending 40-byte synthetic packets. We found each one, fixed it, re-ran everything and documented it.</a:t>
             </a:r>
             <a:endParaRPr lang="en-US" sz="1400" dirty="0"/>
           </a:p>
@@ -23282,7 +23789,7 @@
                 <a:ea typeface="Calibri" pitchFamily="34" charset="-122"/>
                 <a:cs typeface="Calibri" pitchFamily="34" charset="-120"/>
               </a:rPr>
-              <a:t>Is your BBR the real one? No: a simplified version with no ProbeRTT and no BBRv3 loss response; the comparison is against a BBR-style policy.</a:t>
+              <a:t>Q: Does it beat TCP? A: No. It beats our AIMD baselines on a real kernel path; mature kernel TCP is faster, by 1.5x to 1.7x. Q: Does it starve TCP? A: No, it takes 24 to 34 percent of a shared link (3 runs per cell, one laptop). Q: Why were the first runs wrong? A: four separate mistakes, the last being 40-byte synthetic packets against 512-byte TCP payloads; all fixed and re-run.</a:t>
             </a:r>
             <a:endParaRPr lang="en-US" sz="1400" dirty="0"/>
           </a:p>
@@ -23353,7 +23860,7 @@
                 <a:ea typeface="Calibri" pitchFamily="34" charset="-122"/>
                 <a:cs typeface="Calibri" pitchFamily="34" charset="-120"/>
               </a:rPr>
-              <a:t>34. Research gaps: fairness and trust</a:t>
+              <a:t>34. Research gaps: changing paths and a BBR baseline</a:t>
             </a:r>
             <a:endParaRPr lang="en-US" sz="2600" dirty="0"/>
           </a:p>
@@ -23545,7 +24052,7 @@
                 <a:ea typeface="Calibri" pitchFamily="34" charset="-122"/>
                 <a:cs typeface="Calibri" pitchFamily="34" charset="-120"/>
               </a:rPr>
-              <a:t>Fairness and trust.</a:t>
+              <a:t>Two more research gaps we tested.</a:t>
             </a:r>
             <a:endParaRPr lang="en-US" sz="1400" dirty="0"/>
           </a:p>
@@ -23566,7 +24073,7 @@
                 <a:ea typeface="Calibri" pitchFamily="34" charset="-122"/>
                 <a:cs typeface="Calibri" pitchFamily="34" charset="-120"/>
               </a:rPr>
-              <a:t>Two neural flows with unequal round-trip times share the link more evenly than two AIMD flows, Jain 0.84 against 0.64 at 150 ms extra RTT, but still favour the short-RTT flow; six pairs per cell so only the largest gap is clear.</a:t>
+              <a:t>First, paths that change during a transfer: we added a --dyn option so bandwidth and delay change mid-run.</a:t>
             </a:r>
             <a:endParaRPr lang="en-US" sz="1400" dirty="0"/>
           </a:p>
@@ -23587,7 +24094,7 @@
                 <a:ea typeface="Calibri" pitchFamily="34" charset="-122"/>
                 <a:cs typeface="Calibri" pitchFamily="34" charset="-120"/>
               </a:rPr>
-              <a:t>A small decision tree agrees with the network on only 79 percent of decisions but gives the same transfer time on four of five paths.</a:t>
+              <a:t>The neural agent was fastest in all four cases, 6 to 53 percent faster than tuned AIMD, but it retransmits 1 to 6 percent of packets.</a:t>
             </a:r>
             <a:endParaRPr lang="en-US" sz="1400" dirty="0"/>
           </a:p>
@@ -23608,7 +24115,7 @@
                 <a:ea typeface="Calibri" pitchFamily="34" charset="-122"/>
                 <a:cs typeface="Calibri" pitchFamily="34" charset="-120"/>
               </a:rPr>
-              <a:t>Noise on the inputs costs at most 12 percent.</a:t>
+              <a:t>Second, a stronger baseline: a simplified BBR.</a:t>
             </a:r>
             <a:endParaRPr lang="en-US" sz="1400" dirty="0"/>
           </a:p>
@@ -23629,7 +24136,7 @@
                 <a:ea typeface="Calibri" pitchFamily="34" charset="-122"/>
                 <a:cs typeface="Calibri" pitchFamily="34" charset="-120"/>
               </a:rPr>
-              <a:t>Formal certification only works at tiny perturbations, so the agent is robust in practice but not proven.</a:t>
+              <a:t>It beats tuned AIMD on four of five paths and is actually faster than our agent on the 2 percent lossy path, 8.2 seconds against 9.8.</a:t>
             </a:r>
             <a:endParaRPr lang="en-US" sz="1400" dirty="0"/>
           </a:p>
@@ -23650,7 +24157,7 @@
                 <a:ea typeface="Calibri" pitchFamily="34" charset="-122"/>
                 <a:cs typeface="Calibri" pitchFamily="34" charset="-120"/>
               </a:rPr>
-              <a:t>Kernel TCP coexistence is measured: the neural agent takes 24 to 34 percent of a shared link, so it does not starve TCP, with only three runs per cell.</a:t>
+              <a:t>Be honest that our BBR is a simplification and that two bugs in it were found and fixed by these tests.</a:t>
             </a:r>
             <a:endParaRPr lang="en-US" sz="1400" dirty="0"/>
           </a:p>
@@ -23728,7 +24235,7 @@
                 <a:ea typeface="Calibri" pitchFamily="34" charset="-122"/>
                 <a:cs typeface="Calibri" pitchFamily="34" charset="-120"/>
               </a:rPr>
-              <a:t>Did you test against kernel TCP? Yes, on kernel netem: the neural agent took 24 to 34 percent of a shared link, three runs per cell on one laptop.</a:t>
+              <a:t>Is your BBR the real one? No: a simplified version with no ProbeRTT and no BBRv3 loss response; the comparison is against a BBR-style policy.</a:t>
             </a:r>
             <a:endParaRPr lang="en-US" sz="1400" dirty="0"/>
           </a:p>
@@ -23799,7 +24306,7 @@
                 <a:ea typeface="Calibri" pitchFamily="34" charset="-122"/>
                 <a:cs typeface="Calibri" pitchFamily="34" charset="-120"/>
               </a:rPr>
-              <a:t>35. Learnings and future work</a:t>
+              <a:t>35. Research gaps: fairness and trust</a:t>
             </a:r>
             <a:endParaRPr lang="en-US" sz="2600" dirty="0"/>
           </a:p>
@@ -23838,7 +24345,7 @@
                 <a:ea typeface="Calibri" pitchFamily="34" charset="-122"/>
                 <a:cs typeface="Calibri" pitchFamily="34" charset="-120"/>
               </a:rPr>
-              <a:t>Time on this slide: 0:50</a:t>
+              <a:t>Time on this slide: 1:00</a:t>
             </a:r>
             <a:endParaRPr lang="en-US" sz="1300" dirty="0"/>
           </a:p>
@@ -23991,7 +24498,7 @@
                 <a:ea typeface="Calibri" pitchFamily="34" charset="-122"/>
                 <a:cs typeface="Calibri" pitchFamily="34" charset="-120"/>
               </a:rPr>
-              <a:t>What we learned: reliability is a set of simple rules working together, congestion control matters as much as retransmission, and tests tell you things about your own results that you do not want to hear.</a:t>
+              <a:t>Fairness and trust.</a:t>
             </a:r>
             <a:endParaRPr lang="en-US" sz="1400" dirty="0"/>
           </a:p>
@@ -24012,7 +24519,7 @@
                 <a:ea typeface="Calibri" pitchFamily="34" charset="-122"/>
                 <a:cs typeface="Calibri" pitchFamily="34" charset="-120"/>
               </a:rPr>
-              <a:t>Our limits: no kernel netem or multi-machine test, the agent is not a polite neighbour, there is no gain at 10 percent random loss, and the tabular agent did not beat AIMD.</a:t>
+              <a:t>Two neural flows with unequal round-trip times share the link more evenly than two AIMD flows, Jain 0.84 against 0.64 at 150 ms extra RTT, but still favour the short-RTT flow; six pairs per cell so only the largest gap is clear.</a:t>
             </a:r>
             <a:endParaRPr lang="en-US" sz="1400" dirty="0"/>
           </a:p>
@@ -24033,7 +24540,70 @@
                 <a:ea typeface="Calibri" pitchFamily="34" charset="-122"/>
                 <a:cs typeface="Calibri" pitchFamily="34" charset="-120"/>
               </a:rPr>
-              <a:t>Next: fairness-aware training with TCP coexistence, training on real traces, and kernel and multi-machine tests.</a:t>
+              <a:t>A small decision tree agrees with the network on only 79 percent of decisions but gives the same transfer time on four of five paths.</a:t>
+            </a:r>
+            <a:endParaRPr lang="en-US" sz="1400" dirty="0"/>
+          </a:p>
+          <a:p>
+            <a:pPr marL="342900" indent="-342900">
+              <a:spcAft>
+                <a:spcPts val="600"/>
+              </a:spcAft>
+              <a:buSzPct val="100000"/>
+              <a:buChar char="•"/>
+            </a:pPr>
+            <a:r>
+              <a:rPr lang="en-US" sz="1400" dirty="0">
+                <a:solidFill>
+                  <a:srgbClr val="1B2430"/>
+                </a:solidFill>
+                <a:latin typeface="Calibri" pitchFamily="34" charset="0"/>
+                <a:ea typeface="Calibri" pitchFamily="34" charset="-122"/>
+                <a:cs typeface="Calibri" pitchFamily="34" charset="-120"/>
+              </a:rPr>
+              <a:t>Noise on the inputs costs at most 12 percent.</a:t>
+            </a:r>
+            <a:endParaRPr lang="en-US" sz="1400" dirty="0"/>
+          </a:p>
+          <a:p>
+            <a:pPr marL="342900" indent="-342900">
+              <a:spcAft>
+                <a:spcPts val="600"/>
+              </a:spcAft>
+              <a:buSzPct val="100000"/>
+              <a:buChar char="•"/>
+            </a:pPr>
+            <a:r>
+              <a:rPr lang="en-US" sz="1400" dirty="0">
+                <a:solidFill>
+                  <a:srgbClr val="1B2430"/>
+                </a:solidFill>
+                <a:latin typeface="Calibri" pitchFamily="34" charset="0"/>
+                <a:ea typeface="Calibri" pitchFamily="34" charset="-122"/>
+                <a:cs typeface="Calibri" pitchFamily="34" charset="-120"/>
+              </a:rPr>
+              <a:t>Formal certification only works at tiny perturbations, so the agent is robust in practice but not proven.</a:t>
+            </a:r>
+            <a:endParaRPr lang="en-US" sz="1400" dirty="0"/>
+          </a:p>
+          <a:p>
+            <a:pPr marL="342900" indent="-342900">
+              <a:spcAft>
+                <a:spcPts val="600"/>
+              </a:spcAft>
+              <a:buSzPct val="100000"/>
+              <a:buChar char="•"/>
+            </a:pPr>
+            <a:r>
+              <a:rPr lang="en-US" sz="1400" dirty="0">
+                <a:solidFill>
+                  <a:srgbClr val="1B2430"/>
+                </a:solidFill>
+                <a:latin typeface="Calibri" pitchFamily="34" charset="0"/>
+                <a:ea typeface="Calibri" pitchFamily="34" charset="-122"/>
+                <a:cs typeface="Calibri" pitchFamily="34" charset="-120"/>
+              </a:rPr>
+              <a:t>Kernel TCP coexistence is measured: the neural agent takes 24 to 34 percent of a shared link, so it does not starve TCP, with only three runs per cell.</a:t>
             </a:r>
             <a:endParaRPr lang="en-US" sz="1400" dirty="0"/>
           </a:p>
@@ -24111,7 +24681,7 @@
                 <a:ea typeface="Calibri" pitchFamily="34" charset="-122"/>
                 <a:cs typeface="Calibri" pitchFamily="34" charset="-120"/>
               </a:rPr>
-              <a:t>What would you do first? Run the netem script on a Linux machine for kernel TCP and RUDP on the same path, then add a competing flow to the training.</a:t>
+              <a:t>Did you test against kernel TCP? Yes, on kernel netem: the neural agent took 24 to 34 percent of a shared link, three runs per cell on one laptop.</a:t>
             </a:r>
             <a:endParaRPr lang="en-US" sz="1400" dirty="0"/>
           </a:p>
@@ -24182,7 +24752,7 @@
                 <a:ea typeface="Calibri" pitchFamily="34" charset="-122"/>
                 <a:cs typeface="Calibri" pitchFamily="34" charset="-120"/>
               </a:rPr>
-              <a:t>36. Thank you</a:t>
+              <a:t>36. First run between two machines</a:t>
             </a:r>
             <a:endParaRPr lang="en-US" sz="2600" dirty="0"/>
           </a:p>
@@ -24221,7 +24791,7 @@
                 <a:ea typeface="Calibri" pitchFamily="34" charset="-122"/>
                 <a:cs typeface="Calibri" pitchFamily="34" charset="-120"/>
               </a:rPr>
-              <a:t>Time on this slide: 0:15</a:t>
+              <a:t>Time on this slide: 0:45</a:t>
             </a:r>
             <a:endParaRPr lang="en-US" sz="1300" dirty="0"/>
           </a:p>
@@ -24366,7 +24936,7 @@
               <a:buChar char="•"/>
             </a:pPr>
             <a:r>
-              <a:rPr lang="en-US" sz="1600" dirty="0">
+              <a:rPr lang="en-US" sz="1400" dirty="0">
                 <a:solidFill>
                   <a:srgbClr val="1B2430"/>
                 </a:solidFill>
@@ -24374,9 +24944,51 @@
                 <a:ea typeface="Calibri" pitchFamily="34" charset="-122"/>
                 <a:cs typeface="Calibri" pitchFamily="34" charset="-120"/>
               </a:rPr>
-              <a:t>Thank you. The code, report and captures are at github.com/Capsturrrr/rudp. Happy to take questions.</a:t>
-            </a:r>
-            <a:endParaRPr lang="en-US" sz="1600" dirty="0"/>
+              <a:t>Until now every test ran on one computer. We ran the sender on one laptop and the receiver on another, on different networks, joined by Tailscale. It could not connect directly, so traffic went through a relay, about 79 milliseconds round trip.</a:t>
+            </a:r>
+            <a:endParaRPr lang="en-US" sz="1400" dirty="0"/>
+          </a:p>
+          <a:p>
+            <a:pPr marL="342900" indent="-342900">
+              <a:spcAft>
+                <a:spcPts val="600"/>
+              </a:spcAft>
+              <a:buSzPct val="100000"/>
+              <a:buChar char="•"/>
+            </a:pPr>
+            <a:r>
+              <a:rPr lang="en-US" sz="1400" dirty="0">
+                <a:solidFill>
+                  <a:srgbClr val="1B2430"/>
+                </a:solidFill>
+                <a:latin typeface="Calibri" pitchFamily="34" charset="0"/>
+                <a:ea typeface="Calibri" pitchFamily="34" charset="-122"/>
+                <a:cs typeface="Calibri" pitchFamily="34" charset="-120"/>
+              </a:rPr>
+              <a:t>RUDP works between real machines: every transfer that finished delivered all 4,000 packets, with all four policies.</a:t>
+            </a:r>
+            <a:endParaRPr lang="en-US" sz="1400" dirty="0"/>
+          </a:p>
+          <a:p>
+            <a:pPr marL="342900" indent="-342900">
+              <a:spcAft>
+                <a:spcPts val="600"/>
+              </a:spcAft>
+              <a:buSzPct val="100000"/>
+              <a:buChar char="•"/>
+            </a:pPr>
+            <a:r>
+              <a:rPr lang="en-US" sz="1400" dirty="0">
+                <a:solidFill>
+                  <a:srgbClr val="1B2430"/>
+                </a:solidFill>
+                <a:latin typeface="Calibri" pitchFamily="34" charset="0"/>
+                <a:ea typeface="Calibri" pitchFamily="34" charset="-122"/>
+                <a:cs typeface="Calibri" pitchFamily="34" charset="-120"/>
+              </a:rPr>
+              <a:t>Be honest about the numbers: the path drifted, kernel TCP alone took anywhere from 2 to 51 seconds, and 4 of 20 RUDP runs timed out, so this is a demonstration and not a ranking. On the two clean repetitions kernel TCP was 2 to 6 times faster, and in repetition 1 the neural agent beat tuned AIMD, 4.7 against 14.2 seconds.</a:t>
+            </a:r>
+            <a:endParaRPr lang="en-US" sz="1400" dirty="0"/>
           </a:p>
         </p:txBody>
       </p:sp>
@@ -24452,7 +25064,7 @@
                 <a:ea typeface="Calibri" pitchFamily="34" charset="-122"/>
                 <a:cs typeface="Calibri" pitchFamily="34" charset="-120"/>
               </a:rPr>
-              <a:t>Pause and smile; hand over to questions.</a:t>
+              <a:t>Why not a better test? The other laptop was a one-time setup over the internet; the next step is a direct local network with more repetitions.</a:t>
             </a:r>
             <a:endParaRPr lang="en-US" sz="1400" dirty="0"/>
           </a:p>
@@ -24523,7 +25135,7 @@
                 <a:ea typeface="Calibri" pitchFamily="34" charset="-122"/>
                 <a:cs typeface="Calibri" pitchFamily="34" charset="-120"/>
               </a:rPr>
-              <a:t>37. Appendix: slow start</a:t>
+              <a:t>37. Learnings and future work</a:t>
             </a:r>
             <a:endParaRPr lang="en-US" sz="2600" dirty="0"/>
           </a:p>
@@ -24562,7 +25174,7 @@
                 <a:ea typeface="Calibri" pitchFamily="34" charset="-122"/>
                 <a:cs typeface="Calibri" pitchFamily="34" charset="-120"/>
               </a:rPr>
-              <a:t>Time on this slide: -</a:t>
+              <a:t>Time on this slide: 0:50</a:t>
             </a:r>
             <a:endParaRPr lang="en-US" sz="1300" dirty="0"/>
           </a:p>
@@ -24707,7 +25319,7 @@
               <a:buChar char="•"/>
             </a:pPr>
             <a:r>
-              <a:rPr lang="en-US" sz="1600" dirty="0">
+              <a:rPr lang="en-US" sz="1400" dirty="0">
                 <a:solidFill>
                   <a:srgbClr val="1B2430"/>
                 </a:solidFill>
@@ -24715,9 +25327,51 @@
                 <a:ea typeface="Calibri" pitchFamily="34" charset="-122"/>
                 <a:cs typeface="Calibri" pitchFamily="34" charset="-120"/>
               </a:rPr>
-              <a:t>Only if asked: the window starts at 1, adds 1 per ACK until the threshold 16, then 1/window per ACK. In the 62-packet run the final window was 18.71.</a:t>
-            </a:r>
-            <a:endParaRPr lang="en-US" sz="1600" dirty="0"/>
+              <a:t>What we learned: reliability is a set of simple rules working together, congestion control matters as much as retransmission, and tests tell you things about your own results that you do not want to hear.</a:t>
+            </a:r>
+            <a:endParaRPr lang="en-US" sz="1400" dirty="0"/>
+          </a:p>
+          <a:p>
+            <a:pPr marL="342900" indent="-342900">
+              <a:spcAft>
+                <a:spcPts val="600"/>
+              </a:spcAft>
+              <a:buSzPct val="100000"/>
+              <a:buChar char="•"/>
+            </a:pPr>
+            <a:r>
+              <a:rPr lang="en-US" sz="1400" dirty="0">
+                <a:solidFill>
+                  <a:srgbClr val="1B2430"/>
+                </a:solidFill>
+                <a:latin typeface="Calibri" pitchFamily="34" charset="0"/>
+                <a:ea typeface="Calibri" pitchFamily="34" charset="-122"/>
+                <a:cs typeface="Calibri" pitchFamily="34" charset="-120"/>
+              </a:rPr>
+              <a:t>Our limits: only one noisy two-machine run, the agent is not a polite neighbour, there is no gain at 10 percent random loss, and the tabular agent did not beat AIMD.</a:t>
+            </a:r>
+            <a:endParaRPr lang="en-US" sz="1400" dirty="0"/>
+          </a:p>
+          <a:p>
+            <a:pPr marL="342900" indent="-342900">
+              <a:spcAft>
+                <a:spcPts val="600"/>
+              </a:spcAft>
+              <a:buSzPct val="100000"/>
+              <a:buChar char="•"/>
+            </a:pPr>
+            <a:r>
+              <a:rPr lang="en-US" sz="1400" dirty="0">
+                <a:solidFill>
+                  <a:srgbClr val="1B2430"/>
+                </a:solidFill>
+                <a:latin typeface="Calibri" pitchFamily="34" charset="0"/>
+                <a:ea typeface="Calibri" pitchFamily="34" charset="-122"/>
+                <a:cs typeface="Calibri" pitchFamily="34" charset="-120"/>
+              </a:rPr>
+              <a:t>Next: fairness-aware training with TCP coexistence, training on real traces, and controlled multi-machine tests.</a:t>
+            </a:r>
+            <a:endParaRPr lang="en-US" sz="1400" dirty="0"/>
           </a:p>
         </p:txBody>
       </p:sp>
@@ -24793,7 +25447,7 @@
                 <a:ea typeface="Calibri" pitchFamily="34" charset="-122"/>
                 <a:cs typeface="Calibri" pitchFamily="34" charset="-120"/>
               </a:rPr>
-              <a:t>Use this slide to answer 'show me congestion avoidance'.</a:t>
+              <a:t>What would you do first? Run the netem script on a Linux machine for kernel TCP and RUDP on the same path, then add a competing flow to the training.</a:t>
             </a:r>
             <a:endParaRPr lang="en-US" sz="1400" dirty="0"/>
           </a:p>
@@ -25268,7 +25922,7 @@
                 <a:ea typeface="Calibri" pitchFamily="34" charset="-122"/>
                 <a:cs typeface="Calibri" pitchFamily="34" charset="-120"/>
               </a:rPr>
-              <a:t>Hard questions and short answers (1 of 3)</a:t>
+              <a:t>38. Thank you</a:t>
             </a:r>
             <a:endParaRPr lang="en-US" sz="2600" dirty="0"/>
           </a:p>
@@ -25276,7 +25930,46 @@
       </p:sp>
       <p:sp>
         <p:nvSpPr>
-          <p:cNvPr id="3" name="Shape 1"/>
+          <p:cNvPr id="3" name="Text 1"/>
+          <p:cNvSpPr/>
+          <p:nvPr/>
+        </p:nvSpPr>
+        <p:spPr>
+          <a:xfrm>
+            <a:off x="457200" y="804672"/>
+            <a:ext cx="10972800" cy="320040"/>
+          </a:xfrm>
+          <a:prstGeom prst="rect">
+            <a:avLst/>
+          </a:prstGeom>
+          <a:noFill/>
+          <a:ln/>
+        </p:spPr>
+        <p:txBody>
+          <a:bodyPr wrap="square" lIns="0" tIns="0" rIns="0" bIns="0" rtlCol="0" anchor="ctr"/>
+          <a:lstStyle/>
+          <a:p>
+            <a:pPr indent="0" marL="0">
+              <a:buNone/>
+            </a:pPr>
+            <a:r>
+              <a:rPr lang="en-US" sz="1300" dirty="0">
+                <a:solidFill>
+                  <a:srgbClr val="5B6775"/>
+                </a:solidFill>
+                <a:latin typeface="Calibri" pitchFamily="34" charset="0"/>
+                <a:ea typeface="Calibri" pitchFamily="34" charset="-122"/>
+                <a:cs typeface="Calibri" pitchFamily="34" charset="-120"/>
+              </a:rPr>
+              <a:t>Time on this slide: 0:15</a:t>
+            </a:r>
+            <a:endParaRPr lang="en-US" sz="1300" dirty="0"/>
+          </a:p>
+        </p:txBody>
+      </p:sp>
+      <p:sp>
+        <p:nvSpPr>
+          <p:cNvPr id="4" name="Shape 2"/>
           <p:cNvSpPr/>
           <p:nvPr/>
         </p:nvSpPr>
@@ -25299,26 +25992,47 @@
           </a:ln>
         </p:spPr>
       </p:sp>
-      <p:sp>
-        <p:nvSpPr>
-          <p:cNvPr id="4" name="Shape 2"/>
-          <p:cNvSpPr/>
-          <p:nvPr/>
-        </p:nvSpPr>
+      <p:pic>
+        <p:nvPicPr>
+          <p:cNvPr id="5" name="Image 0" descr="th-38.png">    </p:cNvPr>
+          <p:cNvPicPr>
+            <a:picLocks noChangeAspect="1"/>
+          </p:cNvPicPr>
+          <p:nvPr/>
+        </p:nvPicPr>
+        <p:blipFill>
+          <a:blip r:embed="rId1"/>
+          <a:stretch>
+            <a:fillRect/>
+          </a:stretch>
+        </p:blipFill>
         <p:spPr>
           <a:xfrm>
             <a:off x="457200" y="1371600"/>
-            <a:ext cx="11274552" cy="914400"/>
-          </a:xfrm>
-          <a:prstGeom prst="rect">
-            <a:avLst/>
-          </a:prstGeom>
-          <a:solidFill>
-            <a:srgbClr val="F2F6FB"/>
-          </a:solidFill>
-          <a:ln w="9525">
+            <a:ext cx="5669280" cy="3188970"/>
+          </a:xfrm>
+          <a:prstGeom prst="rect">
+            <a:avLst/>
+          </a:prstGeom>
+        </p:spPr>
+      </p:pic>
+      <p:sp>
+        <p:nvSpPr>
+          <p:cNvPr id="6" name="Shape 3"/>
+          <p:cNvSpPr/>
+          <p:nvPr/>
+        </p:nvSpPr>
+        <p:spPr>
+          <a:xfrm>
+            <a:off x="457200" y="1371600"/>
+            <a:ext cx="5669280" cy="3188970"/>
+          </a:xfrm>
+          <a:prstGeom prst="rect">
+            <a:avLst/>
+          </a:prstGeom>
+          <a:ln w="12700">
             <a:solidFill>
-              <a:srgbClr val="D5DEE9"/>
+              <a:srgbClr val="C9D3E0"/>
             </a:solidFill>
             <a:prstDash val="solid"/>
           </a:ln>
@@ -25326,14 +26040,14 @@
       </p:sp>
       <p:sp>
         <p:nvSpPr>
-          <p:cNvPr id="5" name="Text 3"/>
-          <p:cNvSpPr/>
-          <p:nvPr/>
-        </p:nvSpPr>
-        <p:spPr>
-          <a:xfrm>
-            <a:off x="640080" y="1417320"/>
-            <a:ext cx="10972800" cy="320040"/>
+          <p:cNvPr id="7" name="Text 4"/>
+          <p:cNvSpPr/>
+          <p:nvPr/>
+        </p:nvSpPr>
+        <p:spPr>
+          <a:xfrm>
+            <a:off x="6400800" y="1325880"/>
+            <a:ext cx="1828800" cy="320040"/>
           </a:xfrm>
           <a:prstGeom prst="rect">
             <a:avLst/>
@@ -25349,7 +26063,7 @@
               <a:buNone/>
             </a:pPr>
             <a:r>
-              <a:rPr lang="en-US" sz="1500" b="1" dirty="0">
+              <a:rPr lang="en-US" sz="1300" b="1" dirty="0">
                 <a:solidFill>
                   <a:srgbClr val="1F6FEB"/>
                 </a:solidFill>
@@ -25357,22 +26071,22 @@
                 <a:ea typeface="Calibri" pitchFamily="34" charset="-122"/>
                 <a:cs typeface="Calibri" pitchFamily="34" charset="-120"/>
               </a:rPr>
-              <a:t>Is this a lab exercise?</a:t>
-            </a:r>
-            <a:endParaRPr lang="en-US" sz="1500" dirty="0"/>
-          </a:p>
-        </p:txBody>
-      </p:sp>
-      <p:sp>
-        <p:nvSpPr>
-          <p:cNvPr id="6" name="Text 4"/>
-          <p:cNvSpPr/>
-          <p:nvPr/>
-        </p:nvSpPr>
-        <p:spPr>
-          <a:xfrm>
-            <a:off x="640080" y="1737360"/>
-            <a:ext cx="10972800" cy="530352"/>
+              <a:t>SAY</a:t>
+            </a:r>
+            <a:endParaRPr lang="en-US" sz="1300" dirty="0"/>
+          </a:p>
+        </p:txBody>
+      </p:sp>
+      <p:sp>
+        <p:nvSpPr>
+          <p:cNvPr id="8" name="Text 5"/>
+          <p:cNvSpPr/>
+          <p:nvPr/>
+        </p:nvSpPr>
+        <p:spPr>
+          <a:xfrm>
+            <a:off x="6400800" y="1645920"/>
+            <a:ext cx="5349240" cy="3017520"/>
           </a:xfrm>
           <a:prstGeom prst="rect">
             <a:avLst/>
@@ -25384,11 +26098,15 @@
           <a:bodyPr wrap="square" lIns="0" tIns="0" rIns="0" bIns="0" rtlCol="0" anchor="t"/>
           <a:lstStyle/>
           <a:p>
-            <a:pPr indent="0" marL="0">
-              <a:buNone/>
-            </a:pPr>
-            <a:r>
-              <a:rPr lang="en-US" sz="1350" dirty="0">
+            <a:pPr marL="342900" indent="-342900">
+              <a:spcAft>
+                <a:spcPts val="600"/>
+              </a:spcAft>
+              <a:buSzPct val="100000"/>
+              <a:buChar char="•"/>
+            </a:pPr>
+            <a:r>
+              <a:rPr lang="en-US" sz="1600" dirty="0">
                 <a:solidFill>
                   <a:srgbClr val="1B2430"/>
                 </a:solidFill>
@@ -25396,32 +26114,32 @@
                 <a:ea typeface="Calibri" pitchFamily="34" charset="-122"/>
                 <a:cs typeface="Calibri" pitchFamily="34" charset="-120"/>
               </a:rPr>
-              <a:t>A lab sends datagrams. We built reliability and congestion control on top, measured them, and used them in a real chat and a routed network.</a:t>
-            </a:r>
-            <a:endParaRPr lang="en-US" sz="1350" dirty="0"/>
-          </a:p>
-        </p:txBody>
-      </p:sp>
-      <p:sp>
-        <p:nvSpPr>
-          <p:cNvPr id="7" name="Shape 5"/>
-          <p:cNvSpPr/>
-          <p:nvPr/>
-        </p:nvSpPr>
-        <p:spPr>
-          <a:xfrm>
-            <a:off x="457200" y="2377440"/>
-            <a:ext cx="11274552" cy="914400"/>
+              <a:t>Thank you. The code, report and captures are at github.com/Capsturrrr/rudp. Happy to take questions.</a:t>
+            </a:r>
+            <a:endParaRPr lang="en-US" sz="1600" dirty="0"/>
+          </a:p>
+        </p:txBody>
+      </p:sp>
+      <p:sp>
+        <p:nvSpPr>
+          <p:cNvPr id="9" name="Shape 6"/>
+          <p:cNvSpPr/>
+          <p:nvPr/>
+        </p:nvSpPr>
+        <p:spPr>
+          <a:xfrm>
+            <a:off x="457200" y="4709160"/>
+            <a:ext cx="5669280" cy="1737360"/>
           </a:xfrm>
           <a:prstGeom prst="rect">
             <a:avLst/>
           </a:prstGeom>
           <a:solidFill>
-            <a:srgbClr val="F2F6FB"/>
+            <a:srgbClr val="FFF6E5"/>
           </a:solidFill>
-          <a:ln w="9525">
+          <a:ln w="12700">
             <a:solidFill>
-              <a:srgbClr val="D5DEE9"/>
+              <a:srgbClr val="F0C987"/>
             </a:solidFill>
             <a:prstDash val="solid"/>
           </a:ln>
@@ -25429,14 +26147,14 @@
       </p:sp>
       <p:sp>
         <p:nvSpPr>
-          <p:cNvPr id="8" name="Text 6"/>
-          <p:cNvSpPr/>
-          <p:nvPr/>
-        </p:nvSpPr>
-        <p:spPr>
-          <a:xfrm>
-            <a:off x="640080" y="2423160"/>
-            <a:ext cx="10972800" cy="320040"/>
+          <p:cNvPr id="10" name="Text 7"/>
+          <p:cNvSpPr/>
+          <p:nvPr/>
+        </p:nvSpPr>
+        <p:spPr>
+          <a:xfrm>
+            <a:off x="594360" y="4754880"/>
+            <a:ext cx="5394960" cy="1645920"/>
           </a:xfrm>
           <a:prstGeom prst="rect">
             <a:avLst/>
@@ -25445,53 +26163,28 @@
           <a:ln/>
         </p:spPr>
         <p:txBody>
-          <a:bodyPr wrap="square" lIns="0" tIns="0" rIns="0" bIns="0" rtlCol="0" anchor="ctr"/>
+          <a:bodyPr wrap="square" lIns="0" tIns="0" rIns="0" bIns="0" rtlCol="0" anchor="t"/>
           <a:lstStyle/>
           <a:p>
             <a:pPr indent="0" marL="0">
               <a:buNone/>
             </a:pPr>
             <a:r>
-              <a:rPr lang="en-US" sz="1500" b="1" dirty="0">
-                <a:solidFill>
-                  <a:srgbClr val="1F6FEB"/>
-                </a:solidFill>
-                <a:latin typeface="Calibri" pitchFamily="34" charset="0"/>
-                <a:ea typeface="Calibri" pitchFamily="34" charset="-122"/>
-                <a:cs typeface="Calibri" pitchFamily="34" charset="-120"/>
-              </a:rPr>
-              <a:t>Why not TCP?</a:t>
-            </a:r>
-            <a:endParaRPr lang="en-US" sz="1500" dirty="0"/>
-          </a:p>
-        </p:txBody>
-      </p:sp>
-      <p:sp>
-        <p:nvSpPr>
-          <p:cNvPr id="9" name="Text 7"/>
-          <p:cNvSpPr/>
-          <p:nvPr/>
-        </p:nvSpPr>
-        <p:spPr>
-          <a:xfrm>
-            <a:off x="640080" y="2743200"/>
-            <a:ext cx="10972800" cy="530352"/>
-          </a:xfrm>
-          <a:prstGeom prst="rect">
-            <a:avLst/>
-          </a:prstGeom>
-          <a:noFill/>
-          <a:ln/>
-        </p:spPr>
-        <p:txBody>
-          <a:bodyPr wrap="square" lIns="0" tIns="0" rIns="0" bIns="0" rtlCol="0" anchor="t"/>
-          <a:lstStyle/>
-          <a:p>
+              <a:rPr lang="en-US" sz="1400" b="1" dirty="0">
+                <a:solidFill>
+                  <a:srgbClr val="B45309"/>
+                </a:solidFill>
+                <a:latin typeface="Calibri" pitchFamily="34" charset="0"/>
+                <a:ea typeface="Calibri" pitchFamily="34" charset="-122"/>
+                <a:cs typeface="Calibri" pitchFamily="34" charset="-120"/>
+              </a:rPr>
+              <a:t>IF ASKED  </a:t>
+            </a:r>
             <a:pPr indent="0" marL="0">
               <a:buNone/>
             </a:pPr>
             <a:r>
-              <a:rPr lang="en-US" sz="1350" dirty="0">
+              <a:rPr lang="en-US" sz="1400" dirty="0">
                 <a:solidFill>
                   <a:srgbClr val="1B2430"/>
                 </a:solidFill>
@@ -25499,318 +26192,9 @@
                 <a:ea typeface="Calibri" pitchFamily="34" charset="-122"/>
                 <a:cs typeface="Calibri" pitchFamily="34" charset="-120"/>
               </a:rPr>
-              <a:t>TCP is in the kernel and cannot be changed. Building our own makes every mechanism visible. QUIC and HTTP/3 do the same.</a:t>
-            </a:r>
-            <a:endParaRPr lang="en-US" sz="1350" dirty="0"/>
-          </a:p>
-        </p:txBody>
-      </p:sp>
-      <p:sp>
-        <p:nvSpPr>
-          <p:cNvPr id="10" name="Shape 8"/>
-          <p:cNvSpPr/>
-          <p:nvPr/>
-        </p:nvSpPr>
-        <p:spPr>
-          <a:xfrm>
-            <a:off x="457200" y="3383280"/>
-            <a:ext cx="11274552" cy="914400"/>
-          </a:xfrm>
-          <a:prstGeom prst="rect">
-            <a:avLst/>
-          </a:prstGeom>
-          <a:solidFill>
-            <a:srgbClr val="F2F6FB"/>
-          </a:solidFill>
-          <a:ln w="9525">
-            <a:solidFill>
-              <a:srgbClr val="D5DEE9"/>
-            </a:solidFill>
-            <a:prstDash val="solid"/>
-          </a:ln>
-        </p:spPr>
-      </p:sp>
-      <p:sp>
-        <p:nvSpPr>
-          <p:cNvPr id="11" name="Text 9"/>
-          <p:cNvSpPr/>
-          <p:nvPr/>
-        </p:nvSpPr>
-        <p:spPr>
-          <a:xfrm>
-            <a:off x="640080" y="3429000"/>
-            <a:ext cx="10972800" cy="320040"/>
-          </a:xfrm>
-          <a:prstGeom prst="rect">
-            <a:avLst/>
-          </a:prstGeom>
-          <a:noFill/>
-          <a:ln/>
-        </p:spPr>
-        <p:txBody>
-          <a:bodyPr wrap="square" lIns="0" tIns="0" rIns="0" bIns="0" rtlCol="0" anchor="ctr"/>
-          <a:lstStyle/>
-          <a:p>
-            <a:pPr indent="0" marL="0">
-              <a:buNone/>
-            </a:pPr>
-            <a:r>
-              <a:rPr lang="en-US" sz="1500" b="1" dirty="0">
-                <a:solidFill>
-                  <a:srgbClr val="1F6FEB"/>
-                </a:solidFill>
-                <a:latin typeface="Calibri" pitchFamily="34" charset="0"/>
-                <a:ea typeface="Calibri" pitchFamily="34" charset="-122"/>
-                <a:cs typeface="Calibri" pitchFamily="34" charset="-120"/>
-              </a:rPr>
-              <a:t>Did Smart-RUDP win?</a:t>
-            </a:r>
-            <a:endParaRPr lang="en-US" sz="1500" dirty="0"/>
-          </a:p>
-        </p:txBody>
-      </p:sp>
-      <p:sp>
-        <p:nvSpPr>
-          <p:cNvPr id="12" name="Text 10"/>
-          <p:cNvSpPr/>
-          <p:nvPr/>
-        </p:nvSpPr>
-        <p:spPr>
-          <a:xfrm>
-            <a:off x="640080" y="3749040"/>
-            <a:ext cx="10972800" cy="530352"/>
-          </a:xfrm>
-          <a:prstGeom prst="rect">
-            <a:avLst/>
-          </a:prstGeom>
-          <a:noFill/>
-          <a:ln/>
-        </p:spPr>
-        <p:txBody>
-          <a:bodyPr wrap="square" lIns="0" tIns="0" rIns="0" bIns="0" rtlCol="0" anchor="t"/>
-          <a:lstStyle/>
-          <a:p>
-            <a:pPr indent="0" marL="0">
-              <a:buNone/>
-            </a:pPr>
-            <a:r>
-              <a:rPr lang="en-US" sz="1350" dirty="0">
-                <a:solidFill>
-                  <a:srgbClr val="1B2430"/>
-                </a:solidFill>
-                <a:latin typeface="Calibri" pitchFamily="34" charset="0"/>
-                <a:ea typeface="Calibri" pitchFamily="34" charset="-122"/>
-                <a:cs typeface="Calibri" pitchFamily="34" charset="-120"/>
-              </a:rPr>
-              <a:t>Yes, in the final C transport against tuned baselines: 15 to 52 percent less time than tuned AIMD on four ordinary paths (real clock, real sockets and 100 random held-out paths agree), a tie on the 10 percent loss path. Against a simplified BBR it wins on the satellite-like and fast paths and loses on the 2 percent lossy path. The first tabular agent did not beat AIMD, and we say so.</a:t>
-            </a:r>
-            <a:endParaRPr lang="en-US" sz="1350" dirty="0"/>
-          </a:p>
-        </p:txBody>
-      </p:sp>
-      <p:sp>
-        <p:nvSpPr>
-          <p:cNvPr id="13" name="Shape 11"/>
-          <p:cNvSpPr/>
-          <p:nvPr/>
-        </p:nvSpPr>
-        <p:spPr>
-          <a:xfrm>
-            <a:off x="457200" y="4389120"/>
-            <a:ext cx="11274552" cy="914400"/>
-          </a:xfrm>
-          <a:prstGeom prst="rect">
-            <a:avLst/>
-          </a:prstGeom>
-          <a:solidFill>
-            <a:srgbClr val="F2F6FB"/>
-          </a:solidFill>
-          <a:ln w="9525">
-            <a:solidFill>
-              <a:srgbClr val="D5DEE9"/>
-            </a:solidFill>
-            <a:prstDash val="solid"/>
-          </a:ln>
-        </p:spPr>
-      </p:sp>
-      <p:sp>
-        <p:nvSpPr>
-          <p:cNvPr id="14" name="Text 12"/>
-          <p:cNvSpPr/>
-          <p:nvPr/>
-        </p:nvSpPr>
-        <p:spPr>
-          <a:xfrm>
-            <a:off x="640080" y="4434840"/>
-            <a:ext cx="10972800" cy="320040"/>
-          </a:xfrm>
-          <a:prstGeom prst="rect">
-            <a:avLst/>
-          </a:prstGeom>
-          <a:noFill/>
-          <a:ln/>
-        </p:spPr>
-        <p:txBody>
-          <a:bodyPr wrap="square" lIns="0" tIns="0" rIns="0" bIns="0" rtlCol="0" anchor="ctr"/>
-          <a:lstStyle/>
-          <a:p>
-            <a:pPr indent="0" marL="0">
-              <a:buNone/>
-            </a:pPr>
-            <a:r>
-              <a:rPr lang="en-US" sz="1500" b="1" dirty="0">
-                <a:solidFill>
-                  <a:srgbClr val="1F6FEB"/>
-                </a:solidFill>
-                <a:latin typeface="Calibri" pitchFamily="34" charset="0"/>
-                <a:ea typeface="Calibri" pitchFamily="34" charset="-122"/>
-                <a:cs typeface="Calibri" pitchFamily="34" charset="-120"/>
-              </a:rPr>
-              <a:t>Why Go-Back-N?</a:t>
-            </a:r>
-            <a:endParaRPr lang="en-US" sz="1500" dirty="0"/>
-          </a:p>
-        </p:txBody>
-      </p:sp>
-      <p:sp>
-        <p:nvSpPr>
-          <p:cNvPr id="15" name="Text 13"/>
-          <p:cNvSpPr/>
-          <p:nvPr/>
-        </p:nvSpPr>
-        <p:spPr>
-          <a:xfrm>
-            <a:off x="640080" y="4754880"/>
-            <a:ext cx="10972800" cy="530352"/>
-          </a:xfrm>
-          <a:prstGeom prst="rect">
-            <a:avLst/>
-          </a:prstGeom>
-          <a:noFill/>
-          <a:ln/>
-        </p:spPr>
-        <p:txBody>
-          <a:bodyPr wrap="square" lIns="0" tIns="0" rIns="0" bIns="0" rtlCol="0" anchor="t"/>
-          <a:lstStyle/>
-          <a:p>
-            <a:pPr indent="0" marL="0">
-              <a:buNone/>
-            </a:pPr>
-            <a:r>
-              <a:rPr lang="en-US" sz="1350" dirty="0">
-                <a:solidFill>
-                  <a:srgbClr val="1B2430"/>
-                </a:solidFill>
-                <a:latin typeface="Calibri" pitchFamily="34" charset="0"/>
-                <a:ea typeface="Calibri" pitchFamily="34" charset="-122"/>
-                <a:cs typeface="Calibri" pitchFamily="34" charset="-120"/>
-              </a:rPr>
-              <a:t>We started with it because it is simple to build and explain, then replaced it as the default with Selective Repeat: the receiver buffers out-of-order packets and reports them in an ACK bitmap, and the sender resends only what is missing. Go-Back-N stays behind a flag for comparison.</a:t>
-            </a:r>
-            <a:endParaRPr lang="en-US" sz="1350" dirty="0"/>
-          </a:p>
-        </p:txBody>
-      </p:sp>
-      <p:sp>
-        <p:nvSpPr>
-          <p:cNvPr id="16" name="Shape 14"/>
-          <p:cNvSpPr/>
-          <p:nvPr/>
-        </p:nvSpPr>
-        <p:spPr>
-          <a:xfrm>
-            <a:off x="457200" y="5394960"/>
-            <a:ext cx="11274552" cy="914400"/>
-          </a:xfrm>
-          <a:prstGeom prst="rect">
-            <a:avLst/>
-          </a:prstGeom>
-          <a:solidFill>
-            <a:srgbClr val="F2F6FB"/>
-          </a:solidFill>
-          <a:ln w="9525">
-            <a:solidFill>
-              <a:srgbClr val="D5DEE9"/>
-            </a:solidFill>
-            <a:prstDash val="solid"/>
-          </a:ln>
-        </p:spPr>
-      </p:sp>
-      <p:sp>
-        <p:nvSpPr>
-          <p:cNvPr id="17" name="Text 15"/>
-          <p:cNvSpPr/>
-          <p:nvPr/>
-        </p:nvSpPr>
-        <p:spPr>
-          <a:xfrm>
-            <a:off x="640080" y="5440680"/>
-            <a:ext cx="10972800" cy="320040"/>
-          </a:xfrm>
-          <a:prstGeom prst="rect">
-            <a:avLst/>
-          </a:prstGeom>
-          <a:noFill/>
-          <a:ln/>
-        </p:spPr>
-        <p:txBody>
-          <a:bodyPr wrap="square" lIns="0" tIns="0" rIns="0" bIns="0" rtlCol="0" anchor="ctr"/>
-          <a:lstStyle/>
-          <a:p>
-            <a:pPr indent="0" marL="0">
-              <a:buNone/>
-            </a:pPr>
-            <a:r>
-              <a:rPr lang="en-US" sz="1500" b="1" dirty="0">
-                <a:solidFill>
-                  <a:srgbClr val="1F6FEB"/>
-                </a:solidFill>
-                <a:latin typeface="Calibri" pitchFamily="34" charset="0"/>
-                <a:ea typeface="Calibri" pitchFamily="34" charset="-122"/>
-                <a:cs typeface="Calibri" pitchFamily="34" charset="-120"/>
-              </a:rPr>
-              <a:t>Tests ran on one machine?</a:t>
-            </a:r>
-            <a:endParaRPr lang="en-US" sz="1500" dirty="0"/>
-          </a:p>
-        </p:txBody>
-      </p:sp>
-      <p:sp>
-        <p:nvSpPr>
-          <p:cNvPr id="18" name="Text 16"/>
-          <p:cNvSpPr/>
-          <p:nvPr/>
-        </p:nvSpPr>
-        <p:spPr>
-          <a:xfrm>
-            <a:off x="640080" y="5760720"/>
-            <a:ext cx="10972800" cy="530352"/>
-          </a:xfrm>
-          <a:prstGeom prst="rect">
-            <a:avLst/>
-          </a:prstGeom>
-          <a:noFill/>
-          <a:ln/>
-        </p:spPr>
-        <p:txBody>
-          <a:bodyPr wrap="square" lIns="0" tIns="0" rIns="0" bIns="0" rtlCol="0" anchor="t"/>
-          <a:lstStyle/>
-          <a:p>
-            <a:pPr indent="0" marL="0">
-              <a:buNone/>
-            </a:pPr>
-            <a:r>
-              <a:rPr lang="en-US" sz="1350" dirty="0">
-                <a:solidFill>
-                  <a:srgbClr val="1B2430"/>
-                </a:solidFill>
-                <a:latin typeface="Calibri" pitchFamily="34" charset="0"/>
-                <a:ea typeface="Calibri" pitchFamily="34" charset="-122"/>
-                <a:cs typeface="Calibri" pitchFamily="34" charset="-120"/>
-              </a:rPr>
-              <a:t>Yes. Delay, loss and jitter are emulated in our client, in a separate proxy on real UDP sockets, and in virtual time; these agree with each other. We also ran it once on the Linux kernel with tc netem on one laptop: the agent beat tuned AIMD there, but kernel TCP was 1.5 to 1.7 times faster than us. No multi-machine path was tested.</a:t>
-            </a:r>
-            <a:endParaRPr lang="en-US" sz="1350" dirty="0"/>
+              <a:t>Pause and smile; hand over to questions.</a:t>
+            </a:r>
+            <a:endParaRPr lang="en-US" sz="1400" dirty="0"/>
           </a:p>
         </p:txBody>
       </p:sp>
@@ -25879,7 +26263,7 @@
                 <a:ea typeface="Calibri" pitchFamily="34" charset="-122"/>
                 <a:cs typeface="Calibri" pitchFamily="34" charset="-120"/>
               </a:rPr>
-              <a:t>Hard questions and short answers (2 of 3)</a:t>
+              <a:t>39. Appendix: slow start</a:t>
             </a:r>
             <a:endParaRPr lang="en-US" sz="2600" dirty="0"/>
           </a:p>
@@ -25887,7 +26271,46 @@
       </p:sp>
       <p:sp>
         <p:nvSpPr>
-          <p:cNvPr id="3" name="Shape 1"/>
+          <p:cNvPr id="3" name="Text 1"/>
+          <p:cNvSpPr/>
+          <p:nvPr/>
+        </p:nvSpPr>
+        <p:spPr>
+          <a:xfrm>
+            <a:off x="457200" y="804672"/>
+            <a:ext cx="10972800" cy="320040"/>
+          </a:xfrm>
+          <a:prstGeom prst="rect">
+            <a:avLst/>
+          </a:prstGeom>
+          <a:noFill/>
+          <a:ln/>
+        </p:spPr>
+        <p:txBody>
+          <a:bodyPr wrap="square" lIns="0" tIns="0" rIns="0" bIns="0" rtlCol="0" anchor="ctr"/>
+          <a:lstStyle/>
+          <a:p>
+            <a:pPr indent="0" marL="0">
+              <a:buNone/>
+            </a:pPr>
+            <a:r>
+              <a:rPr lang="en-US" sz="1300" dirty="0">
+                <a:solidFill>
+                  <a:srgbClr val="5B6775"/>
+                </a:solidFill>
+                <a:latin typeface="Calibri" pitchFamily="34" charset="0"/>
+                <a:ea typeface="Calibri" pitchFamily="34" charset="-122"/>
+                <a:cs typeface="Calibri" pitchFamily="34" charset="-120"/>
+              </a:rPr>
+              <a:t>Time on this slide: -</a:t>
+            </a:r>
+            <a:endParaRPr lang="en-US" sz="1300" dirty="0"/>
+          </a:p>
+        </p:txBody>
+      </p:sp>
+      <p:sp>
+        <p:nvSpPr>
+          <p:cNvPr id="4" name="Shape 2"/>
           <p:cNvSpPr/>
           <p:nvPr/>
         </p:nvSpPr>
@@ -25910,26 +26333,47 @@
           </a:ln>
         </p:spPr>
       </p:sp>
-      <p:sp>
-        <p:nvSpPr>
-          <p:cNvPr id="4" name="Shape 2"/>
-          <p:cNvSpPr/>
-          <p:nvPr/>
-        </p:nvSpPr>
+      <p:pic>
+        <p:nvPicPr>
+          <p:cNvPr id="5" name="Image 0" descr="th-39.png">    </p:cNvPr>
+          <p:cNvPicPr>
+            <a:picLocks noChangeAspect="1"/>
+          </p:cNvPicPr>
+          <p:nvPr/>
+        </p:nvPicPr>
+        <p:blipFill>
+          <a:blip r:embed="rId1"/>
+          <a:stretch>
+            <a:fillRect/>
+          </a:stretch>
+        </p:blipFill>
         <p:spPr>
           <a:xfrm>
             <a:off x="457200" y="1371600"/>
-            <a:ext cx="11274552" cy="914400"/>
-          </a:xfrm>
-          <a:prstGeom prst="rect">
-            <a:avLst/>
-          </a:prstGeom>
-          <a:solidFill>
-            <a:srgbClr val="F2F6FB"/>
-          </a:solidFill>
-          <a:ln w="9525">
+            <a:ext cx="5669280" cy="3188970"/>
+          </a:xfrm>
+          <a:prstGeom prst="rect">
+            <a:avLst/>
+          </a:prstGeom>
+        </p:spPr>
+      </p:pic>
+      <p:sp>
+        <p:nvSpPr>
+          <p:cNvPr id="6" name="Shape 3"/>
+          <p:cNvSpPr/>
+          <p:nvPr/>
+        </p:nvSpPr>
+        <p:spPr>
+          <a:xfrm>
+            <a:off x="457200" y="1371600"/>
+            <a:ext cx="5669280" cy="3188970"/>
+          </a:xfrm>
+          <a:prstGeom prst="rect">
+            <a:avLst/>
+          </a:prstGeom>
+          <a:ln w="12700">
             <a:solidFill>
-              <a:srgbClr val="D5DEE9"/>
+              <a:srgbClr val="C9D3E0"/>
             </a:solidFill>
             <a:prstDash val="solid"/>
           </a:ln>
@@ -25937,14 +26381,14 @@
       </p:sp>
       <p:sp>
         <p:nvSpPr>
-          <p:cNvPr id="5" name="Text 3"/>
-          <p:cNvSpPr/>
-          <p:nvPr/>
-        </p:nvSpPr>
-        <p:spPr>
-          <a:xfrm>
-            <a:off x="640080" y="1417320"/>
-            <a:ext cx="10972800" cy="320040"/>
+          <p:cNvPr id="7" name="Text 4"/>
+          <p:cNvSpPr/>
+          <p:nvPr/>
+        </p:nvSpPr>
+        <p:spPr>
+          <a:xfrm>
+            <a:off x="6400800" y="1325880"/>
+            <a:ext cx="1828800" cy="320040"/>
           </a:xfrm>
           <a:prstGeom prst="rect">
             <a:avLst/>
@@ -25960,7 +26404,7 @@
               <a:buNone/>
             </a:pPr>
             <a:r>
-              <a:rPr lang="en-US" sz="1500" b="1" dirty="0">
+              <a:rPr lang="en-US" sz="1300" b="1" dirty="0">
                 <a:solidFill>
                   <a:srgbClr val="1F6FEB"/>
                 </a:solidFill>
@@ -25968,22 +26412,22 @@
                 <a:ea typeface="Calibri" pitchFamily="34" charset="-122"/>
                 <a:cs typeface="Calibri" pitchFamily="34" charset="-120"/>
               </a:rPr>
-              <a:t>What does Packet Tracer prove?</a:t>
-            </a:r>
-            <a:endParaRPr lang="en-US" sz="1500" dirty="0"/>
-          </a:p>
-        </p:txBody>
-      </p:sp>
-      <p:sp>
-        <p:nvSpPr>
-          <p:cNvPr id="6" name="Text 4"/>
-          <p:cNvSpPr/>
-          <p:nvPr/>
-        </p:nvSpPr>
-        <p:spPr>
-          <a:xfrm>
-            <a:off x="640080" y="1737360"/>
-            <a:ext cx="10972800" cy="530352"/>
+              <a:t>SAY</a:t>
+            </a:r>
+            <a:endParaRPr lang="en-US" sz="1300" dirty="0"/>
+          </a:p>
+        </p:txBody>
+      </p:sp>
+      <p:sp>
+        <p:nvSpPr>
+          <p:cNvPr id="8" name="Text 5"/>
+          <p:cNvSpPr/>
+          <p:nvPr/>
+        </p:nvSpPr>
+        <p:spPr>
+          <a:xfrm>
+            <a:off x="6400800" y="1645920"/>
+            <a:ext cx="5349240" cy="3017520"/>
           </a:xfrm>
           <a:prstGeom prst="rect">
             <a:avLst/>
@@ -25995,11 +26439,15 @@
           <a:bodyPr wrap="square" lIns="0" tIns="0" rIns="0" bIns="0" rtlCol="0" anchor="t"/>
           <a:lstStyle/>
           <a:p>
-            <a:pPr indent="0" marL="0">
-              <a:buNone/>
-            </a:pPr>
-            <a:r>
-              <a:rPr lang="en-US" sz="1350" dirty="0">
+            <a:pPr marL="342900" indent="-342900">
+              <a:spcAft>
+                <a:spcPts val="600"/>
+              </a:spcAft>
+              <a:buSzPct val="100000"/>
+              <a:buChar char="•"/>
+            </a:pPr>
+            <a:r>
+              <a:rPr lang="en-US" sz="1600" dirty="0">
                 <a:solidFill>
                   <a:srgbClr val="1B2430"/>
                 </a:solidFill>
@@ -26007,32 +26455,32 @@
                 <a:ea typeface="Calibri" pitchFamily="34" charset="-122"/>
                 <a:cs typeface="Calibri" pitchFamily="34" charset="-120"/>
               </a:rPr>
-              <a:t>The network design: OSPF, VLANs, ACL, 70/71 failover. The protocol is validated separately with emulation and Wireshark.</a:t>
-            </a:r>
-            <a:endParaRPr lang="en-US" sz="1350" dirty="0"/>
-          </a:p>
-        </p:txBody>
-      </p:sp>
-      <p:sp>
-        <p:nvSpPr>
-          <p:cNvPr id="7" name="Shape 5"/>
-          <p:cNvSpPr/>
-          <p:nvPr/>
-        </p:nvSpPr>
-        <p:spPr>
-          <a:xfrm>
-            <a:off x="457200" y="2377440"/>
-            <a:ext cx="11274552" cy="914400"/>
+              <a:t>Only if asked: the window starts at 1, adds 1 per ACK until the threshold 16, then 1/window per ACK. In the 62-packet run the final window was 18.71.</a:t>
+            </a:r>
+            <a:endParaRPr lang="en-US" sz="1600" dirty="0"/>
+          </a:p>
+        </p:txBody>
+      </p:sp>
+      <p:sp>
+        <p:nvSpPr>
+          <p:cNvPr id="9" name="Shape 6"/>
+          <p:cNvSpPr/>
+          <p:nvPr/>
+        </p:nvSpPr>
+        <p:spPr>
+          <a:xfrm>
+            <a:off x="457200" y="4709160"/>
+            <a:ext cx="5669280" cy="1737360"/>
           </a:xfrm>
           <a:prstGeom prst="rect">
             <a:avLst/>
           </a:prstGeom>
           <a:solidFill>
-            <a:srgbClr val="F2F6FB"/>
+            <a:srgbClr val="FFF6E5"/>
           </a:solidFill>
-          <a:ln w="9525">
+          <a:ln w="12700">
             <a:solidFill>
-              <a:srgbClr val="D5DEE9"/>
+              <a:srgbClr val="F0C987"/>
             </a:solidFill>
             <a:prstDash val="solid"/>
           </a:ln>
@@ -26040,14 +26488,14 @@
       </p:sp>
       <p:sp>
         <p:nvSpPr>
-          <p:cNvPr id="8" name="Text 6"/>
-          <p:cNvSpPr/>
-          <p:nvPr/>
-        </p:nvSpPr>
-        <p:spPr>
-          <a:xfrm>
-            <a:off x="640080" y="2423160"/>
-            <a:ext cx="10972800" cy="320040"/>
+          <p:cNvPr id="10" name="Text 7"/>
+          <p:cNvSpPr/>
+          <p:nvPr/>
+        </p:nvSpPr>
+        <p:spPr>
+          <a:xfrm>
+            <a:off x="594360" y="4754880"/>
+            <a:ext cx="5394960" cy="1645920"/>
           </a:xfrm>
           <a:prstGeom prst="rect">
             <a:avLst/>
@@ -26056,53 +26504,28 @@
           <a:ln/>
         </p:spPr>
         <p:txBody>
-          <a:bodyPr wrap="square" lIns="0" tIns="0" rIns="0" bIns="0" rtlCol="0" anchor="ctr"/>
+          <a:bodyPr wrap="square" lIns="0" tIns="0" rIns="0" bIns="0" rtlCol="0" anchor="t"/>
           <a:lstStyle/>
           <a:p>
             <a:pPr indent="0" marL="0">
               <a:buNone/>
             </a:pPr>
             <a:r>
-              <a:rPr lang="en-US" sz="1500" b="1" dirty="0">
-                <a:solidFill>
-                  <a:srgbClr val="1F6FEB"/>
-                </a:solidFill>
-                <a:latin typeface="Calibri" pitchFamily="34" charset="0"/>
-                <a:ea typeface="Calibri" pitchFamily="34" charset="-122"/>
-                <a:cs typeface="Calibri" pitchFamily="34" charset="-120"/>
-              </a:rPr>
-              <a:t>Peer disappears?</a:t>
-            </a:r>
-            <a:endParaRPr lang="en-US" sz="1500" dirty="0"/>
-          </a:p>
-        </p:txBody>
-      </p:sp>
-      <p:sp>
-        <p:nvSpPr>
-          <p:cNvPr id="9" name="Text 7"/>
-          <p:cNvSpPr/>
-          <p:nvPr/>
-        </p:nvSpPr>
-        <p:spPr>
-          <a:xfrm>
-            <a:off x="640080" y="2743200"/>
-            <a:ext cx="10972800" cy="530352"/>
-          </a:xfrm>
-          <a:prstGeom prst="rect">
-            <a:avLst/>
-          </a:prstGeom>
-          <a:noFill/>
-          <a:ln/>
-        </p:spPr>
-        <p:txBody>
-          <a:bodyPr wrap="square" lIns="0" tIns="0" rIns="0" bIns="0" rtlCol="0" anchor="t"/>
-          <a:lstStyle/>
-          <a:p>
+              <a:rPr lang="en-US" sz="1400" b="1" dirty="0">
+                <a:solidFill>
+                  <a:srgbClr val="B45309"/>
+                </a:solidFill>
+                <a:latin typeface="Calibri" pitchFamily="34" charset="0"/>
+                <a:ea typeface="Calibri" pitchFamily="34" charset="-122"/>
+                <a:cs typeface="Calibri" pitchFamily="34" charset="-120"/>
+              </a:rPr>
+              <a:t>IF ASKED  </a:t>
+            </a:r>
             <a:pPr indent="0" marL="0">
               <a:buNone/>
             </a:pPr>
             <a:r>
-              <a:rPr lang="en-US" sz="1350" dirty="0">
+              <a:rPr lang="en-US" sz="1400" dirty="0">
                 <a:solidFill>
                   <a:srgbClr val="1B2430"/>
                 </a:solidFill>
@@ -26110,318 +26533,9 @@
                 <a:ea typeface="Calibri" pitchFamily="34" charset="-122"/>
                 <a:cs typeface="Calibri" pitchFamily="34" charset="-120"/>
               </a:rPr>
-              <a:t>Sender keeps retransmitting on timeout. A connection abort after repeated timeouts is not built; it is the fix we would add.</a:t>
-            </a:r>
-            <a:endParaRPr lang="en-US" sz="1350" dirty="0"/>
-          </a:p>
-        </p:txBody>
-      </p:sp>
-      <p:sp>
-        <p:nvSpPr>
-          <p:cNvPr id="10" name="Shape 8"/>
-          <p:cNvSpPr/>
-          <p:nvPr/>
-        </p:nvSpPr>
-        <p:spPr>
-          <a:xfrm>
-            <a:off x="457200" y="3383280"/>
-            <a:ext cx="11274552" cy="914400"/>
-          </a:xfrm>
-          <a:prstGeom prst="rect">
-            <a:avLst/>
-          </a:prstGeom>
-          <a:solidFill>
-            <a:srgbClr val="F2F6FB"/>
-          </a:solidFill>
-          <a:ln w="9525">
-            <a:solidFill>
-              <a:srgbClr val="D5DEE9"/>
-            </a:solidFill>
-            <a:prstDash val="solid"/>
-          </a:ln>
-        </p:spPr>
-      </p:sp>
-      <p:sp>
-        <p:nvSpPr>
-          <p:cNvPr id="11" name="Text 9"/>
-          <p:cNvSpPr/>
-          <p:nvPr/>
-        </p:nvSpPr>
-        <p:spPr>
-          <a:xfrm>
-            <a:off x="640080" y="3429000"/>
-            <a:ext cx="10972800" cy="320040"/>
-          </a:xfrm>
-          <a:prstGeom prst="rect">
-            <a:avLst/>
-          </a:prstGeom>
-          <a:noFill/>
-          <a:ln/>
-        </p:spPr>
-        <p:txBody>
-          <a:bodyPr wrap="square" lIns="0" tIns="0" rIns="0" bIns="0" rtlCol="0" anchor="ctr"/>
-          <a:lstStyle/>
-          <a:p>
-            <a:pPr indent="0" marL="0">
-              <a:buNone/>
-            </a:pPr>
-            <a:r>
-              <a:rPr lang="en-US" sz="1500" b="1" dirty="0">
-                <a:solidFill>
-                  <a:srgbClr val="1F6FEB"/>
-                </a:solidFill>
-                <a:latin typeface="Calibri" pitchFamily="34" charset="0"/>
-                <a:ea typeface="Calibri" pitchFamily="34" charset="-122"/>
-                <a:cs typeface="Calibri" pitchFamily="34" charset="-120"/>
-              </a:rPr>
-              <a:t>Does the checksum catch errors?</a:t>
-            </a:r>
-            <a:endParaRPr lang="en-US" sz="1500" dirty="0"/>
-          </a:p>
-        </p:txBody>
-      </p:sp>
-      <p:sp>
-        <p:nvSpPr>
-          <p:cNvPr id="12" name="Text 10"/>
-          <p:cNvSpPr/>
-          <p:nvPr/>
-        </p:nvSpPr>
-        <p:spPr>
-          <a:xfrm>
-            <a:off x="640080" y="3749040"/>
-            <a:ext cx="10972800" cy="530352"/>
-          </a:xfrm>
-          <a:prstGeom prst="rect">
-            <a:avLst/>
-          </a:prstGeom>
-          <a:noFill/>
-          <a:ln/>
-        </p:spPr>
-        <p:txBody>
-          <a:bodyPr wrap="square" lIns="0" tIns="0" rIns="0" bIns="0" rtlCol="0" anchor="t"/>
-          <a:lstStyle/>
-          <a:p>
-            <a:pPr indent="0" marL="0">
-              <a:buNone/>
-            </a:pPr>
-            <a:r>
-              <a:rPr lang="en-US" sz="1350" dirty="0">
-                <a:solidFill>
-                  <a:srgbClr val="1B2430"/>
-                </a:solidFill>
-                <a:latin typeface="Calibri" pitchFamily="34" charset="0"/>
-                <a:ea typeface="Calibri" pitchFamily="34" charset="-122"/>
-                <a:cs typeface="Calibri" pitchFamily="34" charset="-120"/>
-              </a:rPr>
-              <a:t>It is CRC-16/CCITT now. The first version was a byte sum and a fuzzer showed 2 percent of corrupted packets got through; with CRC-16 none of 333,000 did. It cannot catch every error pattern, as no 16-bit check can.</a:t>
-            </a:r>
-            <a:endParaRPr lang="en-US" sz="1350" dirty="0"/>
-          </a:p>
-        </p:txBody>
-      </p:sp>
-      <p:sp>
-        <p:nvSpPr>
-          <p:cNvPr id="13" name="Shape 11"/>
-          <p:cNvSpPr/>
-          <p:nvPr/>
-        </p:nvSpPr>
-        <p:spPr>
-          <a:xfrm>
-            <a:off x="457200" y="4389120"/>
-            <a:ext cx="11274552" cy="914400"/>
-          </a:xfrm>
-          <a:prstGeom prst="rect">
-            <a:avLst/>
-          </a:prstGeom>
-          <a:solidFill>
-            <a:srgbClr val="F2F6FB"/>
-          </a:solidFill>
-          <a:ln w="9525">
-            <a:solidFill>
-              <a:srgbClr val="D5DEE9"/>
-            </a:solidFill>
-            <a:prstDash val="solid"/>
-          </a:ln>
-        </p:spPr>
-      </p:sp>
-      <p:sp>
-        <p:nvSpPr>
-          <p:cNvPr id="14" name="Text 12"/>
-          <p:cNvSpPr/>
-          <p:nvPr/>
-        </p:nvSpPr>
-        <p:spPr>
-          <a:xfrm>
-            <a:off x="640080" y="4434840"/>
-            <a:ext cx="10972800" cy="320040"/>
-          </a:xfrm>
-          <a:prstGeom prst="rect">
-            <a:avLst/>
-          </a:prstGeom>
-          <a:noFill/>
-          <a:ln/>
-        </p:spPr>
-        <p:txBody>
-          <a:bodyPr wrap="square" lIns="0" tIns="0" rIns="0" bIns="0" rtlCol="0" anchor="ctr"/>
-          <a:lstStyle/>
-          <a:p>
-            <a:pPr indent="0" marL="0">
-              <a:buNone/>
-            </a:pPr>
-            <a:r>
-              <a:rPr lang="en-US" sz="1500" b="1" dirty="0">
-                <a:solidFill>
-                  <a:srgbClr val="1F6FEB"/>
-                </a:solidFill>
-                <a:latin typeface="Calibri" pitchFamily="34" charset="0"/>
-                <a:ea typeface="Calibri" pitchFamily="34" charset="-122"/>
-                <a:cs typeface="Calibri" pitchFamily="34" charset="-120"/>
-              </a:rPr>
-              <a:t>Why no handshake in the exported trace?</a:t>
-            </a:r>
-            <a:endParaRPr lang="en-US" sz="1500" dirty="0"/>
-          </a:p>
-        </p:txBody>
-      </p:sp>
-      <p:sp>
-        <p:nvSpPr>
-          <p:cNvPr id="15" name="Text 13"/>
-          <p:cNvSpPr/>
-          <p:nvPr/>
-        </p:nvSpPr>
-        <p:spPr>
-          <a:xfrm>
-            <a:off x="640080" y="4754880"/>
-            <a:ext cx="10972800" cy="530352"/>
-          </a:xfrm>
-          <a:prstGeom prst="rect">
-            <a:avLst/>
-          </a:prstGeom>
-          <a:noFill/>
-          <a:ln/>
-        </p:spPr>
-        <p:txBody>
-          <a:bodyPr wrap="square" lIns="0" tIns="0" rIns="0" bIns="0" rtlCol="0" anchor="t"/>
-          <a:lstStyle/>
-          <a:p>
-            <a:pPr indent="0" marL="0">
-              <a:buNone/>
-            </a:pPr>
-            <a:r>
-              <a:rPr lang="en-US" sz="1350" dirty="0">
-                <a:solidFill>
-                  <a:srgbClr val="1B2430"/>
-                </a:solidFill>
-                <a:latin typeface="Calibri" pitchFamily="34" charset="0"/>
-                <a:ea typeface="Calibri" pitchFamily="34" charset="-122"/>
-                <a:cs typeface="Calibri" pitchFamily="34" charset="-120"/>
-              </a:rPr>
-              <a:t>The export builds synthetic packets. The real tshark capture shows SYN, SYN-ACK, ACK.</a:t>
-            </a:r>
-            <a:endParaRPr lang="en-US" sz="1350" dirty="0"/>
-          </a:p>
-        </p:txBody>
-      </p:sp>
-      <p:sp>
-        <p:nvSpPr>
-          <p:cNvPr id="16" name="Shape 14"/>
-          <p:cNvSpPr/>
-          <p:nvPr/>
-        </p:nvSpPr>
-        <p:spPr>
-          <a:xfrm>
-            <a:off x="457200" y="5394960"/>
-            <a:ext cx="11274552" cy="914400"/>
-          </a:xfrm>
-          <a:prstGeom prst="rect">
-            <a:avLst/>
-          </a:prstGeom>
-          <a:solidFill>
-            <a:srgbClr val="F2F6FB"/>
-          </a:solidFill>
-          <a:ln w="9525">
-            <a:solidFill>
-              <a:srgbClr val="D5DEE9"/>
-            </a:solidFill>
-            <a:prstDash val="solid"/>
-          </a:ln>
-        </p:spPr>
-      </p:sp>
-      <p:sp>
-        <p:nvSpPr>
-          <p:cNvPr id="17" name="Text 15"/>
-          <p:cNvSpPr/>
-          <p:nvPr/>
-        </p:nvSpPr>
-        <p:spPr>
-          <a:xfrm>
-            <a:off x="640080" y="5440680"/>
-            <a:ext cx="10972800" cy="320040"/>
-          </a:xfrm>
-          <a:prstGeom prst="rect">
-            <a:avLst/>
-          </a:prstGeom>
-          <a:noFill/>
-          <a:ln/>
-        </p:spPr>
-        <p:txBody>
-          <a:bodyPr wrap="square" lIns="0" tIns="0" rIns="0" bIns="0" rtlCol="0" anchor="ctr"/>
-          <a:lstStyle/>
-          <a:p>
-            <a:pPr indent="0" marL="0">
-              <a:buNone/>
-            </a:pPr>
-            <a:r>
-              <a:rPr lang="en-US" sz="1500" b="1" dirty="0">
-                <a:solidFill>
-                  <a:srgbClr val="1F6FEB"/>
-                </a:solidFill>
-                <a:latin typeface="Calibri" pitchFamily="34" charset="0"/>
-                <a:ea typeface="Calibri" pitchFamily="34" charset="-122"/>
-                <a:cs typeface="Calibri" pitchFamily="34" charset="-120"/>
-              </a:rPr>
-              <a:t>Is the baseline fair?</a:t>
-            </a:r>
-            <a:endParaRPr lang="en-US" sz="1500" dirty="0"/>
-          </a:p>
-        </p:txBody>
-      </p:sp>
-      <p:sp>
-        <p:nvSpPr>
-          <p:cNvPr id="18" name="Text 16"/>
-          <p:cNvSpPr/>
-          <p:nvPr/>
-        </p:nvSpPr>
-        <p:spPr>
-          <a:xfrm>
-            <a:off x="640080" y="5760720"/>
-            <a:ext cx="10972800" cy="530352"/>
-          </a:xfrm>
-          <a:prstGeom prst="rect">
-            <a:avLst/>
-          </a:prstGeom>
-          <a:noFill/>
-          <a:ln/>
-        </p:spPr>
-        <p:txBody>
-          <a:bodyPr wrap="square" lIns="0" tIns="0" rIns="0" bIns="0" rtlCol="0" anchor="t"/>
-          <a:lstStyle/>
-          <a:p>
-            <a:pPr indent="0" marL="0">
-              <a:buNone/>
-            </a:pPr>
-            <a:r>
-              <a:rPr lang="en-US" sz="1350" dirty="0">
-                <a:solidFill>
-                  <a:srgbClr val="1B2430"/>
-                </a:solidFill>
-                <a:latin typeface="Calibri" pitchFamily="34" charset="0"/>
-                <a:ea typeface="Calibri" pitchFamily="34" charset="-122"/>
-                <a:cs typeface="Calibri" pitchFamily="34" charset="-120"/>
-              </a:rPr>
-              <a:t>We tuned it: window cap 128 and a high start threshold, plus the same retransmission-timer floor for every policy. We also compare against tuned CUBIC. Tuned AIMD improved a lot, and the agent is still ahead on four paths.</a:t>
-            </a:r>
-            <a:endParaRPr lang="en-US" sz="1350" dirty="0"/>
+              <a:t>Use this slide to answer 'show me congestion avoidance'.</a:t>
+            </a:r>
+            <a:endParaRPr lang="en-US" sz="1400" dirty="0"/>
           </a:p>
         </p:txBody>
       </p:sp>
@@ -26436,6 +26550,1228 @@
 <file path=ppt/slides/slide42.xml><?xml version="1.0" encoding="utf-8"?>
 <p:sld xmlns:a="http://schemas.openxmlformats.org/drawingml/2006/main" xmlns:r="http://schemas.openxmlformats.org/officeDocument/2006/relationships" xmlns:p="http://schemas.openxmlformats.org/presentationml/2006/main">
   <p:cSld name="Slide 42">
+    <p:bg>
+      <p:bgPr>
+        <a:solidFill>
+          <a:srgbClr val="FFFFFF"/>
+        </a:solidFill>
+      </p:bgPr>
+    </p:bg>
+    <p:spTree>
+      <p:nvGrpSpPr>
+        <p:cNvPr id="1" name=""/>
+        <p:cNvGrpSpPr/>
+        <p:nvPr/>
+      </p:nvGrpSpPr>
+      <p:grpSpPr>
+        <a:xfrm>
+          <a:off x="0" y="0"/>
+          <a:ext cx="0" cy="0"/>
+          <a:chOff x="0" y="0"/>
+          <a:chExt cx="0" cy="0"/>
+        </a:xfrm>
+      </p:grpSpPr>
+      <p:sp>
+        <p:nvSpPr>
+          <p:cNvPr id="2" name="Text 0"/>
+          <p:cNvSpPr/>
+          <p:nvPr/>
+        </p:nvSpPr>
+        <p:spPr>
+          <a:xfrm>
+            <a:off x="457200" y="274320"/>
+            <a:ext cx="9601200" cy="548640"/>
+          </a:xfrm>
+          <a:prstGeom prst="rect">
+            <a:avLst/>
+          </a:prstGeom>
+          <a:noFill/>
+          <a:ln/>
+        </p:spPr>
+        <p:txBody>
+          <a:bodyPr wrap="square" lIns="0" tIns="0" rIns="0" bIns="0" rtlCol="0" anchor="ctr"/>
+          <a:lstStyle/>
+          <a:p>
+            <a:pPr indent="0" marL="0">
+              <a:buNone/>
+            </a:pPr>
+            <a:r>
+              <a:rPr lang="en-US" sz="2600" b="1" dirty="0">
+                <a:solidFill>
+                  <a:srgbClr val="1B2430"/>
+                </a:solidFill>
+                <a:latin typeface="Calibri" pitchFamily="34" charset="0"/>
+                <a:ea typeface="Calibri" pitchFamily="34" charset="-122"/>
+                <a:cs typeface="Calibri" pitchFamily="34" charset="-120"/>
+              </a:rPr>
+              <a:t>Hard questions and short answers (1 of 3)</a:t>
+            </a:r>
+            <a:endParaRPr lang="en-US" sz="2600" dirty="0"/>
+          </a:p>
+        </p:txBody>
+      </p:sp>
+      <p:sp>
+        <p:nvSpPr>
+          <p:cNvPr id="3" name="Shape 1"/>
+          <p:cNvSpPr/>
+          <p:nvPr/>
+        </p:nvSpPr>
+        <p:spPr>
+          <a:xfrm>
+            <a:off x="457200" y="1143000"/>
+            <a:ext cx="11274552" cy="36576"/>
+          </a:xfrm>
+          <a:prstGeom prst="rect">
+            <a:avLst/>
+          </a:prstGeom>
+          <a:solidFill>
+            <a:srgbClr val="1F6FEB"/>
+          </a:solidFill>
+          <a:ln w="12700">
+            <a:solidFill>
+              <a:srgbClr val="1F6FEB"/>
+            </a:solidFill>
+            <a:prstDash val="solid"/>
+          </a:ln>
+        </p:spPr>
+      </p:sp>
+      <p:sp>
+        <p:nvSpPr>
+          <p:cNvPr id="4" name="Shape 2"/>
+          <p:cNvSpPr/>
+          <p:nvPr/>
+        </p:nvSpPr>
+        <p:spPr>
+          <a:xfrm>
+            <a:off x="457200" y="1371600"/>
+            <a:ext cx="11274552" cy="914400"/>
+          </a:xfrm>
+          <a:prstGeom prst="rect">
+            <a:avLst/>
+          </a:prstGeom>
+          <a:solidFill>
+            <a:srgbClr val="F2F6FB"/>
+          </a:solidFill>
+          <a:ln w="9525">
+            <a:solidFill>
+              <a:srgbClr val="D5DEE9"/>
+            </a:solidFill>
+            <a:prstDash val="solid"/>
+          </a:ln>
+        </p:spPr>
+      </p:sp>
+      <p:sp>
+        <p:nvSpPr>
+          <p:cNvPr id="5" name="Text 3"/>
+          <p:cNvSpPr/>
+          <p:nvPr/>
+        </p:nvSpPr>
+        <p:spPr>
+          <a:xfrm>
+            <a:off x="640080" y="1417320"/>
+            <a:ext cx="10972800" cy="320040"/>
+          </a:xfrm>
+          <a:prstGeom prst="rect">
+            <a:avLst/>
+          </a:prstGeom>
+          <a:noFill/>
+          <a:ln/>
+        </p:spPr>
+        <p:txBody>
+          <a:bodyPr wrap="square" lIns="0" tIns="0" rIns="0" bIns="0" rtlCol="0" anchor="ctr"/>
+          <a:lstStyle/>
+          <a:p>
+            <a:pPr indent="0" marL="0">
+              <a:buNone/>
+            </a:pPr>
+            <a:r>
+              <a:rPr lang="en-US" sz="1500" b="1" dirty="0">
+                <a:solidFill>
+                  <a:srgbClr val="1F6FEB"/>
+                </a:solidFill>
+                <a:latin typeface="Calibri" pitchFamily="34" charset="0"/>
+                <a:ea typeface="Calibri" pitchFamily="34" charset="-122"/>
+                <a:cs typeface="Calibri" pitchFamily="34" charset="-120"/>
+              </a:rPr>
+              <a:t>Is this a lab exercise?</a:t>
+            </a:r>
+            <a:endParaRPr lang="en-US" sz="1500" dirty="0"/>
+          </a:p>
+        </p:txBody>
+      </p:sp>
+      <p:sp>
+        <p:nvSpPr>
+          <p:cNvPr id="6" name="Text 4"/>
+          <p:cNvSpPr/>
+          <p:nvPr/>
+        </p:nvSpPr>
+        <p:spPr>
+          <a:xfrm>
+            <a:off x="640080" y="1737360"/>
+            <a:ext cx="10972800" cy="530352"/>
+          </a:xfrm>
+          <a:prstGeom prst="rect">
+            <a:avLst/>
+          </a:prstGeom>
+          <a:noFill/>
+          <a:ln/>
+        </p:spPr>
+        <p:txBody>
+          <a:bodyPr wrap="square" lIns="0" tIns="0" rIns="0" bIns="0" rtlCol="0" anchor="t"/>
+          <a:lstStyle/>
+          <a:p>
+            <a:pPr indent="0" marL="0">
+              <a:buNone/>
+            </a:pPr>
+            <a:r>
+              <a:rPr lang="en-US" sz="1350" dirty="0">
+                <a:solidFill>
+                  <a:srgbClr val="1B2430"/>
+                </a:solidFill>
+                <a:latin typeface="Calibri" pitchFamily="34" charset="0"/>
+                <a:ea typeface="Calibri" pitchFamily="34" charset="-122"/>
+                <a:cs typeface="Calibri" pitchFamily="34" charset="-120"/>
+              </a:rPr>
+              <a:t>A lab sends datagrams. We built reliability and congestion control on top, measured them, and used them in a real chat and a routed network.</a:t>
+            </a:r>
+            <a:endParaRPr lang="en-US" sz="1350" dirty="0"/>
+          </a:p>
+        </p:txBody>
+      </p:sp>
+      <p:sp>
+        <p:nvSpPr>
+          <p:cNvPr id="7" name="Shape 5"/>
+          <p:cNvSpPr/>
+          <p:nvPr/>
+        </p:nvSpPr>
+        <p:spPr>
+          <a:xfrm>
+            <a:off x="457200" y="2377440"/>
+            <a:ext cx="11274552" cy="914400"/>
+          </a:xfrm>
+          <a:prstGeom prst="rect">
+            <a:avLst/>
+          </a:prstGeom>
+          <a:solidFill>
+            <a:srgbClr val="F2F6FB"/>
+          </a:solidFill>
+          <a:ln w="9525">
+            <a:solidFill>
+              <a:srgbClr val="D5DEE9"/>
+            </a:solidFill>
+            <a:prstDash val="solid"/>
+          </a:ln>
+        </p:spPr>
+      </p:sp>
+      <p:sp>
+        <p:nvSpPr>
+          <p:cNvPr id="8" name="Text 6"/>
+          <p:cNvSpPr/>
+          <p:nvPr/>
+        </p:nvSpPr>
+        <p:spPr>
+          <a:xfrm>
+            <a:off x="640080" y="2423160"/>
+            <a:ext cx="10972800" cy="320040"/>
+          </a:xfrm>
+          <a:prstGeom prst="rect">
+            <a:avLst/>
+          </a:prstGeom>
+          <a:noFill/>
+          <a:ln/>
+        </p:spPr>
+        <p:txBody>
+          <a:bodyPr wrap="square" lIns="0" tIns="0" rIns="0" bIns="0" rtlCol="0" anchor="ctr"/>
+          <a:lstStyle/>
+          <a:p>
+            <a:pPr indent="0" marL="0">
+              <a:buNone/>
+            </a:pPr>
+            <a:r>
+              <a:rPr lang="en-US" sz="1500" b="1" dirty="0">
+                <a:solidFill>
+                  <a:srgbClr val="1F6FEB"/>
+                </a:solidFill>
+                <a:latin typeface="Calibri" pitchFamily="34" charset="0"/>
+                <a:ea typeface="Calibri" pitchFamily="34" charset="-122"/>
+                <a:cs typeface="Calibri" pitchFamily="34" charset="-120"/>
+              </a:rPr>
+              <a:t>Why not TCP?</a:t>
+            </a:r>
+            <a:endParaRPr lang="en-US" sz="1500" dirty="0"/>
+          </a:p>
+        </p:txBody>
+      </p:sp>
+      <p:sp>
+        <p:nvSpPr>
+          <p:cNvPr id="9" name="Text 7"/>
+          <p:cNvSpPr/>
+          <p:nvPr/>
+        </p:nvSpPr>
+        <p:spPr>
+          <a:xfrm>
+            <a:off x="640080" y="2743200"/>
+            <a:ext cx="10972800" cy="530352"/>
+          </a:xfrm>
+          <a:prstGeom prst="rect">
+            <a:avLst/>
+          </a:prstGeom>
+          <a:noFill/>
+          <a:ln/>
+        </p:spPr>
+        <p:txBody>
+          <a:bodyPr wrap="square" lIns="0" tIns="0" rIns="0" bIns="0" rtlCol="0" anchor="t"/>
+          <a:lstStyle/>
+          <a:p>
+            <a:pPr indent="0" marL="0">
+              <a:buNone/>
+            </a:pPr>
+            <a:r>
+              <a:rPr lang="en-US" sz="1350" dirty="0">
+                <a:solidFill>
+                  <a:srgbClr val="1B2430"/>
+                </a:solidFill>
+                <a:latin typeface="Calibri" pitchFamily="34" charset="0"/>
+                <a:ea typeface="Calibri" pitchFamily="34" charset="-122"/>
+                <a:cs typeface="Calibri" pitchFamily="34" charset="-120"/>
+              </a:rPr>
+              <a:t>TCP is in the kernel and cannot be changed. Building our own makes every mechanism visible. QUIC and HTTP/3 do the same.</a:t>
+            </a:r>
+            <a:endParaRPr lang="en-US" sz="1350" dirty="0"/>
+          </a:p>
+        </p:txBody>
+      </p:sp>
+      <p:sp>
+        <p:nvSpPr>
+          <p:cNvPr id="10" name="Shape 8"/>
+          <p:cNvSpPr/>
+          <p:nvPr/>
+        </p:nvSpPr>
+        <p:spPr>
+          <a:xfrm>
+            <a:off x="457200" y="3383280"/>
+            <a:ext cx="11274552" cy="914400"/>
+          </a:xfrm>
+          <a:prstGeom prst="rect">
+            <a:avLst/>
+          </a:prstGeom>
+          <a:solidFill>
+            <a:srgbClr val="F2F6FB"/>
+          </a:solidFill>
+          <a:ln w="9525">
+            <a:solidFill>
+              <a:srgbClr val="D5DEE9"/>
+            </a:solidFill>
+            <a:prstDash val="solid"/>
+          </a:ln>
+        </p:spPr>
+      </p:sp>
+      <p:sp>
+        <p:nvSpPr>
+          <p:cNvPr id="11" name="Text 9"/>
+          <p:cNvSpPr/>
+          <p:nvPr/>
+        </p:nvSpPr>
+        <p:spPr>
+          <a:xfrm>
+            <a:off x="640080" y="3429000"/>
+            <a:ext cx="10972800" cy="320040"/>
+          </a:xfrm>
+          <a:prstGeom prst="rect">
+            <a:avLst/>
+          </a:prstGeom>
+          <a:noFill/>
+          <a:ln/>
+        </p:spPr>
+        <p:txBody>
+          <a:bodyPr wrap="square" lIns="0" tIns="0" rIns="0" bIns="0" rtlCol="0" anchor="ctr"/>
+          <a:lstStyle/>
+          <a:p>
+            <a:pPr indent="0" marL="0">
+              <a:buNone/>
+            </a:pPr>
+            <a:r>
+              <a:rPr lang="en-US" sz="1500" b="1" dirty="0">
+                <a:solidFill>
+                  <a:srgbClr val="1F6FEB"/>
+                </a:solidFill>
+                <a:latin typeface="Calibri" pitchFamily="34" charset="0"/>
+                <a:ea typeface="Calibri" pitchFamily="34" charset="-122"/>
+                <a:cs typeface="Calibri" pitchFamily="34" charset="-120"/>
+              </a:rPr>
+              <a:t>Did Smart-RUDP win?</a:t>
+            </a:r>
+            <a:endParaRPr lang="en-US" sz="1500" dirty="0"/>
+          </a:p>
+        </p:txBody>
+      </p:sp>
+      <p:sp>
+        <p:nvSpPr>
+          <p:cNvPr id="12" name="Text 10"/>
+          <p:cNvSpPr/>
+          <p:nvPr/>
+        </p:nvSpPr>
+        <p:spPr>
+          <a:xfrm>
+            <a:off x="640080" y="3749040"/>
+            <a:ext cx="10972800" cy="530352"/>
+          </a:xfrm>
+          <a:prstGeom prst="rect">
+            <a:avLst/>
+          </a:prstGeom>
+          <a:noFill/>
+          <a:ln/>
+        </p:spPr>
+        <p:txBody>
+          <a:bodyPr wrap="square" lIns="0" tIns="0" rIns="0" bIns="0" rtlCol="0" anchor="t"/>
+          <a:lstStyle/>
+          <a:p>
+            <a:pPr indent="0" marL="0">
+              <a:buNone/>
+            </a:pPr>
+            <a:r>
+              <a:rPr lang="en-US" sz="1350" dirty="0">
+                <a:solidFill>
+                  <a:srgbClr val="1B2430"/>
+                </a:solidFill>
+                <a:latin typeface="Calibri" pitchFamily="34" charset="0"/>
+                <a:ea typeface="Calibri" pitchFamily="34" charset="-122"/>
+                <a:cs typeface="Calibri" pitchFamily="34" charset="-120"/>
+              </a:rPr>
+              <a:t>Yes, in the final C transport against tuned baselines: 15 to 52 percent less time than tuned AIMD on four ordinary paths (real clock, real sockets and 100 random held-out paths agree), a tie on the 10 percent loss path. Against a simplified BBR it wins on the satellite-like and fast paths and loses on the 2 percent lossy path. The first tabular agent did not beat AIMD, and we say so.</a:t>
+            </a:r>
+            <a:endParaRPr lang="en-US" sz="1350" dirty="0"/>
+          </a:p>
+        </p:txBody>
+      </p:sp>
+      <p:sp>
+        <p:nvSpPr>
+          <p:cNvPr id="13" name="Shape 11"/>
+          <p:cNvSpPr/>
+          <p:nvPr/>
+        </p:nvSpPr>
+        <p:spPr>
+          <a:xfrm>
+            <a:off x="457200" y="4389120"/>
+            <a:ext cx="11274552" cy="914400"/>
+          </a:xfrm>
+          <a:prstGeom prst="rect">
+            <a:avLst/>
+          </a:prstGeom>
+          <a:solidFill>
+            <a:srgbClr val="F2F6FB"/>
+          </a:solidFill>
+          <a:ln w="9525">
+            <a:solidFill>
+              <a:srgbClr val="D5DEE9"/>
+            </a:solidFill>
+            <a:prstDash val="solid"/>
+          </a:ln>
+        </p:spPr>
+      </p:sp>
+      <p:sp>
+        <p:nvSpPr>
+          <p:cNvPr id="14" name="Text 12"/>
+          <p:cNvSpPr/>
+          <p:nvPr/>
+        </p:nvSpPr>
+        <p:spPr>
+          <a:xfrm>
+            <a:off x="640080" y="4434840"/>
+            <a:ext cx="10972800" cy="320040"/>
+          </a:xfrm>
+          <a:prstGeom prst="rect">
+            <a:avLst/>
+          </a:prstGeom>
+          <a:noFill/>
+          <a:ln/>
+        </p:spPr>
+        <p:txBody>
+          <a:bodyPr wrap="square" lIns="0" tIns="0" rIns="0" bIns="0" rtlCol="0" anchor="ctr"/>
+          <a:lstStyle/>
+          <a:p>
+            <a:pPr indent="0" marL="0">
+              <a:buNone/>
+            </a:pPr>
+            <a:r>
+              <a:rPr lang="en-US" sz="1500" b="1" dirty="0">
+                <a:solidFill>
+                  <a:srgbClr val="1F6FEB"/>
+                </a:solidFill>
+                <a:latin typeface="Calibri" pitchFamily="34" charset="0"/>
+                <a:ea typeface="Calibri" pitchFamily="34" charset="-122"/>
+                <a:cs typeface="Calibri" pitchFamily="34" charset="-120"/>
+              </a:rPr>
+              <a:t>Why Go-Back-N?</a:t>
+            </a:r>
+            <a:endParaRPr lang="en-US" sz="1500" dirty="0"/>
+          </a:p>
+        </p:txBody>
+      </p:sp>
+      <p:sp>
+        <p:nvSpPr>
+          <p:cNvPr id="15" name="Text 13"/>
+          <p:cNvSpPr/>
+          <p:nvPr/>
+        </p:nvSpPr>
+        <p:spPr>
+          <a:xfrm>
+            <a:off x="640080" y="4754880"/>
+            <a:ext cx="10972800" cy="530352"/>
+          </a:xfrm>
+          <a:prstGeom prst="rect">
+            <a:avLst/>
+          </a:prstGeom>
+          <a:noFill/>
+          <a:ln/>
+        </p:spPr>
+        <p:txBody>
+          <a:bodyPr wrap="square" lIns="0" tIns="0" rIns="0" bIns="0" rtlCol="0" anchor="t"/>
+          <a:lstStyle/>
+          <a:p>
+            <a:pPr indent="0" marL="0">
+              <a:buNone/>
+            </a:pPr>
+            <a:r>
+              <a:rPr lang="en-US" sz="1350" dirty="0">
+                <a:solidFill>
+                  <a:srgbClr val="1B2430"/>
+                </a:solidFill>
+                <a:latin typeface="Calibri" pitchFamily="34" charset="0"/>
+                <a:ea typeface="Calibri" pitchFamily="34" charset="-122"/>
+                <a:cs typeface="Calibri" pitchFamily="34" charset="-120"/>
+              </a:rPr>
+              <a:t>We started with it because it is simple to build and explain, then replaced it as the default with Selective Repeat: the receiver buffers out-of-order packets and reports them in an ACK bitmap, and the sender resends only what is missing. Go-Back-N stays behind a flag for comparison.</a:t>
+            </a:r>
+            <a:endParaRPr lang="en-US" sz="1350" dirty="0"/>
+          </a:p>
+        </p:txBody>
+      </p:sp>
+      <p:sp>
+        <p:nvSpPr>
+          <p:cNvPr id="16" name="Shape 14"/>
+          <p:cNvSpPr/>
+          <p:nvPr/>
+        </p:nvSpPr>
+        <p:spPr>
+          <a:xfrm>
+            <a:off x="457200" y="5394960"/>
+            <a:ext cx="11274552" cy="914400"/>
+          </a:xfrm>
+          <a:prstGeom prst="rect">
+            <a:avLst/>
+          </a:prstGeom>
+          <a:solidFill>
+            <a:srgbClr val="F2F6FB"/>
+          </a:solidFill>
+          <a:ln w="9525">
+            <a:solidFill>
+              <a:srgbClr val="D5DEE9"/>
+            </a:solidFill>
+            <a:prstDash val="solid"/>
+          </a:ln>
+        </p:spPr>
+      </p:sp>
+      <p:sp>
+        <p:nvSpPr>
+          <p:cNvPr id="17" name="Text 15"/>
+          <p:cNvSpPr/>
+          <p:nvPr/>
+        </p:nvSpPr>
+        <p:spPr>
+          <a:xfrm>
+            <a:off x="640080" y="5440680"/>
+            <a:ext cx="10972800" cy="320040"/>
+          </a:xfrm>
+          <a:prstGeom prst="rect">
+            <a:avLst/>
+          </a:prstGeom>
+          <a:noFill/>
+          <a:ln/>
+        </p:spPr>
+        <p:txBody>
+          <a:bodyPr wrap="square" lIns="0" tIns="0" rIns="0" bIns="0" rtlCol="0" anchor="ctr"/>
+          <a:lstStyle/>
+          <a:p>
+            <a:pPr indent="0" marL="0">
+              <a:buNone/>
+            </a:pPr>
+            <a:r>
+              <a:rPr lang="en-US" sz="1500" b="1" dirty="0">
+                <a:solidFill>
+                  <a:srgbClr val="1F6FEB"/>
+                </a:solidFill>
+                <a:latin typeface="Calibri" pitchFamily="34" charset="0"/>
+                <a:ea typeface="Calibri" pitchFamily="34" charset="-122"/>
+                <a:cs typeface="Calibri" pitchFamily="34" charset="-120"/>
+              </a:rPr>
+              <a:t>Was it tested between machines?</a:t>
+            </a:r>
+            <a:endParaRPr lang="en-US" sz="1500" dirty="0"/>
+          </a:p>
+        </p:txBody>
+      </p:sp>
+      <p:sp>
+        <p:nvSpPr>
+          <p:cNvPr id="18" name="Text 16"/>
+          <p:cNvSpPr/>
+          <p:nvPr/>
+        </p:nvSpPr>
+        <p:spPr>
+          <a:xfrm>
+            <a:off x="640080" y="5760720"/>
+            <a:ext cx="10972800" cy="530352"/>
+          </a:xfrm>
+          <a:prstGeom prst="rect">
+            <a:avLst/>
+          </a:prstGeom>
+          <a:noFill/>
+          <a:ln/>
+        </p:spPr>
+        <p:txBody>
+          <a:bodyPr wrap="square" lIns="0" tIns="0" rIns="0" bIns="0" rtlCol="0" anchor="t"/>
+          <a:lstStyle/>
+          <a:p>
+            <a:pPr indent="0" marL="0">
+              <a:buNone/>
+            </a:pPr>
+            <a:r>
+              <a:rPr lang="en-US" sz="1350" dirty="0">
+                <a:solidFill>
+                  <a:srgbClr val="1B2430"/>
+                </a:solidFill>
+                <a:latin typeface="Calibri" pitchFamily="34" charset="0"/>
+                <a:ea typeface="Calibri" pitchFamily="34" charset="-122"/>
+                <a:cs typeface="Calibri" pitchFamily="34" charset="-120"/>
+              </a:rPr>
+              <a:t>Yes. Delay, loss and jitter are emulated in our client, in a separate proxy on real UDP sockets, and in virtual time; these agree with each other. We also ran it once on the Linux kernel with tc netem on one laptop: the agent beat tuned AIMD there, but kernel TCP was 1.5 to 1.7 times faster than us. We also made one run between two laptops on different networks over a Tailscale relay: RUDP delivered every transfer that finished, but the path drifted and four of twenty runs timed out, so we do not rank the policies from it; kernel TCP was 2 to 6 times faster on the clean repetitions.</a:t>
+            </a:r>
+            <a:endParaRPr lang="en-US" sz="1350" dirty="0"/>
+          </a:p>
+        </p:txBody>
+      </p:sp>
+    </p:spTree>
+  </p:cSld>
+  <p:clrMapOvr>
+    <a:masterClrMapping/>
+  </p:clrMapOvr>
+</p:sld>
+</file>
+
+<file path=ppt/slides/slide43.xml><?xml version="1.0" encoding="utf-8"?>
+<p:sld xmlns:a="http://schemas.openxmlformats.org/drawingml/2006/main" xmlns:r="http://schemas.openxmlformats.org/officeDocument/2006/relationships" xmlns:p="http://schemas.openxmlformats.org/presentationml/2006/main">
+  <p:cSld name="Slide 43">
+    <p:bg>
+      <p:bgPr>
+        <a:solidFill>
+          <a:srgbClr val="FFFFFF"/>
+        </a:solidFill>
+      </p:bgPr>
+    </p:bg>
+    <p:spTree>
+      <p:nvGrpSpPr>
+        <p:cNvPr id="1" name=""/>
+        <p:cNvGrpSpPr/>
+        <p:nvPr/>
+      </p:nvGrpSpPr>
+      <p:grpSpPr>
+        <a:xfrm>
+          <a:off x="0" y="0"/>
+          <a:ext cx="0" cy="0"/>
+          <a:chOff x="0" y="0"/>
+          <a:chExt cx="0" cy="0"/>
+        </a:xfrm>
+      </p:grpSpPr>
+      <p:sp>
+        <p:nvSpPr>
+          <p:cNvPr id="2" name="Text 0"/>
+          <p:cNvSpPr/>
+          <p:nvPr/>
+        </p:nvSpPr>
+        <p:spPr>
+          <a:xfrm>
+            <a:off x="457200" y="274320"/>
+            <a:ext cx="9601200" cy="548640"/>
+          </a:xfrm>
+          <a:prstGeom prst="rect">
+            <a:avLst/>
+          </a:prstGeom>
+          <a:noFill/>
+          <a:ln/>
+        </p:spPr>
+        <p:txBody>
+          <a:bodyPr wrap="square" lIns="0" tIns="0" rIns="0" bIns="0" rtlCol="0" anchor="ctr"/>
+          <a:lstStyle/>
+          <a:p>
+            <a:pPr indent="0" marL="0">
+              <a:buNone/>
+            </a:pPr>
+            <a:r>
+              <a:rPr lang="en-US" sz="2600" b="1" dirty="0">
+                <a:solidFill>
+                  <a:srgbClr val="1B2430"/>
+                </a:solidFill>
+                <a:latin typeface="Calibri" pitchFamily="34" charset="0"/>
+                <a:ea typeface="Calibri" pitchFamily="34" charset="-122"/>
+                <a:cs typeface="Calibri" pitchFamily="34" charset="-120"/>
+              </a:rPr>
+              <a:t>Hard questions and short answers (2 of 3)</a:t>
+            </a:r>
+            <a:endParaRPr lang="en-US" sz="2600" dirty="0"/>
+          </a:p>
+        </p:txBody>
+      </p:sp>
+      <p:sp>
+        <p:nvSpPr>
+          <p:cNvPr id="3" name="Shape 1"/>
+          <p:cNvSpPr/>
+          <p:nvPr/>
+        </p:nvSpPr>
+        <p:spPr>
+          <a:xfrm>
+            <a:off x="457200" y="1143000"/>
+            <a:ext cx="11274552" cy="36576"/>
+          </a:xfrm>
+          <a:prstGeom prst="rect">
+            <a:avLst/>
+          </a:prstGeom>
+          <a:solidFill>
+            <a:srgbClr val="1F6FEB"/>
+          </a:solidFill>
+          <a:ln w="12700">
+            <a:solidFill>
+              <a:srgbClr val="1F6FEB"/>
+            </a:solidFill>
+            <a:prstDash val="solid"/>
+          </a:ln>
+        </p:spPr>
+      </p:sp>
+      <p:sp>
+        <p:nvSpPr>
+          <p:cNvPr id="4" name="Shape 2"/>
+          <p:cNvSpPr/>
+          <p:nvPr/>
+        </p:nvSpPr>
+        <p:spPr>
+          <a:xfrm>
+            <a:off x="457200" y="1371600"/>
+            <a:ext cx="11274552" cy="914400"/>
+          </a:xfrm>
+          <a:prstGeom prst="rect">
+            <a:avLst/>
+          </a:prstGeom>
+          <a:solidFill>
+            <a:srgbClr val="F2F6FB"/>
+          </a:solidFill>
+          <a:ln w="9525">
+            <a:solidFill>
+              <a:srgbClr val="D5DEE9"/>
+            </a:solidFill>
+            <a:prstDash val="solid"/>
+          </a:ln>
+        </p:spPr>
+      </p:sp>
+      <p:sp>
+        <p:nvSpPr>
+          <p:cNvPr id="5" name="Text 3"/>
+          <p:cNvSpPr/>
+          <p:nvPr/>
+        </p:nvSpPr>
+        <p:spPr>
+          <a:xfrm>
+            <a:off x="640080" y="1417320"/>
+            <a:ext cx="10972800" cy="320040"/>
+          </a:xfrm>
+          <a:prstGeom prst="rect">
+            <a:avLst/>
+          </a:prstGeom>
+          <a:noFill/>
+          <a:ln/>
+        </p:spPr>
+        <p:txBody>
+          <a:bodyPr wrap="square" lIns="0" tIns="0" rIns="0" bIns="0" rtlCol="0" anchor="ctr"/>
+          <a:lstStyle/>
+          <a:p>
+            <a:pPr indent="0" marL="0">
+              <a:buNone/>
+            </a:pPr>
+            <a:r>
+              <a:rPr lang="en-US" sz="1500" b="1" dirty="0">
+                <a:solidFill>
+                  <a:srgbClr val="1F6FEB"/>
+                </a:solidFill>
+                <a:latin typeface="Calibri" pitchFamily="34" charset="0"/>
+                <a:ea typeface="Calibri" pitchFamily="34" charset="-122"/>
+                <a:cs typeface="Calibri" pitchFamily="34" charset="-120"/>
+              </a:rPr>
+              <a:t>What does Packet Tracer prove?</a:t>
+            </a:r>
+            <a:endParaRPr lang="en-US" sz="1500" dirty="0"/>
+          </a:p>
+        </p:txBody>
+      </p:sp>
+      <p:sp>
+        <p:nvSpPr>
+          <p:cNvPr id="6" name="Text 4"/>
+          <p:cNvSpPr/>
+          <p:nvPr/>
+        </p:nvSpPr>
+        <p:spPr>
+          <a:xfrm>
+            <a:off x="640080" y="1737360"/>
+            <a:ext cx="10972800" cy="530352"/>
+          </a:xfrm>
+          <a:prstGeom prst="rect">
+            <a:avLst/>
+          </a:prstGeom>
+          <a:noFill/>
+          <a:ln/>
+        </p:spPr>
+        <p:txBody>
+          <a:bodyPr wrap="square" lIns="0" tIns="0" rIns="0" bIns="0" rtlCol="0" anchor="t"/>
+          <a:lstStyle/>
+          <a:p>
+            <a:pPr indent="0" marL="0">
+              <a:buNone/>
+            </a:pPr>
+            <a:r>
+              <a:rPr lang="en-US" sz="1350" dirty="0">
+                <a:solidFill>
+                  <a:srgbClr val="1B2430"/>
+                </a:solidFill>
+                <a:latin typeface="Calibri" pitchFamily="34" charset="0"/>
+                <a:ea typeface="Calibri" pitchFamily="34" charset="-122"/>
+                <a:cs typeface="Calibri" pitchFamily="34" charset="-120"/>
+              </a:rPr>
+              <a:t>The network design: OSPF, VLANs, ACL, 70/71 failover. The protocol is validated separately with emulation and Wireshark.</a:t>
+            </a:r>
+            <a:endParaRPr lang="en-US" sz="1350" dirty="0"/>
+          </a:p>
+        </p:txBody>
+      </p:sp>
+      <p:sp>
+        <p:nvSpPr>
+          <p:cNvPr id="7" name="Shape 5"/>
+          <p:cNvSpPr/>
+          <p:nvPr/>
+        </p:nvSpPr>
+        <p:spPr>
+          <a:xfrm>
+            <a:off x="457200" y="2377440"/>
+            <a:ext cx="11274552" cy="914400"/>
+          </a:xfrm>
+          <a:prstGeom prst="rect">
+            <a:avLst/>
+          </a:prstGeom>
+          <a:solidFill>
+            <a:srgbClr val="F2F6FB"/>
+          </a:solidFill>
+          <a:ln w="9525">
+            <a:solidFill>
+              <a:srgbClr val="D5DEE9"/>
+            </a:solidFill>
+            <a:prstDash val="solid"/>
+          </a:ln>
+        </p:spPr>
+      </p:sp>
+      <p:sp>
+        <p:nvSpPr>
+          <p:cNvPr id="8" name="Text 6"/>
+          <p:cNvSpPr/>
+          <p:nvPr/>
+        </p:nvSpPr>
+        <p:spPr>
+          <a:xfrm>
+            <a:off x="640080" y="2423160"/>
+            <a:ext cx="10972800" cy="320040"/>
+          </a:xfrm>
+          <a:prstGeom prst="rect">
+            <a:avLst/>
+          </a:prstGeom>
+          <a:noFill/>
+          <a:ln/>
+        </p:spPr>
+        <p:txBody>
+          <a:bodyPr wrap="square" lIns="0" tIns="0" rIns="0" bIns="0" rtlCol="0" anchor="ctr"/>
+          <a:lstStyle/>
+          <a:p>
+            <a:pPr indent="0" marL="0">
+              <a:buNone/>
+            </a:pPr>
+            <a:r>
+              <a:rPr lang="en-US" sz="1500" b="1" dirty="0">
+                <a:solidFill>
+                  <a:srgbClr val="1F6FEB"/>
+                </a:solidFill>
+                <a:latin typeface="Calibri" pitchFamily="34" charset="0"/>
+                <a:ea typeface="Calibri" pitchFamily="34" charset="-122"/>
+                <a:cs typeface="Calibri" pitchFamily="34" charset="-120"/>
+              </a:rPr>
+              <a:t>Peer disappears?</a:t>
+            </a:r>
+            <a:endParaRPr lang="en-US" sz="1500" dirty="0"/>
+          </a:p>
+        </p:txBody>
+      </p:sp>
+      <p:sp>
+        <p:nvSpPr>
+          <p:cNvPr id="9" name="Text 7"/>
+          <p:cNvSpPr/>
+          <p:nvPr/>
+        </p:nvSpPr>
+        <p:spPr>
+          <a:xfrm>
+            <a:off x="640080" y="2743200"/>
+            <a:ext cx="10972800" cy="530352"/>
+          </a:xfrm>
+          <a:prstGeom prst="rect">
+            <a:avLst/>
+          </a:prstGeom>
+          <a:noFill/>
+          <a:ln/>
+        </p:spPr>
+        <p:txBody>
+          <a:bodyPr wrap="square" lIns="0" tIns="0" rIns="0" bIns="0" rtlCol="0" anchor="t"/>
+          <a:lstStyle/>
+          <a:p>
+            <a:pPr indent="0" marL="0">
+              <a:buNone/>
+            </a:pPr>
+            <a:r>
+              <a:rPr lang="en-US" sz="1350" dirty="0">
+                <a:solidFill>
+                  <a:srgbClr val="1B2430"/>
+                </a:solidFill>
+                <a:latin typeface="Calibri" pitchFamily="34" charset="0"/>
+                <a:ea typeface="Calibri" pitchFamily="34" charset="-122"/>
+                <a:cs typeface="Calibri" pitchFamily="34" charset="-120"/>
+              </a:rPr>
+              <a:t>Sender keeps retransmitting on timeout. A connection abort after repeated timeouts is not built; it is the fix we would add.</a:t>
+            </a:r>
+            <a:endParaRPr lang="en-US" sz="1350" dirty="0"/>
+          </a:p>
+        </p:txBody>
+      </p:sp>
+      <p:sp>
+        <p:nvSpPr>
+          <p:cNvPr id="10" name="Shape 8"/>
+          <p:cNvSpPr/>
+          <p:nvPr/>
+        </p:nvSpPr>
+        <p:spPr>
+          <a:xfrm>
+            <a:off x="457200" y="3383280"/>
+            <a:ext cx="11274552" cy="914400"/>
+          </a:xfrm>
+          <a:prstGeom prst="rect">
+            <a:avLst/>
+          </a:prstGeom>
+          <a:solidFill>
+            <a:srgbClr val="F2F6FB"/>
+          </a:solidFill>
+          <a:ln w="9525">
+            <a:solidFill>
+              <a:srgbClr val="D5DEE9"/>
+            </a:solidFill>
+            <a:prstDash val="solid"/>
+          </a:ln>
+        </p:spPr>
+      </p:sp>
+      <p:sp>
+        <p:nvSpPr>
+          <p:cNvPr id="11" name="Text 9"/>
+          <p:cNvSpPr/>
+          <p:nvPr/>
+        </p:nvSpPr>
+        <p:spPr>
+          <a:xfrm>
+            <a:off x="640080" y="3429000"/>
+            <a:ext cx="10972800" cy="320040"/>
+          </a:xfrm>
+          <a:prstGeom prst="rect">
+            <a:avLst/>
+          </a:prstGeom>
+          <a:noFill/>
+          <a:ln/>
+        </p:spPr>
+        <p:txBody>
+          <a:bodyPr wrap="square" lIns="0" tIns="0" rIns="0" bIns="0" rtlCol="0" anchor="ctr"/>
+          <a:lstStyle/>
+          <a:p>
+            <a:pPr indent="0" marL="0">
+              <a:buNone/>
+            </a:pPr>
+            <a:r>
+              <a:rPr lang="en-US" sz="1500" b="1" dirty="0">
+                <a:solidFill>
+                  <a:srgbClr val="1F6FEB"/>
+                </a:solidFill>
+                <a:latin typeface="Calibri" pitchFamily="34" charset="0"/>
+                <a:ea typeface="Calibri" pitchFamily="34" charset="-122"/>
+                <a:cs typeface="Calibri" pitchFamily="34" charset="-120"/>
+              </a:rPr>
+              <a:t>Does the checksum catch errors?</a:t>
+            </a:r>
+            <a:endParaRPr lang="en-US" sz="1500" dirty="0"/>
+          </a:p>
+        </p:txBody>
+      </p:sp>
+      <p:sp>
+        <p:nvSpPr>
+          <p:cNvPr id="12" name="Text 10"/>
+          <p:cNvSpPr/>
+          <p:nvPr/>
+        </p:nvSpPr>
+        <p:spPr>
+          <a:xfrm>
+            <a:off x="640080" y="3749040"/>
+            <a:ext cx="10972800" cy="530352"/>
+          </a:xfrm>
+          <a:prstGeom prst="rect">
+            <a:avLst/>
+          </a:prstGeom>
+          <a:noFill/>
+          <a:ln/>
+        </p:spPr>
+        <p:txBody>
+          <a:bodyPr wrap="square" lIns="0" tIns="0" rIns="0" bIns="0" rtlCol="0" anchor="t"/>
+          <a:lstStyle/>
+          <a:p>
+            <a:pPr indent="0" marL="0">
+              <a:buNone/>
+            </a:pPr>
+            <a:r>
+              <a:rPr lang="en-US" sz="1350" dirty="0">
+                <a:solidFill>
+                  <a:srgbClr val="1B2430"/>
+                </a:solidFill>
+                <a:latin typeface="Calibri" pitchFamily="34" charset="0"/>
+                <a:ea typeface="Calibri" pitchFamily="34" charset="-122"/>
+                <a:cs typeface="Calibri" pitchFamily="34" charset="-120"/>
+              </a:rPr>
+              <a:t>It is CRC-16/CCITT now. The first version was a byte sum and a fuzzer showed 2 percent of corrupted packets got through; with CRC-16 none of 333,000 did. It cannot catch every error pattern, as no 16-bit check can.</a:t>
+            </a:r>
+            <a:endParaRPr lang="en-US" sz="1350" dirty="0"/>
+          </a:p>
+        </p:txBody>
+      </p:sp>
+      <p:sp>
+        <p:nvSpPr>
+          <p:cNvPr id="13" name="Shape 11"/>
+          <p:cNvSpPr/>
+          <p:nvPr/>
+        </p:nvSpPr>
+        <p:spPr>
+          <a:xfrm>
+            <a:off x="457200" y="4389120"/>
+            <a:ext cx="11274552" cy="914400"/>
+          </a:xfrm>
+          <a:prstGeom prst="rect">
+            <a:avLst/>
+          </a:prstGeom>
+          <a:solidFill>
+            <a:srgbClr val="F2F6FB"/>
+          </a:solidFill>
+          <a:ln w="9525">
+            <a:solidFill>
+              <a:srgbClr val="D5DEE9"/>
+            </a:solidFill>
+            <a:prstDash val="solid"/>
+          </a:ln>
+        </p:spPr>
+      </p:sp>
+      <p:sp>
+        <p:nvSpPr>
+          <p:cNvPr id="14" name="Text 12"/>
+          <p:cNvSpPr/>
+          <p:nvPr/>
+        </p:nvSpPr>
+        <p:spPr>
+          <a:xfrm>
+            <a:off x="640080" y="4434840"/>
+            <a:ext cx="10972800" cy="320040"/>
+          </a:xfrm>
+          <a:prstGeom prst="rect">
+            <a:avLst/>
+          </a:prstGeom>
+          <a:noFill/>
+          <a:ln/>
+        </p:spPr>
+        <p:txBody>
+          <a:bodyPr wrap="square" lIns="0" tIns="0" rIns="0" bIns="0" rtlCol="0" anchor="ctr"/>
+          <a:lstStyle/>
+          <a:p>
+            <a:pPr indent="0" marL="0">
+              <a:buNone/>
+            </a:pPr>
+            <a:r>
+              <a:rPr lang="en-US" sz="1500" b="1" dirty="0">
+                <a:solidFill>
+                  <a:srgbClr val="1F6FEB"/>
+                </a:solidFill>
+                <a:latin typeface="Calibri" pitchFamily="34" charset="0"/>
+                <a:ea typeface="Calibri" pitchFamily="34" charset="-122"/>
+                <a:cs typeface="Calibri" pitchFamily="34" charset="-120"/>
+              </a:rPr>
+              <a:t>Why no handshake in the exported trace?</a:t>
+            </a:r>
+            <a:endParaRPr lang="en-US" sz="1500" dirty="0"/>
+          </a:p>
+        </p:txBody>
+      </p:sp>
+      <p:sp>
+        <p:nvSpPr>
+          <p:cNvPr id="15" name="Text 13"/>
+          <p:cNvSpPr/>
+          <p:nvPr/>
+        </p:nvSpPr>
+        <p:spPr>
+          <a:xfrm>
+            <a:off x="640080" y="4754880"/>
+            <a:ext cx="10972800" cy="530352"/>
+          </a:xfrm>
+          <a:prstGeom prst="rect">
+            <a:avLst/>
+          </a:prstGeom>
+          <a:noFill/>
+          <a:ln/>
+        </p:spPr>
+        <p:txBody>
+          <a:bodyPr wrap="square" lIns="0" tIns="0" rIns="0" bIns="0" rtlCol="0" anchor="t"/>
+          <a:lstStyle/>
+          <a:p>
+            <a:pPr indent="0" marL="0">
+              <a:buNone/>
+            </a:pPr>
+            <a:r>
+              <a:rPr lang="en-US" sz="1350" dirty="0">
+                <a:solidFill>
+                  <a:srgbClr val="1B2430"/>
+                </a:solidFill>
+                <a:latin typeface="Calibri" pitchFamily="34" charset="0"/>
+                <a:ea typeface="Calibri" pitchFamily="34" charset="-122"/>
+                <a:cs typeface="Calibri" pitchFamily="34" charset="-120"/>
+              </a:rPr>
+              <a:t>The export builds synthetic packets. The real tshark capture shows SYN, SYN-ACK, ACK.</a:t>
+            </a:r>
+            <a:endParaRPr lang="en-US" sz="1350" dirty="0"/>
+          </a:p>
+        </p:txBody>
+      </p:sp>
+      <p:sp>
+        <p:nvSpPr>
+          <p:cNvPr id="16" name="Shape 14"/>
+          <p:cNvSpPr/>
+          <p:nvPr/>
+        </p:nvSpPr>
+        <p:spPr>
+          <a:xfrm>
+            <a:off x="457200" y="5394960"/>
+            <a:ext cx="11274552" cy="914400"/>
+          </a:xfrm>
+          <a:prstGeom prst="rect">
+            <a:avLst/>
+          </a:prstGeom>
+          <a:solidFill>
+            <a:srgbClr val="F2F6FB"/>
+          </a:solidFill>
+          <a:ln w="9525">
+            <a:solidFill>
+              <a:srgbClr val="D5DEE9"/>
+            </a:solidFill>
+            <a:prstDash val="solid"/>
+          </a:ln>
+        </p:spPr>
+      </p:sp>
+      <p:sp>
+        <p:nvSpPr>
+          <p:cNvPr id="17" name="Text 15"/>
+          <p:cNvSpPr/>
+          <p:nvPr/>
+        </p:nvSpPr>
+        <p:spPr>
+          <a:xfrm>
+            <a:off x="640080" y="5440680"/>
+            <a:ext cx="10972800" cy="320040"/>
+          </a:xfrm>
+          <a:prstGeom prst="rect">
+            <a:avLst/>
+          </a:prstGeom>
+          <a:noFill/>
+          <a:ln/>
+        </p:spPr>
+        <p:txBody>
+          <a:bodyPr wrap="square" lIns="0" tIns="0" rIns="0" bIns="0" rtlCol="0" anchor="ctr"/>
+          <a:lstStyle/>
+          <a:p>
+            <a:pPr indent="0" marL="0">
+              <a:buNone/>
+            </a:pPr>
+            <a:r>
+              <a:rPr lang="en-US" sz="1500" b="1" dirty="0">
+                <a:solidFill>
+                  <a:srgbClr val="1F6FEB"/>
+                </a:solidFill>
+                <a:latin typeface="Calibri" pitchFamily="34" charset="0"/>
+                <a:ea typeface="Calibri" pitchFamily="34" charset="-122"/>
+                <a:cs typeface="Calibri" pitchFamily="34" charset="-120"/>
+              </a:rPr>
+              <a:t>Is the baseline fair?</a:t>
+            </a:r>
+            <a:endParaRPr lang="en-US" sz="1500" dirty="0"/>
+          </a:p>
+        </p:txBody>
+      </p:sp>
+      <p:sp>
+        <p:nvSpPr>
+          <p:cNvPr id="18" name="Text 16"/>
+          <p:cNvSpPr/>
+          <p:nvPr/>
+        </p:nvSpPr>
+        <p:spPr>
+          <a:xfrm>
+            <a:off x="640080" y="5760720"/>
+            <a:ext cx="10972800" cy="530352"/>
+          </a:xfrm>
+          <a:prstGeom prst="rect">
+            <a:avLst/>
+          </a:prstGeom>
+          <a:noFill/>
+          <a:ln/>
+        </p:spPr>
+        <p:txBody>
+          <a:bodyPr wrap="square" lIns="0" tIns="0" rIns="0" bIns="0" rtlCol="0" anchor="t"/>
+          <a:lstStyle/>
+          <a:p>
+            <a:pPr indent="0" marL="0">
+              <a:buNone/>
+            </a:pPr>
+            <a:r>
+              <a:rPr lang="en-US" sz="1350" dirty="0">
+                <a:solidFill>
+                  <a:srgbClr val="1B2430"/>
+                </a:solidFill>
+                <a:latin typeface="Calibri" pitchFamily="34" charset="0"/>
+                <a:ea typeface="Calibri" pitchFamily="34" charset="-122"/>
+                <a:cs typeface="Calibri" pitchFamily="34" charset="-120"/>
+              </a:rPr>
+              <a:t>We tuned it: window cap 128 and a high start threshold, plus the same retransmission-timer floor for every policy. We also compare against tuned CUBIC. Tuned AIMD improved a lot, and the agent is still ahead on four paths.</a:t>
+            </a:r>
+            <a:endParaRPr lang="en-US" sz="1350" dirty="0"/>
+          </a:p>
+        </p:txBody>
+      </p:sp>
+    </p:spTree>
+  </p:cSld>
+  <p:clrMapOvr>
+    <a:masterClrMapping/>
+  </p:clrMapOvr>
+</p:sld>
+</file>
+
+<file path=ppt/slides/slide44.xml><?xml version="1.0" encoding="utf-8"?>
+<p:sld xmlns:a="http://schemas.openxmlformats.org/drawingml/2006/main" xmlns:r="http://schemas.openxmlformats.org/officeDocument/2006/relationships" xmlns:p="http://schemas.openxmlformats.org/presentationml/2006/main">
+  <p:cSld name="Slide 44">
     <p:bg>
       <p:bgPr>
         <a:solidFill>

--- a/docs/RUDP_Host_Guide.pptx
+++ b/docs/RUDP_Host_Guide.pptx
@@ -49,9 +49,10 @@
     <p:sldId id="297" r:id="rId43"/>
     <p:sldId id="298" r:id="rId44"/>
     <p:sldId id="299" r:id="rId45"/>
+    <p:sldId id="300" r:id="rId46"/>
   </p:sldIdLst>
   <p:notesMasterIdLst>
-    <p:notesMasterId r:id="rId46"/>
+    <p:notesMasterId r:id="rId47"/>
   </p:notesMasterIdLst>
   <p:sldSz cx="12192000" cy="6858000"/>
   <p:notesSz cx="6858000" cy="12192000"/>
@@ -3913,6 +3914,94 @@
             <a:fld id="{F7021451-1387-4CA6-816F-3879F97B5CBC}" type="slidenum">
               <a:rPr lang="en-US"/>
               <a:t>44</a:t>
+            </a:fld>
+            <a:endParaRPr lang="en-US"/>
+          </a:p>
+        </p:txBody>
+      </p:sp>
+    </p:spTree>
+    <p:extLst>
+      <p:ext uri="{BB962C8B-B14F-4D97-AF65-F5344CB8AC3E}">
+        <p14:creationId xmlns:p14="http://schemas.microsoft.com/office/powerpoint/2010/main" val="1024086991"/>
+      </p:ext>
+    </p:extLst>
+  </p:cSld>
+  <p:clrMapOvr>
+    <a:masterClrMapping/>
+  </p:clrMapOvr>
+</p:notes>
+</file>
+
+<file path=ppt/notesSlides/notesSlide45.xml><?xml version="1.0" encoding="utf-8"?>
+<p:notes xmlns:a="http://schemas.openxmlformats.org/drawingml/2006/main" xmlns:r="http://schemas.openxmlformats.org/officeDocument/2006/relationships" xmlns:p="http://schemas.openxmlformats.org/presentationml/2006/main">
+  <p:cSld>
+    <p:spTree>
+      <p:nvGrpSpPr>
+        <p:cNvPr id="1" name=""/>
+        <p:cNvGrpSpPr/>
+        <p:nvPr/>
+      </p:nvGrpSpPr>
+      <p:grpSpPr>
+        <a:xfrm>
+          <a:off x="0" y="0"/>
+          <a:ext cx="0" cy="0"/>
+          <a:chOff x="0" y="0"/>
+          <a:chExt cx="0" cy="0"/>
+        </a:xfrm>
+      </p:grpSpPr>
+      <p:sp>
+        <p:nvSpPr>
+          <p:cNvPr id="2" name="Slide Image Placeholder 1"/>
+          <p:cNvSpPr>
+            <a:spLocks noGrp="1" noRot="1" noChangeAspect="1"/>
+          </p:cNvSpPr>
+          <p:nvPr>
+            <p:ph type="sldImg"/>
+          </p:nvPr>
+        </p:nvSpPr>
+        <p:spPr/>
+      </p:sp>
+      <p:sp>
+        <p:nvSpPr>
+          <p:cNvPr id="3" name="Notes Placeholder 2"/>
+          <p:cNvSpPr>
+            <a:spLocks noGrp="1"/>
+          </p:cNvSpPr>
+          <p:nvPr>
+            <p:ph type="body" idx="1"/>
+          </p:nvPr>
+        </p:nvSpPr>
+        <p:spPr/>
+        <p:txBody>
+          <a:bodyPr/>
+          <a:lstStyle/>
+          <a:p>
+            <a:r>
+              <a:rPr lang="en-US" dirty="0"/>
+              <a:t/>
+            </a:r>
+            <a:endParaRPr lang="en-US" dirty="0"/>
+          </a:p>
+        </p:txBody>
+      </p:sp>
+      <p:sp>
+        <p:nvSpPr>
+          <p:cNvPr id="4" name="Slide Number Placeholder 3"/>
+          <p:cNvSpPr>
+            <a:spLocks noGrp="1"/>
+          </p:cNvSpPr>
+          <p:nvPr>
+            <p:ph type="sldNum" sz="quarter" idx="10"/>
+          </p:nvPr>
+        </p:nvSpPr>
+        <p:spPr/>
+        <p:txBody>
+          <a:bodyPr/>
+          <a:lstStyle/>
+          <a:p>
+            <a:fld id="{F7021451-1387-4CA6-816F-3879F97B5CBC}" type="slidenum">
+              <a:rPr lang="en-US"/>
+              <a:t>45</a:t>
             </a:fld>
             <a:endParaRPr lang="en-US"/>
           </a:p>
@@ -4884,7 +4973,7 @@
                 <a:ea typeface="Calibri" pitchFamily="34" charset="-122"/>
                 <a:cs typeface="Calibri" pitchFamily="34" charset="-120"/>
               </a:rPr>
-              <a:t>8. AIMD</a:t>
+              <a:t>8. Window picture</a:t>
             </a:r>
             <a:endParaRPr lang="en-US" sz="2600" dirty="0"/>
           </a:p>
@@ -4923,7 +5012,7 @@
                 <a:ea typeface="Calibri" pitchFamily="34" charset="-122"/>
                 <a:cs typeface="Calibri" pitchFamily="34" charset="-120"/>
               </a:rPr>
-              <a:t>Time on this slide: 0:50</a:t>
+              <a:t>Time on this slide: 0:40</a:t>
             </a:r>
             <a:endParaRPr lang="en-US" sz="1300" dirty="0"/>
           </a:p>
@@ -5076,49 +5165,7 @@
                 <a:ea typeface="Calibri" pitchFamily="34" charset="-122"/>
                 <a:cs typeface="Calibri" pitchFamily="34" charset="-120"/>
               </a:rPr>
-              <a:t>Slow start: window grows by one per ACK until the threshold of 16. Then avoidance: plus 1/window per ACK.</a:t>
-            </a:r>
-            <a:endParaRPr lang="en-US" sz="1600" dirty="0"/>
-          </a:p>
-          <a:p>
-            <a:pPr marL="342900" indent="-342900">
-              <a:spcAft>
-                <a:spcPts val="600"/>
-              </a:spcAft>
-              <a:buSzPct val="100000"/>
-              <a:buChar char="•"/>
-            </a:pPr>
-            <a:r>
-              <a:rPr lang="en-US" sz="1600" dirty="0">
-                <a:solidFill>
-                  <a:srgbClr val="1B2430"/>
-                </a:solidFill>
-                <a:latin typeface="Calibri" pitchFamily="34" charset="0"/>
-                <a:ea typeface="Calibri" pitchFamily="34" charset="-122"/>
-                <a:cs typeface="Calibri" pitchFamily="34" charset="-120"/>
-              </a:rPr>
-              <a:t>Three duplicate ACKs: window halves. A timeout: window resets to 1 and the threshold halves. Cap is 32.</a:t>
-            </a:r>
-            <a:endParaRPr lang="en-US" sz="1600" dirty="0"/>
-          </a:p>
-          <a:p>
-            <a:pPr marL="342900" indent="-342900">
-              <a:spcAft>
-                <a:spcPts val="600"/>
-              </a:spcAft>
-              <a:buSzPct val="100000"/>
-              <a:buChar char="•"/>
-            </a:pPr>
-            <a:r>
-              <a:rPr lang="en-US" sz="1600" dirty="0">
-                <a:solidFill>
-                  <a:srgbClr val="1B2430"/>
-                </a:solidFill>
-                <a:latin typeface="Calibri" pitchFamily="34" charset="0"/>
-                <a:ea typeface="Calibri" pitchFamily="34" charset="-122"/>
-                <a:cs typeface="Calibri" pitchFamily="34" charset="-120"/>
-              </a:rPr>
-              <a:t>The graph shows fresh runs at 0, 10, 20 and 40 percent loss. Red marks are timeouts, green are fast retransmits.</a:t>
+              <a:t>Same path, same seed. AIMD saws between 5 and 15 packets and needs 9 s; the agent holds a much bigger window, backs off on loss, finishes in 4 s.</a:t>
             </a:r>
             <a:endParaRPr lang="en-US" sz="1600" dirty="0"/>
           </a:p>
@@ -5196,7 +5243,7 @@
                 <a:ea typeface="Calibri" pitchFamily="34" charset="-122"/>
                 <a:cs typeface="Calibri" pitchFamily="34" charset="-120"/>
               </a:rPr>
-              <a:t>Q: Why cap 32 and ssthresh 16? A: The cap stops a lossless run growing without bound; 16 is where doubling switches to linear growth.</a:t>
+              <a:t>Why not just a bigger AIMD cap? We tuned it to 128; the agent still wins.</a:t>
             </a:r>
             <a:endParaRPr lang="en-US" sz="1400" dirty="0"/>
           </a:p>
@@ -5267,7 +5314,7 @@
                 <a:ea typeface="Calibri" pitchFamily="34" charset="-122"/>
                 <a:cs typeface="Calibri" pitchFamily="34" charset="-120"/>
               </a:rPr>
-              <a:t>9. How we tested</a:t>
+              <a:t>9. Kernel</a:t>
             </a:r>
             <a:endParaRPr lang="en-US" sz="2600" dirty="0"/>
           </a:p>
@@ -5306,7 +5353,7 @@
                 <a:ea typeface="Calibri" pitchFamily="34" charset="-122"/>
                 <a:cs typeface="Calibri" pitchFamily="34" charset="-120"/>
               </a:rPr>
-              <a:t>Time on this slide: 0:40</a:t>
+              <a:t>Time on this slide: 1:00</a:t>
             </a:r>
             <a:endParaRPr lang="en-US" sz="1300" dirty="0"/>
           </a:p>
@@ -5459,7 +5506,7 @@
                 <a:ea typeface="Calibri" pitchFamily="34" charset="-122"/>
                 <a:cs typeface="Calibri" pitchFamily="34" charset="-120"/>
               </a:rPr>
-              <a:t>Three tools: a loss simulator inside the code (used for the benchmark), Linux tc/netem injecting real loss on loopback, and Wireshark/tshark.</a:t>
+              <a:t>Real Linux queues with netem, 500 real 512 byte packets.</a:t>
             </a:r>
             <a:endParaRPr lang="en-US" sz="1600" dirty="0"/>
           </a:p>
@@ -5480,7 +5527,7 @@
                 <a:ea typeface="Calibri" pitchFamily="34" charset="-122"/>
                 <a:cs typeface="Calibri" pitchFamily="34" charset="-120"/>
               </a:rPr>
-              <a:t>Windows Wireshark could not see WSL loopback, so we captured with tshark inside WSL and copied the file across.</a:t>
+              <a:t>Agent beats tuned AIMD by 65 to 83%. Kernel TCP is still faster, as expected.</a:t>
             </a:r>
             <a:endParaRPr lang="en-US" sz="1600" dirty="0"/>
           </a:p>
@@ -5558,7 +5605,7 @@
                 <a:ea typeface="Calibri" pitchFamily="34" charset="-122"/>
                 <a:cs typeface="Calibri" pitchFamily="34" charset="-120"/>
               </a:rPr>
-              <a:t>Q: Is the loss real? A: Benchmark and chat loss is simulated in the program. We also captured a real loopback run with tshark and netem loss.</a:t>
+              <a:t>Why is TCP faster? In-kernel, years of tuning, no user-space overhead.</a:t>
             </a:r>
             <a:endParaRPr lang="en-US" sz="1400" dirty="0"/>
           </a:p>
@@ -5629,7 +5676,7 @@
                 <a:ea typeface="Calibri" pitchFamily="34" charset="-122"/>
                 <a:cs typeface="Calibri" pitchFamily="34" charset="-120"/>
               </a:rPr>
-              <a:t>10. Benchmark results</a:t>
+              <a:t>10. Changing paths</a:t>
             </a:r>
             <a:endParaRPr lang="en-US" sz="2600" dirty="0"/>
           </a:p>
@@ -5668,7 +5715,7 @@
                 <a:ea typeface="Calibri" pitchFamily="34" charset="-122"/>
                 <a:cs typeface="Calibri" pitchFamily="34" charset="-120"/>
               </a:rPr>
-              <a:t>Time on this slide: 0:40</a:t>
+              <a:t>Time on this slide: 1:00</a:t>
             </a:r>
             <a:endParaRPr lang="en-US" sz="1300" dirty="0"/>
           </a:p>
@@ -5821,7 +5868,7 @@
                 <a:ea typeface="Calibri" pitchFamily="34" charset="-122"/>
                 <a:cs typeface="Calibri" pitchFamily="34" charset="-120"/>
               </a:rPr>
-              <a:t>62 of 62 packets were delivered at every loss level from 0 to 40 percent.</a:t>
+              <a:t>Bandwidth drop, rise, delay jump, hand-over: the agent is fastest in all four.</a:t>
             </a:r>
             <a:endParaRPr lang="en-US" sz="1600" dirty="0"/>
           </a:p>
@@ -5842,7 +5889,7 @@
                 <a:ea typeface="Calibri" pitchFamily="34" charset="-122"/>
                 <a:cs typeface="Calibri" pitchFamily="34" charset="-120"/>
               </a:rPr>
-              <a:t>Higher loss costs time and retransmissions, never correctness.</a:t>
+              <a:t>BBR-style is a strong opponent here and beats AIMD on most.</a:t>
             </a:r>
             <a:endParaRPr lang="en-US" sz="1600" dirty="0"/>
           </a:p>
@@ -5920,7 +5967,7 @@
                 <a:ea typeface="Calibri" pitchFamily="34" charset="-122"/>
                 <a:cs typeface="Calibri" pitchFamily="34" charset="-120"/>
               </a:rPr>
-              <a:t>Q: Single runs? A: Yes, the original benchmark ran each level once. Smart-RUDP evaluation uses 6 runs per scenario.</a:t>
+              <a:t>Is it real BBR? A simplified version in virtual time.</a:t>
             </a:r>
             <a:endParaRPr lang="en-US" sz="1400" dirty="0"/>
           </a:p>
@@ -5991,7 +6038,7 @@
                 <a:ea typeface="Calibri" pitchFamily="34" charset="-122"/>
                 <a:cs typeface="Calibri" pitchFamily="34" charset="-120"/>
               </a:rPr>
-              <a:t>11. Problems fixed</a:t>
+              <a:t>11. Fairness</a:t>
             </a:r>
             <a:endParaRPr lang="en-US" sz="2600" dirty="0"/>
           </a:p>
@@ -6030,7 +6077,7 @@
                 <a:ea typeface="Calibri" pitchFamily="34" charset="-122"/>
                 <a:cs typeface="Calibri" pitchFamily="34" charset="-120"/>
               </a:rPr>
-              <a:t>Time on this slide: 0:40</a:t>
+              <a:t>Time on this slide: 1:00</a:t>
             </a:r>
             <a:endParaRPr lang="en-US" sz="1300" dirty="0"/>
           </a:p>
@@ -6183,70 +6230,7 @@
                 <a:ea typeface="Calibri" pitchFamily="34" charset="-122"/>
                 <a:cs typeface="Calibri" pitchFamily="34" charset="-120"/>
               </a:rPr>
-              <a:t>Server stuck after a killed client: it hung 15.5 s; fix was to accept SYN in any state.</a:t>
-            </a:r>
-            <a:endParaRPr lang="en-US" sz="1600" dirty="0"/>
-          </a:p>
-          <a:p>
-            <a:pPr marL="342900" indent="-342900">
-              <a:spcAft>
-                <a:spcPts val="600"/>
-              </a:spcAft>
-              <a:buSzPct val="100000"/>
-              <a:buChar char="•"/>
-            </a:pPr>
-            <a:r>
-              <a:rPr lang="en-US" sz="1600" dirty="0">
-                <a:solidFill>
-                  <a:srgbClr val="1B2430"/>
-                </a:solidFill>
-                <a:latin typeface="Calibri" pitchFamily="34" charset="0"/>
-                <a:ea typeface="Calibri" pitchFamily="34" charset="-122"/>
-                <a:cs typeface="Calibri" pitchFamily="34" charset="-120"/>
-              </a:rPr>
-              <a:t>A leftover netem rule distorted results; we now check tc qdisc before each test.</a:t>
-            </a:r>
-            <a:endParaRPr lang="en-US" sz="1600" dirty="0"/>
-          </a:p>
-          <a:p>
-            <a:pPr marL="342900" indent="-342900">
-              <a:spcAft>
-                <a:spcPts val="600"/>
-              </a:spcAft>
-              <a:buSzPct val="100000"/>
-              <a:buChar char="•"/>
-            </a:pPr>
-            <a:r>
-              <a:rPr lang="en-US" sz="1600" dirty="0">
-                <a:solidFill>
-                  <a:srgbClr val="1B2430"/>
-                </a:solidFill>
-                <a:latin typeface="Calibri" pitchFamily="34" charset="0"/>
-                <a:ea typeface="Calibri" pitchFamily="34" charset="-122"/>
-                <a:cs typeface="Calibri" pitchFamily="34" charset="-120"/>
-              </a:rPr>
-              <a:t>Windows Wireshark saw nothing: capture inside WSL.</a:t>
-            </a:r>
-            <a:endParaRPr lang="en-US" sz="1600" dirty="0"/>
-          </a:p>
-          <a:p>
-            <a:pPr marL="342900" indent="-342900">
-              <a:spcAft>
-                <a:spcPts val="600"/>
-              </a:spcAft>
-              <a:buSzPct val="100000"/>
-              <a:buChar char="•"/>
-            </a:pPr>
-            <a:r>
-              <a:rPr lang="en-US" sz="1600" dirty="0">
-                <a:solidFill>
-                  <a:srgbClr val="1B2430"/>
-                </a:solidFill>
-                <a:latin typeface="Calibri" pitchFamily="34" charset="0"/>
-                <a:ea typeface="Calibri" pitchFamily="34" charset="-122"/>
-                <a:cs typeface="Calibri" pitchFamily="34" charset="-120"/>
-              </a:rPr>
-              <a:t>Benchmark script portability: replaced date and grep tricks with awk and sed.</a:t>
+              <a:t>Next to a kernel TCP flow the agent takes 24 to 34% and TCP keeps the rest. Jain fairness 0.84 against 0.64 for AIMD with unequal RTTs.</a:t>
             </a:r>
             <a:endParaRPr lang="en-US" sz="1600" dirty="0"/>
           </a:p>
@@ -6324,7 +6308,7 @@
                 <a:ea typeface="Calibri" pitchFamily="34" charset="-122"/>
                 <a:cs typeface="Calibri" pitchFamily="34" charset="-120"/>
               </a:rPr>
-              <a:t>Say these quickly: it shows real debugging, which is what separates a project from a lab.</a:t>
+              <a:t>Is it polite? More pushy than AIMD; we have an optional polite mode.</a:t>
             </a:r>
             <a:endParaRPr lang="en-US" sz="1400" dirty="0"/>
           </a:p>
@@ -6395,7 +6379,7 @@
                 <a:ea typeface="Calibri" pitchFamily="34" charset="-122"/>
                 <a:cs typeface="Calibri" pitchFamily="34" charset="-120"/>
               </a:rPr>
-              <a:t>12. Literature</a:t>
+              <a:t>12. Two machines</a:t>
             </a:r>
             <a:endParaRPr lang="en-US" sz="2600" dirty="0"/>
           </a:p>
@@ -6434,7 +6418,7 @@
                 <a:ea typeface="Calibri" pitchFamily="34" charset="-122"/>
                 <a:cs typeface="Calibri" pitchFamily="34" charset="-120"/>
               </a:rPr>
-              <a:t>Time on this slide: 0:30</a:t>
+              <a:t>Time on this slide: 0:45</a:t>
             </a:r>
             <a:endParaRPr lang="en-US" sz="1300" dirty="0"/>
           </a:p>
@@ -6579,7 +6563,7 @@
               <a:buChar char="•"/>
             </a:pPr>
             <a:r>
-              <a:rPr lang="en-US" sz="1400" dirty="0">
+              <a:rPr lang="en-US" sz="1600" dirty="0">
                 <a:solidFill>
                   <a:srgbClr val="1B2430"/>
                 </a:solidFill>
@@ -6587,9 +6571,9 @@
                 <a:ea typeface="Calibri" pitchFamily="34" charset="-122"/>
                 <a:cs typeface="Calibri" pitchFamily="34" charset="-120"/>
               </a:rPr>
-              <a:t>Jacobson and Karels 1988 is the origin of AIMD; Chiu and Jain 1989 explains why it converges fairly.</a:t>
-            </a:r>
-            <a:endParaRPr lang="en-US" sz="1400" dirty="0"/>
+              <a:t>Two laptops on different networks over Tailscale, 79 ms RTT. Every completed transfer delivered all 4000 packets; in rep 1 the agent took 4.7 s.</a:t>
+            </a:r>
+            <a:endParaRPr lang="en-US" sz="1600" dirty="0"/>
           </a:p>
           <a:p>
             <a:pPr marL="342900" indent="-342900">
@@ -6600,7 +6584,7 @@
               <a:buChar char="•"/>
             </a:pPr>
             <a:r>
-              <a:rPr lang="en-US" sz="1400" dirty="0">
+              <a:rPr lang="en-US" sz="1600" dirty="0">
                 <a:solidFill>
                   <a:srgbClr val="1B2430"/>
                 </a:solidFill>
@@ -6608,51 +6592,9 @@
                 <a:ea typeface="Calibri" pitchFamily="34" charset="-122"/>
                 <a:cs typeface="Calibri" pitchFamily="34" charset="-120"/>
               </a:rPr>
-              <a:t>RFC 5681 is the standard; CUBIC is future work; QUIC and RFC 9000 are reliable transport over UDP in production.</a:t>
-            </a:r>
-            <a:endParaRPr lang="en-US" sz="1400" dirty="0"/>
-          </a:p>
-          <a:p>
-            <a:pPr marL="342900" indent="-342900">
-              <a:spcAft>
-                <a:spcPts val="600"/>
-              </a:spcAft>
-              <a:buSzPct val="100000"/>
-              <a:buChar char="•"/>
-            </a:pPr>
-            <a:r>
-              <a:rPr lang="en-US" sz="1400" dirty="0">
-                <a:solidFill>
-                  <a:srgbClr val="1B2430"/>
-                </a:solidFill>
-                <a:latin typeface="Calibri" pitchFamily="34" charset="0"/>
-                <a:ea typeface="Calibri" pitchFamily="34" charset="-122"/>
-                <a:cs typeface="Calibri" pitchFamily="34" charset="-120"/>
-              </a:rPr>
-              <a:t>The AI part comes from Midhula and Arun Raj Kumar (2024) and Cao et al. (2023, DRLFcc): deep reinforcement learning for congestion control. Smart-RUDP applies the same idea with a smaller tabular Q-learning agent.</a:t>
-            </a:r>
-            <a:endParaRPr lang="en-US" sz="1400" dirty="0"/>
-          </a:p>
-          <a:p>
-            <a:pPr marL="342900" indent="-342900">
-              <a:spcAft>
-                <a:spcPts val="600"/>
-              </a:spcAft>
-              <a:buSzPct val="100000"/>
-              <a:buChar char="•"/>
-            </a:pPr>
-            <a:r>
-              <a:rPr lang="en-US" sz="1400" dirty="0">
-                <a:solidFill>
-                  <a:srgbClr val="1B2430"/>
-                </a:solidFill>
-                <a:latin typeface="Calibri" pitchFamily="34" charset="0"/>
-                <a:ea typeface="Calibri" pitchFamily="34" charset="-122"/>
-                <a:cs typeface="Calibri" pitchFamily="34" charset="-120"/>
-              </a:rPr>
-              <a:t>Key researcher: Van Jacobson.</a:t>
-            </a:r>
-            <a:endParaRPr lang="en-US" sz="1400" dirty="0"/>
+              <a:t>The relay drifted, so no ranking from later reps.</a:t>
+            </a:r>
+            <a:endParaRPr lang="en-US" sz="1600" dirty="0"/>
           </a:p>
         </p:txBody>
       </p:sp>
@@ -6728,7 +6670,7 @@
                 <a:ea typeface="Calibri" pitchFamily="34" charset="-122"/>
                 <a:cs typeface="Calibri" pitchFamily="34" charset="-120"/>
               </a:rPr>
-              <a:t>Q: Why AIMD? A: Chiu and Jain show it converges to a fair share. Q: Are those papers deep RL and yours is not? A: Yes; we used a lookup table, which is simpler and inspectable.</a:t>
+              <a:t>Why only one clean rep? The relayed path drifted; 4 of 20 runs timed out.</a:t>
             </a:r>
             <a:endParaRPr lang="en-US" sz="1400" dirty="0"/>
           </a:p>
@@ -6799,7 +6741,7 @@
                 <a:ea typeface="Calibri" pitchFamily="34" charset="-122"/>
                 <a:cs typeface="Calibri" pitchFamily="34" charset="-120"/>
               </a:rPr>
-              <a:t>13. Network design</a:t>
+              <a:t>13. RUDP Drop</a:t>
             </a:r>
             <a:endParaRPr lang="en-US" sz="2600" dirty="0"/>
           </a:p>
@@ -6838,7 +6780,7 @@
                 <a:ea typeface="Calibri" pitchFamily="34" charset="-122"/>
                 <a:cs typeface="Calibri" pitchFamily="34" charset="-120"/>
               </a:rPr>
-              <a:t>Time on this slide: 0:50</a:t>
+              <a:t>Time on this slide: 1:00</a:t>
             </a:r>
             <a:endParaRPr lang="en-US" sz="1300" dirty="0"/>
           </a:p>
@@ -6991,49 +6933,7 @@
                 <a:ea typeface="Calibri" pitchFamily="34" charset="-122"/>
                 <a:cs typeface="Calibri" pitchFamily="34" charset="-120"/>
               </a:rPr>
-              <a:t>Four routers, OSPF area 0: R1, R2, R3 form a triangle and R4 is a branch.</a:t>
-            </a:r>
-            <a:endParaRPr lang="en-US" sz="1600" dirty="0"/>
-          </a:p>
-          <a:p>
-            <a:pPr marL="342900" indent="-342900">
-              <a:spcAft>
-                <a:spcPts val="600"/>
-              </a:spcAft>
-              <a:buSzPct val="100000"/>
-              <a:buChar char="•"/>
-            </a:pPr>
-            <a:r>
-              <a:rPr lang="en-US" sz="1600" dirty="0">
-                <a:solidFill>
-                  <a:srgbClr val="1B2430"/>
-                </a:solidFill>
-                <a:latin typeface="Calibri" pitchFamily="34" charset="0"/>
-                <a:ea typeface="Calibri" pitchFamily="34" charset="-122"/>
-                <a:cs typeface="Calibri" pitchFamily="34" charset="-120"/>
-              </a:rPr>
-              <a:t>Two VLANs with router-on-a-stick, DHCP on R1 and R4, and an access list blocking student to staff.</a:t>
-            </a:r>
-            <a:endParaRPr lang="en-US" sz="1600" dirty="0"/>
-          </a:p>
-          <a:p>
-            <a:pPr marL="342900" indent="-342900">
-              <a:spcAft>
-                <a:spcPts val="600"/>
-              </a:spcAft>
-              <a:buSzPct val="100000"/>
-              <a:buChar char="•"/>
-            </a:pPr>
-            <a:r>
-              <a:rPr lang="en-US" sz="1600" dirty="0">
-                <a:solidFill>
-                  <a:srgbClr val="1B2430"/>
-                </a:solidFill>
-                <a:latin typeface="Calibri" pitchFamily="34" charset="0"/>
-                <a:ea typeface="Calibri" pitchFamily="34" charset="-122"/>
-                <a:cs typeface="Calibri" pitchFamily="34" charset="-120"/>
-              </a:rPr>
-              <a:t>Server LAN is metric 2 via R3; branch is metric 3 via R2. Failover: shutting R1 Gi0/2 still gave 70 of 71 pings, rerouted via R2.</a:t>
+              <a:t>Drop in a file, pick a network, race three policies. Example: 13.0 s neural against 26.7 s AIMD, byte-identical by SHA-256.</a:t>
             </a:r>
             <a:endParaRPr lang="en-US" sz="1600" dirty="0"/>
           </a:p>
@@ -7111,7 +7011,7 @@
                 <a:ea typeface="Calibri" pitchFamily="34" charset="-122"/>
                 <a:cs typeface="Calibri" pitchFamily="34" charset="-120"/>
               </a:rPr>
-              <a:t>Q: Does RUDP run inside Packet Tracer? A: No, it cannot run C. Packet Tracer validates the network design; protocol is validated on one machine plus Wireshark.</a:t>
+              <a:t>Real stack? Yes: C sender, server and impairment proxy.</a:t>
             </a:r>
             <a:endParaRPr lang="en-US" sz="1400" dirty="0"/>
           </a:p>
@@ -7182,7 +7082,7 @@
                 <a:ea typeface="Calibri" pitchFamily="34" charset="-122"/>
                 <a:cs typeface="Calibri" pitchFamily="34" charset="-120"/>
               </a:rPr>
-              <a:t>14. Packet Tracer results</a:t>
+              <a:t>14. Chat</a:t>
             </a:r>
             <a:endParaRPr lang="en-US" sz="2600" dirty="0"/>
           </a:p>
@@ -7221,7 +7121,7 @@
                 <a:ea typeface="Calibri" pitchFamily="34" charset="-122"/>
                 <a:cs typeface="Calibri" pitchFamily="34" charset="-120"/>
               </a:rPr>
-              <a:t>Time on this slide: 0:40</a:t>
+              <a:t>Time on this slide: 1:00</a:t>
             </a:r>
             <a:endParaRPr lang="en-US" sz="1300" dirty="0"/>
           </a:p>
@@ -7374,7 +7274,7 @@
                 <a:ea typeface="Calibri" pitchFamily="34" charset="-122"/>
                 <a:cs typeface="Calibri" pitchFamily="34" charset="-120"/>
               </a:rPr>
-              <a:t>Left: OSPF routes on R1 with the metrics. Middle: the link-failure test, 70 of 71 pings. Right: the ACL, where the student gets destination unreachable to staff but the server is still reachable (TTL 126).</a:t>
+              <a:t>Chat over RUDP between two machines. Live counters show ACKs and retransmissions; the loss slider shows recovery.</a:t>
             </a:r>
             <a:endParaRPr lang="en-US" sz="1600" dirty="0"/>
           </a:p>
@@ -7452,7 +7352,7 @@
                 <a:ea typeface="Calibri" pitchFamily="34" charset="-122"/>
                 <a:cs typeface="Calibri" pitchFamily="34" charset="-120"/>
               </a:rPr>
-              <a:t>If asked to show it live: have the .pkt file open and follow Demo_Steps.txt.</a:t>
+              <a:t>Does it run on the internet? Yes, linked over Tailscale.</a:t>
             </a:r>
             <a:endParaRPr lang="en-US" sz="1400" dirty="0"/>
           </a:p>
@@ -7523,7 +7423,7 @@
                 <a:ea typeface="Calibri" pitchFamily="34" charset="-122"/>
                 <a:cs typeface="Calibri" pitchFamily="34" charset="-120"/>
               </a:rPr>
-              <a:t>15. Smart-RUDP design</a:t>
+              <a:t>15. Packet Tracer</a:t>
             </a:r>
             <a:endParaRPr lang="en-US" sz="2600" dirty="0"/>
           </a:p>
@@ -7715,49 +7615,7 @@
                 <a:ea typeface="Calibri" pitchFamily="34" charset="-122"/>
                 <a:cs typeface="Calibri" pitchFamily="34" charset="-120"/>
               </a:rPr>
-              <a:t>Q-learning with 80 states (RTT ratio, loss fraction, window size), sampled once per RTT.</a:t>
-            </a:r>
-            <a:endParaRPr lang="en-US" sz="1600" dirty="0"/>
-          </a:p>
-          <a:p>
-            <a:pPr marL="342900" indent="-342900">
-              <a:spcAft>
-                <a:spcPts val="600"/>
-              </a:spcAft>
-              <a:buSzPct val="100000"/>
-              <a:buChar char="•"/>
-            </a:pPr>
-            <a:r>
-              <a:rPr lang="en-US" sz="1600" dirty="0">
-                <a:solidFill>
-                  <a:srgbClr val="1B2430"/>
-                </a:solidFill>
-                <a:latin typeface="Calibri" pitchFamily="34" charset="0"/>
-                <a:ea typeface="Calibri" pitchFamily="34" charset="-122"/>
-                <a:cs typeface="Calibri" pitchFamily="34" charset="-120"/>
-              </a:rPr>
-              <a:t>Five actions: multiply the window by 0.5, 0.85, 1.0, 1.15 or 1.5.</a:t>
-            </a:r>
-            <a:endParaRPr lang="en-US" sz="1600" dirty="0"/>
-          </a:p>
-          <a:p>
-            <a:pPr marL="342900" indent="-342900">
-              <a:spcAft>
-                <a:spcPts val="600"/>
-              </a:spcAft>
-              <a:buSzPct val="100000"/>
-              <a:buChar char="•"/>
-            </a:pPr>
-            <a:r>
-              <a:rPr lang="en-US" sz="1600" dirty="0">
-                <a:solidFill>
-                  <a:srgbClr val="1B2430"/>
-                </a:solidFill>
-                <a:latin typeface="Calibri" pitchFamily="34" charset="0"/>
-                <a:ea typeface="Calibri" pitchFamily="34" charset="-122"/>
-                <a:cs typeface="Calibri" pitchFamily="34" charset="-120"/>
-              </a:rPr>
-              <a:t>Reward: throughput gained, minus delay growth, minus retransmissions. Same Go-Back-N reliability; only the window policy changes. Paths are emulated in the program: 5G-like, lossy wireless, satellite-like.</a:t>
+              <a:t>Four routers, OSPF area 0, two VLANs, DHCP, an ACL, and failover: shutting R1 Gi0/2 reroutes through R2, 70 of 71 pings succeed.</a:t>
             </a:r>
             <a:endParaRPr lang="en-US" sz="1600" dirty="0"/>
           </a:p>
@@ -7835,7 +7693,7 @@
                 <a:ea typeface="Calibri" pitchFamily="34" charset="-122"/>
                 <a:cs typeface="Calibri" pitchFamily="34" charset="-120"/>
               </a:rPr>
-              <a:t>Q: Is it really learning? A: Yes, 40 training episodes; the learning-curve figure shows it. It is small and tabular with limited training.</a:t>
+              <a:t>Why separate from the code? Packet Tracer cannot run C programs.</a:t>
             </a:r>
             <a:endParaRPr lang="en-US" sz="1400" dirty="0"/>
           </a:p>
@@ -7906,7 +7764,7 @@
                 <a:ea typeface="Calibri" pitchFamily="34" charset="-122"/>
                 <a:cs typeface="Calibri" pitchFamily="34" charset="-120"/>
               </a:rPr>
-              <a:t>16. The AI agent in our code</a:t>
+              <a:t>16. Wireshark</a:t>
             </a:r>
             <a:endParaRPr lang="en-US" sz="2600" dirty="0"/>
           </a:p>
@@ -7945,7 +7803,7 @@
                 <a:ea typeface="Calibri" pitchFamily="34" charset="-122"/>
                 <a:cs typeface="Calibri" pitchFamily="34" charset="-120"/>
               </a:rPr>
-              <a:t>Time on this slide: 1:00</a:t>
+              <a:t>Time on this slide: 0:40</a:t>
             </a:r>
             <a:endParaRPr lang="en-US" sz="1300" dirty="0"/>
           </a:p>
@@ -8090,7 +7948,7 @@
               <a:buChar char="•"/>
             </a:pPr>
             <a:r>
-              <a:rPr lang="en-US" sz="1400" dirty="0">
+              <a:rPr lang="en-US" sz="1600" dirty="0">
                 <a:solidFill>
                   <a:srgbClr val="1B2430"/>
                 </a:solidFill>
@@ -8098,114 +7956,9 @@
                 <a:ea typeface="Calibri" pitchFamily="34" charset="-122"/>
                 <a:cs typeface="Calibri" pitchFamily="34" charset="-120"/>
               </a:rPr>
-              <a:t>This is the agent itself. Left: rl_cc.h, 73 lines of C. The state is 80 buckets of RTT ratio, loss and window size.</a:t>
-            </a:r>
-            <a:endParaRPr lang="en-US" sz="1400" dirty="0"/>
-          </a:p>
-          <a:p>
-            <a:pPr marL="342900" indent="-342900">
-              <a:spcAft>
-                <a:spcPts val="600"/>
-              </a:spcAft>
-              <a:buSzPct val="100000"/>
-              <a:buChar char="•"/>
-            </a:pPr>
-            <a:r>
-              <a:rPr lang="en-US" sz="1400" dirty="0">
-                <a:solidFill>
-                  <a:srgbClr val="1B2430"/>
-                </a:solidFill>
-                <a:latin typeface="Calibri" pitchFamily="34" charset="0"/>
-                <a:ea typeface="Calibri" pitchFamily="34" charset="-122"/>
-                <a:cs typeface="Calibri" pitchFamily="34" charset="-120"/>
-              </a:rPr>
-              <a:t>choose picks one of five window multipliers, usually the best, sometimes random so it keeps exploring.</a:t>
-            </a:r>
-            <a:endParaRPr lang="en-US" sz="1400" dirty="0"/>
-          </a:p>
-          <a:p>
-            <a:pPr marL="342900" indent="-342900">
-              <a:spcAft>
-                <a:spcPts val="600"/>
-              </a:spcAft>
-              <a:buSzPct val="100000"/>
-              <a:buChar char="•"/>
-            </a:pPr>
-            <a:r>
-              <a:rPr lang="en-US" sz="1400" dirty="0">
-                <a:solidFill>
-                  <a:srgbClr val="1B2430"/>
-                </a:solidFill>
-                <a:latin typeface="Calibri" pitchFamily="34" charset="0"/>
-                <a:ea typeface="Calibri" pitchFamily="34" charset="-122"/>
-                <a:cs typeface="Calibri" pitchFamily="34" charset="-120"/>
-              </a:rPr>
-              <a:t>update is the Q-learning rule: move the value of the action we took toward the reward plus the best value of the next state.</a:t>
-            </a:r>
-            <a:endParaRPr lang="en-US" sz="1400" dirty="0"/>
-          </a:p>
-          <a:p>
-            <a:pPr marL="342900" indent="-342900">
-              <a:spcAft>
-                <a:spcPts val="600"/>
-              </a:spcAft>
-              <a:buSzPct val="100000"/>
-              <a:buChar char="•"/>
-            </a:pPr>
-            <a:r>
-              <a:rPr lang="en-US" sz="1400" dirty="0">
-                <a:solidFill>
-                  <a:srgbClr val="1B2430"/>
-                </a:solidFill>
-                <a:latin typeface="Calibri" pitchFamily="34" charset="0"/>
-                <a:ea typeface="Calibri" pitchFamily="34" charset="-122"/>
-                <a:cs typeface="Calibri" pitchFamily="34" charset="-120"/>
-              </a:rPr>
-              <a:t>Right: the loop in smart_client.c. Once per RTT it computes the reward, throughput minus delay growth minus loss, updates the table, picks the next action and scales the window.</a:t>
-            </a:r>
-            <a:endParaRPr lang="en-US" sz="1400" dirty="0"/>
-          </a:p>
-          <a:p>
-            <a:pPr marL="342900" indent="-342900">
-              <a:spcAft>
-                <a:spcPts val="600"/>
-              </a:spcAft>
-              <a:buSzPct val="100000"/>
-              <a:buChar char="•"/>
-            </a:pPr>
-            <a:r>
-              <a:rPr lang="en-US" sz="1400" dirty="0">
-                <a:solidFill>
-                  <a:srgbClr val="1B2430"/>
-                </a:solidFill>
-                <a:latin typeface="Calibri" pitchFamily="34" charset="0"/>
-                <a:ea typeface="Calibri" pitchFamily="34" charset="-122"/>
-                <a:cs typeface="Calibri" pitchFamily="34" charset="-120"/>
-              </a:rPr>
-              <a:t>The code on the slide is simplified; the real files are in the repo.</a:t>
-            </a:r>
-            <a:endParaRPr lang="en-US" sz="1400" dirty="0"/>
-          </a:p>
-          <a:p>
-            <a:pPr marL="342900" indent="-342900">
-              <a:spcAft>
-                <a:spcPts val="600"/>
-              </a:spcAft>
-              <a:buSzPct val="100000"/>
-              <a:buChar char="•"/>
-            </a:pPr>
-            <a:r>
-              <a:rPr lang="en-US" sz="1400" dirty="0">
-                <a:solidFill>
-                  <a:srgbClr val="1B2430"/>
-                </a:solidFill>
-                <a:latin typeface="Calibri" pitchFamily="34" charset="0"/>
-                <a:ea typeface="Calibri" pitchFamily="34" charset="-122"/>
-                <a:cs typeface="Calibri" pitchFamily="34" charset="-120"/>
-              </a:rPr>
-              <a:t>We also built a deep version: web/dqn.py is a small neural network, two hidden layers of 32, trained with DQN in the same simulator. It reads continuous inputs instead of buckets.</a:t>
-            </a:r>
-            <a:endParaRPr lang="en-US" sz="1400" dirty="0"/>
+              <a:t>Our Lua dissector decodes seq, ack, flags and CRC. Left, the handshake; right, filtering one sequence number shows retransmissions.</a:t>
+            </a:r>
+            <a:endParaRPr lang="en-US" sz="1600" dirty="0"/>
           </a:p>
         </p:txBody>
       </p:sp>
@@ -8281,7 +8034,7 @@
                 <a:ea typeface="Calibri" pitchFamily="34" charset="-122"/>
                 <a:cs typeface="Calibri" pitchFamily="34" charset="-120"/>
               </a:rPr>
-              <a:t>Q: Is this deep RL? A: The C agent is tabular. The chat also has a deep agent, a small DQN in numpy (5-32-32-5). Q: Does deep beat the table? A: Modestly: 3.20 s vs 3.73 s mean on 48 unseen paths, faster on 19, slower on 6. Q: Any problem? A: Training is seed-sensitive: 1 of 4 seeds failed, so we select on validation paths. It is simulated and not in the C code. Q: Where is it trained? A: web/train.py for the chat, the smart client trains online for the main experiments; table in results/q_chat.txt.</a:t>
+              <a:t>Is it a real capture? Yes, from the running protocol on loopback.</a:t>
             </a:r>
             <a:endParaRPr lang="en-US" sz="1400" dirty="0"/>
           </a:p>
@@ -8352,7 +8105,7 @@
                 <a:ea typeface="Calibri" pitchFamily="34" charset="-122"/>
                 <a:cs typeface="Calibri" pitchFamily="34" charset="-120"/>
               </a:rPr>
-              <a:t>17. Smart-RUDP result</a:t>
+              <a:t>17. Protocol</a:t>
             </a:r>
             <a:endParaRPr lang="en-US" sz="2600" dirty="0"/>
           </a:p>
@@ -8536,7 +8289,7 @@
               <a:buChar char="•"/>
             </a:pPr>
             <a:r>
-              <a:rPr lang="en-US" sz="1400" dirty="0">
+              <a:rPr lang="en-US" sz="1600" dirty="0">
                 <a:solidFill>
                   <a:srgbClr val="1B2430"/>
                 </a:solidFill>
@@ -8544,72 +8297,9 @@
                 <a:ea typeface="Calibri" pitchFamily="34" charset="-122"/>
                 <a:cs typeface="Calibri" pitchFamily="34" charset="-120"/>
               </a:rPr>
-              <a:t>Be honest: it did not beat AIMD. Plus 63 percent time on 5G-like, plus 10 percent on satellite, a tie on the lossy path.</a:t>
-            </a:r>
-            <a:endParaRPr lang="en-US" sz="1400" dirty="0"/>
-          </a:p>
-          <a:p>
-            <a:pPr marL="342900" indent="-342900">
-              <a:spcAft>
-                <a:spcPts val="600"/>
-              </a:spcAft>
-              <a:buSzPct val="100000"/>
-              <a:buChar char="•"/>
-            </a:pPr>
-            <a:r>
-              <a:rPr lang="en-US" sz="1400" dirty="0">
-                <a:solidFill>
-                  <a:srgbClr val="1B2430"/>
-                </a:solidFill>
-                <a:latin typeface="Calibri" pitchFamily="34" charset="0"/>
-                <a:ea typeface="Calibri" pitchFamily="34" charset="-122"/>
-                <a:cs typeface="Calibri" pitchFamily="34" charset="-120"/>
-              </a:rPr>
-              <a:t>It used somewhat fewer retransmissions on two paths, within run-to-run noise.</a:t>
-            </a:r>
-            <a:endParaRPr lang="en-US" sz="1400" dirty="0"/>
-          </a:p>
-          <a:p>
-            <a:pPr marL="342900" indent="-342900">
-              <a:spcAft>
-                <a:spcPts val="600"/>
-              </a:spcAft>
-              <a:buSzPct val="100000"/>
-              <a:buChar char="•"/>
-            </a:pPr>
-            <a:r>
-              <a:rPr lang="en-US" sz="1400" dirty="0">
-                <a:solidFill>
-                  <a:srgbClr val="1B2430"/>
-                </a:solidFill>
-                <a:latin typeface="Calibri" pitchFamily="34" charset="0"/>
-                <a:ea typeface="Calibri" pitchFamily="34" charset="-122"/>
-                <a:cs typeface="Calibri" pitchFamily="34" charset="-120"/>
-              </a:rPr>
-              <a:t>Earlier training rounds were much worse; this is the final configuration. The finding is that a simple learner does not beat a tuned rule.</a:t>
-            </a:r>
-            <a:endParaRPr lang="en-US" sz="1400" dirty="0"/>
-          </a:p>
-          <a:p>
-            <a:pPr marL="342900" indent="-342900">
-              <a:spcAft>
-                <a:spcPts val="600"/>
-              </a:spcAft>
-              <a:buSzPct val="100000"/>
-              <a:buChar char="•"/>
-            </a:pPr>
-            <a:r>
-              <a:rPr lang="en-US" sz="1400" dirty="0">
-                <a:solidFill>
-                  <a:srgbClr val="1B2430"/>
-                </a:solidFill>
-                <a:latin typeface="Calibri" pitchFamily="34" charset="0"/>
-                <a:ea typeface="Calibri" pitchFamily="34" charset="-122"/>
-                <a:cs typeface="Calibri" pitchFamily="34" charset="-120"/>
-              </a:rPr>
-              <a:t>In the chat, retrained for bursty random-loss traffic, it does beat AIMD on most simulated paths; mention that on slide 19.</a:t>
-            </a:r>
-            <a:endParaRPr lang="en-US" sz="1400" dirty="0"/>
+              <a:t>13-byte header, three-way handshake, CRC-16 on every packet; corrupt packets are dropped and recovered.</a:t>
+            </a:r>
+            <a:endParaRPr lang="en-US" sz="1600" dirty="0"/>
           </a:p>
         </p:txBody>
       </p:sp>
@@ -8685,7 +8375,7 @@
                 <a:ea typeface="Calibri" pitchFamily="34" charset="-122"/>
                 <a:cs typeface="Calibri" pitchFamily="34" charset="-120"/>
               </a:rPr>
-              <a:t>Q: Then what was the point? A: The experiment. We tested whether a learned window helps and report the answer, including the negative result.</a:t>
+              <a:t>Why CRC-16? A byte-sum accepted corrupt packets; CRC-16 accepted 0 of 333k.</a:t>
             </a:r>
             <a:endParaRPr lang="en-US" sz="1400" dirty="0"/>
           </a:p>
@@ -9544,7 +9234,7 @@
                           <a:ea typeface="Calibri" pitchFamily="34" charset="-122"/>
                           <a:cs typeface="Calibri" pitchFamily="34" charset="-120"/>
                         </a:rPr>
-                        <a:t>More evidence: baselines, SACK, reordering</a:t>
+                        <a:t>How we tested</a:t>
                       </a:r>
                       <a:endParaRPr lang="en-US" sz="1200" dirty="0">
                         <a:latin typeface="Calibri" charset="0"/>
@@ -9609,7 +9299,7 @@
                           <a:ea typeface="Calibri" pitchFamily="34" charset="-122"/>
                           <a:cs typeface="Calibri" pitchFamily="34" charset="-120"/>
                         </a:rPr>
-                        <a:t>1:00</a:t>
+                        <a:t>0:40</a:t>
                       </a:r>
                       <a:endParaRPr lang="en-US" sz="1200" dirty="0">
                         <a:latin typeface="Calibri" charset="0"/>
@@ -9741,7 +9431,7 @@
                           <a:ea typeface="Calibri" pitchFamily="34" charset="-122"/>
                           <a:cs typeface="Calibri" pitchFamily="34" charset="-120"/>
                         </a:rPr>
-                        <a:t>The problem</a:t>
+                        <a:t>Why</a:t>
                       </a:r>
                       <a:endParaRPr lang="en-US" sz="1200" dirty="0">
                         <a:latin typeface="Calibri" charset="0"/>
@@ -9936,7 +9626,7 @@
                           <a:ea typeface="Calibri" pitchFamily="34" charset="-122"/>
                           <a:cs typeface="Calibri" pitchFamily="34" charset="-120"/>
                         </a:rPr>
-                        <a:t>Neural agent in the C transport</a:t>
+                        <a:t>Issues</a:t>
                       </a:r>
                       <a:endParaRPr lang="en-US" sz="1200" dirty="0">
                         <a:latin typeface="Calibri" charset="0"/>
@@ -10001,7 +9691,7 @@
                           <a:ea typeface="Calibri" pitchFamily="34" charset="-122"/>
                           <a:cs typeface="Calibri" pitchFamily="34" charset="-120"/>
                         </a:rPr>
-                        <a:t>1:00</a:t>
+                        <a:t>0:50</a:t>
                       </a:r>
                       <a:endParaRPr lang="en-US" sz="1200" dirty="0">
                         <a:latin typeface="Calibri" charset="0"/>
@@ -10133,7 +9823,7 @@
                           <a:ea typeface="Calibri" pitchFamily="34" charset="-122"/>
                           <a:cs typeface="Calibri" pitchFamily="34" charset="-120"/>
                         </a:rPr>
-                        <a:t>Why we built it</a:t>
+                        <a:t>What we built</a:t>
                       </a:r>
                       <a:endParaRPr lang="en-US" sz="1200" dirty="0">
                         <a:latin typeface="Calibri" charset="0"/>
@@ -10198,7 +9888,7 @@
                           <a:ea typeface="Calibri" pitchFamily="34" charset="-122"/>
                           <a:cs typeface="Calibri" pitchFamily="34" charset="-120"/>
                         </a:rPr>
-                        <a:t>0:50</a:t>
+                        <a:t>0:40</a:t>
                       </a:r>
                       <a:endParaRPr lang="en-US" sz="1200" dirty="0">
                         <a:latin typeface="Calibri" charset="0"/>
@@ -10328,7 +10018,7 @@
                           <a:ea typeface="Calibri" pitchFamily="34" charset="-122"/>
                           <a:cs typeface="Calibri" pitchFamily="34" charset="-120"/>
                         </a:rPr>
-                        <a:t>Fairness, ablations, chat fixes</a:t>
+                        <a:t>Changes</a:t>
                       </a:r>
                       <a:endParaRPr lang="en-US" sz="1200" dirty="0">
                         <a:latin typeface="Calibri" charset="0"/>
@@ -10393,7 +10083,7 @@
                           <a:ea typeface="Calibri" pitchFamily="34" charset="-122"/>
                           <a:cs typeface="Calibri" pitchFamily="34" charset="-120"/>
                         </a:rPr>
-                        <a:t>0:50</a:t>
+                        <a:t>1:00</a:t>
                       </a:r>
                       <a:endParaRPr lang="en-US" sz="1200" dirty="0">
                         <a:latin typeface="Calibri" charset="0"/>
@@ -10525,7 +10215,7 @@
                           <a:ea typeface="Calibri" pitchFamily="34" charset="-122"/>
                           <a:cs typeface="Calibri" pitchFamily="34" charset="-120"/>
                         </a:rPr>
-                        <a:t>What we built</a:t>
+                        <a:t>Headline results</a:t>
                       </a:r>
                       <a:endParaRPr lang="en-US" sz="1200" dirty="0">
                         <a:latin typeface="Calibri" charset="0"/>
@@ -10590,7 +10280,7 @@
                           <a:ea typeface="Calibri" pitchFamily="34" charset="-122"/>
                           <a:cs typeface="Calibri" pitchFamily="34" charset="-120"/>
                         </a:rPr>
-                        <a:t>0:40</a:t>
+                        <a:t>1:00</a:t>
                       </a:r>
                       <a:endParaRPr lang="en-US" sz="1200" dirty="0">
                         <a:latin typeface="Calibri" charset="0"/>
@@ -10720,7 +10410,7 @@
                           <a:ea typeface="Calibri" pitchFamily="34" charset="-122"/>
                           <a:cs typeface="Calibri" pitchFamily="34" charset="-120"/>
                         </a:rPr>
-                        <a:t>Safety net: hand over to AIMD</a:t>
+                        <a:t>Limits</a:t>
                       </a:r>
                       <a:endParaRPr lang="en-US" sz="1200" dirty="0">
                         <a:latin typeface="Calibri" charset="0"/>
@@ -10917,7 +10607,7 @@
                           <a:ea typeface="Calibri" pitchFamily="34" charset="-122"/>
                           <a:cs typeface="Calibri" pitchFamily="34" charset="-120"/>
                         </a:rPr>
-                        <a:t>Packet header</a:t>
+                        <a:t>Up to 83% less time</a:t>
                       </a:r>
                       <a:endParaRPr lang="en-US" sz="1200" dirty="0">
                         <a:latin typeface="Calibri" charset="0"/>
@@ -11112,7 +10802,7 @@
                           <a:ea typeface="Calibri" pitchFamily="34" charset="-122"/>
                           <a:cs typeface="Calibri" pitchFamily="34" charset="-120"/>
                         </a:rPr>
-                        <a:t>Selective Repeat is now the default</a:t>
+                        <a:t>Learned</a:t>
                       </a:r>
                       <a:endParaRPr lang="en-US" sz="1200" dirty="0">
                         <a:latin typeface="Calibri" charset="0"/>
@@ -11309,7 +10999,7 @@
                           <a:ea typeface="Calibri" pitchFamily="34" charset="-122"/>
                           <a:cs typeface="Calibri" pitchFamily="34" charset="-120"/>
                         </a:rPr>
-                        <a:t>Handshake and data flow</a:t>
+                        <a:t>Scorecard</a:t>
                       </a:r>
                       <a:endParaRPr lang="en-US" sz="1200" dirty="0">
                         <a:latin typeface="Calibri" charset="0"/>
@@ -11374,7 +11064,7 @@
                           <a:ea typeface="Calibri" pitchFamily="34" charset="-122"/>
                           <a:cs typeface="Calibri" pitchFamily="34" charset="-120"/>
                         </a:rPr>
-                        <a:t>0:50</a:t>
+                        <a:t>1:00</a:t>
                       </a:r>
                       <a:endParaRPr lang="en-US" sz="1200" dirty="0">
                         <a:latin typeface="Calibri" charset="0"/>
@@ -11504,7 +11194,7 @@
                           <a:ea typeface="Calibri" pitchFamily="34" charset="-122"/>
                           <a:cs typeface="Calibri" pitchFamily="34" charset="-120"/>
                         </a:rPr>
-                        <a:t>Final results: tuned baselines, real clock</a:t>
+                        <a:t>Thank you</a:t>
                       </a:r>
                       <a:endParaRPr lang="en-US" sz="1200" dirty="0">
                         <a:latin typeface="Calibri" charset="0"/>
@@ -11569,7 +11259,7 @@
                           <a:ea typeface="Calibri" pitchFamily="34" charset="-122"/>
                           <a:cs typeface="Calibri" pitchFamily="34" charset="-120"/>
                         </a:rPr>
-                        <a:t>1:00</a:t>
+                        <a:t>0:15</a:t>
                       </a:r>
                       <a:endParaRPr lang="en-US" sz="1200" dirty="0">
                         <a:latin typeface="Calibri" charset="0"/>
@@ -11701,7 +11391,7 @@
                           <a:ea typeface="Calibri" pitchFamily="34" charset="-122"/>
                           <a:cs typeface="Calibri" pitchFamily="34" charset="-120"/>
                         </a:rPr>
-                        <a:t>Go-Back-N</a:t>
+                        <a:t>Real clock</a:t>
                       </a:r>
                       <a:endParaRPr lang="en-US" sz="1200" dirty="0">
                         <a:latin typeface="Calibri" charset="0"/>
@@ -11766,7 +11456,7 @@
                           <a:ea typeface="Calibri" pitchFamily="34" charset="-122"/>
                           <a:cs typeface="Calibri" pitchFamily="34" charset="-120"/>
                         </a:rPr>
-                        <a:t>0:50</a:t>
+                        <a:t>1:00</a:t>
                       </a:r>
                       <a:endParaRPr lang="en-US" sz="1200" dirty="0">
                         <a:latin typeface="Calibri" charset="0"/>
@@ -11896,7 +11586,7 @@
                           <a:ea typeface="Calibri" pitchFamily="34" charset="-122"/>
                           <a:cs typeface="Calibri" pitchFamily="34" charset="-120"/>
                         </a:rPr>
-                        <a:t>Real sockets found what the emulator could not</a:t>
+                        <a:t>Neural agent in the C transport</a:t>
                       </a:r>
                       <a:endParaRPr lang="en-US" sz="1200" dirty="0">
                         <a:latin typeface="Calibri" charset="0"/>
@@ -11961,7 +11651,7 @@
                           <a:ea typeface="Calibri" pitchFamily="34" charset="-122"/>
                           <a:cs typeface="Calibri" pitchFamily="34" charset="-120"/>
                         </a:rPr>
-                        <a:t>0:50</a:t>
+                        <a:t>1:00</a:t>
                       </a:r>
                       <a:endParaRPr lang="en-US" sz="1200" dirty="0">
                         <a:latin typeface="Calibri" charset="0"/>
@@ -12093,7 +11783,7 @@
                           <a:ea typeface="Calibri" pitchFamily="34" charset="-122"/>
                           <a:cs typeface="Calibri" pitchFamily="34" charset="-120"/>
                         </a:rPr>
-                        <a:t>AIMD</a:t>
+                        <a:t>Window picture</a:t>
                       </a:r>
                       <a:endParaRPr lang="en-US" sz="1200" dirty="0">
                         <a:latin typeface="Calibri" charset="0"/>
@@ -12158,7 +11848,7 @@
                           <a:ea typeface="Calibri" pitchFamily="34" charset="-122"/>
                           <a:cs typeface="Calibri" pitchFamily="34" charset="-120"/>
                         </a:rPr>
-                        <a:t>0:50</a:t>
+                        <a:t>0:40</a:t>
                       </a:r>
                       <a:endParaRPr lang="en-US" sz="1200" dirty="0">
                         <a:latin typeface="Calibri" charset="0"/>
@@ -12288,7 +11978,7 @@
                           <a:ea typeface="Calibri" pitchFamily="34" charset="-122"/>
                           <a:cs typeface="Calibri" pitchFamily="34" charset="-120"/>
                         </a:rPr>
-                        <a:t>A fast, faithful C simulator, and what it showed</a:t>
+                        <a:t>Safety net: hand over to AIMD</a:t>
                       </a:r>
                       <a:endParaRPr lang="en-US" sz="1200" dirty="0">
                         <a:latin typeface="Calibri" charset="0"/>
@@ -12353,7 +12043,7 @@
                           <a:ea typeface="Calibri" pitchFamily="34" charset="-122"/>
                           <a:cs typeface="Calibri" pitchFamily="34" charset="-120"/>
                         </a:rPr>
-                        <a:t>1:00</a:t>
+                        <a:t>0:50</a:t>
                       </a:r>
                       <a:endParaRPr lang="en-US" sz="1200" dirty="0">
                         <a:latin typeface="Calibri" charset="0"/>
@@ -12485,7 +12175,7 @@
                           <a:ea typeface="Calibri" pitchFamily="34" charset="-122"/>
                           <a:cs typeface="Calibri" pitchFamily="34" charset="-120"/>
                         </a:rPr>
-                        <a:t>How we tested</a:t>
+                        <a:t>Kernel</a:t>
                       </a:r>
                       <a:endParaRPr lang="en-US" sz="1200" dirty="0">
                         <a:latin typeface="Calibri" charset="0"/>
@@ -12550,7 +12240,7 @@
                           <a:ea typeface="Calibri" pitchFamily="34" charset="-122"/>
                           <a:cs typeface="Calibri" pitchFamily="34" charset="-120"/>
                         </a:rPr>
-                        <a:t>0:40</a:t>
+                        <a:t>1:00</a:t>
                       </a:r>
                       <a:endParaRPr lang="en-US" sz="1200" dirty="0">
                         <a:latin typeface="Calibri" charset="0"/>
@@ -12680,7 +12370,7 @@
                           <a:ea typeface="Calibri" pitchFamily="34" charset="-122"/>
                           <a:cs typeface="Calibri" pitchFamily="34" charset="-120"/>
                         </a:rPr>
-                        <a:t>Fairness and file transfer</a:t>
+                        <a:t>More evidence: baselines, SACK, reordering</a:t>
                       </a:r>
                       <a:endParaRPr lang="en-US" sz="1200" dirty="0">
                         <a:latin typeface="Calibri" charset="0"/>
@@ -12745,7 +12435,7 @@
                           <a:ea typeface="Calibri" pitchFamily="34" charset="-122"/>
                           <a:cs typeface="Calibri" pitchFamily="34" charset="-120"/>
                         </a:rPr>
-                        <a:t>0:50</a:t>
+                        <a:t>1:00</a:t>
                       </a:r>
                       <a:endParaRPr lang="en-US" sz="1200" dirty="0">
                         <a:latin typeface="Calibri" charset="0"/>
@@ -12877,7 +12567,7 @@
                           <a:ea typeface="Calibri" pitchFamily="34" charset="-122"/>
                           <a:cs typeface="Calibri" pitchFamily="34" charset="-120"/>
                         </a:rPr>
-                        <a:t>Benchmark results</a:t>
+                        <a:t>Changing paths</a:t>
                       </a:r>
                       <a:endParaRPr lang="en-US" sz="1200" dirty="0">
                         <a:latin typeface="Calibri" charset="0"/>
@@ -12942,7 +12632,7 @@
                           <a:ea typeface="Calibri" pitchFamily="34" charset="-122"/>
                           <a:cs typeface="Calibri" pitchFamily="34" charset="-120"/>
                         </a:rPr>
-                        <a:t>0:40</a:t>
+                        <a:t>1:00</a:t>
                       </a:r>
                       <a:endParaRPr lang="en-US" sz="1200" dirty="0">
                         <a:latin typeface="Calibri" charset="0"/>
@@ -13072,7 +12762,7 @@
                           <a:ea typeface="Calibri" pitchFamily="34" charset="-122"/>
                           <a:cs typeface="Calibri" pitchFamily="34" charset="-120"/>
                         </a:rPr>
-                        <a:t>Seeing the difference: the window</a:t>
+                        <a:t>Fairness, ablations, chat fixes</a:t>
                       </a:r>
                       <a:endParaRPr lang="en-US" sz="1200" dirty="0">
                         <a:latin typeface="Calibri" charset="0"/>
@@ -13137,7 +12827,7 @@
                           <a:ea typeface="Calibri" pitchFamily="34" charset="-122"/>
                           <a:cs typeface="Calibri" pitchFamily="34" charset="-120"/>
                         </a:rPr>
-                        <a:t>0:40</a:t>
+                        <a:t>0:50</a:t>
                       </a:r>
                       <a:endParaRPr lang="en-US" sz="1200" dirty="0">
                         <a:latin typeface="Calibri" charset="0"/>
@@ -13269,7 +12959,7 @@
                           <a:ea typeface="Calibri" pitchFamily="34" charset="-122"/>
                           <a:cs typeface="Calibri" pitchFamily="34" charset="-120"/>
                         </a:rPr>
-                        <a:t>Problems fixed</a:t>
+                        <a:t>Fairness</a:t>
                       </a:r>
                       <a:endParaRPr lang="en-US" sz="1200" dirty="0">
                         <a:latin typeface="Calibri" charset="0"/>
@@ -13334,7 +13024,7 @@
                           <a:ea typeface="Calibri" pitchFamily="34" charset="-122"/>
                           <a:cs typeface="Calibri" pitchFamily="34" charset="-120"/>
                         </a:rPr>
-                        <a:t>0:40</a:t>
+                        <a:t>1:00</a:t>
                       </a:r>
                       <a:endParaRPr lang="en-US" sz="1200" dirty="0">
                         <a:latin typeface="Calibri" charset="0"/>
@@ -13464,7 +13154,7 @@
                           <a:ea typeface="Calibri" pitchFamily="34" charset="-122"/>
                           <a:cs typeface="Calibri" pitchFamily="34" charset="-120"/>
                         </a:rPr>
-                        <a:t>Closing gaps: fairness and cross traffic</a:t>
+                        <a:t>Fairness and file transfer</a:t>
                       </a:r>
                       <a:endParaRPr lang="en-US" sz="1200" dirty="0">
                         <a:latin typeface="Calibri" charset="0"/>
@@ -13661,7 +13351,7 @@
                           <a:ea typeface="Calibri" pitchFamily="34" charset="-122"/>
                           <a:cs typeface="Calibri" pitchFamily="34" charset="-120"/>
                         </a:rPr>
-                        <a:t>Literature</a:t>
+                        <a:t>Two machines</a:t>
                       </a:r>
                       <a:endParaRPr lang="en-US" sz="1200" dirty="0">
                         <a:latin typeface="Calibri" charset="0"/>
@@ -13726,7 +13416,7 @@
                           <a:ea typeface="Calibri" pitchFamily="34" charset="-122"/>
                           <a:cs typeface="Calibri" pitchFamily="34" charset="-120"/>
                         </a:rPr>
-                        <a:t>0:30</a:t>
+                        <a:t>0:45</a:t>
                       </a:r>
                       <a:endParaRPr lang="en-US" sz="1200" dirty="0">
                         <a:latin typeface="Calibri" charset="0"/>
@@ -13856,7 +13546,7 @@
                           <a:ea typeface="Calibri" pitchFamily="34" charset="-122"/>
                           <a:cs typeface="Calibri" pitchFamily="34" charset="-120"/>
                         </a:rPr>
-                        <a:t>How it was tested</a:t>
+                        <a:t>Closing gaps: fairness and cross traffic</a:t>
                       </a:r>
                       <a:endParaRPr lang="en-US" sz="1200" dirty="0">
                         <a:latin typeface="Calibri" charset="0"/>
@@ -13921,7 +13611,7 @@
                           <a:ea typeface="Calibri" pitchFamily="34" charset="-122"/>
                           <a:cs typeface="Calibri" pitchFamily="34" charset="-120"/>
                         </a:rPr>
-                        <a:t>0:40</a:t>
+                        <a:t>0:50</a:t>
                       </a:r>
                       <a:endParaRPr lang="en-US" sz="1200" dirty="0">
                         <a:latin typeface="Calibri" charset="0"/>
@@ -14053,7 +13743,7 @@
                           <a:ea typeface="Calibri" pitchFamily="34" charset="-122"/>
                           <a:cs typeface="Calibri" pitchFamily="34" charset="-120"/>
                         </a:rPr>
-                        <a:t>Network design</a:t>
+                        <a:t>RUDP Drop</a:t>
                       </a:r>
                       <a:endParaRPr lang="en-US" sz="1200" dirty="0">
                         <a:latin typeface="Calibri" charset="0"/>
@@ -14118,7 +13808,7 @@
                           <a:ea typeface="Calibri" pitchFamily="34" charset="-122"/>
                           <a:cs typeface="Calibri" pitchFamily="34" charset="-120"/>
                         </a:rPr>
-                        <a:t>0:50</a:t>
+                        <a:t>1:00</a:t>
                       </a:r>
                       <a:endParaRPr lang="en-US" sz="1200" dirty="0">
                         <a:latin typeface="Calibri" charset="0"/>
@@ -14248,7 +13938,7 @@
                           <a:ea typeface="Calibri" pitchFamily="34" charset="-122"/>
                           <a:cs typeface="Calibri" pitchFamily="34" charset="-120"/>
                         </a:rPr>
-                        <a:t>Reality check: real kernel (tc/netem)</a:t>
+                        <a:t>Real sockets found what the emulator could not</a:t>
                       </a:r>
                       <a:endParaRPr lang="en-US" sz="1200" dirty="0">
                         <a:latin typeface="Calibri" charset="0"/>
@@ -14313,7 +14003,7 @@
                           <a:ea typeface="Calibri" pitchFamily="34" charset="-122"/>
                           <a:cs typeface="Calibri" pitchFamily="34" charset="-120"/>
                         </a:rPr>
-                        <a:t>1:00</a:t>
+                        <a:t>0:50</a:t>
                       </a:r>
                       <a:endParaRPr lang="en-US" sz="1200" dirty="0">
                         <a:latin typeface="Calibri" charset="0"/>
@@ -14445,7 +14135,7 @@
                           <a:ea typeface="Calibri" pitchFamily="34" charset="-122"/>
                           <a:cs typeface="Calibri" pitchFamily="34" charset="-120"/>
                         </a:rPr>
-                        <a:t>Packet Tracer results</a:t>
+                        <a:t>Chat</a:t>
                       </a:r>
                       <a:endParaRPr lang="en-US" sz="1200" dirty="0">
                         <a:latin typeface="Calibri" charset="0"/>
@@ -14510,7 +14200,7 @@
                           <a:ea typeface="Calibri" pitchFamily="34" charset="-122"/>
                           <a:cs typeface="Calibri" pitchFamily="34" charset="-120"/>
                         </a:rPr>
-                        <a:t>0:40</a:t>
+                        <a:t>1:00</a:t>
                       </a:r>
                       <a:endParaRPr lang="en-US" sz="1200" dirty="0">
                         <a:latin typeface="Calibri" charset="0"/>
@@ -14640,7 +14330,7 @@
                           <a:ea typeface="Calibri" pitchFamily="34" charset="-122"/>
                           <a:cs typeface="Calibri" pitchFamily="34" charset="-120"/>
                         </a:rPr>
-                        <a:t>Research gaps: changing paths and a BBR baseline</a:t>
+                        <a:t>Problems we hit and fixed</a:t>
                       </a:r>
                       <a:endParaRPr lang="en-US" sz="1200" dirty="0">
                         <a:latin typeface="Calibri" charset="0"/>
@@ -14705,7 +14395,7 @@
                           <a:ea typeface="Calibri" pitchFamily="34" charset="-122"/>
                           <a:cs typeface="Calibri" pitchFamily="34" charset="-120"/>
                         </a:rPr>
-                        <a:t>1:00</a:t>
+                        <a:t>0:40</a:t>
                       </a:r>
                       <a:endParaRPr lang="en-US" sz="1200" dirty="0">
                         <a:latin typeface="Calibri" charset="0"/>
@@ -14837,7 +14527,7 @@
                           <a:ea typeface="Calibri" pitchFamily="34" charset="-122"/>
                           <a:cs typeface="Calibri" pitchFamily="34" charset="-120"/>
                         </a:rPr>
-                        <a:t>Smart-RUDP design</a:t>
+                        <a:t>Packet Tracer</a:t>
                       </a:r>
                       <a:endParaRPr lang="en-US" sz="1200" dirty="0">
                         <a:latin typeface="Calibri" charset="0"/>
@@ -15032,7 +14722,7 @@
                           <a:ea typeface="Calibri" pitchFamily="34" charset="-122"/>
                           <a:cs typeface="Calibri" pitchFamily="34" charset="-120"/>
                         </a:rPr>
-                        <a:t>Research gaps: fairness and trust</a:t>
+                        <a:t>Our first learned agent: an honest result</a:t>
                       </a:r>
                       <a:endParaRPr lang="en-US" sz="1200" dirty="0">
                         <a:latin typeface="Calibri" charset="0"/>
@@ -15097,7 +14787,7 @@
                           <a:ea typeface="Calibri" pitchFamily="34" charset="-122"/>
                           <a:cs typeface="Calibri" pitchFamily="34" charset="-120"/>
                         </a:rPr>
-                        <a:t>1:00</a:t>
+                        <a:t>0:50</a:t>
                       </a:r>
                       <a:endParaRPr lang="en-US" sz="1200" dirty="0">
                         <a:latin typeface="Calibri" charset="0"/>
@@ -15229,7 +14919,7 @@
                           <a:ea typeface="Calibri" pitchFamily="34" charset="-122"/>
                           <a:cs typeface="Calibri" pitchFamily="34" charset="-120"/>
                         </a:rPr>
-                        <a:t>The AI agent in our code</a:t>
+                        <a:t>Wireshark</a:t>
                       </a:r>
                       <a:endParaRPr lang="en-US" sz="1200" dirty="0">
                         <a:latin typeface="Calibri" charset="0"/>
@@ -15294,7 +14984,7 @@
                           <a:ea typeface="Calibri" pitchFamily="34" charset="-122"/>
                           <a:cs typeface="Calibri" pitchFamily="34" charset="-120"/>
                         </a:rPr>
-                        <a:t>1:00</a:t>
+                        <a:t>0:40</a:t>
                       </a:r>
                       <a:endParaRPr lang="en-US" sz="1200" dirty="0">
                         <a:latin typeface="Calibri" charset="0"/>
@@ -15424,7 +15114,7 @@
                           <a:ea typeface="Calibri" pitchFamily="34" charset="-122"/>
                           <a:cs typeface="Calibri" pitchFamily="34" charset="-120"/>
                         </a:rPr>
-                        <a:t>First run between two machines</a:t>
+                        <a:t>Benchmark results</a:t>
                       </a:r>
                       <a:endParaRPr lang="en-US" sz="1200" dirty="0">
                         <a:latin typeface="Calibri" charset="0"/>
@@ -15489,7 +15179,7 @@
                           <a:ea typeface="Calibri" pitchFamily="34" charset="-122"/>
                           <a:cs typeface="Calibri" pitchFamily="34" charset="-120"/>
                         </a:rPr>
-                        <a:t>0:45</a:t>
+                        <a:t>0:40</a:t>
                       </a:r>
                       <a:endParaRPr lang="en-US" sz="1200" dirty="0">
                         <a:latin typeface="Calibri" charset="0"/>
@@ -15621,7 +15311,7 @@
                           <a:ea typeface="Calibri" pitchFamily="34" charset="-122"/>
                           <a:cs typeface="Calibri" pitchFamily="34" charset="-120"/>
                         </a:rPr>
-                        <a:t>Smart-RUDP result</a:t>
+                        <a:t>Protocol</a:t>
                       </a:r>
                       <a:endParaRPr lang="en-US" sz="1200" dirty="0">
                         <a:latin typeface="Calibri" charset="0"/>
@@ -15816,7 +15506,7 @@
                           <a:ea typeface="Calibri" pitchFamily="34" charset="-122"/>
                           <a:cs typeface="Calibri" pitchFamily="34" charset="-120"/>
                         </a:rPr>
-                        <a:t>Learnings and future work</a:t>
+                        <a:t>Literature behind the design</a:t>
                       </a:r>
                       <a:endParaRPr lang="en-US" sz="1200" dirty="0">
                         <a:latin typeface="Calibri" charset="0"/>
@@ -15881,7 +15571,7 @@
                           <a:ea typeface="Calibri" pitchFamily="34" charset="-122"/>
                           <a:cs typeface="Calibri" pitchFamily="34" charset="-120"/>
                         </a:rPr>
-                        <a:t>0:50</a:t>
+                        <a:t>0:30</a:t>
                       </a:r>
                       <a:endParaRPr lang="en-US" sz="1200" dirty="0">
                         <a:latin typeface="Calibri" charset="0"/>
@@ -16013,7 +15703,7 @@
                           <a:ea typeface="Calibri" pitchFamily="34" charset="-122"/>
                           <a:cs typeface="Calibri" pitchFamily="34" charset="-120"/>
                         </a:rPr>
-                        <a:t>Wireshark traces</a:t>
+                        <a:t>Selective Repeat</a:t>
                       </a:r>
                       <a:endParaRPr lang="en-US" sz="1200" dirty="0">
                         <a:latin typeface="Calibri" charset="0"/>
@@ -16078,7 +15768,7 @@
                           <a:ea typeface="Calibri" pitchFamily="34" charset="-122"/>
                           <a:cs typeface="Calibri" pitchFamily="34" charset="-120"/>
                         </a:rPr>
-                        <a:t>0:40</a:t>
+                        <a:t>0:50</a:t>
                       </a:r>
                       <a:endParaRPr lang="en-US" sz="1200" dirty="0">
                         <a:latin typeface="Calibri" charset="0"/>
@@ -16208,7 +15898,7 @@
                           <a:ea typeface="Calibri" pitchFamily="34" charset="-122"/>
                           <a:cs typeface="Calibri" pitchFamily="34" charset="-120"/>
                         </a:rPr>
-                        <a:t>Thank you</a:t>
+                        <a:t>Smart-RUDP: a Q-learning window controller</a:t>
                       </a:r>
                       <a:endParaRPr lang="en-US" sz="1200" dirty="0">
                         <a:latin typeface="Calibri" charset="0"/>
@@ -16273,7 +15963,7 @@
                           <a:ea typeface="Calibri" pitchFamily="34" charset="-122"/>
                           <a:cs typeface="Calibri" pitchFamily="34" charset="-120"/>
                         </a:rPr>
-                        <a:t>0:15</a:t>
+                        <a:t>0:50</a:t>
                       </a:r>
                       <a:endParaRPr lang="en-US" sz="1200" dirty="0">
                         <a:latin typeface="Calibri" charset="0"/>
@@ -16405,7 +16095,7 @@
                           <a:ea typeface="Calibri" pitchFamily="34" charset="-122"/>
                           <a:cs typeface="Calibri" pitchFamily="34" charset="-120"/>
                         </a:rPr>
-                        <a:t>Wireshark real capture</a:t>
+                        <a:t>Controllers</a:t>
                       </a:r>
                       <a:endParaRPr lang="en-US" sz="1200" dirty="0">
                         <a:latin typeface="Calibri" charset="0"/>
@@ -16600,7 +16290,7 @@
                           <a:ea typeface="Calibri" pitchFamily="34" charset="-122"/>
                           <a:cs typeface="Calibri" pitchFamily="34" charset="-120"/>
                         </a:rPr>
-                        <a:t>Appendix: slow start</a:t>
+                        <a:t>The AI agent in our code</a:t>
                       </a:r>
                       <a:endParaRPr lang="en-US" sz="1200" dirty="0">
                         <a:latin typeface="Calibri" charset="0"/>
@@ -16665,7 +16355,7 @@
                           <a:ea typeface="Calibri" pitchFamily="34" charset="-122"/>
                           <a:cs typeface="Calibri" pitchFamily="34" charset="-120"/>
                         </a:rPr>
-                        <a:t>-</a:t>
+                        <a:t>1:00</a:t>
                       </a:r>
                       <a:endParaRPr lang="en-US" sz="1200" dirty="0">
                         <a:latin typeface="Calibri" charset="0"/>
@@ -16797,7 +16487,7 @@
                           <a:ea typeface="Calibri" pitchFamily="34" charset="-122"/>
                           <a:cs typeface="Calibri" pitchFamily="34" charset="-120"/>
                         </a:rPr>
-                        <a:t>RUDP Chat demo</a:t>
+                        <a:t>Ablation</a:t>
                       </a:r>
                       <a:endParaRPr lang="en-US" sz="1200" dirty="0">
                         <a:latin typeface="Calibri" charset="0"/>
@@ -16862,7 +16552,7 @@
                           <a:ea typeface="Calibri" pitchFamily="34" charset="-122"/>
                           <a:cs typeface="Calibri" pitchFamily="34" charset="-120"/>
                         </a:rPr>
-                        <a:t>1:00</a:t>
+                        <a:t>0:50</a:t>
                       </a:r>
                       <a:endParaRPr lang="en-US" sz="1200" dirty="0">
                         <a:latin typeface="Calibri" charset="0"/>
@@ -16918,6 +16608,17 @@
                       <a:pPr indent="0" marL="0">
                         <a:buNone/>
                       </a:pPr>
+                      <a:r>
+                        <a:rPr lang="en-US" sz="1200" dirty="0">
+                          <a:solidFill>
+                            <a:srgbClr val="1B2430"/>
+                          </a:solidFill>
+                          <a:latin typeface="Calibri" pitchFamily="34" charset="0"/>
+                          <a:ea typeface="Calibri" pitchFamily="34" charset="-122"/>
+                          <a:cs typeface="Calibri" pitchFamily="34" charset="-120"/>
+                        </a:rPr>
+                        <a:t>40</a:t>
+                      </a:r>
                       <a:endParaRPr lang="en-US" sz="1200" dirty="0">
                         <a:latin typeface="Calibri" charset="0"/>
                         <a:ea typeface="Calibri" charset="0"/>
@@ -16972,6 +16673,17 @@
                       <a:pPr indent="0" marL="0">
                         <a:buNone/>
                       </a:pPr>
+                      <a:r>
+                        <a:rPr lang="en-US" sz="1200" dirty="0">
+                          <a:solidFill>
+                            <a:srgbClr val="1B2430"/>
+                          </a:solidFill>
+                          <a:latin typeface="Calibri" pitchFamily="34" charset="0"/>
+                          <a:ea typeface="Calibri" pitchFamily="34" charset="-122"/>
+                          <a:cs typeface="Calibri" pitchFamily="34" charset="-120"/>
+                        </a:rPr>
+                        <a:t>Appendix: slow start and congestion avoidance</a:t>
+                      </a:r>
                       <a:endParaRPr lang="en-US" sz="1200" dirty="0">
                         <a:latin typeface="Calibri" charset="0"/>
                         <a:ea typeface="Calibri" charset="0"/>
@@ -17026,6 +16738,17 @@
                       <a:pPr indent="0" marL="0">
                         <a:buNone/>
                       </a:pPr>
+                      <a:r>
+                        <a:rPr lang="en-US" sz="1200" dirty="0">
+                          <a:solidFill>
+                            <a:srgbClr val="1B2430"/>
+                          </a:solidFill>
+                          <a:latin typeface="Calibri" pitchFamily="34" charset="0"/>
+                          <a:ea typeface="Calibri" pitchFamily="34" charset="-122"/>
+                          <a:cs typeface="Calibri" pitchFamily="34" charset="-120"/>
+                        </a:rPr>
+                        <a:t>-</a:t>
+                      </a:r>
                       <a:endParaRPr lang="en-US" sz="1200" dirty="0">
                         <a:latin typeface="Calibri" charset="0"/>
                         <a:ea typeface="Calibri" charset="0"/>
@@ -17181,7 +16904,7 @@
                 <a:ea typeface="Calibri" pitchFamily="34" charset="-122"/>
                 <a:cs typeface="Calibri" pitchFamily="34" charset="-120"/>
               </a:rPr>
-              <a:t>18. Wireshark traces</a:t>
+              <a:t>18. Selective Repeat</a:t>
             </a:r>
             <a:endParaRPr lang="en-US" sz="2600" dirty="0"/>
           </a:p>
@@ -17220,7 +16943,7 @@
                 <a:ea typeface="Calibri" pitchFamily="34" charset="-122"/>
                 <a:cs typeface="Calibri" pitchFamily="34" charset="-120"/>
               </a:rPr>
-              <a:t>Time on this slide: 0:40</a:t>
+              <a:t>Time on this slide: 0:50</a:t>
             </a:r>
             <a:endParaRPr lang="en-US" sz="1300" dirty="0"/>
           </a:p>
@@ -17373,70 +17096,7 @@
                 <a:ea typeface="Calibri" pitchFamily="34" charset="-122"/>
                 <a:cs typeface="Calibri" pitchFamily="34" charset="-120"/>
               </a:rPr>
-              <a:t>We wrote a Lua dissector, named smartrudp, that decodes sequence, ack, flags, checksum and length.</a:t>
-            </a:r>
-            <a:endParaRPr lang="en-US" sz="1600" dirty="0"/>
-          </a:p>
-          <a:p>
-            <a:pPr marL="342900" indent="-342900">
-              <a:spcAft>
-                <a:spcPts val="600"/>
-              </a:spcAft>
-              <a:buSzPct val="100000"/>
-              <a:buChar char="•"/>
-            </a:pPr>
-            <a:r>
-              <a:rPr lang="en-US" sz="1600" dirty="0">
-                <a:solidFill>
-                  <a:srgbClr val="1B2430"/>
-                </a:solidFill>
-                <a:latin typeface="Calibri" pitchFamily="34" charset="0"/>
-                <a:ea typeface="Calibri" pitchFamily="34" charset="-122"/>
-                <a:cs typeface="Calibri" pitchFamily="34" charset="-120"/>
-              </a:rPr>
-              <a:t>Useful filters: smartrudp.flags.data == 1 and smartrudp.seq == N.</a:t>
-            </a:r>
-            <a:endParaRPr lang="en-US" sz="1600" dirty="0"/>
-          </a:p>
-          <a:p>
-            <a:pPr marL="342900" indent="-342900">
-              <a:spcAft>
-                <a:spcPts val="600"/>
-              </a:spcAft>
-              <a:buSzPct val="100000"/>
-              <a:buChar char="•"/>
-            </a:pPr>
-            <a:r>
-              <a:rPr lang="en-US" sz="1600" dirty="0">
-                <a:solidFill>
-                  <a:srgbClr val="1B2430"/>
-                </a:solidFill>
-                <a:latin typeface="Calibri" pitchFamily="34" charset="0"/>
-                <a:ea typeface="Calibri" pitchFamily="34" charset="-122"/>
-                <a:cs typeface="Calibri" pitchFamily="34" charset="-120"/>
-              </a:rPr>
-              <a:t>In a 400-packet lossy run the receiver saw 87 (AIMD) and 95 (Smart) repeated data segments.</a:t>
-            </a:r>
-            <a:endParaRPr lang="en-US" sz="1600" dirty="0"/>
-          </a:p>
-          <a:p>
-            <a:pPr marL="342900" indent="-342900">
-              <a:spcAft>
-                <a:spcPts val="600"/>
-              </a:spcAft>
-              <a:buSzPct val="100000"/>
-              <a:buChar char="•"/>
-            </a:pPr>
-            <a:r>
-              <a:rPr lang="en-US" sz="1600" dirty="0">
-                <a:solidFill>
-                  <a:srgbClr val="1B2430"/>
-                </a:solidFill>
-                <a:latin typeface="Calibri" pitchFamily="34" charset="0"/>
-                <a:ea typeface="Calibri" pitchFamily="34" charset="-122"/>
-                <a:cs typeface="Calibri" pitchFamily="34" charset="-120"/>
-              </a:rPr>
-              <a:t>The program's exported trace uses topology addresses and has no handshake.</a:t>
+              <a:t>Receiver buffers out of order, 32-byte ACK bitmap, one timer per packet, adaptive timeout. About 10x fewer retransmissions than Go-Back-N.</a:t>
             </a:r>
             <a:endParaRPr lang="en-US" sz="1600" dirty="0"/>
           </a:p>
@@ -17514,7 +17174,7 @@
                 <a:ea typeface="Calibri" pitchFamily="34" charset="-122"/>
                 <a:cs typeface="Calibri" pitchFamily="34" charset="-120"/>
               </a:rPr>
-              <a:t>Q: Why no handshake in the export? A: The export builds synthetic packets. The real tshark capture on the next slide shows the handshake.</a:t>
+              <a:t>Is the gain significant? All rows yes except hostile 10% loss.</a:t>
             </a:r>
             <a:endParaRPr lang="en-US" sz="1400" dirty="0"/>
           </a:p>
@@ -17585,7 +17245,7 @@
                 <a:ea typeface="Calibri" pitchFamily="34" charset="-122"/>
                 <a:cs typeface="Calibri" pitchFamily="34" charset="-120"/>
               </a:rPr>
-              <a:t>19. Wireshark real capture</a:t>
+              <a:t>19. Controllers</a:t>
             </a:r>
             <a:endParaRPr lang="en-US" sz="2600" dirty="0"/>
           </a:p>
@@ -17777,7 +17437,7 @@
                 <a:ea typeface="Calibri" pitchFamily="34" charset="-122"/>
                 <a:cs typeface="Calibri" pitchFamily="34" charset="-120"/>
               </a:rPr>
-              <a:t>Left: the first three packets, SYN, SYN-ACK and ACK, decoded by our dissector (filter frame.number &lt;= 3).</a:t>
+              <a:t>Five controllers behind one interface. The neural net is 5-32-32-5 with 1413 weights and five actions from 0.5x to 1.5x.</a:t>
             </a:r>
             <a:endParaRPr lang="en-US" sz="1600" dirty="0"/>
           </a:p>
@@ -17798,7 +17458,7 @@
                 <a:ea typeface="Calibri" pitchFamily="34" charset="-122"/>
                 <a:cs typeface="Calibri" pitchFamily="34" charset="-120"/>
               </a:rPr>
-              <a:t>Right: filter smartrudp.seq == N shows the same segment twice, a retransmission.</a:t>
+              <a:t>AIMD takes over when an interval loses 10% or more.</a:t>
             </a:r>
             <a:endParaRPr lang="en-US" sz="1600" dirty="0"/>
           </a:p>
@@ -17876,7 +17536,7 @@
                 <a:ea typeface="Calibri" pitchFamily="34" charset="-122"/>
                 <a:cs typeface="Calibri" pitchFamily="34" charset="-120"/>
               </a:rPr>
-              <a:t>If Wireshark is open live: Analyze, Decode As, UDP 8888 = RUDP, then use these two filters.</a:t>
+              <a:t>Why hand-over? Without it the agent was 7x slower at 10% loss.</a:t>
             </a:r>
             <a:endParaRPr lang="en-US" sz="1400" dirty="0"/>
           </a:p>
@@ -17947,7 +17607,7 @@
                 <a:ea typeface="Calibri" pitchFamily="34" charset="-122"/>
                 <a:cs typeface="Calibri" pitchFamily="34" charset="-120"/>
               </a:rPr>
-              <a:t>20. RUDP Chat demo</a:t>
+              <a:t>20. Ablation</a:t>
             </a:r>
             <a:endParaRPr lang="en-US" sz="2600" dirty="0"/>
           </a:p>
@@ -17986,7 +17646,7 @@
                 <a:ea typeface="Calibri" pitchFamily="34" charset="-122"/>
                 <a:cs typeface="Calibri" pitchFamily="34" charset="-120"/>
               </a:rPr>
-              <a:t>Time on this slide: 1:00</a:t>
+              <a:t>Time on this slide: 0:50</a:t>
             </a:r>
             <a:endParaRPr lang="en-US" sz="1300" dirty="0"/>
           </a:p>
@@ -18131,7 +17791,7 @@
               <a:buChar char="•"/>
             </a:pPr>
             <a:r>
-              <a:rPr lang="en-US" sz="1400" dirty="0">
+              <a:rPr lang="en-US" sz="1600" dirty="0">
                 <a:solidFill>
                   <a:srgbClr val="1B2430"/>
                 </a:solidFill>
@@ -18139,72 +17799,9 @@
                 <a:ea typeface="Calibri" pitchFamily="34" charset="-122"/>
                 <a:cs typeface="Calibri" pitchFamily="34" charset="-120"/>
               </a:rPr>
-              <a:t>The protocol in use: each message is one numbered, checksummed RUDP segment, ACKed in order.</a:t>
-            </a:r>
-            <a:endParaRPr lang="en-US" sz="1400" dirty="0"/>
-          </a:p>
-          <a:p>
-            <a:pPr marL="342900" indent="-342900">
-              <a:spcAft>
-                <a:spcPts val="600"/>
-              </a:spcAft>
-              <a:buSzPct val="100000"/>
-              <a:buChar char="•"/>
-            </a:pPr>
-            <a:r>
-              <a:rPr lang="en-US" sz="1400" dirty="0">
-                <a:solidFill>
-                  <a:srgbClr val="1B2430"/>
-                </a:solidFill>
-                <a:latin typeface="Calibri" pitchFamily="34" charset="0"/>
-                <a:ea typeface="Calibri" pitchFamily="34" charset="-122"/>
-                <a:cs typeface="Calibri" pitchFamily="34" charset="-120"/>
-              </a:rPr>
-              <a:t>There is a terminal version and a browser version; two devices were linked over Tailscale, laptop and phone.</a:t>
-            </a:r>
-            <a:endParaRPr lang="en-US" sz="1400" dirty="0"/>
-          </a:p>
-          <a:p>
-            <a:pPr marL="342900" indent="-342900">
-              <a:spcAft>
-                <a:spcPts val="600"/>
-              </a:spcAft>
-              <a:buSzPct val="100000"/>
-              <a:buChar char="•"/>
-            </a:pPr>
-            <a:r>
-              <a:rPr lang="en-US" sz="1400" dirty="0">
-                <a:solidFill>
-                  <a:srgbClr val="1B2430"/>
-                </a:solidFill>
-                <a:latin typeface="Calibri" pitchFamily="34" charset="0"/>
-                <a:ea typeface="Calibri" pitchFamily="34" charset="-122"/>
-                <a:cs typeface="Calibri" pitchFamily="34" charset="-120"/>
-              </a:rPr>
-              <a:t>Drag the loss slider: lost messages are resent and still arrive in order. The right panel shows sent, lost and resent counts and the log.</a:t>
-            </a:r>
-            <a:endParaRPr lang="en-US" sz="1400" dirty="0"/>
-          </a:p>
-          <a:p>
-            <a:pPr marL="342900" indent="-342900">
-              <a:spcAft>
-                <a:spcPts val="600"/>
-              </a:spcAft>
-              <a:buSzPct val="100000"/>
-              <a:buChar char="•"/>
-            </a:pPr>
-            <a:r>
-              <a:rPr lang="en-US" sz="1400" dirty="0">
-                <a:solidFill>
-                  <a:srgbClr val="1B2430"/>
-                </a:solidFill>
-                <a:latin typeface="Calibri" pitchFamily="34" charset="0"/>
-                <a:ea typeface="Calibri" pitchFamily="34" charset="-122"/>
-                <a:cs typeface="Calibri" pitchFamily="34" charset="-120"/>
-              </a:rPr>
-              <a:t>There is a controller switch: fixed window, AIMD, or Smart-RUDP. For the chat we retrained Smart-RUDP on simulated paths: it was faster than AIMD on 5 of 6 held-out paths and equal on 1, because AIMD resets to one packet on random loss. Say it is simulated, and that the agent may not shrink the window without a congestion signal. Stress test: 48 random paths the agent never trained on, 3 seeds each. Mean delivery time was 3.73 seconds for Smart-RUDP against 7.16 for AIMD. Smart-RUDP was faster on 27 paths, slower on 5, within 5 percent on 16. So on our data, in simulation, it beats AIMD in the chat setting. There is also a deep neural-network option in the controller dropdown; it gave 3.20 seconds mean on the stress paths against 3.73 for the table.</a:t>
-            </a:r>
-            <a:endParaRPr lang="en-US" sz="1400" dirty="0"/>
+              <a:t>On 100 random held-out paths the agent takes 0.53x the time. Cap 128 and original settings matter most.</a:t>
+            </a:r>
+            <a:endParaRPr lang="en-US" sz="1600" dirty="0"/>
           </a:p>
         </p:txBody>
       </p:sp>
@@ -18280,7 +17877,7 @@
                 <a:ea typeface="Calibri" pitchFamily="34" charset="-122"/>
                 <a:cs typeface="Calibri" pitchFamily="34" charset="-120"/>
               </a:rPr>
-              <a:t>Q: Is that a fair win? A: Both start from the same window of 10; held-out paths and seeds; honest limits: simulated, and without the no-shrink rule the agent lost. Q: Did it win in Section 8? A: No, that result stands. Q: Where does it lose? A: Tight bottleneck queues and very high loss; the fixed window of 8 is hard to beat there. A broader-trained agent did worse, so we kept the first.</a:t>
+              <a:t>Did retraining help? Evolution strategy added only 2%, not adopted.</a:t>
             </a:r>
             <a:endParaRPr lang="en-US" sz="1400" dirty="0"/>
           </a:p>
@@ -18351,7 +17948,7 @@
                 <a:ea typeface="Calibri" pitchFamily="34" charset="-122"/>
                 <a:cs typeface="Calibri" pitchFamily="34" charset="-120"/>
               </a:rPr>
-              <a:t>21. More evidence: baselines, SACK, reordering</a:t>
+              <a:t>21. How we tested</a:t>
             </a:r>
             <a:endParaRPr lang="en-US" sz="2600" dirty="0"/>
           </a:p>
@@ -18390,7 +17987,7 @@
                 <a:ea typeface="Calibri" pitchFamily="34" charset="-122"/>
                 <a:cs typeface="Calibri" pitchFamily="34" charset="-120"/>
               </a:rPr>
-              <a:t>Time on this slide: 1:00</a:t>
+              <a:t>Time on this slide: 0:40</a:t>
             </a:r>
             <a:endParaRPr lang="en-US" sz="1300" dirty="0"/>
           </a:p>
@@ -18535,7 +18132,7 @@
               <a:buChar char="•"/>
             </a:pPr>
             <a:r>
-              <a:rPr lang="en-US" sz="1400" dirty="0">
+              <a:rPr lang="en-US" sz="1600" dirty="0">
                 <a:solidFill>
                   <a:srgbClr val="1B2430"/>
                 </a:solidFill>
@@ -18543,135 +18140,9 @@
                 <a:ea typeface="Calibri" pitchFamily="34" charset="-122"/>
                 <a:cs typeface="Calibri" pitchFamily="34" charset="-120"/>
               </a:rPr>
-              <a:t>The abstract also promised TCP and plain UDP baselines, so we ran them on the same 48 unseen simulated paths.</a:t>
-            </a:r>
-            <a:endParaRPr lang="en-US" sz="1400" dirty="0"/>
-          </a:p>
-          <a:p>
-            <a:pPr marL="342900" indent="-342900">
-              <a:spcAft>
-                <a:spcPts val="600"/>
-              </a:spcAft>
-              <a:buSzPct val="100000"/>
-              <a:buChar char="•"/>
-            </a:pPr>
-            <a:r>
-              <a:rPr lang="en-US" sz="1400" dirty="0">
-                <a:solidFill>
-                  <a:srgbClr val="1B2430"/>
-                </a:solidFill>
-                <a:latin typeface="Calibri" pitchFamily="34" charset="0"/>
-                <a:ea typeface="Calibri" pitchFamily="34" charset="-122"/>
-                <a:cs typeface="Calibri" pitchFamily="34" charset="-120"/>
-              </a:rPr>
-              <a:t>Plain UDP delivered only 68 percent of the messages, so reliability is needed. Our TCP model, with selective acknowledgments, has the lowest median at 1.48 seconds.</a:t>
-            </a:r>
-            <a:endParaRPr lang="en-US" sz="1400" dirty="0"/>
-          </a:p>
-          <a:p>
-            <a:pPr marL="342900" indent="-342900">
-              <a:spcAft>
-                <a:spcPts val="600"/>
-              </a:spcAft>
-              <a:buSzPct val="100000"/>
-              <a:buChar char="•"/>
-            </a:pPr>
-            <a:r>
-              <a:rPr lang="en-US" sz="1400" dirty="0">
-                <a:solidFill>
-                  <a:srgbClr val="1B2430"/>
-                </a:solidFill>
-                <a:latin typeface="Calibri" pitchFamily="34" charset="0"/>
-                <a:ea typeface="Calibri" pitchFamily="34" charset="-122"/>
-                <a:cs typeface="Calibri" pitchFamily="34" charset="-120"/>
-              </a:rPr>
-              <a:t>Smart-RUDP deep is at 3.20 seconds mean and is about even with the TCP model path by path: faster on 22, slower on 23.</a:t>
-            </a:r>
-            <a:endParaRPr lang="en-US" sz="1400" dirty="0"/>
-          </a:p>
-          <a:p>
-            <a:pPr marL="342900" indent="-342900">
-              <a:spcAft>
-                <a:spcPts val="600"/>
-              </a:spcAft>
-              <a:buSzPct val="100000"/>
-              <a:buChar char="•"/>
-            </a:pPr>
-            <a:r>
-              <a:rPr lang="en-US" sz="1400" dirty="0">
-                <a:solidFill>
-                  <a:srgbClr val="1B2430"/>
-                </a:solidFill>
-                <a:latin typeface="Calibri" pitchFamily="34" charset="0"/>
-                <a:ea typeface="Calibri" pitchFamily="34" charset="-122"/>
-                <a:cs typeface="Calibri" pitchFamily="34" charset="-120"/>
-              </a:rPr>
-              <a:t>The gap to TCP is mostly Go-Back-N. A selective-ack version of our transport cut AIMD from 7.16 to 4.90 seconds in simulation.</a:t>
-            </a:r>
-            <a:endParaRPr lang="en-US" sz="1400" dirty="0"/>
-          </a:p>
-          <a:p>
-            <a:pPr marL="342900" indent="-342900">
-              <a:spcAft>
-                <a:spcPts val="600"/>
-              </a:spcAft>
-              <a:buSzPct val="100000"/>
-              <a:buChar char="•"/>
-            </a:pPr>
-            <a:r>
-              <a:rPr lang="en-US" sz="1400" dirty="0">
-                <a:solidFill>
-                  <a:srgbClr val="1B2430"/>
-                </a:solidFill>
-                <a:latin typeface="Calibri" pitchFamily="34" charset="0"/>
-                <a:ea typeface="Calibri" pitchFamily="34" charset="-122"/>
-                <a:cs typeface="Calibri" pitchFamily="34" charset="-120"/>
-              </a:rPr>
-              <a:t>Reordering hurts Go-Back-N badly: AIMD goes from 0.82 to 6.79 seconds at 20 milliseconds of jitter. The learned agents cope better and selective ack removes most of the damage.</a:t>
-            </a:r>
-            <a:endParaRPr lang="en-US" sz="1400" dirty="0"/>
-          </a:p>
-          <a:p>
-            <a:pPr marL="342900" indent="-342900">
-              <a:spcAft>
-                <a:spcPts val="600"/>
-              </a:spcAft>
-              <a:buSzPct val="100000"/>
-              <a:buChar char="•"/>
-            </a:pPr>
-            <a:r>
-              <a:rPr lang="en-US" sz="1400" dirty="0">
-                <a:solidFill>
-                  <a:srgbClr val="1B2430"/>
-                </a:solidFill>
-                <a:latin typeface="Calibri" pitchFamily="34" charset="0"/>
-                <a:ea typeface="Calibri" pitchFamily="34" charset="-122"/>
-                <a:cs typeface="Calibri" pitchFamily="34" charset="-120"/>
-              </a:rPr>
-              <a:t>For the C experiments we repeated 20 runs per mode: Smart-RUDP is still slower on 5G and satellite and ties on lossy.</a:t>
-            </a:r>
-            <a:endParaRPr lang="en-US" sz="1400" dirty="0"/>
-          </a:p>
-          <a:p>
-            <a:pPr marL="342900" indent="-342900">
-              <a:spcAft>
-                <a:spcPts val="600"/>
-              </a:spcAft>
-              <a:buSzPct val="100000"/>
-              <a:buChar char="•"/>
-            </a:pPr>
-            <a:r>
-              <a:rPr lang="en-US" sz="1400" dirty="0">
-                <a:solidFill>
-                  <a:srgbClr val="1B2430"/>
-                </a:solidFill>
-                <a:latin typeface="Calibri" pitchFamily="34" charset="0"/>
-                <a:ea typeface="Calibri" pitchFamily="34" charset="-122"/>
-                <a:cs typeface="Calibri" pitchFamily="34" charset="-120"/>
-              </a:rPr>
-              <a:t>Be upfront: our simulator originally allowed a duplicate-ACK retransmission storm that flatters aggressive controllers. With the realistic rule the neural agent is about level with AIMD in simulation (7.27 s against 7.75 s). The C results are the evidence we rely on.</a:t>
-            </a:r>
-            <a:endParaRPr lang="en-US" sz="1400" dirty="0"/>
+              <a:t>Correctness first, then four steps toward the real world: emulation, impairment proxy, kernel netem, two machines.</a:t>
+            </a:r>
+            <a:endParaRPr lang="en-US" sz="1600" dirty="0"/>
           </a:p>
         </p:txBody>
       </p:sp>
@@ -18747,7 +18218,7 @@
                 <a:ea typeface="Calibri" pitchFamily="34" charset="-122"/>
                 <a:cs typeface="Calibri" pitchFamily="34" charset="-120"/>
               </a:rPr>
-              <a:t>Q: Is the TCP row real TCP? A: No, it is a model with the same window cap; real kernel TCP needs netem on Linux, and we provide the script. Q: Why did you not implement SACK in C? A: Time; the simulation shows it is the biggest win and it is the first item of future work. Q: Is 20 runs enough? A: The intervals exclude zero for 5G and satellite and include zero for lossy. Did you check it is not a simulator artefact? Yes: with the realistic rule the simulated gain mostly disappears, so we lean on the C results, which use that rule and equal window caps.</a:t>
+              <a:t>Where are commands? docs/RUNNING_ALL_TESTS.md.</a:t>
             </a:r>
             <a:endParaRPr lang="en-US" sz="1400" dirty="0"/>
           </a:p>
@@ -18818,7 +18289,7 @@
                 <a:ea typeface="Calibri" pitchFamily="34" charset="-122"/>
                 <a:cs typeface="Calibri" pitchFamily="34" charset="-120"/>
               </a:rPr>
-              <a:t>22. Neural agent in the C transport</a:t>
+              <a:t>22. Issues</a:t>
             </a:r>
             <a:endParaRPr lang="en-US" sz="2600" dirty="0"/>
           </a:p>
@@ -18857,7 +18328,7 @@
                 <a:ea typeface="Calibri" pitchFamily="34" charset="-122"/>
                 <a:cs typeface="Calibri" pitchFamily="34" charset="-120"/>
               </a:rPr>
-              <a:t>Time on this slide: 1:00</a:t>
+              <a:t>Time on this slide: 0:50</a:t>
             </a:r>
             <a:endParaRPr lang="en-US" sz="1300" dirty="0"/>
           </a:p>
@@ -19002,7 +18473,7 @@
               <a:buChar char="•"/>
             </a:pPr>
             <a:r>
-              <a:rPr lang="en-US" sz="1400" dirty="0">
+              <a:rPr lang="en-US" sz="1600" dirty="0">
                 <a:solidFill>
                   <a:srgbClr val="1B2430"/>
                 </a:solidFill>
@@ -19010,93 +18481,9 @@
                 <a:ea typeface="Calibri" pitchFamily="34" charset="-122"/>
                 <a:cs typeface="Calibri" pitchFamily="34" charset="-120"/>
               </a:rPr>
-              <a:t>We then put the neural agent into the C transport, the same code as Section 8, and tested it on the same three emulated paths with 15 runs each.</a:t>
-            </a:r>
-            <a:endParaRPr lang="en-US" sz="1400" dirty="0"/>
-          </a:p>
-          <a:p>
-            <a:pPr marL="342900" indent="-342900">
-              <a:spcAft>
-                <a:spcPts val="600"/>
-              </a:spcAft>
-              <a:buSzPct val="100000"/>
-              <a:buChar char="•"/>
-            </a:pPr>
-            <a:r>
-              <a:rPr lang="en-US" sz="1400" dirty="0">
-                <a:solidFill>
-                  <a:srgbClr val="1B2430"/>
-                </a:solidFill>
-                <a:latin typeface="Calibri" pitchFamily="34" charset="0"/>
-                <a:ea typeface="Calibri" pitchFamily="34" charset="-122"/>
-                <a:cs typeface="Calibri" pitchFamily="34" charset="-120"/>
-              </a:rPr>
-              <a:t>AIMD and the agents all start from a window of 10. The neural agent was faster than AIMD on all three: 15 percent on 5G-like, 27 percent on lossy, 24 percent on satellite-like. The intervals exclude zero.</a:t>
-            </a:r>
-            <a:endParaRPr lang="en-US" sz="1400" dirty="0"/>
-          </a:p>
-          <a:p>
-            <a:pPr marL="342900" indent="-342900">
-              <a:spcAft>
-                <a:spcPts val="600"/>
-              </a:spcAft>
-              <a:buSzPct val="100000"/>
-              <a:buChar char="•"/>
-            </a:pPr>
-            <a:r>
-              <a:rPr lang="en-US" sz="1400" dirty="0">
-                <a:solidFill>
-                  <a:srgbClr val="1B2430"/>
-                </a:solidFill>
-                <a:latin typeface="Calibri" pitchFamily="34" charset="0"/>
-                <a:ea typeface="Calibri" pitchFamily="34" charset="-122"/>
-                <a:cs typeface="Calibri" pitchFamily="34" charset="-120"/>
-              </a:rPr>
-              <a:t>The retrained table did not carry over: it was slower on 5G and satellite. A network generalises to unseen paths where a table does not.</a:t>
-            </a:r>
-            <a:endParaRPr lang="en-US" sz="1400" dirty="0"/>
-          </a:p>
-          <a:p>
-            <a:pPr marL="342900" indent="-342900">
-              <a:spcAft>
-                <a:spcPts val="600"/>
-              </a:spcAft>
-              <a:buSzPct val="100000"/>
-              <a:buChar char="•"/>
-            </a:pPr>
-            <a:r>
-              <a:rPr lang="en-US" sz="1400" dirty="0">
-                <a:solidFill>
-                  <a:srgbClr val="1B2430"/>
-                </a:solidFill>
-                <a:latin typeface="Calibri" pitchFamily="34" charset="0"/>
-                <a:ea typeface="Calibri" pitchFamily="34" charset="-122"/>
-                <a:cs typeface="Calibri" pitchFamily="34" charset="-120"/>
-              </a:rPr>
-              <a:t>We also added selective acknowledgments to the C code: about ten times fewer retransmissions, but no significant change in completion time on these emulated paths.</a:t>
-            </a:r>
-            <a:endParaRPr lang="en-US" sz="1400" dirty="0"/>
-          </a:p>
-          <a:p>
-            <a:pPr marL="342900" indent="-342900">
-              <a:spcAft>
-                <a:spcPts val="600"/>
-              </a:spcAft>
-              <a:buSzPct val="100000"/>
-              <a:buChar char="•"/>
-            </a:pPr>
-            <a:r>
-              <a:rPr lang="en-US" sz="1400" dirty="0">
-                <a:solidFill>
-                  <a:srgbClr val="1B2430"/>
-                </a:solidFill>
-                <a:latin typeface="Calibri" pitchFamily="34" charset="0"/>
-                <a:ea typeface="Calibri" pitchFamily="34" charset="-122"/>
-                <a:cs typeface="Calibri" pitchFamily="34" charset="-120"/>
-              </a:rPr>
-              <a:t>We also reran it with AIMD capped at 32 like the agent: the neural agent still wins by 19, 29 and 28 percent, all significant.</a:t>
-            </a:r>
-            <a:endParaRPr lang="en-US" sz="1400" dirty="0"/>
+              <a:t>What went wrong: the Q-table was not faster, 7x slower at 10% loss, socket bugs, weak early baselines, and four mistakes in our own kernel tests.</a:t>
+            </a:r>
+            <a:endParaRPr lang="en-US" sz="1600" dirty="0"/>
           </a:p>
         </p:txBody>
       </p:sp>
@@ -19172,7 +18559,7 @@
                 <a:ea typeface="Calibri" pitchFamily="34" charset="-122"/>
                 <a:cs typeface="Calibri" pitchFamily="34" charset="-120"/>
               </a:rPr>
-              <a:t>Q: So Smart-RUDP now beats AIMD? A: The neural version does, in the C transport on emulated paths, trained in a simulator; the original table agent in Section 8 did not. Q: Is it fair? A: Same start window; AIMD keeps a cap of 128 while the agents are capped at 32; the agent retransmits more on random loss. Q: Why no gain from SACK? A: Those paths are limited by the bottleneck rate, so extra retransmissions cost little; the simulator, with different paths, showed a large gain.</a:t>
+              <a:t>Were results hidden? No; all are in the report.</a:t>
             </a:r>
             <a:endParaRPr lang="en-US" sz="1400" dirty="0"/>
           </a:p>
@@ -19243,7 +18630,7 @@
                 <a:ea typeface="Calibri" pitchFamily="34" charset="-122"/>
                 <a:cs typeface="Calibri" pitchFamily="34" charset="-120"/>
               </a:rPr>
-              <a:t>23. Fairness, ablations, chat fixes</a:t>
+              <a:t>23. Changes</a:t>
             </a:r>
             <a:endParaRPr lang="en-US" sz="2600" dirty="0"/>
           </a:p>
@@ -19282,7 +18669,7 @@
                 <a:ea typeface="Calibri" pitchFamily="34" charset="-122"/>
                 <a:cs typeface="Calibri" pitchFamily="34" charset="-120"/>
               </a:rPr>
-              <a:t>Time on this slide: 0:50</a:t>
+              <a:t>Time on this slide: 1:00</a:t>
             </a:r>
             <a:endParaRPr lang="en-US" sz="1300" dirty="0"/>
           </a:p>
@@ -19427,7 +18814,7 @@
               <a:buChar char="•"/>
             </a:pPr>
             <a:r>
-              <a:rPr lang="en-US" sz="1400" dirty="0">
+              <a:rPr lang="en-US" sz="1600" dirty="0">
                 <a:solidFill>
                   <a:srgbClr val="1B2430"/>
                 </a:solidFill>
@@ -19435,72 +18822,9 @@
                 <a:ea typeface="Calibri" pitchFamily="34" charset="-122"/>
                 <a:cs typeface="Calibri" pitchFamily="34" charset="-120"/>
               </a:rPr>
-              <a:t>We also tested two things people ask about. Fairness: two flows through one bottleneck. The neural agent is fair against itself and on short paths, but takes 74 percent against AIMD on the long 120 ms path, about like a fixed window.</a:t>
-            </a:r>
-            <a:endParaRPr lang="en-US" sz="1400" dirty="0"/>
-          </a:p>
-          <a:p>
-            <a:pPr marL="342900" indent="-342900">
-              <a:spcAft>
-                <a:spcPts val="600"/>
-              </a:spcAft>
-              <a:buSzPct val="100000"/>
-              <a:buChar char="•"/>
-            </a:pPr>
-            <a:r>
-              <a:rPr lang="en-US" sz="1400" dirty="0">
-                <a:solidFill>
-                  <a:srgbClr val="1B2430"/>
-                </a:solidFill>
-                <a:latin typeface="Calibri" pitchFamily="34" charset="0"/>
-                <a:ea typeface="Calibri" pitchFamily="34" charset="-122"/>
-                <a:cs typeface="Calibri" pitchFamily="34" charset="-120"/>
-              </a:rPr>
-              <a:t>Ablation: we retrained the agent with one piece removed. Only the no-shrink mask matters; without it the agent is no better than AIMD. The other pieces showed no measurable value.</a:t>
-            </a:r>
-            <a:endParaRPr lang="en-US" sz="1400" dirty="0"/>
-          </a:p>
-          <a:p>
-            <a:pPr marL="342900" indent="-342900">
-              <a:spcAft>
-                <a:spcPts val="600"/>
-              </a:spcAft>
-              <a:buSzPct val="100000"/>
-              <a:buChar char="•"/>
-            </a:pPr>
-            <a:r>
-              <a:rPr lang="en-US" sz="1400" dirty="0">
-                <a:solidFill>
-                  <a:srgbClr val="1B2430"/>
-                </a:solidFill>
-                <a:latin typeface="Calibri" pitchFamily="34" charset="0"/>
-                <a:ea typeface="Calibri" pitchFamily="34" charset="-122"/>
-                <a:cs typeface="Calibri" pitchFamily="34" charset="-120"/>
-              </a:rPr>
-              <a:t>The same recipe also gave very different results by seed, between 3.2 and 7.4 seconds, so we pick the seed on validation paths.</a:t>
-            </a:r>
-            <a:endParaRPr lang="en-US" sz="1400" dirty="0"/>
-          </a:p>
-          <a:p>
-            <a:pPr marL="342900" indent="-342900">
-              <a:spcAft>
-                <a:spcPts val="600"/>
-              </a:spcAft>
-              <a:buSzPct val="100000"/>
-              <a:buChar char="•"/>
-            </a:pPr>
-            <a:r>
-              <a:rPr lang="en-US" sz="1400" dirty="0">
-                <a:solidFill>
-                  <a:srgbClr val="1B2430"/>
-                </a:solidFill>
-                <a:latin typeface="Calibri" pitchFamily="34" charset="0"/>
-                <a:ea typeface="Calibri" pitchFamily="34" charset="-122"/>
-                <a:cs typeface="Calibri" pitchFamily="34" charset="-120"/>
-              </a:rPr>
-              <a:t>While building the dashboard we found a retransmission storm in the web gateway and fixed it; there is also an adaptive timeout option now.</a:t>
-            </a:r>
-            <a:endParaRPr lang="en-US" sz="1400" dirty="0"/>
+              <a:t>Each issue led to a fix: Selective Repeat, CRC-16, tuned baselines, neural net with hand-over, corrected kernel tests.</a:t>
+            </a:r>
+            <a:endParaRPr lang="en-US" sz="1600" dirty="0"/>
           </a:p>
         </p:txBody>
       </p:sp>
@@ -19576,7 +18900,7 @@
                 <a:ea typeface="Calibri" pitchFamily="34" charset="-122"/>
                 <a:cs typeface="Calibri" pitchFamily="34" charset="-120"/>
               </a:rPr>
-              <a:t>Is the agent fair? Mostly, but not on the long path against AIMD (74% share, Jain 0.82). Fairness was only tested in the simulator, not in C.</a:t>
+              <a:t>Biggest fix? Hand-over to AIMD: 84.9 s down to 13.9 s at 10% loss.</a:t>
             </a:r>
             <a:endParaRPr lang="en-US" sz="1400" dirty="0"/>
           </a:p>
@@ -19647,7 +18971,7 @@
                 <a:ea typeface="Calibri" pitchFamily="34" charset="-122"/>
                 <a:cs typeface="Calibri" pitchFamily="34" charset="-120"/>
               </a:rPr>
-              <a:t>24. Safety net: hand over to AIMD</a:t>
+              <a:t>24. Limits</a:t>
             </a:r>
             <a:endParaRPr lang="en-US" sz="2600" dirty="0"/>
           </a:p>
@@ -19831,7 +19155,7 @@
               <a:buChar char="•"/>
             </a:pPr>
             <a:r>
-              <a:rPr lang="en-US" sz="1400" dirty="0">
+              <a:rPr lang="en-US" sz="1600" dirty="0">
                 <a:solidFill>
                   <a:srgbClr val="1B2430"/>
                 </a:solidFill>
@@ -19839,72 +19163,9 @@
                 <a:ea typeface="Calibri" pitchFamily="34" charset="-122"/>
                 <a:cs typeface="Calibri" pitchFamily="34" charset="-120"/>
               </a:rPr>
-              <a:t>While checking our own result we found where the neural agent fails: on a hostile path with 10 percent loss it needed about 85 seconds where AIMD needed 11.</a:t>
-            </a:r>
-            <a:endParaRPr lang="en-US" sz="1400" dirty="0"/>
-          </a:p>
-          <a:p>
-            <a:pPr marL="342900" indent="-342900">
-              <a:spcAft>
-                <a:spcPts val="600"/>
-              </a:spcAft>
-              <a:buSzPct val="100000"/>
-              <a:buChar char="•"/>
-            </a:pPr>
-            <a:r>
-              <a:rPr lang="en-US" sz="1400" dirty="0">
-                <a:solidFill>
-                  <a:srgbClr val="1B2430"/>
-                </a:solidFill>
-                <a:latin typeface="Calibri" pitchFamily="34" charset="0"/>
-                <a:ea typeface="Calibri" pitchFamily="34" charset="-122"/>
-                <a:cs typeface="Calibri" pitchFamily="34" charset="-120"/>
-              </a:rPr>
-              <a:t>The fix is a hand-over: when a decision interval loses 10 percent or more of its packets, plain AIMD controls the window; after three clean intervals the agent takes over again.</a:t>
-            </a:r>
-            <a:endParaRPr lang="en-US" sz="1400" dirty="0"/>
-          </a:p>
-          <a:p>
-            <a:pPr marL="342900" indent="-342900">
-              <a:spcAft>
-                <a:spcPts val="600"/>
-              </a:spcAft>
-              <a:buSzPct val="100000"/>
-              <a:buChar char="•"/>
-            </a:pPr>
-            <a:r>
-              <a:rPr lang="en-US" sz="1400" dirty="0">
-                <a:solidFill>
-                  <a:srgbClr val="1B2430"/>
-                </a:solidFill>
-                <a:latin typeface="Calibri" pitchFamily="34" charset="0"/>
-                <a:ea typeface="Calibri" pitchFamily="34" charset="-122"/>
-                <a:cs typeface="Calibri" pitchFamily="34" charset="-120"/>
-              </a:rPr>
-              <a:t>With that, the three benign paths keep the agent's advantage and the hostile path is back near AIMD at about 14 seconds.</a:t>
-            </a:r>
-            <a:endParaRPr lang="en-US" sz="1400" dirty="0"/>
-          </a:p>
-          <a:p>
-            <a:pPr marL="342900" indent="-342900">
-              <a:spcAft>
-                <a:spcPts val="600"/>
-              </a:spcAft>
-              <a:buSzPct val="100000"/>
-              <a:buChar char="•"/>
-            </a:pPr>
-            <a:r>
-              <a:rPr lang="en-US" sz="1400" dirty="0">
-                <a:solidFill>
-                  <a:srgbClr val="1B2430"/>
-                </a:solidFill>
-                <a:latin typeface="Calibri" pitchFamily="34" charset="0"/>
-                <a:ea typeface="Calibri" pitchFamily="34" charset="-122"/>
-                <a:cs typeface="Calibri" pitchFamily="34" charset="-120"/>
-              </a:rPr>
-              <a:t>We also tried cutting the window on every timeout; it fixed the hostile case but made the 2 percent path much worse, so we dropped it. So the learned agent is useful on clean to moderate paths and needs a classical safety net elsewhere.</a:t>
-            </a:r>
-            <a:endParaRPr lang="en-US" sz="1400" dirty="0"/>
+              <a:t>Kernel TCP is faster; the agent is pushier than AIMD; no formal verification; trained in a simulator; two-machine run is one relayed path.</a:t>
+            </a:r>
+            <a:endParaRPr lang="en-US" sz="1600" dirty="0"/>
           </a:p>
         </p:txBody>
       </p:sp>
@@ -19980,7 +19241,7 @@
                 <a:ea typeface="Calibri" pitchFamily="34" charset="-122"/>
                 <a:cs typeface="Calibri" pitchFamily="34" charset="-120"/>
               </a:rPr>
-              <a:t>Is the hybrid still 'AI'? Yes on clean and moderate paths, where the neural network decides; on heavy loss it deliberately defers to AIMD. It is a rule we added, not something the network learned.</a:t>
+              <a:t>Future work? Real traces, formal certification, a direct-LAN multi-machine run.</a:t>
             </a:r>
             <a:endParaRPr lang="en-US" sz="1400" dirty="0"/>
           </a:p>
@@ -20051,7 +19312,7 @@
                 <a:ea typeface="Calibri" pitchFamily="34" charset="-122"/>
                 <a:cs typeface="Calibri" pitchFamily="34" charset="-120"/>
               </a:rPr>
-              <a:t>25. Selective Repeat is now the default</a:t>
+              <a:t>25. Learned</a:t>
             </a:r>
             <a:endParaRPr lang="en-US" sz="2600" dirty="0"/>
           </a:p>
@@ -20235,7 +19496,7 @@
               <a:buChar char="•"/>
             </a:pPr>
             <a:r>
-              <a:rPr lang="en-US" sz="1400" dirty="0">
+              <a:rPr lang="en-US" sz="1600" dirty="0">
                 <a:solidFill>
                   <a:srgbClr val="1B2430"/>
                 </a:solidFill>
@@ -20243,72 +19504,9 @@
                 <a:ea typeface="Calibri" pitchFamily="34" charset="-122"/>
                 <a:cs typeface="Calibri" pitchFamily="34" charset="-120"/>
               </a:rPr>
-              <a:t>We swapped Go-Back-N for Selective Repeat as the default. The receiver now keeps out-of-order packets and tells the sender exactly which ones it holds in a bitmap inside every ACK; the sender has one timer per packet and resends only what is missing.</a:t>
-            </a:r>
-            <a:endParaRPr lang="en-US" sz="1400" dirty="0"/>
-          </a:p>
-          <a:p>
-            <a:pPr marL="342900" indent="-342900">
-              <a:spcAft>
-                <a:spcPts val="600"/>
-              </a:spcAft>
-              <a:buSzPct val="100000"/>
-              <a:buChar char="•"/>
-            </a:pPr>
-            <a:r>
-              <a:rPr lang="en-US" sz="1400" dirty="0">
-                <a:solidFill>
-                  <a:srgbClr val="1B2430"/>
-                </a:solidFill>
-                <a:latin typeface="Calibri" pitchFamily="34" charset="0"/>
-                <a:ea typeface="Calibri" pitchFamily="34" charset="-122"/>
-                <a:cs typeface="Calibri" pitchFamily="34" charset="-120"/>
-              </a:rPr>
-              <a:t>The result: about ten times fewer retransmissions, and the neural agent's lead over AIMD grows to 46 percent on the lossy path and 50 percent on the satellite path.</a:t>
-            </a:r>
-            <a:endParaRPr lang="en-US" sz="1400" dirty="0"/>
-          </a:p>
-          <a:p>
-            <a:pPr marL="342900" indent="-342900">
-              <a:spcAft>
-                <a:spcPts val="600"/>
-              </a:spcAft>
-              <a:buSzPct val="100000"/>
-              <a:buChar char="•"/>
-            </a:pPr>
-            <a:r>
-              <a:rPr lang="en-US" sz="1400" dirty="0">
-                <a:solidFill>
-                  <a:srgbClr val="1B2430"/>
-                </a:solidFill>
-                <a:latin typeface="Calibri" pitchFamily="34" charset="0"/>
-                <a:ea typeface="Calibri" pitchFamily="34" charset="-122"/>
-                <a:cs typeface="Calibri" pitchFamily="34" charset="-120"/>
-              </a:rPr>
-              <a:t>The 10 percent loss failure we found earlier was mostly a Go-Back-N effect: with Selective Repeat the agent ties AIMD there.</a:t>
-            </a:r>
-            <a:endParaRPr lang="en-US" sz="1400" dirty="0"/>
-          </a:p>
-          <a:p>
-            <a:pPr marL="342900" indent="-342900">
-              <a:spcAft>
-                <a:spcPts val="600"/>
-              </a:spcAft>
-              <a:buSzPct val="100000"/>
-              <a:buChar char="•"/>
-            </a:pPr>
-            <a:r>
-              <a:rPr lang="en-US" sz="1400" dirty="0">
-                <a:solidFill>
-                  <a:srgbClr val="1B2430"/>
-                </a:solidFill>
-                <a:latin typeface="Calibri" pitchFamily="34" charset="0"/>
-                <a:ea typeface="Calibri" pitchFamily="34" charset="-122"/>
-                <a:cs typeface="Calibri" pitchFamily="34" charset="-120"/>
-              </a:rPr>
-              <a:t>Go-Back-N is still in the code behind a flag, and the earlier tables in the report were measured with it and are labelled that way.</a:t>
-            </a:r>
-            <a:endParaRPr lang="en-US" sz="1400" dirty="0"/>
+              <a:t>We learned protocol design, honest evaluation, and that tuned baselines matter. Next: real traces and certification.</a:t>
+            </a:r>
+            <a:endParaRPr lang="en-US" sz="1600" dirty="0"/>
           </a:p>
         </p:txBody>
       </p:sp>
@@ -20384,7 +19582,7 @@
                 <a:ea typeface="Calibri" pitchFamily="34" charset="-122"/>
                 <a:cs typeface="Calibri" pitchFamily="34" charset="-120"/>
               </a:rPr>
-              <a:t>Is it textbook Selective Repeat? Nearly: per-packet timers and a buffering receiver, but we use a cumulative ACK plus a 64-bit bitmap instead of one ACK per packet, and the window is capped at 60.</a:t>
+              <a:t>What would you do first? A bigger real-network study.</a:t>
             </a:r>
             <a:endParaRPr lang="en-US" sz="1400" dirty="0"/>
           </a:p>
@@ -20455,7 +19653,7 @@
                 <a:ea typeface="Calibri" pitchFamily="34" charset="-122"/>
                 <a:cs typeface="Calibri" pitchFamily="34" charset="-120"/>
               </a:rPr>
-              <a:t>26. Final results: tuned baselines, real clock</a:t>
+              <a:t>26. Thank you</a:t>
             </a:r>
             <a:endParaRPr lang="en-US" sz="2600" dirty="0"/>
           </a:p>
@@ -20494,7 +19692,7 @@
                 <a:ea typeface="Calibri" pitchFamily="34" charset="-122"/>
                 <a:cs typeface="Calibri" pitchFamily="34" charset="-120"/>
               </a:rPr>
-              <a:t>Time on this slide: 1:00</a:t>
+              <a:t>Time on this slide: 0:15</a:t>
             </a:r>
             <a:endParaRPr lang="en-US" sz="1300" dirty="0"/>
           </a:p>
@@ -20639,7 +19837,7 @@
               <a:buChar char="•"/>
             </a:pPr>
             <a:r>
-              <a:rPr lang="en-US" sz="1400" dirty="0">
+              <a:rPr lang="en-US" sz="1600" dirty="0">
                 <a:solidFill>
                   <a:srgbClr val="1B2430"/>
                 </a:solidFill>
@@ -20647,51 +19845,9 @@
                 <a:ea typeface="Calibri" pitchFamily="34" charset="-122"/>
                 <a:cs typeface="Calibri" pitchFamily="34" charset="-120"/>
               </a:rPr>
-              <a:t>This is the final comparison. Everything runs in the C transport with Selective Repeat, a real clock and a real server process. We compare four policies: the original AIMD with a window cap of 32, AIMD tuned with a cap of 128, tuned CUBIC, and the neural agent with its final settings.</a:t>
-            </a:r>
-            <a:endParaRPr lang="en-US" sz="1400" dirty="0"/>
-          </a:p>
-          <a:p>
-            <a:pPr marL="342900" indent="-342900">
-              <a:spcAft>
-                <a:spcPts val="600"/>
-              </a:spcAft>
-              <a:buSzPct val="100000"/>
-              <a:buChar char="•"/>
-            </a:pPr>
-            <a:r>
-              <a:rPr lang="en-US" sz="1400" dirty="0">
-                <a:solidFill>
-                  <a:srgbClr val="1B2430"/>
-                </a:solidFill>
-                <a:latin typeface="Calibri" pitchFamily="34" charset="0"/>
-                <a:ea typeface="Calibri" pitchFamily="34" charset="-122"/>
-                <a:cs typeface="Calibri" pitchFamily="34" charset="-120"/>
-              </a:rPr>
-              <a:t>The neural agent is fastest on four of the five paths and significantly faster than tuned AIMD on all four: 15 percent on the 5G-like path, 49 percent on lossy, and 52 percent on the satellite-like and fast paths. It beats CUBIC significantly on lossy and satellite. On the hostile 10 percent loss path nothing is significantly different.</a:t>
-            </a:r>
-            <a:endParaRPr lang="en-US" sz="1400" dirty="0"/>
-          </a:p>
-          <a:p>
-            <a:pPr marL="342900" indent="-342900">
-              <a:spcAft>
-                <a:spcPts val="600"/>
-              </a:spcAft>
-              <a:buSzPct val="100000"/>
-              <a:buChar char="•"/>
-            </a:pPr>
-            <a:r>
-              <a:rPr lang="en-US" sz="1400" dirty="0">
-                <a:solidFill>
-                  <a:srgbClr val="1B2430"/>
-                </a:solidFill>
-                <a:latin typeface="Calibri" pitchFamily="34" charset="0"/>
-                <a:ea typeface="Calibri" pitchFamily="34" charset="-122"/>
-                <a:cs typeface="Calibri" pitchFamily="34" charset="-120"/>
-              </a:rPr>
-              <a:t>One correction we want to be upfront about: earlier we reported bigger margins and 262 retransmissions on the fast path. That came from a timer that fired too early. Fixing it helped AIMD even more than the agent, so these numbers are the honest ones.</a:t>
-            </a:r>
-            <a:endParaRPr lang="en-US" sz="1400" dirty="0"/>
+              <a:t>Thank you. Code and results are at github.com/Capsturrrr/rudp.</a:t>
+            </a:r>
+            <a:endParaRPr lang="en-US" sz="1600" dirty="0"/>
           </a:p>
         </p:txBody>
       </p:sp>
@@ -20767,7 +19923,7 @@
                 <a:ea typeface="Calibri" pitchFamily="34" charset="-122"/>
                 <a:cs typeface="Calibri" pitchFamily="34" charset="-120"/>
               </a:rPr>
-              <a:t>Why did the margin shrink? A retransmission timer defect was hurting AIMD more than the agent. We found it by tracing the retransmissions, fixed it for every policy, and re-ran everything. Without the fix AIMD is 41 percent slower on random paths.</a:t>
+              <a:t>Questions.</a:t>
             </a:r>
             <a:endParaRPr lang="en-US" sz="1400" dirty="0"/>
           </a:p>
@@ -20838,7 +19994,7 @@
                 <a:ea typeface="Calibri" pitchFamily="34" charset="-122"/>
                 <a:cs typeface="Calibri" pitchFamily="34" charset="-120"/>
               </a:rPr>
-              <a:t>27. Real sockets found what the emulator could not</a:t>
+              <a:t>27. Neural agent in the C transport</a:t>
             </a:r>
             <a:endParaRPr lang="en-US" sz="2600" dirty="0"/>
           </a:p>
@@ -20877,7 +20033,7 @@
                 <a:ea typeface="Calibri" pitchFamily="34" charset="-122"/>
                 <a:cs typeface="Calibri" pitchFamily="34" charset="-120"/>
               </a:rPr>
-              <a:t>Time on this slide: 0:50</a:t>
+              <a:t>Time on this slide: 1:00</a:t>
             </a:r>
             <a:endParaRPr lang="en-US" sz="1300" dirty="0"/>
           </a:p>
@@ -21030,7 +20186,7 @@
                 <a:ea typeface="Calibri" pitchFamily="34" charset="-122"/>
                 <a:cs typeface="Calibri" pitchFamily="34" charset="-120"/>
               </a:rPr>
-              <a:t>The emulator is inside our client, so we also tested through a separate impairment process on real UDP sockets. That found three real defects.</a:t>
+              <a:t>We then put the neural agent into the C transport, the same code as Section 8, and tested it on the same three emulated paths with 15 runs each.</a:t>
             </a:r>
             <a:endParaRPr lang="en-US" sz="1400" dirty="0"/>
           </a:p>
@@ -21051,7 +20207,7 @@
                 <a:ea typeface="Calibri" pitchFamily="34" charset="-122"/>
                 <a:cs typeface="Calibri" pitchFamily="34" charset="-120"/>
               </a:rPr>
-              <a:t>First, if the client's last handshake ACK is lost, the server ignored all following data and the transfer hung. We fixed it the way TCP does and added a regression test. Second, the spurious timeouts I just mentioned. Third, a fuzzer showed our byte-sum checksum let about 2 percent of corrupted packets through, so it is now CRC-16 and the fuzzer accepts none.</a:t>
+              <a:t>AIMD and the agents all start from a window of 10. The neural agent was faster than AIMD on all three: 15 percent on 5G-like, 27 percent on lossy, 24 percent on satellite-like. The intervals exclude zero.</a:t>
             </a:r>
             <a:endParaRPr lang="en-US" sz="1400" dirty="0"/>
           </a:p>
@@ -21072,7 +20228,49 @@
                 <a:ea typeface="Calibri" pitchFamily="34" charset="-122"/>
                 <a:cs typeface="Calibri" pitchFamily="34" charset="-120"/>
               </a:rPr>
-              <a:t>On real sockets the neural agent is again fastest on every path: 17, 53, 45 and 39 percent faster than tuned AIMD on 5G, lossy, satellite and fast, and a tie on the hostile path.</a:t>
+              <a:t>The retrained table did not carry over: it was slower on 5G and satellite. A network generalises to unseen paths where a table does not.</a:t>
+            </a:r>
+            <a:endParaRPr lang="en-US" sz="1400" dirty="0"/>
+          </a:p>
+          <a:p>
+            <a:pPr marL="342900" indent="-342900">
+              <a:spcAft>
+                <a:spcPts val="600"/>
+              </a:spcAft>
+              <a:buSzPct val="100000"/>
+              <a:buChar char="•"/>
+            </a:pPr>
+            <a:r>
+              <a:rPr lang="en-US" sz="1400" dirty="0">
+                <a:solidFill>
+                  <a:srgbClr val="1B2430"/>
+                </a:solidFill>
+                <a:latin typeface="Calibri" pitchFamily="34" charset="0"/>
+                <a:ea typeface="Calibri" pitchFamily="34" charset="-122"/>
+                <a:cs typeface="Calibri" pitchFamily="34" charset="-120"/>
+              </a:rPr>
+              <a:t>We also added selective acknowledgments to the C code: about ten times fewer retransmissions, but no significant change in completion time on these emulated paths.</a:t>
+            </a:r>
+            <a:endParaRPr lang="en-US" sz="1400" dirty="0"/>
+          </a:p>
+          <a:p>
+            <a:pPr marL="342900" indent="-342900">
+              <a:spcAft>
+                <a:spcPts val="600"/>
+              </a:spcAft>
+              <a:buSzPct val="100000"/>
+              <a:buChar char="•"/>
+            </a:pPr>
+            <a:r>
+              <a:rPr lang="en-US" sz="1400" dirty="0">
+                <a:solidFill>
+                  <a:srgbClr val="1B2430"/>
+                </a:solidFill>
+                <a:latin typeface="Calibri" pitchFamily="34" charset="0"/>
+                <a:ea typeface="Calibri" pitchFamily="34" charset="-122"/>
+                <a:cs typeface="Calibri" pitchFamily="34" charset="-120"/>
+              </a:rPr>
+              <a:t>We also reran it with AIMD capped at 32 like the agent: the neural agent still wins by 19, 29 and 28 percent, all significant.</a:t>
             </a:r>
             <a:endParaRPr lang="en-US" sz="1400" dirty="0"/>
           </a:p>
@@ -21150,7 +20348,7 @@
                 <a:ea typeface="Calibri" pitchFamily="34" charset="-122"/>
                 <a:cs typeface="Calibri" pitchFamily="34" charset="-120"/>
               </a:rPr>
-              <a:t>Is this a real network? It is real UDP sockets on one machine, with the impairment applied by a separate process. It is not a kernel netem or a multi-machine path; we provide the script for that but had no root access.</a:t>
+              <a:t>Q: So Smart-RUDP now beats AIMD? A: The neural version does, in the C transport on emulated paths, trained in a simulator; the original table agent in Section 8 did not. Q: Is it fair? A: Same start window; AIMD keeps a cap of 128 while the agents are capped at 32; the agent retransmits more on random loss. Q: Why no gain from SACK? A: Those paths are limited by the bottleneck rate, so extra retransmissions cost little; the simulator, with different paths, showed a large gain.</a:t>
             </a:r>
             <a:endParaRPr lang="en-US" sz="1400" dirty="0"/>
           </a:p>
@@ -21413,28 +20611,7 @@
                 <a:ea typeface="Calibri" pitchFamily="34" charset="-122"/>
                 <a:cs typeface="Calibri" pitchFamily="34" charset="-120"/>
               </a:rPr>
-              <a:t>Good morning ma'am. We are Harshavardhan, Rohit and Shloak.</a:t>
-            </a:r>
-            <a:endParaRPr lang="en-US" sz="1600" dirty="0"/>
-          </a:p>
-          <a:p>
-            <a:pPr marL="342900" indent="-342900">
-              <a:spcAft>
-                <a:spcPts val="600"/>
-              </a:spcAft>
-              <a:buSzPct val="100000"/>
-              <a:buChar char="•"/>
-            </a:pPr>
-            <a:r>
-              <a:rPr lang="en-US" sz="1600" dirty="0">
-                <a:solidFill>
-                  <a:srgbClr val="1B2430"/>
-                </a:solidFill>
-                <a:latin typeface="Calibri" pitchFamily="34" charset="0"/>
-                <a:ea typeface="Calibri" pitchFamily="34" charset="-122"/>
-                <a:cs typeface="Calibri" pitchFamily="34" charset="-120"/>
-              </a:rPr>
-              <a:t>Our project is Smart-RUDP: a reliable transport protocol we built in C on top of UDP, plus a controller that learns how fast to send.</a:t>
+              <a:t>We built RUDP, a reliable protocol on UDP in C, and taught a neural network to control its congestion window.</a:t>
             </a:r>
             <a:endParaRPr lang="en-US" sz="1600" dirty="0"/>
           </a:p>
@@ -21512,7 +20689,7 @@
                 <a:ea typeface="Calibri" pitchFamily="34" charset="-122"/>
                 <a:cs typeface="Calibri" pitchFamily="34" charset="-120"/>
               </a:rPr>
-              <a:t>Say the three names and the GitHub link once, then move on.</a:t>
+              <a:t>Who did what? Harsh: transport and agent; Rohit and Shloak: network design and tools.</a:t>
             </a:r>
             <a:endParaRPr lang="en-US" sz="1400" dirty="0"/>
           </a:p>
@@ -21583,7 +20760,7 @@
                 <a:ea typeface="Calibri" pitchFamily="34" charset="-122"/>
                 <a:cs typeface="Calibri" pitchFamily="34" charset="-120"/>
               </a:rPr>
-              <a:t>28. A fast, faithful C simulator, and what it showed</a:t>
+              <a:t>28. Safety net: hand over to AIMD</a:t>
             </a:r>
             <a:endParaRPr lang="en-US" sz="2600" dirty="0"/>
           </a:p>
@@ -21622,7 +20799,7 @@
                 <a:ea typeface="Calibri" pitchFamily="34" charset="-122"/>
                 <a:cs typeface="Calibri" pitchFamily="34" charset="-120"/>
               </a:rPr>
-              <a:t>Time on this slide: 1:00</a:t>
+              <a:t>Time on this slide: 0:50</a:t>
             </a:r>
             <a:endParaRPr lang="en-US" sz="1300" dirty="0"/>
           </a:p>
@@ -21775,7 +20952,7 @@
                 <a:ea typeface="Calibri" pitchFamily="34" charset="-122"/>
                 <a:cs typeface="Calibri" pitchFamily="34" charset="-120"/>
               </a:rPr>
-              <a:t>Our old simulator was in Python and never matched the C code exactly. So we added a virtual-time mode to the C sender itself: same code, simulated receiver and clock, about a thousand times faster. It reproduces the real-clock results in all 15 calibration cells.</a:t>
+              <a:t>While checking our own result we found where the neural agent fails: on a hostile path with 10 percent loss it needed about 85 seconds where AIMD needed 11.</a:t>
             </a:r>
             <a:endParaRPr lang="en-US" sz="1400" dirty="0"/>
           </a:p>
@@ -21796,7 +20973,7 @@
                 <a:ea typeface="Calibri" pitchFamily="34" charset="-122"/>
                 <a:cs typeface="Calibri" pitchFamily="34" charset="-120"/>
               </a:rPr>
-              <a:t>That let us test on 100 random paths that we never tuned on. The neural agent needs 0.53 times the time of tuned AIMD, is faster on 89 paths and never more than 20 percent slower. Tuned CUBIC is slower by more than 20 percent on 27 paths.</a:t>
+              <a:t>The fix is a hand-over: when a decision interval loses 10 percent or more of its packets, plain AIMD controls the window; after three clean intervals the agent takes over again.</a:t>
             </a:r>
             <a:endParaRPr lang="en-US" sz="1400" dirty="0"/>
           </a:p>
@@ -21817,7 +20994,28 @@
                 <a:ea typeface="Calibri" pitchFamily="34" charset="-122"/>
                 <a:cs typeface="Calibri" pitchFamily="34" charset="-120"/>
               </a:rPr>
-              <a:t>The ablation shows which parts matter: the window cap of 128 most, then pacing, the timer floor and slow start. We also tried evolution-strategy retraining directly in the C sender and it only gave 2 percent, so we did not adopt it.</a:t>
+              <a:t>With that, the three benign paths keep the agent's advantage and the hostile path is back near AIMD at about 14 seconds.</a:t>
+            </a:r>
+            <a:endParaRPr lang="en-US" sz="1400" dirty="0"/>
+          </a:p>
+          <a:p>
+            <a:pPr marL="342900" indent="-342900">
+              <a:spcAft>
+                <a:spcPts val="600"/>
+              </a:spcAft>
+              <a:buSzPct val="100000"/>
+              <a:buChar char="•"/>
+            </a:pPr>
+            <a:r>
+              <a:rPr lang="en-US" sz="1400" dirty="0">
+                <a:solidFill>
+                  <a:srgbClr val="1B2430"/>
+                </a:solidFill>
+                <a:latin typeface="Calibri" pitchFamily="34" charset="0"/>
+                <a:ea typeface="Calibri" pitchFamily="34" charset="-122"/>
+                <a:cs typeface="Calibri" pitchFamily="34" charset="-120"/>
+              </a:rPr>
+              <a:t>We also tried cutting the window on every timeout; it fixed the hostile case but made the 2 percent path much worse, so we dropped it. So the learned agent is useful on clean to moderate paths and needs a classical safety net elsewhere.</a:t>
             </a:r>
             <a:endParaRPr lang="en-US" sz="1400" dirty="0"/>
           </a:p>
@@ -21895,7 +21093,7 @@
                 <a:ea typeface="Calibri" pitchFamily="34" charset="-122"/>
                 <a:cs typeface="Calibri" pitchFamily="34" charset="-120"/>
               </a:rPr>
-              <a:t>Is the test set separate from tuning? Yes. Slow-start and hand-over settings were chosen on a different set of random paths; the 100 test paths were used only for the reported numbers.</a:t>
+              <a:t>Is the hybrid still 'AI'? Yes on clean and moderate paths, where the neural network decides; on heavy loss it deliberately defers to AIMD. It is a rule we added, not something the network learned.</a:t>
             </a:r>
             <a:endParaRPr lang="en-US" sz="1400" dirty="0"/>
           </a:p>
@@ -21966,7 +21164,7 @@
                 <a:ea typeface="Calibri" pitchFamily="34" charset="-122"/>
                 <a:cs typeface="Calibri" pitchFamily="34" charset="-120"/>
               </a:rPr>
-              <a:t>29. Fairness and file transfer</a:t>
+              <a:t>29. More evidence: baselines, SACK, reordering</a:t>
             </a:r>
             <a:endParaRPr lang="en-US" sz="2600" dirty="0"/>
           </a:p>
@@ -22005,7 +21203,7 @@
                 <a:ea typeface="Calibri" pitchFamily="34" charset="-122"/>
                 <a:cs typeface="Calibri" pitchFamily="34" charset="-120"/>
               </a:rPr>
-              <a:t>Time on this slide: 0:50</a:t>
+              <a:t>Time on this slide: 1:00</a:t>
             </a:r>
             <a:endParaRPr lang="en-US" sz="1300" dirty="0"/>
           </a:p>
@@ -22158,7 +21356,7 @@
                 <a:ea typeface="Calibri" pitchFamily="34" charset="-122"/>
                 <a:cs typeface="Calibri" pitchFamily="34" charset="-120"/>
               </a:rPr>
-              <a:t>Fairness on real sockets: two neural flows split the link evenly, and so do two AIMD flows. But against tuned AIMD the neural agent takes 68 percent of the link, and 76 percent against the original AIMD. CUBIC takes 61 percent. So the agent is a more aggressive neighbour. Nothing starves, but it is not polite, and we did not test coexistence with TCP. That is our main limitation.</a:t>
+              <a:t>The abstract also promised TCP and plain UDP baselines, so we ran them on the same 48 unseen simulated paths.</a:t>
             </a:r>
             <a:endParaRPr lang="en-US" sz="1400" dirty="0"/>
           </a:p>
@@ -22179,7 +21377,7 @@
                 <a:ea typeface="Calibri" pitchFamily="34" charset="-122"/>
                 <a:cs typeface="Calibri" pitchFamily="34" charset="-120"/>
               </a:rPr>
-              <a:t>We also added file transfer: the sender sends a real file and the received file is byte-identical in every run. A 4 megabyte file over the fast path takes 8.9 seconds with the agent against 21 seconds with tuned AIMD.</a:t>
+              <a:t>Plain UDP delivered only 68 percent of the messages, so reliability is needed. Our TCP model, with selective acknowledgments, has the lowest median at 1.48 seconds.</a:t>
             </a:r>
             <a:endParaRPr lang="en-US" sz="1400" dirty="0"/>
           </a:p>
@@ -22200,7 +21398,91 @@
                 <a:ea typeface="Calibri" pitchFamily="34" charset="-122"/>
                 <a:cs typeface="Calibri" pitchFamily="34" charset="-120"/>
               </a:rPr>
-              <a:t>The chat and web gateway now use the same window and bitmap as the C transport, and there is CI, fuzzing and an architecture document.</a:t>
+              <a:t>Smart-RUDP deep is at 3.20 seconds mean and is about even with the TCP model path by path: faster on 22, slower on 23.</a:t>
+            </a:r>
+            <a:endParaRPr lang="en-US" sz="1400" dirty="0"/>
+          </a:p>
+          <a:p>
+            <a:pPr marL="342900" indent="-342900">
+              <a:spcAft>
+                <a:spcPts val="600"/>
+              </a:spcAft>
+              <a:buSzPct val="100000"/>
+              <a:buChar char="•"/>
+            </a:pPr>
+            <a:r>
+              <a:rPr lang="en-US" sz="1400" dirty="0">
+                <a:solidFill>
+                  <a:srgbClr val="1B2430"/>
+                </a:solidFill>
+                <a:latin typeface="Calibri" pitchFamily="34" charset="0"/>
+                <a:ea typeface="Calibri" pitchFamily="34" charset="-122"/>
+                <a:cs typeface="Calibri" pitchFamily="34" charset="-120"/>
+              </a:rPr>
+              <a:t>The gap to TCP is mostly Go-Back-N. A selective-ack version of our transport cut AIMD from 7.16 to 4.90 seconds in simulation.</a:t>
+            </a:r>
+            <a:endParaRPr lang="en-US" sz="1400" dirty="0"/>
+          </a:p>
+          <a:p>
+            <a:pPr marL="342900" indent="-342900">
+              <a:spcAft>
+                <a:spcPts val="600"/>
+              </a:spcAft>
+              <a:buSzPct val="100000"/>
+              <a:buChar char="•"/>
+            </a:pPr>
+            <a:r>
+              <a:rPr lang="en-US" sz="1400" dirty="0">
+                <a:solidFill>
+                  <a:srgbClr val="1B2430"/>
+                </a:solidFill>
+                <a:latin typeface="Calibri" pitchFamily="34" charset="0"/>
+                <a:ea typeface="Calibri" pitchFamily="34" charset="-122"/>
+                <a:cs typeface="Calibri" pitchFamily="34" charset="-120"/>
+              </a:rPr>
+              <a:t>Reordering hurts Go-Back-N badly: AIMD goes from 0.82 to 6.79 seconds at 20 milliseconds of jitter. The learned agents cope better and selective ack removes most of the damage.</a:t>
+            </a:r>
+            <a:endParaRPr lang="en-US" sz="1400" dirty="0"/>
+          </a:p>
+          <a:p>
+            <a:pPr marL="342900" indent="-342900">
+              <a:spcAft>
+                <a:spcPts val="600"/>
+              </a:spcAft>
+              <a:buSzPct val="100000"/>
+              <a:buChar char="•"/>
+            </a:pPr>
+            <a:r>
+              <a:rPr lang="en-US" sz="1400" dirty="0">
+                <a:solidFill>
+                  <a:srgbClr val="1B2430"/>
+                </a:solidFill>
+                <a:latin typeface="Calibri" pitchFamily="34" charset="0"/>
+                <a:ea typeface="Calibri" pitchFamily="34" charset="-122"/>
+                <a:cs typeface="Calibri" pitchFamily="34" charset="-120"/>
+              </a:rPr>
+              <a:t>For the C experiments we repeated 20 runs per mode: Smart-RUDP is still slower on 5G and satellite and ties on lossy.</a:t>
+            </a:r>
+            <a:endParaRPr lang="en-US" sz="1400" dirty="0"/>
+          </a:p>
+          <a:p>
+            <a:pPr marL="342900" indent="-342900">
+              <a:spcAft>
+                <a:spcPts val="600"/>
+              </a:spcAft>
+              <a:buSzPct val="100000"/>
+              <a:buChar char="•"/>
+            </a:pPr>
+            <a:r>
+              <a:rPr lang="en-US" sz="1400" dirty="0">
+                <a:solidFill>
+                  <a:srgbClr val="1B2430"/>
+                </a:solidFill>
+                <a:latin typeface="Calibri" pitchFamily="34" charset="0"/>
+                <a:ea typeface="Calibri" pitchFamily="34" charset="-122"/>
+                <a:cs typeface="Calibri" pitchFamily="34" charset="-120"/>
+              </a:rPr>
+              <a:t>Be upfront: our simulator originally allowed a duplicate-ACK retransmission storm that flatters aggressive controllers. With the realistic rule the neural agent is about level with AIMD in simulation (7.27 s against 7.75 s). The C results are the evidence we rely on.</a:t>
             </a:r>
             <a:endParaRPr lang="en-US" sz="1400" dirty="0"/>
           </a:p>
@@ -22278,7 +21560,7 @@
                 <a:ea typeface="Calibri" pitchFamily="34" charset="-122"/>
                 <a:cs typeface="Calibri" pitchFamily="34" charset="-120"/>
               </a:rPr>
-              <a:t>Would this be safe to deploy? Not on a shared link yet: it needs fairness-aware training and TCP coexistence tests. For a dedicated path it is a clear win.</a:t>
+              <a:t>Q: Is the TCP row real TCP? A: No, it is a model with the same window cap; real kernel TCP needs netem on Linux, and we provide the script. Q: Why did you not implement SACK in C? A: Time; the simulation shows it is the biggest win and it is the first item of future work. Q: Is 20 runs enough? A: The intervals exclude zero for 5G and satellite and include zero for lossy. Did you check it is not a simulator artefact? Yes: with the realistic rule the simulated gain mostly disappears, so we lean on the C results, which use that rule and equal window caps.</a:t>
             </a:r>
             <a:endParaRPr lang="en-US" sz="1400" dirty="0"/>
           </a:p>
@@ -22349,7 +21631,7 @@
                 <a:ea typeface="Calibri" pitchFamily="34" charset="-122"/>
                 <a:cs typeface="Calibri" pitchFamily="34" charset="-120"/>
               </a:rPr>
-              <a:t>30. Seeing the difference: the window</a:t>
+              <a:t>30. Fairness, ablations, chat fixes</a:t>
             </a:r>
             <a:endParaRPr lang="en-US" sz="2600" dirty="0"/>
           </a:p>
@@ -22388,7 +21670,7 @@
                 <a:ea typeface="Calibri" pitchFamily="34" charset="-122"/>
                 <a:cs typeface="Calibri" pitchFamily="34" charset="-120"/>
               </a:rPr>
-              <a:t>Time on this slide: 0:40</a:t>
+              <a:t>Time on this slide: 0:50</a:t>
             </a:r>
             <a:endParaRPr lang="en-US" sz="1300" dirty="0"/>
           </a:p>
@@ -22533,7 +21815,7 @@
               <a:buChar char="•"/>
             </a:pPr>
             <a:r>
-              <a:rPr lang="en-US" sz="1600" dirty="0">
+              <a:rPr lang="en-US" sz="1400" dirty="0">
                 <a:solidFill>
                   <a:srgbClr val="1B2430"/>
                 </a:solidFill>
@@ -22541,9 +21823,72 @@
                 <a:ea typeface="Calibri" pitchFamily="34" charset="-122"/>
                 <a:cs typeface="Calibri" pitchFamily="34" charset="-120"/>
               </a:rPr>
-              <a:t>This is the congestion window on the lossy path, same seed for both. AIMD, in grey, climbs one packet per round trip and halves on every loss, so it never gets above about 15 packets and takes nine seconds. The neural agent, in green, runs much higher, backs off when it sees loss or queueing delay, and finishes in four seconds. The figure comes from our virtual-time sender and can be regenerated with make figures.</a:t>
-            </a:r>
-            <a:endParaRPr lang="en-US" sz="1600" dirty="0"/>
+              <a:t>We also tested two things people ask about. Fairness: two flows through one bottleneck. The neural agent is fair against itself and on short paths, but takes 74 percent against AIMD on the long 120 ms path, about like a fixed window.</a:t>
+            </a:r>
+            <a:endParaRPr lang="en-US" sz="1400" dirty="0"/>
+          </a:p>
+          <a:p>
+            <a:pPr marL="342900" indent="-342900">
+              <a:spcAft>
+                <a:spcPts val="600"/>
+              </a:spcAft>
+              <a:buSzPct val="100000"/>
+              <a:buChar char="•"/>
+            </a:pPr>
+            <a:r>
+              <a:rPr lang="en-US" sz="1400" dirty="0">
+                <a:solidFill>
+                  <a:srgbClr val="1B2430"/>
+                </a:solidFill>
+                <a:latin typeface="Calibri" pitchFamily="34" charset="0"/>
+                <a:ea typeface="Calibri" pitchFamily="34" charset="-122"/>
+                <a:cs typeface="Calibri" pitchFamily="34" charset="-120"/>
+              </a:rPr>
+              <a:t>Ablation: we retrained the agent with one piece removed. Only the no-shrink mask matters; without it the agent is no better than AIMD. The other pieces showed no measurable value.</a:t>
+            </a:r>
+            <a:endParaRPr lang="en-US" sz="1400" dirty="0"/>
+          </a:p>
+          <a:p>
+            <a:pPr marL="342900" indent="-342900">
+              <a:spcAft>
+                <a:spcPts val="600"/>
+              </a:spcAft>
+              <a:buSzPct val="100000"/>
+              <a:buChar char="•"/>
+            </a:pPr>
+            <a:r>
+              <a:rPr lang="en-US" sz="1400" dirty="0">
+                <a:solidFill>
+                  <a:srgbClr val="1B2430"/>
+                </a:solidFill>
+                <a:latin typeface="Calibri" pitchFamily="34" charset="0"/>
+                <a:ea typeface="Calibri" pitchFamily="34" charset="-122"/>
+                <a:cs typeface="Calibri" pitchFamily="34" charset="-120"/>
+              </a:rPr>
+              <a:t>The same recipe also gave very different results by seed, between 3.2 and 7.4 seconds, so we pick the seed on validation paths.</a:t>
+            </a:r>
+            <a:endParaRPr lang="en-US" sz="1400" dirty="0"/>
+          </a:p>
+          <a:p>
+            <a:pPr marL="342900" indent="-342900">
+              <a:spcAft>
+                <a:spcPts val="600"/>
+              </a:spcAft>
+              <a:buSzPct val="100000"/>
+              <a:buChar char="•"/>
+            </a:pPr>
+            <a:r>
+              <a:rPr lang="en-US" sz="1400" dirty="0">
+                <a:solidFill>
+                  <a:srgbClr val="1B2430"/>
+                </a:solidFill>
+                <a:latin typeface="Calibri" pitchFamily="34" charset="0"/>
+                <a:ea typeface="Calibri" pitchFamily="34" charset="-122"/>
+                <a:cs typeface="Calibri" pitchFamily="34" charset="-120"/>
+              </a:rPr>
+              <a:t>While building the dashboard we found a retransmission storm in the web gateway and fixed it; there is also an adaptive timeout option now.</a:t>
+            </a:r>
+            <a:endParaRPr lang="en-US" sz="1400" dirty="0"/>
           </a:p>
         </p:txBody>
       </p:sp>
@@ -22619,7 +21964,7 @@
                 <a:ea typeface="Calibri" pitchFamily="34" charset="-122"/>
                 <a:cs typeface="Calibri" pitchFamily="34" charset="-120"/>
               </a:rPr>
-              <a:t>Why does the agent's window jump around so much? It picks one of five multipliers about once per round trip, so it moves in steps; that is the cost of a learned policy with a coarse action set.</a:t>
+              <a:t>Is the agent fair? Mostly, but not on the long path against AIMD (74% share, Jain 0.82). Fairness was only tested in the simulator, not in C.</a:t>
             </a:r>
             <a:endParaRPr lang="en-US" sz="1400" dirty="0"/>
           </a:p>
@@ -22690,7 +22035,7 @@
                 <a:ea typeface="Calibri" pitchFamily="34" charset="-122"/>
                 <a:cs typeface="Calibri" pitchFamily="34" charset="-120"/>
               </a:rPr>
-              <a:t>31. Closing gaps: fairness and cross traffic</a:t>
+              <a:t>31. Fairness and file transfer</a:t>
             </a:r>
             <a:endParaRPr lang="en-US" sz="2600" dirty="0"/>
           </a:p>
@@ -22882,7 +22227,7 @@
                 <a:ea typeface="Calibri" pitchFamily="34" charset="-122"/>
                 <a:cs typeface="Calibri" pitchFamily="34" charset="-120"/>
               </a:rPr>
-              <a:t>We worked on the weaknesses we had listed. For fairness we added an optional polite mode: when a standing queue builds, the agent backs off. Over 8 runs against tuned AIMD it takes 52 percent of the link instead of 70, and the Jain index rises from 0.86 to 0.94. The price is speed: on 100 random paths the average time goes from 0.53 to 0.58 times AIMD's, and the worst path is 2.95 times slower, so it stays off by default.</a:t>
+              <a:t>Fairness on real sockets: two neural flows split the link evenly, and so do two AIMD flows. But against tuned AIMD the neural agent takes 68 percent of the link, and 76 percent against the original AIMD. CUBIC takes 61 percent. So the agent is a more aggressive neighbour. Nothing starves, but it is not polite, and we did not test coexistence with TCP. That is our main limitation.</a:t>
             </a:r>
             <a:endParaRPr lang="en-US" sz="1400" dirty="0"/>
           </a:p>
@@ -22903,7 +22248,28 @@
                 <a:ea typeface="Calibri" pitchFamily="34" charset="-122"/>
                 <a:cs typeface="Calibri" pitchFamily="34" charset="-120"/>
               </a:rPr>
-              <a:t>We also added bursty cross traffic to the test proxy. Here the result is less flattering: the agent is 15 percent faster than tuned AIMD, but level with CUBIC, and it retransmits about three times as often as AIMD. Three tweaks did not fix that, so we report it as a limit. Finally the server now handles up to 16 clients, checked by sending two files at once.</a:t>
+              <a:t>We also added file transfer: the sender sends a real file and the received file is byte-identical in every run. A 4 megabyte file over the fast path takes 8.9 seconds with the agent against 21 seconds with tuned AIMD.</a:t>
+            </a:r>
+            <a:endParaRPr lang="en-US" sz="1400" dirty="0"/>
+          </a:p>
+          <a:p>
+            <a:pPr marL="342900" indent="-342900">
+              <a:spcAft>
+                <a:spcPts val="600"/>
+              </a:spcAft>
+              <a:buSzPct val="100000"/>
+              <a:buChar char="•"/>
+            </a:pPr>
+            <a:r>
+              <a:rPr lang="en-US" sz="1400" dirty="0">
+                <a:solidFill>
+                  <a:srgbClr val="1B2430"/>
+                </a:solidFill>
+                <a:latin typeface="Calibri" pitchFamily="34" charset="0"/>
+                <a:ea typeface="Calibri" pitchFamily="34" charset="-122"/>
+                <a:cs typeface="Calibri" pitchFamily="34" charset="-120"/>
+              </a:rPr>
+              <a:t>The chat and web gateway now use the same window and bitmap as the C transport, and there is CI, fuzzing and an architecture document.</a:t>
             </a:r>
             <a:endParaRPr lang="en-US" sz="1400" dirty="0"/>
           </a:p>
@@ -22981,7 +22347,7 @@
                 <a:ea typeface="Calibri" pitchFamily="34" charset="-122"/>
                 <a:cs typeface="Calibri" pitchFamily="34" charset="-120"/>
               </a:rPr>
-              <a:t>Is polite mode learned? No. It is a hand-made rule on the delay signal. A learned version needs a two-flow training environment, which is future work.</a:t>
+              <a:t>Would this be safe to deploy? Not on a shared link yet: it needs fairness-aware training and TCP coexistence tests. For a dedicated path it is a clear win.</a:t>
             </a:r>
             <a:endParaRPr lang="en-US" sz="1400" dirty="0"/>
           </a:p>
@@ -23052,7 +22418,7 @@
                 <a:ea typeface="Calibri" pitchFamily="34" charset="-122"/>
                 <a:cs typeface="Calibri" pitchFamily="34" charset="-120"/>
               </a:rPr>
-              <a:t>32. How it was tested</a:t>
+              <a:t>32. Closing gaps: fairness and cross traffic</a:t>
             </a:r>
             <a:endParaRPr lang="en-US" sz="2600" dirty="0"/>
           </a:p>
@@ -23091,7 +22457,7 @@
                 <a:ea typeface="Calibri" pitchFamily="34" charset="-122"/>
                 <a:cs typeface="Calibri" pitchFamily="34" charset="-120"/>
               </a:rPr>
-              <a:t>Time on this slide: 0:40</a:t>
+              <a:t>Time on this slide: 0:50</a:t>
             </a:r>
             <a:endParaRPr lang="en-US" sz="1300" dirty="0"/>
           </a:p>
@@ -23244,7 +22610,7 @@
                 <a:ea typeface="Calibri" pitchFamily="34" charset="-122"/>
                 <a:cs typeface="Calibri" pitchFamily="34" charset="-120"/>
               </a:rPr>
-              <a:t>Correctness first: unit, end-to-end, handshake, file-integrity, chat and simulator tests, and the packet parser is fuzzed under AddressSanitizer.</a:t>
+              <a:t>We worked on the weaknesses we had listed. For fairness we added an optional polite mode: when a standing queue builds, the agent backs off. Over 8 runs against tuned AIMD it takes 52 percent of the link instead of 70, and the Jain index rises from 0.86 to 0.94. The price is speed: on 100 random paths the average time goes from 0.53 to 0.58 times AIMD's, and the worst path is 2.95 times slower, so it stays off by default.</a:t>
             </a:r>
             <a:endParaRPr lang="en-US" sz="1400" dirty="0"/>
           </a:p>
@@ -23265,28 +22631,7 @@
                 <a:ea typeface="Calibri" pitchFamily="34" charset="-122"/>
                 <a:cs typeface="Calibri" pitchFamily="34" charset="-120"/>
               </a:rPr>
-              <a:t>For speed we use virtual time, which is the same C sender on a simulated clock. We checked it against the real clock, and it agreed in all 15 of 15 cells. We use paired seeds with 95 percent intervals and keep tuning seeds apart from test seeds.</a:t>
-            </a:r>
-            <a:endParaRPr lang="en-US" sz="1400" dirty="0"/>
-          </a:p>
-          <a:p>
-            <a:pPr marL="342900" indent="-342900">
-              <a:spcAft>
-                <a:spcPts val="600"/>
-              </a:spcAft>
-              <a:buSzPct val="100000"/>
-              <a:buChar char="•"/>
-            </a:pPr>
-            <a:r>
-              <a:rPr lang="en-US" sz="1400" dirty="0">
-                <a:solidFill>
-                  <a:srgbClr val="1B2430"/>
-                </a:solidFill>
-                <a:latin typeface="Calibri" pitchFamily="34" charset="0"/>
-                <a:ea typeface="Calibri" pitchFamily="34" charset="-122"/>
-                <a:cs typeface="Calibri" pitchFamily="34" charset="-120"/>
-              </a:rPr>
-              <a:t>Realism comes in four steps: emulation in the client, a separate proxy on real sockets, the Linux kernel with netem, and two laptops over the internet. Every result has its command in the report.</a:t>
+              <a:t>We also added bursty cross traffic to the test proxy. Here the result is less flattering: the agent is 15 percent faster than tuned AIMD, but level with CUBIC, and it retransmits about three times as often as AIMD. Three tweaks did not fix that, so we report it as a limit. Finally the server now handles up to 16 clients, checked by sending two files at once.</a:t>
             </a:r>
             <a:endParaRPr lang="en-US" sz="1400" dirty="0"/>
           </a:p>
@@ -23364,7 +22709,7 @@
                 <a:ea typeface="Calibri" pitchFamily="34" charset="-122"/>
                 <a:cs typeface="Calibri" pitchFamily="34" charset="-120"/>
               </a:rPr>
-              <a:t>Did you make mistakes? Yes, and we logged them: untuned baselines, unequal payloads, and synthetic 40-byte packets in the kernel test, each found, fixed and re-run.</a:t>
+              <a:t>Is polite mode learned? No. It is a hand-made rule on the delay signal. A learned version needs a two-flow training environment, which is future work.</a:t>
             </a:r>
             <a:endParaRPr lang="en-US" sz="1400" dirty="0"/>
           </a:p>
@@ -23435,7 +22780,7 @@
                 <a:ea typeface="Calibri" pitchFamily="34" charset="-122"/>
                 <a:cs typeface="Calibri" pitchFamily="34" charset="-120"/>
               </a:rPr>
-              <a:t>33. Reality check: real kernel (tc/netem)</a:t>
+              <a:t>33. Real sockets found what the emulator could not</a:t>
             </a:r>
             <a:endParaRPr lang="en-US" sz="2600" dirty="0"/>
           </a:p>
@@ -23474,7 +22819,7 @@
                 <a:ea typeface="Calibri" pitchFamily="34" charset="-122"/>
                 <a:cs typeface="Calibri" pitchFamily="34" charset="-120"/>
               </a:rPr>
-              <a:t>Time on this slide: 1:00</a:t>
+              <a:t>Time on this slide: 0:50</a:t>
             </a:r>
             <a:endParaRPr lang="en-US" sz="1300" dirty="0"/>
           </a:p>
@@ -23627,7 +22972,7 @@
                 <a:ea typeface="Calibri" pitchFamily="34" charset="-122"/>
                 <a:cs typeface="Calibri" pitchFamily="34" charset="-120"/>
               </a:rPr>
-              <a:t>Until now our real-socket tests ran through our own proxy. We repeated them on the Linux kernel itself, using tc netem, with kernel TCP in the same table.</a:t>
+              <a:t>The emulator is inside our client, so we also tested through a separate impairment process on real UDP sockets. That found three real defects.</a:t>
             </a:r>
             <a:endParaRPr lang="en-US" sz="1400" dirty="0"/>
           </a:p>
@@ -23648,7 +22993,7 @@
                 <a:ea typeface="Calibri" pitchFamily="34" charset="-122"/>
                 <a:cs typeface="Calibri" pitchFamily="34" charset="-120"/>
               </a:rPr>
-              <a:t>Against tuned AIMD the neural agent is 71 percent faster on the lossy path, 65 percent on the 5G-like path and 83 percent on the satellite path, all significant. On the reordering path it is 60 percent faster but that is not significant.</a:t>
+              <a:t>First, if the client's last handshake ACK is lost, the server ignored all following data and the transfer hung. We fixed it the way TCP does and added a regression test. Second, the spurious timeouts I just mentioned. Third, a fuzzer showed our byte-sum checksum let about 2 percent of corrupted packets through, so it is now CRC-16 and the fuzzer accepts none.</a:t>
             </a:r>
             <a:endParaRPr lang="en-US" sz="1400" dirty="0"/>
           </a:p>
@@ -23669,49 +23014,7 @@
                 <a:ea typeface="Calibri" pitchFamily="34" charset="-122"/>
                 <a:cs typeface="Calibri" pitchFamily="34" charset="-120"/>
               </a:rPr>
-              <a:t>Kernel TCP is still faster than our agent on every path, by one and a half to one and seven tenths. We are not claiming to beat TCP.</a:t>
-            </a:r>
-            <a:endParaRPr lang="en-US" sz="1400" dirty="0"/>
-          </a:p>
-          <a:p>
-            <a:pPr marL="342900" indent="-342900">
-              <a:spcAft>
-                <a:spcPts val="600"/>
-              </a:spcAft>
-              <a:buSzPct val="100000"/>
-              <a:buChar char="•"/>
-            </a:pPr>
-            <a:r>
-              <a:rPr lang="en-US" sz="1400" dirty="0">
-                <a:solidFill>
-                  <a:srgbClr val="1B2430"/>
-                </a:solidFill>
-                <a:latin typeface="Calibri" pitchFamily="34" charset="0"/>
-                <a:ea typeface="Calibri" pitchFamily="34" charset="-122"/>
-                <a:cs typeface="Calibri" pitchFamily="34" charset="-120"/>
-              </a:rPr>
-              <a:t>We also put a kernel TCP flow and one RUDP flow on the same link. The neural agent takes 24 to 34 percent of it, so it does not starve TCP; tuned AIMD gets only 5 to 17 percent.</a:t>
-            </a:r>
-            <a:endParaRPr lang="en-US" sz="1400" dirty="0"/>
-          </a:p>
-          <a:p>
-            <a:pPr marL="342900" indent="-342900">
-              <a:spcAft>
-                <a:spcPts val="600"/>
-              </a:spcAft>
-              <a:buSzPct val="100000"/>
-              <a:buChar char="•"/>
-            </a:pPr>
-            <a:r>
-              <a:rPr lang="en-US" sz="1400" dirty="0">
-                <a:solidFill>
-                  <a:srgbClr val="1B2430"/>
-                </a:solidFill>
-                <a:latin typeface="Calibri" pitchFamily="34" charset="0"/>
-                <a:ea typeface="Calibri" pitchFamily="34" charset="-122"/>
-                <a:cs typeface="Calibri" pitchFamily="34" charset="-120"/>
-              </a:rPr>
-              <a:t>Our first runs were wrong four times: the netem queue limit counted packets in flight, the baseline was untuned, the payload sizes differed, and finally RUDP was sending 40-byte synthetic packets. We found each one, fixed it, re-ran everything and documented it.</a:t>
+              <a:t>On real sockets the neural agent is again fastest on every path: 17, 53, 45 and 39 percent faster than tuned AIMD on 5G, lossy, satellite and fast, and a tie on the hostile path.</a:t>
             </a:r>
             <a:endParaRPr lang="en-US" sz="1400" dirty="0"/>
           </a:p>
@@ -23789,7 +23092,7 @@
                 <a:ea typeface="Calibri" pitchFamily="34" charset="-122"/>
                 <a:cs typeface="Calibri" pitchFamily="34" charset="-120"/>
               </a:rPr>
-              <a:t>Q: Does it beat TCP? A: No. It beats our AIMD baselines on a real kernel path; mature kernel TCP is faster, by 1.5x to 1.7x. Q: Does it starve TCP? A: No, it takes 24 to 34 percent of a shared link (3 runs per cell, one laptop). Q: Why were the first runs wrong? A: four separate mistakes, the last being 40-byte synthetic packets against 512-byte TCP payloads; all fixed and re-run.</a:t>
+              <a:t>Is this a real network? It is real UDP sockets on one machine, with the impairment applied by a separate process. It is not a kernel netem or a multi-machine path; we provide the script for that but had no root access.</a:t>
             </a:r>
             <a:endParaRPr lang="en-US" sz="1400" dirty="0"/>
           </a:p>
@@ -23860,7 +23163,7 @@
                 <a:ea typeface="Calibri" pitchFamily="34" charset="-122"/>
                 <a:cs typeface="Calibri" pitchFamily="34" charset="-120"/>
               </a:rPr>
-              <a:t>34. Research gaps: changing paths and a BBR baseline</a:t>
+              <a:t>34. Problems we hit and fixed</a:t>
             </a:r>
             <a:endParaRPr lang="en-US" sz="2600" dirty="0"/>
           </a:p>
@@ -23899,7 +23202,7 @@
                 <a:ea typeface="Calibri" pitchFamily="34" charset="-122"/>
                 <a:cs typeface="Calibri" pitchFamily="34" charset="-120"/>
               </a:rPr>
-              <a:t>Time on this slide: 1:00</a:t>
+              <a:t>Time on this slide: 0:40</a:t>
             </a:r>
             <a:endParaRPr lang="en-US" sz="1300" dirty="0"/>
           </a:p>
@@ -24044,7 +23347,7 @@
               <a:buChar char="•"/>
             </a:pPr>
             <a:r>
-              <a:rPr lang="en-US" sz="1400" dirty="0">
+              <a:rPr lang="en-US" sz="1600" dirty="0">
                 <a:solidFill>
                   <a:srgbClr val="1B2430"/>
                 </a:solidFill>
@@ -24052,9 +23355,9 @@
                 <a:ea typeface="Calibri" pitchFamily="34" charset="-122"/>
                 <a:cs typeface="Calibri" pitchFamily="34" charset="-120"/>
               </a:rPr>
-              <a:t>Two more research gaps we tested.</a:t>
-            </a:r>
-            <a:endParaRPr lang="en-US" sz="1400" dirty="0"/>
+              <a:t>Server stuck after a killed client: it hung 15.5 s; fix was to accept SYN in any state.</a:t>
+            </a:r>
+            <a:endParaRPr lang="en-US" sz="1600" dirty="0"/>
           </a:p>
           <a:p>
             <a:pPr marL="342900" indent="-342900">
@@ -24065,7 +23368,7 @@
               <a:buChar char="•"/>
             </a:pPr>
             <a:r>
-              <a:rPr lang="en-US" sz="1400" dirty="0">
+              <a:rPr lang="en-US" sz="1600" dirty="0">
                 <a:solidFill>
                   <a:srgbClr val="1B2430"/>
                 </a:solidFill>
@@ -24073,9 +23376,9 @@
                 <a:ea typeface="Calibri" pitchFamily="34" charset="-122"/>
                 <a:cs typeface="Calibri" pitchFamily="34" charset="-120"/>
               </a:rPr>
-              <a:t>First, paths that change during a transfer: we added a --dyn option so bandwidth and delay change mid-run.</a:t>
-            </a:r>
-            <a:endParaRPr lang="en-US" sz="1400" dirty="0"/>
+              <a:t>A leftover netem rule distorted results; we now check tc qdisc before each test.</a:t>
+            </a:r>
+            <a:endParaRPr lang="en-US" sz="1600" dirty="0"/>
           </a:p>
           <a:p>
             <a:pPr marL="342900" indent="-342900">
@@ -24086,7 +23389,7 @@
               <a:buChar char="•"/>
             </a:pPr>
             <a:r>
-              <a:rPr lang="en-US" sz="1400" dirty="0">
+              <a:rPr lang="en-US" sz="1600" dirty="0">
                 <a:solidFill>
                   <a:srgbClr val="1B2430"/>
                 </a:solidFill>
@@ -24094,9 +23397,9 @@
                 <a:ea typeface="Calibri" pitchFamily="34" charset="-122"/>
                 <a:cs typeface="Calibri" pitchFamily="34" charset="-120"/>
               </a:rPr>
-              <a:t>The neural agent was fastest in all four cases, 6 to 53 percent faster than tuned AIMD, but it retransmits 1 to 6 percent of packets.</a:t>
-            </a:r>
-            <a:endParaRPr lang="en-US" sz="1400" dirty="0"/>
+              <a:t>Windows Wireshark saw nothing: capture inside WSL.</a:t>
+            </a:r>
+            <a:endParaRPr lang="en-US" sz="1600" dirty="0"/>
           </a:p>
           <a:p>
             <a:pPr marL="342900" indent="-342900">
@@ -24107,7 +23410,7 @@
               <a:buChar char="•"/>
             </a:pPr>
             <a:r>
-              <a:rPr lang="en-US" sz="1400" dirty="0">
+              <a:rPr lang="en-US" sz="1600" dirty="0">
                 <a:solidFill>
                   <a:srgbClr val="1B2430"/>
                 </a:solidFill>
@@ -24115,51 +23418,9 @@
                 <a:ea typeface="Calibri" pitchFamily="34" charset="-122"/>
                 <a:cs typeface="Calibri" pitchFamily="34" charset="-120"/>
               </a:rPr>
-              <a:t>Second, a stronger baseline: a simplified BBR.</a:t>
-            </a:r>
-            <a:endParaRPr lang="en-US" sz="1400" dirty="0"/>
-          </a:p>
-          <a:p>
-            <a:pPr marL="342900" indent="-342900">
-              <a:spcAft>
-                <a:spcPts val="600"/>
-              </a:spcAft>
-              <a:buSzPct val="100000"/>
-              <a:buChar char="•"/>
-            </a:pPr>
-            <a:r>
-              <a:rPr lang="en-US" sz="1400" dirty="0">
-                <a:solidFill>
-                  <a:srgbClr val="1B2430"/>
-                </a:solidFill>
-                <a:latin typeface="Calibri" pitchFamily="34" charset="0"/>
-                <a:ea typeface="Calibri" pitchFamily="34" charset="-122"/>
-                <a:cs typeface="Calibri" pitchFamily="34" charset="-120"/>
-              </a:rPr>
-              <a:t>It beats tuned AIMD on four of five paths and is actually faster than our agent on the 2 percent lossy path, 8.2 seconds against 9.8.</a:t>
-            </a:r>
-            <a:endParaRPr lang="en-US" sz="1400" dirty="0"/>
-          </a:p>
-          <a:p>
-            <a:pPr marL="342900" indent="-342900">
-              <a:spcAft>
-                <a:spcPts val="600"/>
-              </a:spcAft>
-              <a:buSzPct val="100000"/>
-              <a:buChar char="•"/>
-            </a:pPr>
-            <a:r>
-              <a:rPr lang="en-US" sz="1400" dirty="0">
-                <a:solidFill>
-                  <a:srgbClr val="1B2430"/>
-                </a:solidFill>
-                <a:latin typeface="Calibri" pitchFamily="34" charset="0"/>
-                <a:ea typeface="Calibri" pitchFamily="34" charset="-122"/>
-                <a:cs typeface="Calibri" pitchFamily="34" charset="-120"/>
-              </a:rPr>
-              <a:t>Be honest that our BBR is a simplification and that two bugs in it were found and fixed by these tests.</a:t>
-            </a:r>
-            <a:endParaRPr lang="en-US" sz="1400" dirty="0"/>
+              <a:t>Benchmark script portability: replaced date and grep tricks with awk and sed.</a:t>
+            </a:r>
+            <a:endParaRPr lang="en-US" sz="1600" dirty="0"/>
           </a:p>
         </p:txBody>
       </p:sp>
@@ -24235,7 +23496,7 @@
                 <a:ea typeface="Calibri" pitchFamily="34" charset="-122"/>
                 <a:cs typeface="Calibri" pitchFamily="34" charset="-120"/>
               </a:rPr>
-              <a:t>Is your BBR the real one? No: a simplified version with no ProbeRTT and no BBRv3 loss response; the comparison is against a BBR-style policy.</a:t>
+              <a:t>Say these quickly: it shows real debugging, which is what separates a project from a lab.</a:t>
             </a:r>
             <a:endParaRPr lang="en-US" sz="1400" dirty="0"/>
           </a:p>
@@ -24306,7 +23567,7 @@
                 <a:ea typeface="Calibri" pitchFamily="34" charset="-122"/>
                 <a:cs typeface="Calibri" pitchFamily="34" charset="-120"/>
               </a:rPr>
-              <a:t>35. Research gaps: fairness and trust</a:t>
+              <a:t>35. Our first learned agent: an honest result</a:t>
             </a:r>
             <a:endParaRPr lang="en-US" sz="2600" dirty="0"/>
           </a:p>
@@ -24345,7 +23606,7 @@
                 <a:ea typeface="Calibri" pitchFamily="34" charset="-122"/>
                 <a:cs typeface="Calibri" pitchFamily="34" charset="-120"/>
               </a:rPr>
-              <a:t>Time on this slide: 1:00</a:t>
+              <a:t>Time on this slide: 0:50</a:t>
             </a:r>
             <a:endParaRPr lang="en-US" sz="1300" dirty="0"/>
           </a:p>
@@ -24498,7 +23759,7 @@
                 <a:ea typeface="Calibri" pitchFamily="34" charset="-122"/>
                 <a:cs typeface="Calibri" pitchFamily="34" charset="-120"/>
               </a:rPr>
-              <a:t>Fairness and trust.</a:t>
+              <a:t>Be honest: it did not beat AIMD. Plus 63 percent time on 5G-like, plus 10 percent on satellite, a tie on the lossy path.</a:t>
             </a:r>
             <a:endParaRPr lang="en-US" sz="1400" dirty="0"/>
           </a:p>
@@ -24519,7 +23780,7 @@
                 <a:ea typeface="Calibri" pitchFamily="34" charset="-122"/>
                 <a:cs typeface="Calibri" pitchFamily="34" charset="-120"/>
               </a:rPr>
-              <a:t>Two neural flows with unequal round-trip times share the link more evenly than two AIMD flows, Jain 0.84 against 0.64 at 150 ms extra RTT, but still favour the short-RTT flow; six pairs per cell so only the largest gap is clear.</a:t>
+              <a:t>It used somewhat fewer retransmissions on two paths, within run-to-run noise.</a:t>
             </a:r>
             <a:endParaRPr lang="en-US" sz="1400" dirty="0"/>
           </a:p>
@@ -24540,7 +23801,7 @@
                 <a:ea typeface="Calibri" pitchFamily="34" charset="-122"/>
                 <a:cs typeface="Calibri" pitchFamily="34" charset="-120"/>
               </a:rPr>
-              <a:t>A small decision tree agrees with the network on only 79 percent of decisions but gives the same transfer time on four of five paths.</a:t>
+              <a:t>Earlier training rounds were much worse; this is the final configuration. The finding is that a simple learner does not beat a tuned rule.</a:t>
             </a:r>
             <a:endParaRPr lang="en-US" sz="1400" dirty="0"/>
           </a:p>
@@ -24561,49 +23822,7 @@
                 <a:ea typeface="Calibri" pitchFamily="34" charset="-122"/>
                 <a:cs typeface="Calibri" pitchFamily="34" charset="-120"/>
               </a:rPr>
-              <a:t>Noise on the inputs costs at most 12 percent.</a:t>
-            </a:r>
-            <a:endParaRPr lang="en-US" sz="1400" dirty="0"/>
-          </a:p>
-          <a:p>
-            <a:pPr marL="342900" indent="-342900">
-              <a:spcAft>
-                <a:spcPts val="600"/>
-              </a:spcAft>
-              <a:buSzPct val="100000"/>
-              <a:buChar char="•"/>
-            </a:pPr>
-            <a:r>
-              <a:rPr lang="en-US" sz="1400" dirty="0">
-                <a:solidFill>
-                  <a:srgbClr val="1B2430"/>
-                </a:solidFill>
-                <a:latin typeface="Calibri" pitchFamily="34" charset="0"/>
-                <a:ea typeface="Calibri" pitchFamily="34" charset="-122"/>
-                <a:cs typeface="Calibri" pitchFamily="34" charset="-120"/>
-              </a:rPr>
-              <a:t>Formal certification only works at tiny perturbations, so the agent is robust in practice but not proven.</a:t>
-            </a:r>
-            <a:endParaRPr lang="en-US" sz="1400" dirty="0"/>
-          </a:p>
-          <a:p>
-            <a:pPr marL="342900" indent="-342900">
-              <a:spcAft>
-                <a:spcPts val="600"/>
-              </a:spcAft>
-              <a:buSzPct val="100000"/>
-              <a:buChar char="•"/>
-            </a:pPr>
-            <a:r>
-              <a:rPr lang="en-US" sz="1400" dirty="0">
-                <a:solidFill>
-                  <a:srgbClr val="1B2430"/>
-                </a:solidFill>
-                <a:latin typeface="Calibri" pitchFamily="34" charset="0"/>
-                <a:ea typeface="Calibri" pitchFamily="34" charset="-122"/>
-                <a:cs typeface="Calibri" pitchFamily="34" charset="-120"/>
-              </a:rPr>
-              <a:t>Kernel TCP coexistence is measured: the neural agent takes 24 to 34 percent of a shared link, so it does not starve TCP, with only three runs per cell.</a:t>
+              <a:t>In the chat, retrained for bursty random-loss traffic, it does beat AIMD on most simulated paths; mention that on slide 19.</a:t>
             </a:r>
             <a:endParaRPr lang="en-US" sz="1400" dirty="0"/>
           </a:p>
@@ -24681,7 +23900,7 @@
                 <a:ea typeface="Calibri" pitchFamily="34" charset="-122"/>
                 <a:cs typeface="Calibri" pitchFamily="34" charset="-120"/>
               </a:rPr>
-              <a:t>Did you test against kernel TCP? Yes, on kernel netem: the neural agent took 24 to 34 percent of a shared link, three runs per cell on one laptop.</a:t>
+              <a:t>Q: Then what was the point? A: The experiment. We tested whether a learned window helps and report the answer, including the negative result.</a:t>
             </a:r>
             <a:endParaRPr lang="en-US" sz="1400" dirty="0"/>
           </a:p>
@@ -24752,7 +23971,7 @@
                 <a:ea typeface="Calibri" pitchFamily="34" charset="-122"/>
                 <a:cs typeface="Calibri" pitchFamily="34" charset="-120"/>
               </a:rPr>
-              <a:t>36. First run between two machines</a:t>
+              <a:t>36. Benchmark results</a:t>
             </a:r>
             <a:endParaRPr lang="en-US" sz="2600" dirty="0"/>
           </a:p>
@@ -24791,7 +24010,7 @@
                 <a:ea typeface="Calibri" pitchFamily="34" charset="-122"/>
                 <a:cs typeface="Calibri" pitchFamily="34" charset="-120"/>
               </a:rPr>
-              <a:t>Time on this slide: 0:45</a:t>
+              <a:t>Time on this slide: 0:40</a:t>
             </a:r>
             <a:endParaRPr lang="en-US" sz="1300" dirty="0"/>
           </a:p>
@@ -24936,7 +24155,7 @@
               <a:buChar char="•"/>
             </a:pPr>
             <a:r>
-              <a:rPr lang="en-US" sz="1400" dirty="0">
+              <a:rPr lang="en-US" sz="1600" dirty="0">
                 <a:solidFill>
                   <a:srgbClr val="1B2430"/>
                 </a:solidFill>
@@ -24944,9 +24163,9 @@
                 <a:ea typeface="Calibri" pitchFamily="34" charset="-122"/>
                 <a:cs typeface="Calibri" pitchFamily="34" charset="-120"/>
               </a:rPr>
-              <a:t>Until now every test ran on one computer. We ran the sender on one laptop and the receiver on another, on different networks, joined by Tailscale. It could not connect directly, so traffic went through a relay, about 79 milliseconds round trip.</a:t>
-            </a:r>
-            <a:endParaRPr lang="en-US" sz="1400" dirty="0"/>
+              <a:t>62 of 62 packets were delivered at every loss level from 0 to 40 percent.</a:t>
+            </a:r>
+            <a:endParaRPr lang="en-US" sz="1600" dirty="0"/>
           </a:p>
           <a:p>
             <a:pPr marL="342900" indent="-342900">
@@ -24957,7 +24176,7 @@
               <a:buChar char="•"/>
             </a:pPr>
             <a:r>
-              <a:rPr lang="en-US" sz="1400" dirty="0">
+              <a:rPr lang="en-US" sz="1600" dirty="0">
                 <a:solidFill>
                   <a:srgbClr val="1B2430"/>
                 </a:solidFill>
@@ -24965,30 +24184,9 @@
                 <a:ea typeface="Calibri" pitchFamily="34" charset="-122"/>
                 <a:cs typeface="Calibri" pitchFamily="34" charset="-120"/>
               </a:rPr>
-              <a:t>RUDP works between real machines: every transfer that finished delivered all 4,000 packets, with all four policies.</a:t>
-            </a:r>
-            <a:endParaRPr lang="en-US" sz="1400" dirty="0"/>
-          </a:p>
-          <a:p>
-            <a:pPr marL="342900" indent="-342900">
-              <a:spcAft>
-                <a:spcPts val="600"/>
-              </a:spcAft>
-              <a:buSzPct val="100000"/>
-              <a:buChar char="•"/>
-            </a:pPr>
-            <a:r>
-              <a:rPr lang="en-US" sz="1400" dirty="0">
-                <a:solidFill>
-                  <a:srgbClr val="1B2430"/>
-                </a:solidFill>
-                <a:latin typeface="Calibri" pitchFamily="34" charset="0"/>
-                <a:ea typeface="Calibri" pitchFamily="34" charset="-122"/>
-                <a:cs typeface="Calibri" pitchFamily="34" charset="-120"/>
-              </a:rPr>
-              <a:t>Be honest about the numbers: the path drifted, kernel TCP alone took anywhere from 2 to 51 seconds, and 4 of 20 RUDP runs timed out, so this is a demonstration and not a ranking. On the two clean repetitions kernel TCP was 2 to 6 times faster, and in repetition 1 the neural agent beat tuned AIMD, 4.7 against 14.2 seconds.</a:t>
-            </a:r>
-            <a:endParaRPr lang="en-US" sz="1400" dirty="0"/>
+              <a:t>Higher loss costs time and retransmissions, never correctness.</a:t>
+            </a:r>
+            <a:endParaRPr lang="en-US" sz="1600" dirty="0"/>
           </a:p>
         </p:txBody>
       </p:sp>
@@ -25064,7 +24262,7 @@
                 <a:ea typeface="Calibri" pitchFamily="34" charset="-122"/>
                 <a:cs typeface="Calibri" pitchFamily="34" charset="-120"/>
               </a:rPr>
-              <a:t>Why not a better test? The other laptop was a one-time setup over the internet; the next step is a direct local network with more repetitions.</a:t>
+              <a:t>Q: Single runs? A: Yes, the original benchmark ran each level once. Smart-RUDP evaluation uses 6 runs per scenario.</a:t>
             </a:r>
             <a:endParaRPr lang="en-US" sz="1400" dirty="0"/>
           </a:p>
@@ -25135,7 +24333,7 @@
                 <a:ea typeface="Calibri" pitchFamily="34" charset="-122"/>
                 <a:cs typeface="Calibri" pitchFamily="34" charset="-120"/>
               </a:rPr>
-              <a:t>37. Learnings and future work</a:t>
+              <a:t>37. Literature behind the design</a:t>
             </a:r>
             <a:endParaRPr lang="en-US" sz="2600" dirty="0"/>
           </a:p>
@@ -25174,7 +24372,7 @@
                 <a:ea typeface="Calibri" pitchFamily="34" charset="-122"/>
                 <a:cs typeface="Calibri" pitchFamily="34" charset="-120"/>
               </a:rPr>
-              <a:t>Time on this slide: 0:50</a:t>
+              <a:t>Time on this slide: 0:30</a:t>
             </a:r>
             <a:endParaRPr lang="en-US" sz="1300" dirty="0"/>
           </a:p>
@@ -25327,7 +24525,7 @@
                 <a:ea typeface="Calibri" pitchFamily="34" charset="-122"/>
                 <a:cs typeface="Calibri" pitchFamily="34" charset="-120"/>
               </a:rPr>
-              <a:t>What we learned: reliability is a set of simple rules working together, congestion control matters as much as retransmission, and tests tell you things about your own results that you do not want to hear.</a:t>
+              <a:t>Jacobson and Karels 1988 is the origin of AIMD; Chiu and Jain 1989 explains why it converges fairly.</a:t>
             </a:r>
             <a:endParaRPr lang="en-US" sz="1400" dirty="0"/>
           </a:p>
@@ -25348,7 +24546,7 @@
                 <a:ea typeface="Calibri" pitchFamily="34" charset="-122"/>
                 <a:cs typeface="Calibri" pitchFamily="34" charset="-120"/>
               </a:rPr>
-              <a:t>Our limits: only one noisy two-machine run, the agent is not a polite neighbour, there is no gain at 10 percent random loss, and the tabular agent did not beat AIMD.</a:t>
+              <a:t>RFC 5681 is the standard; CUBIC is future work; QUIC and RFC 9000 are reliable transport over UDP in production.</a:t>
             </a:r>
             <a:endParaRPr lang="en-US" sz="1400" dirty="0"/>
           </a:p>
@@ -25369,7 +24567,28 @@
                 <a:ea typeface="Calibri" pitchFamily="34" charset="-122"/>
                 <a:cs typeface="Calibri" pitchFamily="34" charset="-120"/>
               </a:rPr>
-              <a:t>Next: fairness-aware training with TCP coexistence, training on real traces, and controlled multi-machine tests.</a:t>
+              <a:t>The AI part comes from Midhula and Arun Raj Kumar (2024) and Cao et al. (2023, DRLFcc): deep reinforcement learning for congestion control. Smart-RUDP applies the same idea with a smaller tabular Q-learning agent.</a:t>
+            </a:r>
+            <a:endParaRPr lang="en-US" sz="1400" dirty="0"/>
+          </a:p>
+          <a:p>
+            <a:pPr marL="342900" indent="-342900">
+              <a:spcAft>
+                <a:spcPts val="600"/>
+              </a:spcAft>
+              <a:buSzPct val="100000"/>
+              <a:buChar char="•"/>
+            </a:pPr>
+            <a:r>
+              <a:rPr lang="en-US" sz="1400" dirty="0">
+                <a:solidFill>
+                  <a:srgbClr val="1B2430"/>
+                </a:solidFill>
+                <a:latin typeface="Calibri" pitchFamily="34" charset="0"/>
+                <a:ea typeface="Calibri" pitchFamily="34" charset="-122"/>
+                <a:cs typeface="Calibri" pitchFamily="34" charset="-120"/>
+              </a:rPr>
+              <a:t>Key researcher: Van Jacobson.</a:t>
             </a:r>
             <a:endParaRPr lang="en-US" sz="1400" dirty="0"/>
           </a:p>
@@ -25447,7 +24666,7 @@
                 <a:ea typeface="Calibri" pitchFamily="34" charset="-122"/>
                 <a:cs typeface="Calibri" pitchFamily="34" charset="-120"/>
               </a:rPr>
-              <a:t>What would you do first? Run the netem script on a Linux machine for kernel TCP and RUDP on the same path, then add a competing flow to the training.</a:t>
+              <a:t>Q: Why AIMD? A: Chiu and Jain show it converges to a fair share. Q: Are those papers deep RL and yours is not? A: Yes; we used a lookup table, which is simpler and inspectable.</a:t>
             </a:r>
             <a:endParaRPr lang="en-US" sz="1400" dirty="0"/>
           </a:p>
@@ -25518,7 +24737,7 @@
                 <a:ea typeface="Calibri" pitchFamily="34" charset="-122"/>
                 <a:cs typeface="Calibri" pitchFamily="34" charset="-120"/>
               </a:rPr>
-              <a:t>2. The problem</a:t>
+              <a:t>2. Why</a:t>
             </a:r>
             <a:endParaRPr lang="en-US" sz="2600" dirty="0"/>
           </a:p>
@@ -25710,7 +24929,7 @@
                 <a:ea typeface="Calibri" pitchFamily="34" charset="-122"/>
                 <a:cs typeface="Calibri" pitchFamily="34" charset="-120"/>
               </a:rPr>
-              <a:t>UDP is fast but gives no guarantees: packets can be lost, duplicated or reordered.</a:t>
+              <a:t>UDP is fast but unreliable. TCP is reliable but sits in the kernel.</a:t>
             </a:r>
             <a:endParaRPr lang="en-US" sz="1600" dirty="0"/>
           </a:p>
@@ -25731,49 +24950,7 @@
                 <a:ea typeface="Calibri" pitchFamily="34" charset="-122"/>
                 <a:cs typeface="Calibri" pitchFamily="34" charset="-120"/>
               </a:rPr>
-              <a:t>TCP is reliable but sits inside the operating system, so you cannot see or change it.</a:t>
-            </a:r>
-            <a:endParaRPr lang="en-US" sz="1600" dirty="0"/>
-          </a:p>
-          <a:p>
-            <a:pPr marL="342900" indent="-342900">
-              <a:spcAft>
-                <a:spcPts val="600"/>
-              </a:spcAft>
-              <a:buSzPct val="100000"/>
-              <a:buChar char="•"/>
-            </a:pPr>
-            <a:r>
-              <a:rPr lang="en-US" sz="1600" dirty="0">
-                <a:solidFill>
-                  <a:srgbClr val="1B2430"/>
-                </a:solidFill>
-                <a:latin typeface="Calibri" pitchFamily="34" charset="0"/>
-                <a:ea typeface="Calibri" pitchFamily="34" charset="-122"/>
-                <a:cs typeface="Calibri" pitchFamily="34" charset="-120"/>
-              </a:rPr>
-              <a:t>In 1986 the early Internet had congestion collapse: throughput fell from 32 Kbps to 40 bps. TCP's congestion control was invented to fix that.</a:t>
-            </a:r>
-            <a:endParaRPr lang="en-US" sz="1600" dirty="0"/>
-          </a:p>
-          <a:p>
-            <a:pPr marL="342900" indent="-342900">
-              <a:spcAft>
-                <a:spcPts val="600"/>
-              </a:spcAft>
-              <a:buSzPct val="100000"/>
-              <a:buChar char="•"/>
-            </a:pPr>
-            <a:r>
-              <a:rPr lang="en-US" sz="1600" dirty="0">
-                <a:solidFill>
-                  <a:srgbClr val="1B2430"/>
-                </a:solidFill>
-                <a:latin typeface="Calibri" pitchFamily="34" charset="0"/>
-                <a:ea typeface="Calibri" pitchFamily="34" charset="-122"/>
-                <a:cs typeface="Calibri" pitchFamily="34" charset="-120"/>
-              </a:rPr>
-              <a:t>Our question: can we rebuild TCP's core ideas ourselves, on UDP?</a:t>
+              <a:t>Our question: can we rebuild TCP's core ideas ourselves, in a form we can read, tune and teach a network to control?</a:t>
             </a:r>
             <a:endParaRPr lang="en-US" sz="1600" dirty="0"/>
           </a:p>
@@ -25851,7 +25028,7 @@
                 <a:ea typeface="Calibri" pitchFamily="34" charset="-122"/>
                 <a:cs typeface="Calibri" pitchFamily="34" charset="-120"/>
               </a:rPr>
-              <a:t>Q: Why not just use TCP? A: TCP cannot be changed or inspected; building our own makes every mechanism visible. QUIC and HTTP/3 do the same in practice.</a:t>
+              <a:t>Is this like QUIC? Same idea: reliability in user space over UDP.</a:t>
             </a:r>
             <a:endParaRPr lang="en-US" sz="1400" dirty="0"/>
           </a:p>
@@ -25922,7 +25099,7 @@
                 <a:ea typeface="Calibri" pitchFamily="34" charset="-122"/>
                 <a:cs typeface="Calibri" pitchFamily="34" charset="-120"/>
               </a:rPr>
-              <a:t>38. Thank you</a:t>
+              <a:t>38. Smart-RUDP: a Q-learning window controller</a:t>
             </a:r>
             <a:endParaRPr lang="en-US" sz="2600" dirty="0"/>
           </a:p>
@@ -25961,7 +25138,7 @@
                 <a:ea typeface="Calibri" pitchFamily="34" charset="-122"/>
                 <a:cs typeface="Calibri" pitchFamily="34" charset="-120"/>
               </a:rPr>
-              <a:t>Time on this slide: 0:15</a:t>
+              <a:t>Time on this slide: 0:50</a:t>
             </a:r>
             <a:endParaRPr lang="en-US" sz="1300" dirty="0"/>
           </a:p>
@@ -26114,7 +25291,49 @@
                 <a:ea typeface="Calibri" pitchFamily="34" charset="-122"/>
                 <a:cs typeface="Calibri" pitchFamily="34" charset="-120"/>
               </a:rPr>
-              <a:t>Thank you. The code, report and captures are at github.com/Capsturrrr/rudp. Happy to take questions.</a:t>
+              <a:t>Q-learning with 80 states (RTT ratio, loss fraction, window size), sampled once per RTT.</a:t>
+            </a:r>
+            <a:endParaRPr lang="en-US" sz="1600" dirty="0"/>
+          </a:p>
+          <a:p>
+            <a:pPr marL="342900" indent="-342900">
+              <a:spcAft>
+                <a:spcPts val="600"/>
+              </a:spcAft>
+              <a:buSzPct val="100000"/>
+              <a:buChar char="•"/>
+            </a:pPr>
+            <a:r>
+              <a:rPr lang="en-US" sz="1600" dirty="0">
+                <a:solidFill>
+                  <a:srgbClr val="1B2430"/>
+                </a:solidFill>
+                <a:latin typeface="Calibri" pitchFamily="34" charset="0"/>
+                <a:ea typeface="Calibri" pitchFamily="34" charset="-122"/>
+                <a:cs typeface="Calibri" pitchFamily="34" charset="-120"/>
+              </a:rPr>
+              <a:t>Five actions: multiply the window by 0.5, 0.85, 1.0, 1.15 or 1.5.</a:t>
+            </a:r>
+            <a:endParaRPr lang="en-US" sz="1600" dirty="0"/>
+          </a:p>
+          <a:p>
+            <a:pPr marL="342900" indent="-342900">
+              <a:spcAft>
+                <a:spcPts val="600"/>
+              </a:spcAft>
+              <a:buSzPct val="100000"/>
+              <a:buChar char="•"/>
+            </a:pPr>
+            <a:r>
+              <a:rPr lang="en-US" sz="1600" dirty="0">
+                <a:solidFill>
+                  <a:srgbClr val="1B2430"/>
+                </a:solidFill>
+                <a:latin typeface="Calibri" pitchFamily="34" charset="0"/>
+                <a:ea typeface="Calibri" pitchFamily="34" charset="-122"/>
+                <a:cs typeface="Calibri" pitchFamily="34" charset="-120"/>
+              </a:rPr>
+              <a:t>Reward: throughput gained, minus delay growth, minus retransmissions. Same Go-Back-N reliability; only the window policy changes. Paths are emulated in the program: 5G-like, lossy wireless, satellite-like.</a:t>
             </a:r>
             <a:endParaRPr lang="en-US" sz="1600" dirty="0"/>
           </a:p>
@@ -26192,7 +25411,7 @@
                 <a:ea typeface="Calibri" pitchFamily="34" charset="-122"/>
                 <a:cs typeface="Calibri" pitchFamily="34" charset="-120"/>
               </a:rPr>
-              <a:t>Pause and smile; hand over to questions.</a:t>
+              <a:t>Q: Is it really learning? A: Yes, 40 training episodes; the learning-curve figure shows it. It is small and tabular with limited training.</a:t>
             </a:r>
             <a:endParaRPr lang="en-US" sz="1400" dirty="0"/>
           </a:p>
@@ -26263,7 +25482,7 @@
                 <a:ea typeface="Calibri" pitchFamily="34" charset="-122"/>
                 <a:cs typeface="Calibri" pitchFamily="34" charset="-120"/>
               </a:rPr>
-              <a:t>39. Appendix: slow start</a:t>
+              <a:t>39. The AI agent in our code</a:t>
             </a:r>
             <a:endParaRPr lang="en-US" sz="2600" dirty="0"/>
           </a:p>
@@ -26302,7 +25521,7 @@
                 <a:ea typeface="Calibri" pitchFamily="34" charset="-122"/>
                 <a:cs typeface="Calibri" pitchFamily="34" charset="-120"/>
               </a:rPr>
-              <a:t>Time on this slide: -</a:t>
+              <a:t>Time on this slide: 1:00</a:t>
             </a:r>
             <a:endParaRPr lang="en-US" sz="1300" dirty="0"/>
           </a:p>
@@ -26447,7 +25666,7 @@
               <a:buChar char="•"/>
             </a:pPr>
             <a:r>
-              <a:rPr lang="en-US" sz="1600" dirty="0">
+              <a:rPr lang="en-US" sz="1400" dirty="0">
                 <a:solidFill>
                   <a:srgbClr val="1B2430"/>
                 </a:solidFill>
@@ -26455,9 +25674,114 @@
                 <a:ea typeface="Calibri" pitchFamily="34" charset="-122"/>
                 <a:cs typeface="Calibri" pitchFamily="34" charset="-120"/>
               </a:rPr>
-              <a:t>Only if asked: the window starts at 1, adds 1 per ACK until the threshold 16, then 1/window per ACK. In the 62-packet run the final window was 18.71.</a:t>
-            </a:r>
-            <a:endParaRPr lang="en-US" sz="1600" dirty="0"/>
+              <a:t>This is the agent itself. Left: rl_cc.h, 73 lines of C. The state is 80 buckets of RTT ratio, loss and window size.</a:t>
+            </a:r>
+            <a:endParaRPr lang="en-US" sz="1400" dirty="0"/>
+          </a:p>
+          <a:p>
+            <a:pPr marL="342900" indent="-342900">
+              <a:spcAft>
+                <a:spcPts val="600"/>
+              </a:spcAft>
+              <a:buSzPct val="100000"/>
+              <a:buChar char="•"/>
+            </a:pPr>
+            <a:r>
+              <a:rPr lang="en-US" sz="1400" dirty="0">
+                <a:solidFill>
+                  <a:srgbClr val="1B2430"/>
+                </a:solidFill>
+                <a:latin typeface="Calibri" pitchFamily="34" charset="0"/>
+                <a:ea typeface="Calibri" pitchFamily="34" charset="-122"/>
+                <a:cs typeface="Calibri" pitchFamily="34" charset="-120"/>
+              </a:rPr>
+              <a:t>choose picks one of five window multipliers, usually the best, sometimes random so it keeps exploring.</a:t>
+            </a:r>
+            <a:endParaRPr lang="en-US" sz="1400" dirty="0"/>
+          </a:p>
+          <a:p>
+            <a:pPr marL="342900" indent="-342900">
+              <a:spcAft>
+                <a:spcPts val="600"/>
+              </a:spcAft>
+              <a:buSzPct val="100000"/>
+              <a:buChar char="•"/>
+            </a:pPr>
+            <a:r>
+              <a:rPr lang="en-US" sz="1400" dirty="0">
+                <a:solidFill>
+                  <a:srgbClr val="1B2430"/>
+                </a:solidFill>
+                <a:latin typeface="Calibri" pitchFamily="34" charset="0"/>
+                <a:ea typeface="Calibri" pitchFamily="34" charset="-122"/>
+                <a:cs typeface="Calibri" pitchFamily="34" charset="-120"/>
+              </a:rPr>
+              <a:t>update is the Q-learning rule: move the value of the action we took toward the reward plus the best value of the next state.</a:t>
+            </a:r>
+            <a:endParaRPr lang="en-US" sz="1400" dirty="0"/>
+          </a:p>
+          <a:p>
+            <a:pPr marL="342900" indent="-342900">
+              <a:spcAft>
+                <a:spcPts val="600"/>
+              </a:spcAft>
+              <a:buSzPct val="100000"/>
+              <a:buChar char="•"/>
+            </a:pPr>
+            <a:r>
+              <a:rPr lang="en-US" sz="1400" dirty="0">
+                <a:solidFill>
+                  <a:srgbClr val="1B2430"/>
+                </a:solidFill>
+                <a:latin typeface="Calibri" pitchFamily="34" charset="0"/>
+                <a:ea typeface="Calibri" pitchFamily="34" charset="-122"/>
+                <a:cs typeface="Calibri" pitchFamily="34" charset="-120"/>
+              </a:rPr>
+              <a:t>Right: the loop in smart_client.c. Once per RTT it computes the reward, throughput minus delay growth minus loss, updates the table, picks the next action and scales the window.</a:t>
+            </a:r>
+            <a:endParaRPr lang="en-US" sz="1400" dirty="0"/>
+          </a:p>
+          <a:p>
+            <a:pPr marL="342900" indent="-342900">
+              <a:spcAft>
+                <a:spcPts val="600"/>
+              </a:spcAft>
+              <a:buSzPct val="100000"/>
+              <a:buChar char="•"/>
+            </a:pPr>
+            <a:r>
+              <a:rPr lang="en-US" sz="1400" dirty="0">
+                <a:solidFill>
+                  <a:srgbClr val="1B2430"/>
+                </a:solidFill>
+                <a:latin typeface="Calibri" pitchFamily="34" charset="0"/>
+                <a:ea typeface="Calibri" pitchFamily="34" charset="-122"/>
+                <a:cs typeface="Calibri" pitchFamily="34" charset="-120"/>
+              </a:rPr>
+              <a:t>The code on the slide is simplified; the real files are in the repo.</a:t>
+            </a:r>
+            <a:endParaRPr lang="en-US" sz="1400" dirty="0"/>
+          </a:p>
+          <a:p>
+            <a:pPr marL="342900" indent="-342900">
+              <a:spcAft>
+                <a:spcPts val="600"/>
+              </a:spcAft>
+              <a:buSzPct val="100000"/>
+              <a:buChar char="•"/>
+            </a:pPr>
+            <a:r>
+              <a:rPr lang="en-US" sz="1400" dirty="0">
+                <a:solidFill>
+                  <a:srgbClr val="1B2430"/>
+                </a:solidFill>
+                <a:latin typeface="Calibri" pitchFamily="34" charset="0"/>
+                <a:ea typeface="Calibri" pitchFamily="34" charset="-122"/>
+                <a:cs typeface="Calibri" pitchFamily="34" charset="-120"/>
+              </a:rPr>
+              <a:t>We also built a deep version: web/dqn.py is a small neural network, two hidden layers of 32, trained with DQN in the same simulator. It reads continuous inputs instead of buckets.</a:t>
+            </a:r>
+            <a:endParaRPr lang="en-US" sz="1400" dirty="0"/>
           </a:p>
         </p:txBody>
       </p:sp>
@@ -26533,7 +25857,7 @@
                 <a:ea typeface="Calibri" pitchFamily="34" charset="-122"/>
                 <a:cs typeface="Calibri" pitchFamily="34" charset="-120"/>
               </a:rPr>
-              <a:t>Use this slide to answer 'show me congestion avoidance'.</a:t>
+              <a:t>Q: Is this deep RL? A: The C agent is tabular. The chat also has a deep agent, a small DQN in numpy (5-32-32-5). Q: Does deep beat the table? A: Modestly: 3.20 s vs 3.73 s mean on 48 unseen paths, faster on 19, slower on 6. Q: Any problem? A: Training is seed-sensitive: 1 of 4 seeds failed, so we select on validation paths. It is simulated and not in the C code. Q: Where is it trained? A: web/train.py for the chat, the smart client trains online for the main experiments; table in results/q_chat.txt.</a:t>
             </a:r>
             <a:endParaRPr lang="en-US" sz="1400" dirty="0"/>
           </a:p>
@@ -26604,7 +25928,7 @@
                 <a:ea typeface="Calibri" pitchFamily="34" charset="-122"/>
                 <a:cs typeface="Calibri" pitchFamily="34" charset="-120"/>
               </a:rPr>
-              <a:t>Hard questions and short answers (1 of 3)</a:t>
+              <a:t>40. Appendix: slow start and congestion avoidance</a:t>
             </a:r>
             <a:endParaRPr lang="en-US" sz="2600" dirty="0"/>
           </a:p>
@@ -26612,7 +25936,46 @@
       </p:sp>
       <p:sp>
         <p:nvSpPr>
-          <p:cNvPr id="3" name="Shape 1"/>
+          <p:cNvPr id="3" name="Text 1"/>
+          <p:cNvSpPr/>
+          <p:nvPr/>
+        </p:nvSpPr>
+        <p:spPr>
+          <a:xfrm>
+            <a:off x="457200" y="804672"/>
+            <a:ext cx="10972800" cy="320040"/>
+          </a:xfrm>
+          <a:prstGeom prst="rect">
+            <a:avLst/>
+          </a:prstGeom>
+          <a:noFill/>
+          <a:ln/>
+        </p:spPr>
+        <p:txBody>
+          <a:bodyPr wrap="square" lIns="0" tIns="0" rIns="0" bIns="0" rtlCol="0" anchor="ctr"/>
+          <a:lstStyle/>
+          <a:p>
+            <a:pPr indent="0" marL="0">
+              <a:buNone/>
+            </a:pPr>
+            <a:r>
+              <a:rPr lang="en-US" sz="1300" dirty="0">
+                <a:solidFill>
+                  <a:srgbClr val="5B6775"/>
+                </a:solidFill>
+                <a:latin typeface="Calibri" pitchFamily="34" charset="0"/>
+                <a:ea typeface="Calibri" pitchFamily="34" charset="-122"/>
+                <a:cs typeface="Calibri" pitchFamily="34" charset="-120"/>
+              </a:rPr>
+              <a:t>Time on this slide: -</a:t>
+            </a:r>
+            <a:endParaRPr lang="en-US" sz="1300" dirty="0"/>
+          </a:p>
+        </p:txBody>
+      </p:sp>
+      <p:sp>
+        <p:nvSpPr>
+          <p:cNvPr id="4" name="Shape 2"/>
           <p:cNvSpPr/>
           <p:nvPr/>
         </p:nvSpPr>
@@ -26635,26 +25998,47 @@
           </a:ln>
         </p:spPr>
       </p:sp>
-      <p:sp>
-        <p:nvSpPr>
-          <p:cNvPr id="4" name="Shape 2"/>
-          <p:cNvSpPr/>
-          <p:nvPr/>
-        </p:nvSpPr>
+      <p:pic>
+        <p:nvPicPr>
+          <p:cNvPr id="5" name="Image 0" descr="th-40.png">    </p:cNvPr>
+          <p:cNvPicPr>
+            <a:picLocks noChangeAspect="1"/>
+          </p:cNvPicPr>
+          <p:nvPr/>
+        </p:nvPicPr>
+        <p:blipFill>
+          <a:blip r:embed="rId1"/>
+          <a:stretch>
+            <a:fillRect/>
+          </a:stretch>
+        </p:blipFill>
         <p:spPr>
           <a:xfrm>
             <a:off x="457200" y="1371600"/>
-            <a:ext cx="11274552" cy="914400"/>
-          </a:xfrm>
-          <a:prstGeom prst="rect">
-            <a:avLst/>
-          </a:prstGeom>
-          <a:solidFill>
-            <a:srgbClr val="F2F6FB"/>
-          </a:solidFill>
-          <a:ln w="9525">
+            <a:ext cx="5669280" cy="3188970"/>
+          </a:xfrm>
+          <a:prstGeom prst="rect">
+            <a:avLst/>
+          </a:prstGeom>
+        </p:spPr>
+      </p:pic>
+      <p:sp>
+        <p:nvSpPr>
+          <p:cNvPr id="6" name="Shape 3"/>
+          <p:cNvSpPr/>
+          <p:nvPr/>
+        </p:nvSpPr>
+        <p:spPr>
+          <a:xfrm>
+            <a:off x="457200" y="1371600"/>
+            <a:ext cx="5669280" cy="3188970"/>
+          </a:xfrm>
+          <a:prstGeom prst="rect">
+            <a:avLst/>
+          </a:prstGeom>
+          <a:ln w="12700">
             <a:solidFill>
-              <a:srgbClr val="D5DEE9"/>
+              <a:srgbClr val="C9D3E0"/>
             </a:solidFill>
             <a:prstDash val="solid"/>
           </a:ln>
@@ -26662,14 +26046,14 @@
       </p:sp>
       <p:sp>
         <p:nvSpPr>
-          <p:cNvPr id="5" name="Text 3"/>
-          <p:cNvSpPr/>
-          <p:nvPr/>
-        </p:nvSpPr>
-        <p:spPr>
-          <a:xfrm>
-            <a:off x="640080" y="1417320"/>
-            <a:ext cx="10972800" cy="320040"/>
+          <p:cNvPr id="7" name="Text 4"/>
+          <p:cNvSpPr/>
+          <p:nvPr/>
+        </p:nvSpPr>
+        <p:spPr>
+          <a:xfrm>
+            <a:off x="6400800" y="1325880"/>
+            <a:ext cx="1828800" cy="320040"/>
           </a:xfrm>
           <a:prstGeom prst="rect">
             <a:avLst/>
@@ -26685,7 +26069,7 @@
               <a:buNone/>
             </a:pPr>
             <a:r>
-              <a:rPr lang="en-US" sz="1500" b="1" dirty="0">
+              <a:rPr lang="en-US" sz="1300" b="1" dirty="0">
                 <a:solidFill>
                   <a:srgbClr val="1F6FEB"/>
                 </a:solidFill>
@@ -26693,22 +26077,22 @@
                 <a:ea typeface="Calibri" pitchFamily="34" charset="-122"/>
                 <a:cs typeface="Calibri" pitchFamily="34" charset="-120"/>
               </a:rPr>
-              <a:t>Is this a lab exercise?</a:t>
-            </a:r>
-            <a:endParaRPr lang="en-US" sz="1500" dirty="0"/>
-          </a:p>
-        </p:txBody>
-      </p:sp>
-      <p:sp>
-        <p:nvSpPr>
-          <p:cNvPr id="6" name="Text 4"/>
-          <p:cNvSpPr/>
-          <p:nvPr/>
-        </p:nvSpPr>
-        <p:spPr>
-          <a:xfrm>
-            <a:off x="640080" y="1737360"/>
-            <a:ext cx="10972800" cy="530352"/>
+              <a:t>SAY</a:t>
+            </a:r>
+            <a:endParaRPr lang="en-US" sz="1300" dirty="0"/>
+          </a:p>
+        </p:txBody>
+      </p:sp>
+      <p:sp>
+        <p:nvSpPr>
+          <p:cNvPr id="8" name="Text 5"/>
+          <p:cNvSpPr/>
+          <p:nvPr/>
+        </p:nvSpPr>
+        <p:spPr>
+          <a:xfrm>
+            <a:off x="6400800" y="1645920"/>
+            <a:ext cx="5349240" cy="3017520"/>
           </a:xfrm>
           <a:prstGeom prst="rect">
             <a:avLst/>
@@ -26720,11 +26104,15 @@
           <a:bodyPr wrap="square" lIns="0" tIns="0" rIns="0" bIns="0" rtlCol="0" anchor="t"/>
           <a:lstStyle/>
           <a:p>
-            <a:pPr indent="0" marL="0">
-              <a:buNone/>
-            </a:pPr>
-            <a:r>
-              <a:rPr lang="en-US" sz="1350" dirty="0">
+            <a:pPr marL="342900" indent="-342900">
+              <a:spcAft>
+                <a:spcPts val="600"/>
+              </a:spcAft>
+              <a:buSzPct val="100000"/>
+              <a:buChar char="•"/>
+            </a:pPr>
+            <a:r>
+              <a:rPr lang="en-US" sz="1600" dirty="0">
                 <a:solidFill>
                   <a:srgbClr val="1B2430"/>
                 </a:solidFill>
@@ -26732,32 +26120,32 @@
                 <a:ea typeface="Calibri" pitchFamily="34" charset="-122"/>
                 <a:cs typeface="Calibri" pitchFamily="34" charset="-120"/>
               </a:rPr>
-              <a:t>A lab sends datagrams. We built reliability and congestion control on top, measured them, and used them in a real chat and a routed network.</a:t>
-            </a:r>
-            <a:endParaRPr lang="en-US" sz="1350" dirty="0"/>
-          </a:p>
-        </p:txBody>
-      </p:sp>
-      <p:sp>
-        <p:nvSpPr>
-          <p:cNvPr id="7" name="Shape 5"/>
-          <p:cNvSpPr/>
-          <p:nvPr/>
-        </p:nvSpPr>
-        <p:spPr>
-          <a:xfrm>
-            <a:off x="457200" y="2377440"/>
-            <a:ext cx="11274552" cy="914400"/>
+              <a:t>Only if asked: the window starts at 1, adds 1 per ACK until the threshold 16, then 1/window per ACK. In the 62-packet run the final window was 18.71.</a:t>
+            </a:r>
+            <a:endParaRPr lang="en-US" sz="1600" dirty="0"/>
+          </a:p>
+        </p:txBody>
+      </p:sp>
+      <p:sp>
+        <p:nvSpPr>
+          <p:cNvPr id="9" name="Shape 6"/>
+          <p:cNvSpPr/>
+          <p:nvPr/>
+        </p:nvSpPr>
+        <p:spPr>
+          <a:xfrm>
+            <a:off x="457200" y="4709160"/>
+            <a:ext cx="5669280" cy="1737360"/>
           </a:xfrm>
           <a:prstGeom prst="rect">
             <a:avLst/>
           </a:prstGeom>
           <a:solidFill>
-            <a:srgbClr val="F2F6FB"/>
+            <a:srgbClr val="FFF6E5"/>
           </a:solidFill>
-          <a:ln w="9525">
+          <a:ln w="12700">
             <a:solidFill>
-              <a:srgbClr val="D5DEE9"/>
+              <a:srgbClr val="F0C987"/>
             </a:solidFill>
             <a:prstDash val="solid"/>
           </a:ln>
@@ -26765,14 +26153,14 @@
       </p:sp>
       <p:sp>
         <p:nvSpPr>
-          <p:cNvPr id="8" name="Text 6"/>
-          <p:cNvSpPr/>
-          <p:nvPr/>
-        </p:nvSpPr>
-        <p:spPr>
-          <a:xfrm>
-            <a:off x="640080" y="2423160"/>
-            <a:ext cx="10972800" cy="320040"/>
+          <p:cNvPr id="10" name="Text 7"/>
+          <p:cNvSpPr/>
+          <p:nvPr/>
+        </p:nvSpPr>
+        <p:spPr>
+          <a:xfrm>
+            <a:off x="594360" y="4754880"/>
+            <a:ext cx="5394960" cy="1645920"/>
           </a:xfrm>
           <a:prstGeom prst="rect">
             <a:avLst/>
@@ -26781,53 +26169,28 @@
           <a:ln/>
         </p:spPr>
         <p:txBody>
-          <a:bodyPr wrap="square" lIns="0" tIns="0" rIns="0" bIns="0" rtlCol="0" anchor="ctr"/>
+          <a:bodyPr wrap="square" lIns="0" tIns="0" rIns="0" bIns="0" rtlCol="0" anchor="t"/>
           <a:lstStyle/>
           <a:p>
             <a:pPr indent="0" marL="0">
               <a:buNone/>
             </a:pPr>
             <a:r>
-              <a:rPr lang="en-US" sz="1500" b="1" dirty="0">
-                <a:solidFill>
-                  <a:srgbClr val="1F6FEB"/>
-                </a:solidFill>
-                <a:latin typeface="Calibri" pitchFamily="34" charset="0"/>
-                <a:ea typeface="Calibri" pitchFamily="34" charset="-122"/>
-                <a:cs typeface="Calibri" pitchFamily="34" charset="-120"/>
-              </a:rPr>
-              <a:t>Why not TCP?</a:t>
-            </a:r>
-            <a:endParaRPr lang="en-US" sz="1500" dirty="0"/>
-          </a:p>
-        </p:txBody>
-      </p:sp>
-      <p:sp>
-        <p:nvSpPr>
-          <p:cNvPr id="9" name="Text 7"/>
-          <p:cNvSpPr/>
-          <p:nvPr/>
-        </p:nvSpPr>
-        <p:spPr>
-          <a:xfrm>
-            <a:off x="640080" y="2743200"/>
-            <a:ext cx="10972800" cy="530352"/>
-          </a:xfrm>
-          <a:prstGeom prst="rect">
-            <a:avLst/>
-          </a:prstGeom>
-          <a:noFill/>
-          <a:ln/>
-        </p:spPr>
-        <p:txBody>
-          <a:bodyPr wrap="square" lIns="0" tIns="0" rIns="0" bIns="0" rtlCol="0" anchor="t"/>
-          <a:lstStyle/>
-          <a:p>
+              <a:rPr lang="en-US" sz="1400" b="1" dirty="0">
+                <a:solidFill>
+                  <a:srgbClr val="B45309"/>
+                </a:solidFill>
+                <a:latin typeface="Calibri" pitchFamily="34" charset="0"/>
+                <a:ea typeface="Calibri" pitchFamily="34" charset="-122"/>
+                <a:cs typeface="Calibri" pitchFamily="34" charset="-120"/>
+              </a:rPr>
+              <a:t>IF ASKED  </a:t>
+            </a:r>
             <a:pPr indent="0" marL="0">
               <a:buNone/>
             </a:pPr>
             <a:r>
-              <a:rPr lang="en-US" sz="1350" dirty="0">
+              <a:rPr lang="en-US" sz="1400" dirty="0">
                 <a:solidFill>
                   <a:srgbClr val="1B2430"/>
                 </a:solidFill>
@@ -26835,318 +26198,9 @@
                 <a:ea typeface="Calibri" pitchFamily="34" charset="-122"/>
                 <a:cs typeface="Calibri" pitchFamily="34" charset="-120"/>
               </a:rPr>
-              <a:t>TCP is in the kernel and cannot be changed. Building our own makes every mechanism visible. QUIC and HTTP/3 do the same.</a:t>
-            </a:r>
-            <a:endParaRPr lang="en-US" sz="1350" dirty="0"/>
-          </a:p>
-        </p:txBody>
-      </p:sp>
-      <p:sp>
-        <p:nvSpPr>
-          <p:cNvPr id="10" name="Shape 8"/>
-          <p:cNvSpPr/>
-          <p:nvPr/>
-        </p:nvSpPr>
-        <p:spPr>
-          <a:xfrm>
-            <a:off x="457200" y="3383280"/>
-            <a:ext cx="11274552" cy="914400"/>
-          </a:xfrm>
-          <a:prstGeom prst="rect">
-            <a:avLst/>
-          </a:prstGeom>
-          <a:solidFill>
-            <a:srgbClr val="F2F6FB"/>
-          </a:solidFill>
-          <a:ln w="9525">
-            <a:solidFill>
-              <a:srgbClr val="D5DEE9"/>
-            </a:solidFill>
-            <a:prstDash val="solid"/>
-          </a:ln>
-        </p:spPr>
-      </p:sp>
-      <p:sp>
-        <p:nvSpPr>
-          <p:cNvPr id="11" name="Text 9"/>
-          <p:cNvSpPr/>
-          <p:nvPr/>
-        </p:nvSpPr>
-        <p:spPr>
-          <a:xfrm>
-            <a:off x="640080" y="3429000"/>
-            <a:ext cx="10972800" cy="320040"/>
-          </a:xfrm>
-          <a:prstGeom prst="rect">
-            <a:avLst/>
-          </a:prstGeom>
-          <a:noFill/>
-          <a:ln/>
-        </p:spPr>
-        <p:txBody>
-          <a:bodyPr wrap="square" lIns="0" tIns="0" rIns="0" bIns="0" rtlCol="0" anchor="ctr"/>
-          <a:lstStyle/>
-          <a:p>
-            <a:pPr indent="0" marL="0">
-              <a:buNone/>
-            </a:pPr>
-            <a:r>
-              <a:rPr lang="en-US" sz="1500" b="1" dirty="0">
-                <a:solidFill>
-                  <a:srgbClr val="1F6FEB"/>
-                </a:solidFill>
-                <a:latin typeface="Calibri" pitchFamily="34" charset="0"/>
-                <a:ea typeface="Calibri" pitchFamily="34" charset="-122"/>
-                <a:cs typeface="Calibri" pitchFamily="34" charset="-120"/>
-              </a:rPr>
-              <a:t>Did Smart-RUDP win?</a:t>
-            </a:r>
-            <a:endParaRPr lang="en-US" sz="1500" dirty="0"/>
-          </a:p>
-        </p:txBody>
-      </p:sp>
-      <p:sp>
-        <p:nvSpPr>
-          <p:cNvPr id="12" name="Text 10"/>
-          <p:cNvSpPr/>
-          <p:nvPr/>
-        </p:nvSpPr>
-        <p:spPr>
-          <a:xfrm>
-            <a:off x="640080" y="3749040"/>
-            <a:ext cx="10972800" cy="530352"/>
-          </a:xfrm>
-          <a:prstGeom prst="rect">
-            <a:avLst/>
-          </a:prstGeom>
-          <a:noFill/>
-          <a:ln/>
-        </p:spPr>
-        <p:txBody>
-          <a:bodyPr wrap="square" lIns="0" tIns="0" rIns="0" bIns="0" rtlCol="0" anchor="t"/>
-          <a:lstStyle/>
-          <a:p>
-            <a:pPr indent="0" marL="0">
-              <a:buNone/>
-            </a:pPr>
-            <a:r>
-              <a:rPr lang="en-US" sz="1350" dirty="0">
-                <a:solidFill>
-                  <a:srgbClr val="1B2430"/>
-                </a:solidFill>
-                <a:latin typeface="Calibri" pitchFamily="34" charset="0"/>
-                <a:ea typeface="Calibri" pitchFamily="34" charset="-122"/>
-                <a:cs typeface="Calibri" pitchFamily="34" charset="-120"/>
-              </a:rPr>
-              <a:t>Yes, in the final C transport against tuned baselines: 15 to 52 percent less time than tuned AIMD on four ordinary paths (real clock, real sockets and 100 random held-out paths agree), a tie on the 10 percent loss path. Against a simplified BBR it wins on the satellite-like and fast paths and loses on the 2 percent lossy path. The first tabular agent did not beat AIMD, and we say so.</a:t>
-            </a:r>
-            <a:endParaRPr lang="en-US" sz="1350" dirty="0"/>
-          </a:p>
-        </p:txBody>
-      </p:sp>
-      <p:sp>
-        <p:nvSpPr>
-          <p:cNvPr id="13" name="Shape 11"/>
-          <p:cNvSpPr/>
-          <p:nvPr/>
-        </p:nvSpPr>
-        <p:spPr>
-          <a:xfrm>
-            <a:off x="457200" y="4389120"/>
-            <a:ext cx="11274552" cy="914400"/>
-          </a:xfrm>
-          <a:prstGeom prst="rect">
-            <a:avLst/>
-          </a:prstGeom>
-          <a:solidFill>
-            <a:srgbClr val="F2F6FB"/>
-          </a:solidFill>
-          <a:ln w="9525">
-            <a:solidFill>
-              <a:srgbClr val="D5DEE9"/>
-            </a:solidFill>
-            <a:prstDash val="solid"/>
-          </a:ln>
-        </p:spPr>
-      </p:sp>
-      <p:sp>
-        <p:nvSpPr>
-          <p:cNvPr id="14" name="Text 12"/>
-          <p:cNvSpPr/>
-          <p:nvPr/>
-        </p:nvSpPr>
-        <p:spPr>
-          <a:xfrm>
-            <a:off x="640080" y="4434840"/>
-            <a:ext cx="10972800" cy="320040"/>
-          </a:xfrm>
-          <a:prstGeom prst="rect">
-            <a:avLst/>
-          </a:prstGeom>
-          <a:noFill/>
-          <a:ln/>
-        </p:spPr>
-        <p:txBody>
-          <a:bodyPr wrap="square" lIns="0" tIns="0" rIns="0" bIns="0" rtlCol="0" anchor="ctr"/>
-          <a:lstStyle/>
-          <a:p>
-            <a:pPr indent="0" marL="0">
-              <a:buNone/>
-            </a:pPr>
-            <a:r>
-              <a:rPr lang="en-US" sz="1500" b="1" dirty="0">
-                <a:solidFill>
-                  <a:srgbClr val="1F6FEB"/>
-                </a:solidFill>
-                <a:latin typeface="Calibri" pitchFamily="34" charset="0"/>
-                <a:ea typeface="Calibri" pitchFamily="34" charset="-122"/>
-                <a:cs typeface="Calibri" pitchFamily="34" charset="-120"/>
-              </a:rPr>
-              <a:t>Why Go-Back-N?</a:t>
-            </a:r>
-            <a:endParaRPr lang="en-US" sz="1500" dirty="0"/>
-          </a:p>
-        </p:txBody>
-      </p:sp>
-      <p:sp>
-        <p:nvSpPr>
-          <p:cNvPr id="15" name="Text 13"/>
-          <p:cNvSpPr/>
-          <p:nvPr/>
-        </p:nvSpPr>
-        <p:spPr>
-          <a:xfrm>
-            <a:off x="640080" y="4754880"/>
-            <a:ext cx="10972800" cy="530352"/>
-          </a:xfrm>
-          <a:prstGeom prst="rect">
-            <a:avLst/>
-          </a:prstGeom>
-          <a:noFill/>
-          <a:ln/>
-        </p:spPr>
-        <p:txBody>
-          <a:bodyPr wrap="square" lIns="0" tIns="0" rIns="0" bIns="0" rtlCol="0" anchor="t"/>
-          <a:lstStyle/>
-          <a:p>
-            <a:pPr indent="0" marL="0">
-              <a:buNone/>
-            </a:pPr>
-            <a:r>
-              <a:rPr lang="en-US" sz="1350" dirty="0">
-                <a:solidFill>
-                  <a:srgbClr val="1B2430"/>
-                </a:solidFill>
-                <a:latin typeface="Calibri" pitchFamily="34" charset="0"/>
-                <a:ea typeface="Calibri" pitchFamily="34" charset="-122"/>
-                <a:cs typeface="Calibri" pitchFamily="34" charset="-120"/>
-              </a:rPr>
-              <a:t>We started with it because it is simple to build and explain, then replaced it as the default with Selective Repeat: the receiver buffers out-of-order packets and reports them in an ACK bitmap, and the sender resends only what is missing. Go-Back-N stays behind a flag for comparison.</a:t>
-            </a:r>
-            <a:endParaRPr lang="en-US" sz="1350" dirty="0"/>
-          </a:p>
-        </p:txBody>
-      </p:sp>
-      <p:sp>
-        <p:nvSpPr>
-          <p:cNvPr id="16" name="Shape 14"/>
-          <p:cNvSpPr/>
-          <p:nvPr/>
-        </p:nvSpPr>
-        <p:spPr>
-          <a:xfrm>
-            <a:off x="457200" y="5394960"/>
-            <a:ext cx="11274552" cy="914400"/>
-          </a:xfrm>
-          <a:prstGeom prst="rect">
-            <a:avLst/>
-          </a:prstGeom>
-          <a:solidFill>
-            <a:srgbClr val="F2F6FB"/>
-          </a:solidFill>
-          <a:ln w="9525">
-            <a:solidFill>
-              <a:srgbClr val="D5DEE9"/>
-            </a:solidFill>
-            <a:prstDash val="solid"/>
-          </a:ln>
-        </p:spPr>
-      </p:sp>
-      <p:sp>
-        <p:nvSpPr>
-          <p:cNvPr id="17" name="Text 15"/>
-          <p:cNvSpPr/>
-          <p:nvPr/>
-        </p:nvSpPr>
-        <p:spPr>
-          <a:xfrm>
-            <a:off x="640080" y="5440680"/>
-            <a:ext cx="10972800" cy="320040"/>
-          </a:xfrm>
-          <a:prstGeom prst="rect">
-            <a:avLst/>
-          </a:prstGeom>
-          <a:noFill/>
-          <a:ln/>
-        </p:spPr>
-        <p:txBody>
-          <a:bodyPr wrap="square" lIns="0" tIns="0" rIns="0" bIns="0" rtlCol="0" anchor="ctr"/>
-          <a:lstStyle/>
-          <a:p>
-            <a:pPr indent="0" marL="0">
-              <a:buNone/>
-            </a:pPr>
-            <a:r>
-              <a:rPr lang="en-US" sz="1500" b="1" dirty="0">
-                <a:solidFill>
-                  <a:srgbClr val="1F6FEB"/>
-                </a:solidFill>
-                <a:latin typeface="Calibri" pitchFamily="34" charset="0"/>
-                <a:ea typeface="Calibri" pitchFamily="34" charset="-122"/>
-                <a:cs typeface="Calibri" pitchFamily="34" charset="-120"/>
-              </a:rPr>
-              <a:t>Was it tested between machines?</a:t>
-            </a:r>
-            <a:endParaRPr lang="en-US" sz="1500" dirty="0"/>
-          </a:p>
-        </p:txBody>
-      </p:sp>
-      <p:sp>
-        <p:nvSpPr>
-          <p:cNvPr id="18" name="Text 16"/>
-          <p:cNvSpPr/>
-          <p:nvPr/>
-        </p:nvSpPr>
-        <p:spPr>
-          <a:xfrm>
-            <a:off x="640080" y="5760720"/>
-            <a:ext cx="10972800" cy="530352"/>
-          </a:xfrm>
-          <a:prstGeom prst="rect">
-            <a:avLst/>
-          </a:prstGeom>
-          <a:noFill/>
-          <a:ln/>
-        </p:spPr>
-        <p:txBody>
-          <a:bodyPr wrap="square" lIns="0" tIns="0" rIns="0" bIns="0" rtlCol="0" anchor="t"/>
-          <a:lstStyle/>
-          <a:p>
-            <a:pPr indent="0" marL="0">
-              <a:buNone/>
-            </a:pPr>
-            <a:r>
-              <a:rPr lang="en-US" sz="1350" dirty="0">
-                <a:solidFill>
-                  <a:srgbClr val="1B2430"/>
-                </a:solidFill>
-                <a:latin typeface="Calibri" pitchFamily="34" charset="0"/>
-                <a:ea typeface="Calibri" pitchFamily="34" charset="-122"/>
-                <a:cs typeface="Calibri" pitchFamily="34" charset="-120"/>
-              </a:rPr>
-              <a:t>Yes. Delay, loss and jitter are emulated in our client, in a separate proxy on real UDP sockets, and in virtual time; these agree with each other. We also ran it once on the Linux kernel with tc netem on one laptop: the agent beat tuned AIMD there, but kernel TCP was 1.5 to 1.7 times faster than us. We also made one run between two laptops on different networks over a Tailscale relay: RUDP delivered every transfer that finished, but the path drifted and four of twenty runs timed out, so we do not rank the policies from it; kernel TCP was 2 to 6 times faster on the clean repetitions.</a:t>
-            </a:r>
-            <a:endParaRPr lang="en-US" sz="1350" dirty="0"/>
+              <a:t>Use this slide to answer 'show me congestion avoidance'.</a:t>
+            </a:r>
+            <a:endParaRPr lang="en-US" sz="1400" dirty="0"/>
           </a:p>
         </p:txBody>
       </p:sp>
@@ -27215,7 +26269,7 @@
                 <a:ea typeface="Calibri" pitchFamily="34" charset="-122"/>
                 <a:cs typeface="Calibri" pitchFamily="34" charset="-120"/>
               </a:rPr>
-              <a:t>Hard questions and short answers (2 of 3)</a:t>
+              <a:t>Hard questions and short answers (1 of 3)</a:t>
             </a:r>
             <a:endParaRPr lang="en-US" sz="2600" dirty="0"/>
           </a:p>
@@ -27304,7 +26358,7 @@
                 <a:ea typeface="Calibri" pitchFamily="34" charset="-122"/>
                 <a:cs typeface="Calibri" pitchFamily="34" charset="-120"/>
               </a:rPr>
-              <a:t>What does Packet Tracer prove?</a:t>
+              <a:t>Is this a lab exercise?</a:t>
             </a:r>
             <a:endParaRPr lang="en-US" sz="1500" dirty="0"/>
           </a:p>
@@ -27343,7 +26397,7 @@
                 <a:ea typeface="Calibri" pitchFamily="34" charset="-122"/>
                 <a:cs typeface="Calibri" pitchFamily="34" charset="-120"/>
               </a:rPr>
-              <a:t>The network design: OSPF, VLANs, ACL, 70/71 failover. The protocol is validated separately with emulation and Wireshark.</a:t>
+              <a:t>A lab sends datagrams. We built reliability and congestion control on top, measured them, and used them in a real chat and a routed network.</a:t>
             </a:r>
             <a:endParaRPr lang="en-US" sz="1350" dirty="0"/>
           </a:p>
@@ -27407,7 +26461,7 @@
                 <a:ea typeface="Calibri" pitchFamily="34" charset="-122"/>
                 <a:cs typeface="Calibri" pitchFamily="34" charset="-120"/>
               </a:rPr>
-              <a:t>Peer disappears?</a:t>
+              <a:t>Why not TCP?</a:t>
             </a:r>
             <a:endParaRPr lang="en-US" sz="1500" dirty="0"/>
           </a:p>
@@ -27446,7 +26500,7 @@
                 <a:ea typeface="Calibri" pitchFamily="34" charset="-122"/>
                 <a:cs typeface="Calibri" pitchFamily="34" charset="-120"/>
               </a:rPr>
-              <a:t>Sender keeps retransmitting on timeout. A connection abort after repeated timeouts is not built; it is the fix we would add.</a:t>
+              <a:t>TCP is in the kernel and cannot be changed. Building our own makes every mechanism visible. QUIC and HTTP/3 do the same.</a:t>
             </a:r>
             <a:endParaRPr lang="en-US" sz="1350" dirty="0"/>
           </a:p>
@@ -27510,7 +26564,7 @@
                 <a:ea typeface="Calibri" pitchFamily="34" charset="-122"/>
                 <a:cs typeface="Calibri" pitchFamily="34" charset="-120"/>
               </a:rPr>
-              <a:t>Does the checksum catch errors?</a:t>
+              <a:t>Did Smart-RUDP win?</a:t>
             </a:r>
             <a:endParaRPr lang="en-US" sz="1500" dirty="0"/>
           </a:p>
@@ -27549,7 +26603,7 @@
                 <a:ea typeface="Calibri" pitchFamily="34" charset="-122"/>
                 <a:cs typeface="Calibri" pitchFamily="34" charset="-120"/>
               </a:rPr>
-              <a:t>It is CRC-16/CCITT now. The first version was a byte sum and a fuzzer showed 2 percent of corrupted packets got through; with CRC-16 none of 333,000 did. It cannot catch every error pattern, as no 16-bit check can.</a:t>
+              <a:t>Yes, in the final C transport against tuned baselines: 15 to 52 percent less time than tuned AIMD on four ordinary paths (real clock, real sockets and 100 random held-out paths agree), a tie on the 10 percent loss path. Against a simplified BBR it wins on the satellite-like and fast paths and loses on the 2 percent lossy path. The first tabular agent did not beat AIMD, and we say so.</a:t>
             </a:r>
             <a:endParaRPr lang="en-US" sz="1350" dirty="0"/>
           </a:p>
@@ -27613,7 +26667,7 @@
                 <a:ea typeface="Calibri" pitchFamily="34" charset="-122"/>
                 <a:cs typeface="Calibri" pitchFamily="34" charset="-120"/>
               </a:rPr>
-              <a:t>Why no handshake in the exported trace?</a:t>
+              <a:t>Why Go-Back-N?</a:t>
             </a:r>
             <a:endParaRPr lang="en-US" sz="1500" dirty="0"/>
           </a:p>
@@ -27652,7 +26706,7 @@
                 <a:ea typeface="Calibri" pitchFamily="34" charset="-122"/>
                 <a:cs typeface="Calibri" pitchFamily="34" charset="-120"/>
               </a:rPr>
-              <a:t>The export builds synthetic packets. The real tshark capture shows SYN, SYN-ACK, ACK.</a:t>
+              <a:t>We started with it because it is simple to build and explain, then replaced it as the default with Selective Repeat: the receiver buffers out-of-order packets and reports them in an ACK bitmap, and the sender resends only what is missing. Go-Back-N stays behind a flag for comparison.</a:t>
             </a:r>
             <a:endParaRPr lang="en-US" sz="1350" dirty="0"/>
           </a:p>
@@ -27716,7 +26770,7 @@
                 <a:ea typeface="Calibri" pitchFamily="34" charset="-122"/>
                 <a:cs typeface="Calibri" pitchFamily="34" charset="-120"/>
               </a:rPr>
-              <a:t>Is the baseline fair?</a:t>
+              <a:t>Was it tested between machines?</a:t>
             </a:r>
             <a:endParaRPr lang="en-US" sz="1500" dirty="0"/>
           </a:p>
@@ -27755,7 +26809,7 @@
                 <a:ea typeface="Calibri" pitchFamily="34" charset="-122"/>
                 <a:cs typeface="Calibri" pitchFamily="34" charset="-120"/>
               </a:rPr>
-              <a:t>We tuned it: window cap 128 and a high start threshold, plus the same retransmission-timer floor for every policy. We also compare against tuned CUBIC. Tuned AIMD improved a lot, and the agent is still ahead on four paths.</a:t>
+              <a:t>Yes. Delay, loss and jitter are emulated in our client, in a separate proxy on real UDP sockets, and in virtual time; these agree with each other. We also ran it once on the Linux kernel with tc netem on one laptop: the agent beat tuned AIMD there, but kernel TCP was 1.5 to 1.7 times faster than us. We also made one run between two laptops on different networks over a Tailscale relay: RUDP delivered every transfer that finished, but the path drifted and four of twenty runs timed out, so we do not rank the policies from it; kernel TCP was 2 to 6 times faster on the clean repetitions.</a:t>
             </a:r>
             <a:endParaRPr lang="en-US" sz="1350" dirty="0"/>
           </a:p>
@@ -27826,6 +26880,617 @@
                 <a:ea typeface="Calibri" pitchFamily="34" charset="-122"/>
                 <a:cs typeface="Calibri" pitchFamily="34" charset="-120"/>
               </a:rPr>
+              <a:t>Hard questions and short answers (2 of 3)</a:t>
+            </a:r>
+            <a:endParaRPr lang="en-US" sz="2600" dirty="0"/>
+          </a:p>
+        </p:txBody>
+      </p:sp>
+      <p:sp>
+        <p:nvSpPr>
+          <p:cNvPr id="3" name="Shape 1"/>
+          <p:cNvSpPr/>
+          <p:nvPr/>
+        </p:nvSpPr>
+        <p:spPr>
+          <a:xfrm>
+            <a:off x="457200" y="1143000"/>
+            <a:ext cx="11274552" cy="36576"/>
+          </a:xfrm>
+          <a:prstGeom prst="rect">
+            <a:avLst/>
+          </a:prstGeom>
+          <a:solidFill>
+            <a:srgbClr val="1F6FEB"/>
+          </a:solidFill>
+          <a:ln w="12700">
+            <a:solidFill>
+              <a:srgbClr val="1F6FEB"/>
+            </a:solidFill>
+            <a:prstDash val="solid"/>
+          </a:ln>
+        </p:spPr>
+      </p:sp>
+      <p:sp>
+        <p:nvSpPr>
+          <p:cNvPr id="4" name="Shape 2"/>
+          <p:cNvSpPr/>
+          <p:nvPr/>
+        </p:nvSpPr>
+        <p:spPr>
+          <a:xfrm>
+            <a:off x="457200" y="1371600"/>
+            <a:ext cx="11274552" cy="914400"/>
+          </a:xfrm>
+          <a:prstGeom prst="rect">
+            <a:avLst/>
+          </a:prstGeom>
+          <a:solidFill>
+            <a:srgbClr val="F2F6FB"/>
+          </a:solidFill>
+          <a:ln w="9525">
+            <a:solidFill>
+              <a:srgbClr val="D5DEE9"/>
+            </a:solidFill>
+            <a:prstDash val="solid"/>
+          </a:ln>
+        </p:spPr>
+      </p:sp>
+      <p:sp>
+        <p:nvSpPr>
+          <p:cNvPr id="5" name="Text 3"/>
+          <p:cNvSpPr/>
+          <p:nvPr/>
+        </p:nvSpPr>
+        <p:spPr>
+          <a:xfrm>
+            <a:off x="640080" y="1417320"/>
+            <a:ext cx="10972800" cy="320040"/>
+          </a:xfrm>
+          <a:prstGeom prst="rect">
+            <a:avLst/>
+          </a:prstGeom>
+          <a:noFill/>
+          <a:ln/>
+        </p:spPr>
+        <p:txBody>
+          <a:bodyPr wrap="square" lIns="0" tIns="0" rIns="0" bIns="0" rtlCol="0" anchor="ctr"/>
+          <a:lstStyle/>
+          <a:p>
+            <a:pPr indent="0" marL="0">
+              <a:buNone/>
+            </a:pPr>
+            <a:r>
+              <a:rPr lang="en-US" sz="1500" b="1" dirty="0">
+                <a:solidFill>
+                  <a:srgbClr val="1F6FEB"/>
+                </a:solidFill>
+                <a:latin typeface="Calibri" pitchFamily="34" charset="0"/>
+                <a:ea typeface="Calibri" pitchFamily="34" charset="-122"/>
+                <a:cs typeface="Calibri" pitchFamily="34" charset="-120"/>
+              </a:rPr>
+              <a:t>What does Packet Tracer prove?</a:t>
+            </a:r>
+            <a:endParaRPr lang="en-US" sz="1500" dirty="0"/>
+          </a:p>
+        </p:txBody>
+      </p:sp>
+      <p:sp>
+        <p:nvSpPr>
+          <p:cNvPr id="6" name="Text 4"/>
+          <p:cNvSpPr/>
+          <p:nvPr/>
+        </p:nvSpPr>
+        <p:spPr>
+          <a:xfrm>
+            <a:off x="640080" y="1737360"/>
+            <a:ext cx="10972800" cy="530352"/>
+          </a:xfrm>
+          <a:prstGeom prst="rect">
+            <a:avLst/>
+          </a:prstGeom>
+          <a:noFill/>
+          <a:ln/>
+        </p:spPr>
+        <p:txBody>
+          <a:bodyPr wrap="square" lIns="0" tIns="0" rIns="0" bIns="0" rtlCol="0" anchor="t"/>
+          <a:lstStyle/>
+          <a:p>
+            <a:pPr indent="0" marL="0">
+              <a:buNone/>
+            </a:pPr>
+            <a:r>
+              <a:rPr lang="en-US" sz="1350" dirty="0">
+                <a:solidFill>
+                  <a:srgbClr val="1B2430"/>
+                </a:solidFill>
+                <a:latin typeface="Calibri" pitchFamily="34" charset="0"/>
+                <a:ea typeface="Calibri" pitchFamily="34" charset="-122"/>
+                <a:cs typeface="Calibri" pitchFamily="34" charset="-120"/>
+              </a:rPr>
+              <a:t>The network design: OSPF, VLANs, ACL, 70/71 failover. The protocol is validated separately with emulation and Wireshark.</a:t>
+            </a:r>
+            <a:endParaRPr lang="en-US" sz="1350" dirty="0"/>
+          </a:p>
+        </p:txBody>
+      </p:sp>
+      <p:sp>
+        <p:nvSpPr>
+          <p:cNvPr id="7" name="Shape 5"/>
+          <p:cNvSpPr/>
+          <p:nvPr/>
+        </p:nvSpPr>
+        <p:spPr>
+          <a:xfrm>
+            <a:off x="457200" y="2377440"/>
+            <a:ext cx="11274552" cy="914400"/>
+          </a:xfrm>
+          <a:prstGeom prst="rect">
+            <a:avLst/>
+          </a:prstGeom>
+          <a:solidFill>
+            <a:srgbClr val="F2F6FB"/>
+          </a:solidFill>
+          <a:ln w="9525">
+            <a:solidFill>
+              <a:srgbClr val="D5DEE9"/>
+            </a:solidFill>
+            <a:prstDash val="solid"/>
+          </a:ln>
+        </p:spPr>
+      </p:sp>
+      <p:sp>
+        <p:nvSpPr>
+          <p:cNvPr id="8" name="Text 6"/>
+          <p:cNvSpPr/>
+          <p:nvPr/>
+        </p:nvSpPr>
+        <p:spPr>
+          <a:xfrm>
+            <a:off x="640080" y="2423160"/>
+            <a:ext cx="10972800" cy="320040"/>
+          </a:xfrm>
+          <a:prstGeom prst="rect">
+            <a:avLst/>
+          </a:prstGeom>
+          <a:noFill/>
+          <a:ln/>
+        </p:spPr>
+        <p:txBody>
+          <a:bodyPr wrap="square" lIns="0" tIns="0" rIns="0" bIns="0" rtlCol="0" anchor="ctr"/>
+          <a:lstStyle/>
+          <a:p>
+            <a:pPr indent="0" marL="0">
+              <a:buNone/>
+            </a:pPr>
+            <a:r>
+              <a:rPr lang="en-US" sz="1500" b="1" dirty="0">
+                <a:solidFill>
+                  <a:srgbClr val="1F6FEB"/>
+                </a:solidFill>
+                <a:latin typeface="Calibri" pitchFamily="34" charset="0"/>
+                <a:ea typeface="Calibri" pitchFamily="34" charset="-122"/>
+                <a:cs typeface="Calibri" pitchFamily="34" charset="-120"/>
+              </a:rPr>
+              <a:t>Peer disappears?</a:t>
+            </a:r>
+            <a:endParaRPr lang="en-US" sz="1500" dirty="0"/>
+          </a:p>
+        </p:txBody>
+      </p:sp>
+      <p:sp>
+        <p:nvSpPr>
+          <p:cNvPr id="9" name="Text 7"/>
+          <p:cNvSpPr/>
+          <p:nvPr/>
+        </p:nvSpPr>
+        <p:spPr>
+          <a:xfrm>
+            <a:off x="640080" y="2743200"/>
+            <a:ext cx="10972800" cy="530352"/>
+          </a:xfrm>
+          <a:prstGeom prst="rect">
+            <a:avLst/>
+          </a:prstGeom>
+          <a:noFill/>
+          <a:ln/>
+        </p:spPr>
+        <p:txBody>
+          <a:bodyPr wrap="square" lIns="0" tIns="0" rIns="0" bIns="0" rtlCol="0" anchor="t"/>
+          <a:lstStyle/>
+          <a:p>
+            <a:pPr indent="0" marL="0">
+              <a:buNone/>
+            </a:pPr>
+            <a:r>
+              <a:rPr lang="en-US" sz="1350" dirty="0">
+                <a:solidFill>
+                  <a:srgbClr val="1B2430"/>
+                </a:solidFill>
+                <a:latin typeface="Calibri" pitchFamily="34" charset="0"/>
+                <a:ea typeface="Calibri" pitchFamily="34" charset="-122"/>
+                <a:cs typeface="Calibri" pitchFamily="34" charset="-120"/>
+              </a:rPr>
+              <a:t>Sender keeps retransmitting on timeout. A connection abort after repeated timeouts is not built; it is the fix we would add.</a:t>
+            </a:r>
+            <a:endParaRPr lang="en-US" sz="1350" dirty="0"/>
+          </a:p>
+        </p:txBody>
+      </p:sp>
+      <p:sp>
+        <p:nvSpPr>
+          <p:cNvPr id="10" name="Shape 8"/>
+          <p:cNvSpPr/>
+          <p:nvPr/>
+        </p:nvSpPr>
+        <p:spPr>
+          <a:xfrm>
+            <a:off x="457200" y="3383280"/>
+            <a:ext cx="11274552" cy="914400"/>
+          </a:xfrm>
+          <a:prstGeom prst="rect">
+            <a:avLst/>
+          </a:prstGeom>
+          <a:solidFill>
+            <a:srgbClr val="F2F6FB"/>
+          </a:solidFill>
+          <a:ln w="9525">
+            <a:solidFill>
+              <a:srgbClr val="D5DEE9"/>
+            </a:solidFill>
+            <a:prstDash val="solid"/>
+          </a:ln>
+        </p:spPr>
+      </p:sp>
+      <p:sp>
+        <p:nvSpPr>
+          <p:cNvPr id="11" name="Text 9"/>
+          <p:cNvSpPr/>
+          <p:nvPr/>
+        </p:nvSpPr>
+        <p:spPr>
+          <a:xfrm>
+            <a:off x="640080" y="3429000"/>
+            <a:ext cx="10972800" cy="320040"/>
+          </a:xfrm>
+          <a:prstGeom prst="rect">
+            <a:avLst/>
+          </a:prstGeom>
+          <a:noFill/>
+          <a:ln/>
+        </p:spPr>
+        <p:txBody>
+          <a:bodyPr wrap="square" lIns="0" tIns="0" rIns="0" bIns="0" rtlCol="0" anchor="ctr"/>
+          <a:lstStyle/>
+          <a:p>
+            <a:pPr indent="0" marL="0">
+              <a:buNone/>
+            </a:pPr>
+            <a:r>
+              <a:rPr lang="en-US" sz="1500" b="1" dirty="0">
+                <a:solidFill>
+                  <a:srgbClr val="1F6FEB"/>
+                </a:solidFill>
+                <a:latin typeface="Calibri" pitchFamily="34" charset="0"/>
+                <a:ea typeface="Calibri" pitchFamily="34" charset="-122"/>
+                <a:cs typeface="Calibri" pitchFamily="34" charset="-120"/>
+              </a:rPr>
+              <a:t>Does the checksum catch errors?</a:t>
+            </a:r>
+            <a:endParaRPr lang="en-US" sz="1500" dirty="0"/>
+          </a:p>
+        </p:txBody>
+      </p:sp>
+      <p:sp>
+        <p:nvSpPr>
+          <p:cNvPr id="12" name="Text 10"/>
+          <p:cNvSpPr/>
+          <p:nvPr/>
+        </p:nvSpPr>
+        <p:spPr>
+          <a:xfrm>
+            <a:off x="640080" y="3749040"/>
+            <a:ext cx="10972800" cy="530352"/>
+          </a:xfrm>
+          <a:prstGeom prst="rect">
+            <a:avLst/>
+          </a:prstGeom>
+          <a:noFill/>
+          <a:ln/>
+        </p:spPr>
+        <p:txBody>
+          <a:bodyPr wrap="square" lIns="0" tIns="0" rIns="0" bIns="0" rtlCol="0" anchor="t"/>
+          <a:lstStyle/>
+          <a:p>
+            <a:pPr indent="0" marL="0">
+              <a:buNone/>
+            </a:pPr>
+            <a:r>
+              <a:rPr lang="en-US" sz="1350" dirty="0">
+                <a:solidFill>
+                  <a:srgbClr val="1B2430"/>
+                </a:solidFill>
+                <a:latin typeface="Calibri" pitchFamily="34" charset="0"/>
+                <a:ea typeface="Calibri" pitchFamily="34" charset="-122"/>
+                <a:cs typeface="Calibri" pitchFamily="34" charset="-120"/>
+              </a:rPr>
+              <a:t>It is CRC-16/CCITT now. The first version was a byte sum and a fuzzer showed 2 percent of corrupted packets got through; with CRC-16 none of 333,000 did. It cannot catch every error pattern, as no 16-bit check can.</a:t>
+            </a:r>
+            <a:endParaRPr lang="en-US" sz="1350" dirty="0"/>
+          </a:p>
+        </p:txBody>
+      </p:sp>
+      <p:sp>
+        <p:nvSpPr>
+          <p:cNvPr id="13" name="Shape 11"/>
+          <p:cNvSpPr/>
+          <p:nvPr/>
+        </p:nvSpPr>
+        <p:spPr>
+          <a:xfrm>
+            <a:off x="457200" y="4389120"/>
+            <a:ext cx="11274552" cy="914400"/>
+          </a:xfrm>
+          <a:prstGeom prst="rect">
+            <a:avLst/>
+          </a:prstGeom>
+          <a:solidFill>
+            <a:srgbClr val="F2F6FB"/>
+          </a:solidFill>
+          <a:ln w="9525">
+            <a:solidFill>
+              <a:srgbClr val="D5DEE9"/>
+            </a:solidFill>
+            <a:prstDash val="solid"/>
+          </a:ln>
+        </p:spPr>
+      </p:sp>
+      <p:sp>
+        <p:nvSpPr>
+          <p:cNvPr id="14" name="Text 12"/>
+          <p:cNvSpPr/>
+          <p:nvPr/>
+        </p:nvSpPr>
+        <p:spPr>
+          <a:xfrm>
+            <a:off x="640080" y="4434840"/>
+            <a:ext cx="10972800" cy="320040"/>
+          </a:xfrm>
+          <a:prstGeom prst="rect">
+            <a:avLst/>
+          </a:prstGeom>
+          <a:noFill/>
+          <a:ln/>
+        </p:spPr>
+        <p:txBody>
+          <a:bodyPr wrap="square" lIns="0" tIns="0" rIns="0" bIns="0" rtlCol="0" anchor="ctr"/>
+          <a:lstStyle/>
+          <a:p>
+            <a:pPr indent="0" marL="0">
+              <a:buNone/>
+            </a:pPr>
+            <a:r>
+              <a:rPr lang="en-US" sz="1500" b="1" dirty="0">
+                <a:solidFill>
+                  <a:srgbClr val="1F6FEB"/>
+                </a:solidFill>
+                <a:latin typeface="Calibri" pitchFamily="34" charset="0"/>
+                <a:ea typeface="Calibri" pitchFamily="34" charset="-122"/>
+                <a:cs typeface="Calibri" pitchFamily="34" charset="-120"/>
+              </a:rPr>
+              <a:t>Why no handshake in the exported trace?</a:t>
+            </a:r>
+            <a:endParaRPr lang="en-US" sz="1500" dirty="0"/>
+          </a:p>
+        </p:txBody>
+      </p:sp>
+      <p:sp>
+        <p:nvSpPr>
+          <p:cNvPr id="15" name="Text 13"/>
+          <p:cNvSpPr/>
+          <p:nvPr/>
+        </p:nvSpPr>
+        <p:spPr>
+          <a:xfrm>
+            <a:off x="640080" y="4754880"/>
+            <a:ext cx="10972800" cy="530352"/>
+          </a:xfrm>
+          <a:prstGeom prst="rect">
+            <a:avLst/>
+          </a:prstGeom>
+          <a:noFill/>
+          <a:ln/>
+        </p:spPr>
+        <p:txBody>
+          <a:bodyPr wrap="square" lIns="0" tIns="0" rIns="0" bIns="0" rtlCol="0" anchor="t"/>
+          <a:lstStyle/>
+          <a:p>
+            <a:pPr indent="0" marL="0">
+              <a:buNone/>
+            </a:pPr>
+            <a:r>
+              <a:rPr lang="en-US" sz="1350" dirty="0">
+                <a:solidFill>
+                  <a:srgbClr val="1B2430"/>
+                </a:solidFill>
+                <a:latin typeface="Calibri" pitchFamily="34" charset="0"/>
+                <a:ea typeface="Calibri" pitchFamily="34" charset="-122"/>
+                <a:cs typeface="Calibri" pitchFamily="34" charset="-120"/>
+              </a:rPr>
+              <a:t>The export builds synthetic packets. The real tshark capture shows SYN, SYN-ACK, ACK.</a:t>
+            </a:r>
+            <a:endParaRPr lang="en-US" sz="1350" dirty="0"/>
+          </a:p>
+        </p:txBody>
+      </p:sp>
+      <p:sp>
+        <p:nvSpPr>
+          <p:cNvPr id="16" name="Shape 14"/>
+          <p:cNvSpPr/>
+          <p:nvPr/>
+        </p:nvSpPr>
+        <p:spPr>
+          <a:xfrm>
+            <a:off x="457200" y="5394960"/>
+            <a:ext cx="11274552" cy="914400"/>
+          </a:xfrm>
+          <a:prstGeom prst="rect">
+            <a:avLst/>
+          </a:prstGeom>
+          <a:solidFill>
+            <a:srgbClr val="F2F6FB"/>
+          </a:solidFill>
+          <a:ln w="9525">
+            <a:solidFill>
+              <a:srgbClr val="D5DEE9"/>
+            </a:solidFill>
+            <a:prstDash val="solid"/>
+          </a:ln>
+        </p:spPr>
+      </p:sp>
+      <p:sp>
+        <p:nvSpPr>
+          <p:cNvPr id="17" name="Text 15"/>
+          <p:cNvSpPr/>
+          <p:nvPr/>
+        </p:nvSpPr>
+        <p:spPr>
+          <a:xfrm>
+            <a:off x="640080" y="5440680"/>
+            <a:ext cx="10972800" cy="320040"/>
+          </a:xfrm>
+          <a:prstGeom prst="rect">
+            <a:avLst/>
+          </a:prstGeom>
+          <a:noFill/>
+          <a:ln/>
+        </p:spPr>
+        <p:txBody>
+          <a:bodyPr wrap="square" lIns="0" tIns="0" rIns="0" bIns="0" rtlCol="0" anchor="ctr"/>
+          <a:lstStyle/>
+          <a:p>
+            <a:pPr indent="0" marL="0">
+              <a:buNone/>
+            </a:pPr>
+            <a:r>
+              <a:rPr lang="en-US" sz="1500" b="1" dirty="0">
+                <a:solidFill>
+                  <a:srgbClr val="1F6FEB"/>
+                </a:solidFill>
+                <a:latin typeface="Calibri" pitchFamily="34" charset="0"/>
+                <a:ea typeface="Calibri" pitchFamily="34" charset="-122"/>
+                <a:cs typeface="Calibri" pitchFamily="34" charset="-120"/>
+              </a:rPr>
+              <a:t>Is the baseline fair?</a:t>
+            </a:r>
+            <a:endParaRPr lang="en-US" sz="1500" dirty="0"/>
+          </a:p>
+        </p:txBody>
+      </p:sp>
+      <p:sp>
+        <p:nvSpPr>
+          <p:cNvPr id="18" name="Text 16"/>
+          <p:cNvSpPr/>
+          <p:nvPr/>
+        </p:nvSpPr>
+        <p:spPr>
+          <a:xfrm>
+            <a:off x="640080" y="5760720"/>
+            <a:ext cx="10972800" cy="530352"/>
+          </a:xfrm>
+          <a:prstGeom prst="rect">
+            <a:avLst/>
+          </a:prstGeom>
+          <a:noFill/>
+          <a:ln/>
+        </p:spPr>
+        <p:txBody>
+          <a:bodyPr wrap="square" lIns="0" tIns="0" rIns="0" bIns="0" rtlCol="0" anchor="t"/>
+          <a:lstStyle/>
+          <a:p>
+            <a:pPr indent="0" marL="0">
+              <a:buNone/>
+            </a:pPr>
+            <a:r>
+              <a:rPr lang="en-US" sz="1350" dirty="0">
+                <a:solidFill>
+                  <a:srgbClr val="1B2430"/>
+                </a:solidFill>
+                <a:latin typeface="Calibri" pitchFamily="34" charset="0"/>
+                <a:ea typeface="Calibri" pitchFamily="34" charset="-122"/>
+                <a:cs typeface="Calibri" pitchFamily="34" charset="-120"/>
+              </a:rPr>
+              <a:t>We tuned it: window cap 128 and a high start threshold, plus the same retransmission-timer floor for every policy. We also compare against tuned CUBIC. Tuned AIMD improved a lot, and the agent is still ahead on four paths.</a:t>
+            </a:r>
+            <a:endParaRPr lang="en-US" sz="1350" dirty="0"/>
+          </a:p>
+        </p:txBody>
+      </p:sp>
+    </p:spTree>
+  </p:cSld>
+  <p:clrMapOvr>
+    <a:masterClrMapping/>
+  </p:clrMapOvr>
+</p:sld>
+</file>
+
+<file path=ppt/slides/slide45.xml><?xml version="1.0" encoding="utf-8"?>
+<p:sld xmlns:a="http://schemas.openxmlformats.org/drawingml/2006/main" xmlns:r="http://schemas.openxmlformats.org/officeDocument/2006/relationships" xmlns:p="http://schemas.openxmlformats.org/presentationml/2006/main">
+  <p:cSld name="Slide 45">
+    <p:bg>
+      <p:bgPr>
+        <a:solidFill>
+          <a:srgbClr val="FFFFFF"/>
+        </a:solidFill>
+      </p:bgPr>
+    </p:bg>
+    <p:spTree>
+      <p:nvGrpSpPr>
+        <p:cNvPr id="1" name=""/>
+        <p:cNvGrpSpPr/>
+        <p:nvPr/>
+      </p:nvGrpSpPr>
+      <p:grpSpPr>
+        <a:xfrm>
+          <a:off x="0" y="0"/>
+          <a:ext cx="0" cy="0"/>
+          <a:chOff x="0" y="0"/>
+          <a:chExt cx="0" cy="0"/>
+        </a:xfrm>
+      </p:grpSpPr>
+      <p:sp>
+        <p:nvSpPr>
+          <p:cNvPr id="2" name="Text 0"/>
+          <p:cNvSpPr/>
+          <p:nvPr/>
+        </p:nvSpPr>
+        <p:spPr>
+          <a:xfrm>
+            <a:off x="457200" y="274320"/>
+            <a:ext cx="9601200" cy="548640"/>
+          </a:xfrm>
+          <a:prstGeom prst="rect">
+            <a:avLst/>
+          </a:prstGeom>
+          <a:noFill/>
+          <a:ln/>
+        </p:spPr>
+        <p:txBody>
+          <a:bodyPr wrap="square" lIns="0" tIns="0" rIns="0" bIns="0" rtlCol="0" anchor="ctr"/>
+          <a:lstStyle/>
+          <a:p>
+            <a:pPr indent="0" marL="0">
+              <a:buNone/>
+            </a:pPr>
+            <a:r>
+              <a:rPr lang="en-US" sz="2600" b="1" dirty="0">
+                <a:solidFill>
+                  <a:srgbClr val="1B2430"/>
+                </a:solidFill>
+                <a:latin typeface="Calibri" pitchFamily="34" charset="0"/>
+                <a:ea typeface="Calibri" pitchFamily="34" charset="-122"/>
+                <a:cs typeface="Calibri" pitchFamily="34" charset="-120"/>
+              </a:rPr>
               <a:t>Hard questions and short answers (3 of 3)</a:t>
             </a:r>
             <a:endParaRPr lang="en-US" sz="2600" dirty="0"/>
@@ -28437,7 +28102,7 @@
                 <a:ea typeface="Calibri" pitchFamily="34" charset="-122"/>
                 <a:cs typeface="Calibri" pitchFamily="34" charset="-120"/>
               </a:rPr>
-              <a:t>3. Why we built it</a:t>
+              <a:t>3. What we built</a:t>
             </a:r>
             <a:endParaRPr lang="en-US" sz="2600" dirty="0"/>
           </a:p>
@@ -28476,7 +28141,7 @@
                 <a:ea typeface="Calibri" pitchFamily="34" charset="-122"/>
                 <a:cs typeface="Calibri" pitchFamily="34" charset="-120"/>
               </a:rPr>
-              <a:t>Time on this slide: 0:50</a:t>
+              <a:t>Time on this slide: 0:40</a:t>
             </a:r>
             <a:endParaRPr lang="en-US" sz="1300" dirty="0"/>
           </a:p>
@@ -28621,7 +28286,7 @@
               <a:buChar char="•"/>
             </a:pPr>
             <a:r>
-              <a:rPr lang="en-US" sz="1400" dirty="0">
+              <a:rPr lang="en-US" sz="1600" dirty="0">
                 <a:solidFill>
                   <a:srgbClr val="1B2430"/>
                 </a:solidFill>
@@ -28629,51 +28294,9 @@
                 <a:ea typeface="Calibri" pitchFamily="34" charset="-122"/>
                 <a:cs typeface="Calibri" pitchFamily="34" charset="-120"/>
               </a:rPr>
-              <a:t>The need: campus users send data to a server across a routed network. TCP is fixed in the kernel; UDP gives no guarantees.</a:t>
-            </a:r>
-            <a:endParaRPr lang="en-US" sz="1400" dirty="0"/>
-          </a:p>
-          <a:p>
-            <a:pPr marL="342900" indent="-342900">
-              <a:spcAft>
-                <a:spcPts val="600"/>
-              </a:spcAft>
-              <a:buSzPct val="100000"/>
-              <a:buChar char="•"/>
-            </a:pPr>
-            <a:r>
-              <a:rPr lang="en-US" sz="1400" dirty="0">
-                <a:solidFill>
-                  <a:srgbClr val="1B2430"/>
-                </a:solidFill>
-                <a:latin typeface="Calibri" pitchFamily="34" charset="0"/>
-                <a:ea typeface="Calibri" pitchFamily="34" charset="-122"/>
-                <a:cs typeface="Calibri" pitchFamily="34" charset="-120"/>
-              </a:rPr>
-              <a:t>Our answer: RUDP, a readable and tunable transport, and Smart-RUDP, which learns the window from RTT and loss.</a:t>
-            </a:r>
-            <a:endParaRPr lang="en-US" sz="1400" dirty="0"/>
-          </a:p>
-          <a:p>
-            <a:pPr marL="342900" indent="-342900">
-              <a:spcAft>
-                <a:spcPts val="600"/>
-              </a:spcAft>
-              <a:buSzPct val="100000"/>
-              <a:buChar char="•"/>
-            </a:pPr>
-            <a:r>
-              <a:rPr lang="en-US" sz="1400" dirty="0">
-                <a:solidFill>
-                  <a:srgbClr val="1B2430"/>
-                </a:solidFill>
-                <a:latin typeface="Calibri" pitchFamily="34" charset="0"/>
-                <a:ea typeface="Calibri" pitchFamily="34" charset="-122"/>
-                <a:cs typeface="Calibri" pitchFamily="34" charset="-120"/>
-              </a:rPr>
-              <a:t>Scenario: a student on VLAN 10 uploads to the server LAN. The ACL keeps students out of staff VLAN 20. If a core link fails, OSPF reroutes through R2: longer path, higher RTT, and the transport must adapt.</a:t>
-            </a:r>
-            <a:endParaRPr lang="en-US" sz="1400" dirty="0"/>
+              <a:t>Four parts: the protocol, the learned controller, the Packet Tracer network, and the tools (chat, Drop, Wireshark dissector).</a:t>
+            </a:r>
+            <a:endParaRPr lang="en-US" sz="1600" dirty="0"/>
           </a:p>
         </p:txBody>
       </p:sp>
@@ -28749,7 +28372,7 @@
                 <a:ea typeface="Calibri" pitchFamily="34" charset="-122"/>
                 <a:cs typeface="Calibri" pitchFamily="34" charset="-120"/>
               </a:rPr>
-              <a:t>Q: Is this just a lab exercise? A: A lab sends datagrams. We built reliability and congestion control on top, measured them, and used them in an application.</a:t>
+              <a:t>How big is the core? About 470 lines of C.</a:t>
             </a:r>
             <a:endParaRPr lang="en-US" sz="1400" dirty="0"/>
           </a:p>
@@ -28820,7 +28443,7 @@
                 <a:ea typeface="Calibri" pitchFamily="34" charset="-122"/>
                 <a:cs typeface="Calibri" pitchFamily="34" charset="-120"/>
               </a:rPr>
-              <a:t>4. What we built</a:t>
+              <a:t>4. Headline results</a:t>
             </a:r>
             <a:endParaRPr lang="en-US" sz="2600" dirty="0"/>
           </a:p>
@@ -28859,7 +28482,7 @@
                 <a:ea typeface="Calibri" pitchFamily="34" charset="-122"/>
                 <a:cs typeface="Calibri" pitchFamily="34" charset="-120"/>
               </a:rPr>
-              <a:t>Time on this slide: 0:40</a:t>
+              <a:t>Time on this slide: 1:00</a:t>
             </a:r>
             <a:endParaRPr lang="en-US" sz="1300" dirty="0"/>
           </a:p>
@@ -29012,7 +28635,7 @@
                 <a:ea typeface="Calibri" pitchFamily="34" charset="-122"/>
                 <a:cs typeface="Calibri" pitchFamily="34" charset="-120"/>
               </a:rPr>
-              <a:t>Four pieces: handshake, reliability, flow control and congestion control.</a:t>
+              <a:t>Lead with the numbers: 15 to 52% less time on emulated paths, 65 to 83% on the real Linux kernel, 0.53x on 100 random unseen paths.</a:t>
             </a:r>
             <a:endParaRPr lang="en-US" sz="1600" dirty="0"/>
           </a:p>
@@ -29033,7 +28656,7 @@
                 <a:ea typeface="Calibri" pitchFamily="34" charset="-122"/>
                 <a:cs typeface="Calibri" pitchFamily="34" charset="-120"/>
               </a:rPr>
-              <a:t>About 670 lines of C across four source files, built in eight phases, on GitHub at Capsturrrr/rudp.</a:t>
+              <a:t>Fastest in all four changing-path cases. Fairer than AIMD, and it takes 24 to 34% next to kernel TCP.</a:t>
             </a:r>
             <a:endParaRPr lang="en-US" sz="1600" dirty="0"/>
           </a:p>
@@ -29111,7 +28734,7 @@
                 <a:ea typeface="Calibri" pitchFamily="34" charset="-122"/>
                 <a:cs typeface="Calibri" pitchFamily="34" charset="-120"/>
               </a:rPr>
-              <a:t>Q: Who did what? A: Agree one answer as a team before you go in.</a:t>
+              <a:t>Against what? Tuned AIMD and tuned CUBIC, not weak baselines.</a:t>
             </a:r>
             <a:endParaRPr lang="en-US" sz="1400" dirty="0"/>
           </a:p>
@@ -29182,7 +28805,7 @@
                 <a:ea typeface="Calibri" pitchFamily="34" charset="-122"/>
                 <a:cs typeface="Calibri" pitchFamily="34" charset="-120"/>
               </a:rPr>
-              <a:t>5. Packet header</a:t>
+              <a:t>5. Up to 83% less time</a:t>
             </a:r>
             <a:endParaRPr lang="en-US" sz="2600" dirty="0"/>
           </a:p>
@@ -29374,49 +28997,7 @@
                 <a:ea typeface="Calibri" pitchFamily="34" charset="-122"/>
                 <a:cs typeface="Calibri" pitchFamily="34" charset="-120"/>
               </a:rPr>
-              <a:t>13-byte header: sequence 4, ack 4, flags 1, checksum 2, payload length 2.</a:t>
-            </a:r>
-            <a:endParaRPr lang="en-US" sz="1600" dirty="0"/>
-          </a:p>
-          <a:p>
-            <a:pPr marL="342900" indent="-342900">
-              <a:spcAft>
-                <a:spcPts val="600"/>
-              </a:spcAft>
-              <a:buSzPct val="100000"/>
-              <a:buChar char="•"/>
-            </a:pPr>
-            <a:r>
-              <a:rPr lang="en-US" sz="1600" dirty="0">
-                <a:solidFill>
-                  <a:srgbClr val="1B2430"/>
-                </a:solidFill>
-                <a:latin typeface="Calibri" pitchFamily="34" charset="0"/>
-                <a:ea typeface="Calibri" pitchFamily="34" charset="-122"/>
-                <a:cs typeface="Calibri" pitchFamily="34" charset="-120"/>
-              </a:rPr>
-              <a:t>Fields are packed byte by byte so compiler padding never changes the wire format.</a:t>
-            </a:r>
-            <a:endParaRPr lang="en-US" sz="1600" dirty="0"/>
-          </a:p>
-          <a:p>
-            <a:pPr marL="342900" indent="-342900">
-              <a:spcAft>
-                <a:spcPts val="600"/>
-              </a:spcAft>
-              <a:buSzPct val="100000"/>
-              <a:buChar char="•"/>
-            </a:pPr>
-            <a:r>
-              <a:rPr lang="en-US" sz="1600" dirty="0">
-                <a:solidFill>
-                  <a:srgbClr val="1B2430"/>
-                </a:solidFill>
-                <a:latin typeface="Calibri" pitchFamily="34" charset="0"/>
-                <a:ea typeface="Calibri" pitchFamily="34" charset="-122"/>
-                <a:cs typeface="Calibri" pitchFamily="34" charset="-120"/>
-              </a:rPr>
-              <a:t>A data packet is 53 bytes on the wire; ACKs and handshake packets are 13.</a:t>
+              <a:t>Same trained network on every path, no retuning. Left bars real clock, right bars real kernel.</a:t>
             </a:r>
             <a:endParaRPr lang="en-US" sz="1600" dirty="0"/>
           </a:p>
@@ -29494,7 +29075,7 @@
                 <a:ea typeface="Calibri" pitchFamily="34" charset="-122"/>
                 <a:cs typeface="Calibri" pitchFamily="34" charset="-120"/>
               </a:rPr>
-              <a:t>Q: How does the checksum work? A: 16-bit one's-complement sum over header and payload, like UDP/TCP. A corrupted packet fails and is recovered by retransmission.</a:t>
+              <a:t>Why is the kernel gain bigger? Tuned AIMD does badly with netem's real queues.</a:t>
             </a:r>
             <a:endParaRPr lang="en-US" sz="1400" dirty="0"/>
           </a:p>
@@ -29565,7 +29146,7 @@
                 <a:ea typeface="Calibri" pitchFamily="34" charset="-122"/>
                 <a:cs typeface="Calibri" pitchFamily="34" charset="-120"/>
               </a:rPr>
-              <a:t>6. Handshake and data flow</a:t>
+              <a:t>6. Scorecard</a:t>
             </a:r>
             <a:endParaRPr lang="en-US" sz="2600" dirty="0"/>
           </a:p>
@@ -29604,7 +29185,7 @@
                 <a:ea typeface="Calibri" pitchFamily="34" charset="-122"/>
                 <a:cs typeface="Calibri" pitchFamily="34" charset="-120"/>
               </a:rPr>
-              <a:t>Time on this slide: 0:50</a:t>
+              <a:t>Time on this slide: 1:00</a:t>
             </a:r>
             <a:endParaRPr lang="en-US" sz="1300" dirty="0"/>
           </a:p>
@@ -29757,7 +29338,7 @@
                 <a:ea typeface="Calibri" pitchFamily="34" charset="-122"/>
                 <a:cs typeface="Calibri" pitchFamily="34" charset="-120"/>
               </a:rPr>
-              <a:t>Three-way handshake: SYN, SYN-ACK, ACK. Then data, up to a window of packets in flight.</a:t>
+              <a:t>One table of every alternative: AIMD, CUBIC, BBR-style, Q-table, plain UDP and kernel TCP.</a:t>
             </a:r>
             <a:endParaRPr lang="en-US" sz="1600" dirty="0"/>
           </a:p>
@@ -29778,28 +29359,7 @@
                 <a:ea typeface="Calibri" pitchFamily="34" charset="-122"/>
                 <a:cs typeface="Calibri" pitchFamily="34" charset="-120"/>
               </a:rPr>
-              <a:t>ACKs are cumulative: ACK N confirms everything before N. FIN closes the connection.</a:t>
-            </a:r>
-            <a:endParaRPr lang="en-US" sz="1600" dirty="0"/>
-          </a:p>
-          <a:p>
-            <a:pPr marL="342900" indent="-342900">
-              <a:spcAft>
-                <a:spcPts val="600"/>
-              </a:spcAft>
-              <a:buSzPct val="100000"/>
-              <a:buChar char="•"/>
-            </a:pPr>
-            <a:r>
-              <a:rPr lang="en-US" sz="1600" dirty="0">
-                <a:solidFill>
-                  <a:srgbClr val="1B2430"/>
-                </a:solidFill>
-                <a:latin typeface="Calibri" pitchFamily="34" charset="0"/>
-                <a:ea typeface="Calibri" pitchFamily="34" charset="-122"/>
-                <a:cs typeface="Calibri" pitchFamily="34" charset="-120"/>
-              </a:rPr>
-              <a:t>The server accepts a new SYN in any state, so a killed client can never leave it stuck. That was a real bug we fixed.</a:t>
+              <a:t>Honest row: kernel TCP is 1.5 to 1.7x faster than the agent. FTP and SCP run on TCP so that row stands for them.</a:t>
             </a:r>
             <a:endParaRPr lang="en-US" sz="1600" dirty="0"/>
           </a:p>
@@ -29877,7 +29437,7 @@
                 <a:ea typeface="Calibri" pitchFamily="34" charset="-122"/>
                 <a:cs typeface="Calibri" pitchFamily="34" charset="-120"/>
               </a:rPr>
-              <a:t>Q: What if the peer disappears? A: Sender keeps retransmitting on timeout. An abort after repeated timeouts is not implemented; it is the fix we would add.</a:t>
+              <a:t>Did you run FTP? No; it runs on kernel TCP, so the TCP row is the comparison.</a:t>
             </a:r>
             <a:endParaRPr lang="en-US" sz="1400" dirty="0"/>
           </a:p>
@@ -29948,7 +29508,7 @@
                 <a:ea typeface="Calibri" pitchFamily="34" charset="-122"/>
                 <a:cs typeface="Calibri" pitchFamily="34" charset="-120"/>
               </a:rPr>
-              <a:t>7. Go-Back-N</a:t>
+              <a:t>7. Real clock</a:t>
             </a:r>
             <a:endParaRPr lang="en-US" sz="2600" dirty="0"/>
           </a:p>
@@ -29987,7 +29547,7 @@
                 <a:ea typeface="Calibri" pitchFamily="34" charset="-122"/>
                 <a:cs typeface="Calibri" pitchFamily="34" charset="-120"/>
               </a:rPr>
-              <a:t>Time on this slide: 0:50</a:t>
+              <a:t>Time on this slide: 1:00</a:t>
             </a:r>
             <a:endParaRPr lang="en-US" sz="1300" dirty="0"/>
           </a:p>
@@ -30140,7 +29700,7 @@
                 <a:ea typeface="Calibri" pitchFamily="34" charset="-122"/>
                 <a:cs typeface="Calibri" pitchFamily="34" charset="-120"/>
               </a:rPr>
-              <a:t>The window is the number of packets in flight; it started fixed at 4 and is now driven by the congestion window.</a:t>
+              <a:t>Fastest on four of five paths. Lossy 3.6 s against 7.1 s tuned AIMD and 13.9 s CUBIC.</a:t>
             </a:r>
             <a:endParaRPr lang="en-US" sz="1600" dirty="0"/>
           </a:p>
@@ -30161,28 +29721,7 @@
                 <a:ea typeface="Calibri" pitchFamily="34" charset="-122"/>
                 <a:cs typeface="Calibri" pitchFamily="34" charset="-120"/>
               </a:rPr>
-              <a:t>Timeout is 500 ms; fast retransmit triggers after 3 duplicate ACKs, no waiting for the timer.</a:t>
-            </a:r>
-            <a:endParaRPr lang="en-US" sz="1600" dirty="0"/>
-          </a:p>
-          <a:p>
-            <a:pPr marL="342900" indent="-342900">
-              <a:spcAft>
-                <a:spcPts val="600"/>
-              </a:spcAft>
-              <a:buSzPct val="100000"/>
-              <a:buChar char="•"/>
-            </a:pPr>
-            <a:r>
-              <a:rPr lang="en-US" sz="1600" dirty="0">
-                <a:solidFill>
-                  <a:srgbClr val="1B2430"/>
-                </a:solidFill>
-                <a:latin typeface="Calibri" pitchFamily="34" charset="0"/>
-                <a:ea typeface="Calibri" pitchFamily="34" charset="-122"/>
-                <a:cs typeface="Calibri" pitchFamily="34" charset="-120"/>
-              </a:rPr>
-              <a:t>Proof: in a 20% loss netem capture we saw 12 timeouts about 500 ms apart. Result: the 2,442-byte message reassembled correctly.</a:t>
+              <a:t>At 10% loss no policy is significantly different.</a:t>
             </a:r>
             <a:endParaRPr lang="en-US" sz="1600" dirty="0"/>
           </a:p>
@@ -30260,7 +29799,7 @@
                 <a:ea typeface="Calibri" pitchFamily="34" charset="-122"/>
                 <a:cs typeface="Calibri" pitchFamily="34" charset="-120"/>
               </a:rPr>
-              <a:t>Q: Why Go-Back-N? A: Simpler to build and explain. It wastes bandwidth under loss; Selective Repeat with SACK is our stated future work.</a:t>
+              <a:t>How many runs? 10 paired runs per path, 95% intervals.</a:t>
             </a:r>
             <a:endParaRPr lang="en-US" sz="1400" dirty="0"/>
           </a:p>
